--- a/attached_assets/VaughnMartin-Investor-Deck-v13-final.pptx
+++ b/attached_assets/VaughnMartin-Investor-Deck-v13-final.pptx
@@ -6,15 +6,15 @@
   </p:sldMasterIdLst>
   <p:sldIdLst>
     <p:sldId id="256" r:id="rId7"/>
-    <p:sldId id="257" r:id="rId8"/>
-    <p:sldId id="258" r:id="rId9"/>
-    <p:sldId id="259" r:id="rId10"/>
-    <p:sldId id="260" r:id="rId11"/>
-    <p:sldId id="261" r:id="rId12"/>
-    <p:sldId id="262" r:id="rId13"/>
-    <p:sldId id="263" r:id="rId14"/>
-    <p:sldId id="264" r:id="rId15"/>
-    <p:sldId id="265" r:id="rId16"/>
+    <p:sldId id="257" r:id="rId9"/>
+    <p:sldId id="258" r:id="rId10"/>
+    <p:sldId id="259" r:id="rId11"/>
+    <p:sldId id="260" r:id="rId12"/>
+    <p:sldId id="261" r:id="rId13"/>
+    <p:sldId id="262" r:id="rId14"/>
+    <p:sldId id="263" r:id="rId15"/>
+    <p:sldId id="264" r:id="rId16"/>
+    <p:sldId id="265" r:id="rId17"/>
   </p:sldIdLst>
   <p:sldSz cx="12188952" cy="6858000" type="screen4x3"/>
   <p:notesSz cx="6858000" cy="9144000"/>
@@ -114,6 +114,1084 @@
     </a:lvl9pPr>
   </p:defaultTextStyle>
 </p:presentation>
+</file>
+
+<file path=ppt/notesMasters/notesMaster1.xml><?xml version="1.0" encoding="utf-8"?>
+<p:notesMaster xmlns:a="http://schemas.openxmlformats.org/drawingml/2006/main" xmlns:p="http://schemas.openxmlformats.org/presentationml/2006/main" xmlns:r="http://schemas.openxmlformats.org/officeDocument/2006/relationships">
+  <p:cSld>
+    <p:bg>
+      <p:bgRef idx="1001">
+        <a:schemeClr val="bg1"/>
+      </p:bgRef>
+    </p:bg>
+    <p:spTree>
+      <p:nvGrpSpPr>
+        <p:cNvPr id="1" name=""/>
+        <p:cNvGrpSpPr/>
+        <p:nvPr/>
+      </p:nvGrpSpPr>
+      <p:grpSpPr>
+        <a:xfrm>
+          <a:off x="0" y="0"/>
+          <a:ext cx="0" cy="0"/>
+          <a:chOff x="0" y="0"/>
+          <a:chExt cx="0" cy="0"/>
+        </a:xfrm>
+      </p:grpSpPr>
+      <p:sp>
+        <p:nvSpPr>
+          <p:cNvPr id="2" name="Header Placeholder 1"/>
+          <p:cNvSpPr>
+            <a:spLocks noGrp="1"/>
+          </p:cNvSpPr>
+          <p:nvPr>
+            <p:ph type="hdr" sz="quarter"/>
+          </p:nvPr>
+        </p:nvSpPr>
+        <p:spPr>
+          <a:xfrm>
+            <a:off x="0" y="0"/>
+            <a:ext cx="2971800" cy="457200"/>
+          </a:xfrm>
+          <a:prstGeom prst="rect">
+            <a:avLst/>
+          </a:prstGeom>
+        </p:spPr>
+        <p:txBody>
+          <a:bodyPr vert="horz" lIns="91440" tIns="45720" rIns="91440" bIns="45720" rtlCol="0"/>
+          <a:lstStyle>
+            <a:lvl1pPr algn="l">
+              <a:defRPr sz="1200"/>
+            </a:lvl1pPr>
+          </a:lstStyle>
+          <a:p>
+            <a:endParaRPr lang="en-US"/>
+          </a:p>
+        </p:txBody>
+      </p:sp>
+      <p:sp>
+        <p:nvSpPr>
+          <p:cNvPr id="3" name="Date Placeholder 2"/>
+          <p:cNvSpPr>
+            <a:spLocks noGrp="1"/>
+          </p:cNvSpPr>
+          <p:nvPr>
+            <p:ph type="dt" idx="1"/>
+          </p:nvPr>
+        </p:nvSpPr>
+        <p:spPr>
+          <a:xfrm>
+            <a:off x="3884613" y="0"/>
+            <a:ext cx="2971800" cy="457200"/>
+          </a:xfrm>
+          <a:prstGeom prst="rect">
+            <a:avLst/>
+          </a:prstGeom>
+        </p:spPr>
+        <p:txBody>
+          <a:bodyPr vert="horz" lIns="91440" tIns="45720" rIns="91440" bIns="45720" rtlCol="0"/>
+          <a:lstStyle>
+            <a:lvl1pPr algn="r">
+              <a:defRPr sz="1200"/>
+            </a:lvl1pPr>
+          </a:lstStyle>
+          <a:p>
+            <a:fld id="{0F89C1C7-3DCD-1040-A9CF-14679D8B5DDD}" type="datetimeFigureOut">
+              <a:rPr lang="en-US" smtClean="0"/>
+              <a:t>10/17/16</a:t>
+            </a:fld>
+            <a:endParaRPr lang="en-US"/>
+          </a:p>
+        </p:txBody>
+      </p:sp>
+      <p:sp>
+        <p:nvSpPr>
+          <p:cNvPr id="4" name="Slide Image Placeholder 3"/>
+          <p:cNvSpPr>
+            <a:spLocks noGrp="1" noRot="1" noChangeAspect="1"/>
+          </p:cNvSpPr>
+          <p:nvPr>
+            <p:ph type="sldImg" idx="2"/>
+          </p:nvPr>
+        </p:nvSpPr>
+        <p:spPr>
+          <a:xfrm>
+            <a:off x="1143000" y="685800"/>
+            <a:ext cx="4572000" cy="3429000"/>
+          </a:xfrm>
+          <a:prstGeom prst="rect">
+            <a:avLst/>
+          </a:prstGeom>
+          <a:noFill/>
+          <a:ln w="12700">
+            <a:solidFill>
+              <a:prstClr val="black"/>
+            </a:solidFill>
+          </a:ln>
+        </p:spPr>
+        <p:txBody>
+          <a:bodyPr vert="horz" lIns="91440" tIns="45720" rIns="91440" bIns="45720" rtlCol="0" anchor="ctr"/>
+          <a:lstStyle/>
+          <a:p>
+            <a:endParaRPr lang="en-US"/>
+          </a:p>
+        </p:txBody>
+      </p:sp>
+      <p:sp>
+        <p:nvSpPr>
+          <p:cNvPr id="5" name="Notes Placeholder 4"/>
+          <p:cNvSpPr>
+            <a:spLocks noGrp="1"/>
+          </p:cNvSpPr>
+          <p:nvPr>
+            <p:ph type="body" sz="quarter" idx="3"/>
+          </p:nvPr>
+        </p:nvSpPr>
+        <p:spPr>
+          <a:xfrm>
+            <a:off x="685800" y="4343400"/>
+            <a:ext cx="5486400" cy="4114800"/>
+          </a:xfrm>
+          <a:prstGeom prst="rect">
+            <a:avLst/>
+          </a:prstGeom>
+        </p:spPr>
+        <p:txBody>
+          <a:bodyPr vert="horz" lIns="91440" tIns="45720" rIns="91440" bIns="45720" rtlCol="0"/>
+          <a:lstStyle/>
+          <a:p>
+            <a:pPr lvl="0"/>
+            <a:r>
+              <a:rPr lang="en-US" smtClean="0"/>
+              <a:t>Click to edit Master text styles</a:t>
+            </a:r>
+          </a:p>
+          <a:p>
+            <a:pPr lvl="1"/>
+            <a:r>
+              <a:rPr lang="en-US" smtClean="0"/>
+              <a:t>Second level</a:t>
+            </a:r>
+          </a:p>
+          <a:p>
+            <a:pPr lvl="2"/>
+            <a:r>
+              <a:rPr lang="en-US" smtClean="0"/>
+              <a:t>Third level</a:t>
+            </a:r>
+          </a:p>
+          <a:p>
+            <a:pPr lvl="3"/>
+            <a:r>
+              <a:rPr lang="en-US" smtClean="0"/>
+              <a:t>Fourth level</a:t>
+            </a:r>
+          </a:p>
+          <a:p>
+            <a:pPr lvl="4"/>
+            <a:r>
+              <a:rPr lang="en-US" smtClean="0"/>
+              <a:t>Fifth level</a:t>
+            </a:r>
+            <a:endParaRPr lang="en-US"/>
+          </a:p>
+        </p:txBody>
+      </p:sp>
+      <p:sp>
+        <p:nvSpPr>
+          <p:cNvPr id="6" name="Footer Placeholder 5"/>
+          <p:cNvSpPr>
+            <a:spLocks noGrp="1"/>
+          </p:cNvSpPr>
+          <p:nvPr>
+            <p:ph type="ftr" sz="quarter" idx="4"/>
+          </p:nvPr>
+        </p:nvSpPr>
+        <p:spPr>
+          <a:xfrm>
+            <a:off x="0" y="8685213"/>
+            <a:ext cx="2971800" cy="457200"/>
+          </a:xfrm>
+          <a:prstGeom prst="rect">
+            <a:avLst/>
+          </a:prstGeom>
+        </p:spPr>
+        <p:txBody>
+          <a:bodyPr vert="horz" lIns="91440" tIns="45720" rIns="91440" bIns="45720" rtlCol="0" anchor="b"/>
+          <a:lstStyle>
+            <a:lvl1pPr algn="l">
+              <a:defRPr sz="1200"/>
+            </a:lvl1pPr>
+          </a:lstStyle>
+          <a:p>
+            <a:endParaRPr lang="en-US"/>
+          </a:p>
+        </p:txBody>
+      </p:sp>
+      <p:sp>
+        <p:nvSpPr>
+          <p:cNvPr id="7" name="Slide Number Placeholder 6"/>
+          <p:cNvSpPr>
+            <a:spLocks noGrp="1"/>
+          </p:cNvSpPr>
+          <p:nvPr>
+            <p:ph type="sldNum" sz="quarter" idx="5"/>
+          </p:nvPr>
+        </p:nvSpPr>
+        <p:spPr>
+          <a:xfrm>
+            <a:off x="3884613" y="8685213"/>
+            <a:ext cx="2971800" cy="457200"/>
+          </a:xfrm>
+          <a:prstGeom prst="rect">
+            <a:avLst/>
+          </a:prstGeom>
+        </p:spPr>
+        <p:txBody>
+          <a:bodyPr vert="horz" lIns="91440" tIns="45720" rIns="91440" bIns="45720" rtlCol="0" anchor="b"/>
+          <a:lstStyle>
+            <a:lvl1pPr algn="r">
+              <a:defRPr sz="1200"/>
+            </a:lvl1pPr>
+          </a:lstStyle>
+          <a:p>
+            <a:fld id="{BB5E49A5-4136-284D-997B-48E1D791AD67}" type="slidenum">
+              <a:rPr lang="en-US" smtClean="0"/>
+              <a:t>‹#›</a:t>
+            </a:fld>
+            <a:endParaRPr lang="en-US"/>
+          </a:p>
+        </p:txBody>
+      </p:sp>
+    </p:spTree>
+    <p:extLst>
+      <p:ext uri="{BB962C8B-B14F-4D97-AF65-F5344CB8AC3E}">
+        <p14:creationId xmlns:p14="http://schemas.microsoft.com/office/powerpoint/2010/main" val="2623252185"/>
+      </p:ext>
+    </p:extLst>
+  </p:cSld>
+  <p:clrMap bg1="lt1" tx1="dk1" bg2="lt2" tx2="dk2" accent1="accent1" accent2="accent2" accent3="accent3" accent4="accent4" accent5="accent5" accent6="accent6" hlink="hlink" folHlink="folHlink"/>
+  <p:notesStyle>
+    <a:lvl1pPr marL="0" algn="l" defTabSz="457200" rtl="0" eaLnBrk="1" latinLnBrk="0" hangingPunct="1">
+      <a:defRPr sz="1200" kern="1200">
+        <a:solidFill>
+          <a:schemeClr val="tx1"/>
+        </a:solidFill>
+        <a:latin typeface="+mn-lt"/>
+        <a:ea typeface="+mn-ea"/>
+        <a:cs typeface="+mn-cs"/>
+      </a:defRPr>
+    </a:lvl1pPr>
+    <a:lvl2pPr marL="457200" algn="l" defTabSz="457200" rtl="0" eaLnBrk="1" latinLnBrk="0" hangingPunct="1">
+      <a:defRPr sz="1200" kern="1200">
+        <a:solidFill>
+          <a:schemeClr val="tx1"/>
+        </a:solidFill>
+        <a:latin typeface="+mn-lt"/>
+        <a:ea typeface="+mn-ea"/>
+        <a:cs typeface="+mn-cs"/>
+      </a:defRPr>
+    </a:lvl2pPr>
+    <a:lvl3pPr marL="914400" algn="l" defTabSz="457200" rtl="0" eaLnBrk="1" latinLnBrk="0" hangingPunct="1">
+      <a:defRPr sz="1200" kern="1200">
+        <a:solidFill>
+          <a:schemeClr val="tx1"/>
+        </a:solidFill>
+        <a:latin typeface="+mn-lt"/>
+        <a:ea typeface="+mn-ea"/>
+        <a:cs typeface="+mn-cs"/>
+      </a:defRPr>
+    </a:lvl3pPr>
+    <a:lvl4pPr marL="1371600" algn="l" defTabSz="457200" rtl="0" eaLnBrk="1" latinLnBrk="0" hangingPunct="1">
+      <a:defRPr sz="1200" kern="1200">
+        <a:solidFill>
+          <a:schemeClr val="tx1"/>
+        </a:solidFill>
+        <a:latin typeface="+mn-lt"/>
+        <a:ea typeface="+mn-ea"/>
+        <a:cs typeface="+mn-cs"/>
+      </a:defRPr>
+    </a:lvl4pPr>
+    <a:lvl5pPr marL="1828800" algn="l" defTabSz="457200" rtl="0" eaLnBrk="1" latinLnBrk="0" hangingPunct="1">
+      <a:defRPr sz="1200" kern="1200">
+        <a:solidFill>
+          <a:schemeClr val="tx1"/>
+        </a:solidFill>
+        <a:latin typeface="+mn-lt"/>
+        <a:ea typeface="+mn-ea"/>
+        <a:cs typeface="+mn-cs"/>
+      </a:defRPr>
+    </a:lvl5pPr>
+    <a:lvl6pPr marL="2286000" algn="l" defTabSz="457200" rtl="0" eaLnBrk="1" latinLnBrk="0" hangingPunct="1">
+      <a:defRPr sz="1200" kern="1200">
+        <a:solidFill>
+          <a:schemeClr val="tx1"/>
+        </a:solidFill>
+        <a:latin typeface="+mn-lt"/>
+        <a:ea typeface="+mn-ea"/>
+        <a:cs typeface="+mn-cs"/>
+      </a:defRPr>
+    </a:lvl6pPr>
+    <a:lvl7pPr marL="2743200" algn="l" defTabSz="457200" rtl="0" eaLnBrk="1" latinLnBrk="0" hangingPunct="1">
+      <a:defRPr sz="1200" kern="1200">
+        <a:solidFill>
+          <a:schemeClr val="tx1"/>
+        </a:solidFill>
+        <a:latin typeface="+mn-lt"/>
+        <a:ea typeface="+mn-ea"/>
+        <a:cs typeface="+mn-cs"/>
+      </a:defRPr>
+    </a:lvl7pPr>
+    <a:lvl8pPr marL="3200400" algn="l" defTabSz="457200" rtl="0" eaLnBrk="1" latinLnBrk="0" hangingPunct="1">
+      <a:defRPr sz="1200" kern="1200">
+        <a:solidFill>
+          <a:schemeClr val="tx1"/>
+        </a:solidFill>
+        <a:latin typeface="+mn-lt"/>
+        <a:ea typeface="+mn-ea"/>
+        <a:cs typeface="+mn-cs"/>
+      </a:defRPr>
+    </a:lvl8pPr>
+    <a:lvl9pPr marL="3657600" algn="l" defTabSz="457200" rtl="0" eaLnBrk="1" latinLnBrk="0" hangingPunct="1">
+      <a:defRPr sz="1200" kern="1200">
+        <a:solidFill>
+          <a:schemeClr val="tx1"/>
+        </a:solidFill>
+        <a:latin typeface="+mn-lt"/>
+        <a:ea typeface="+mn-ea"/>
+        <a:cs typeface="+mn-cs"/>
+      </a:defRPr>
+    </a:lvl9pPr>
+  </p:notesStyle>
+</p:notesMaster>
+</file>
+
+<file path=ppt/notesSlides/notesSlide1.xml><?xml version="1.0" encoding="utf-8"?>
+<p:notes xmlns:a="http://schemas.openxmlformats.org/drawingml/2006/main" xmlns:p="http://schemas.openxmlformats.org/presentationml/2006/main" xmlns:r="http://schemas.openxmlformats.org/officeDocument/2006/relationships">
+  <p:cSld>
+    <p:spTree>
+      <p:nvGrpSpPr>
+        <p:cNvPr id="1" name=""/>
+        <p:cNvGrpSpPr/>
+        <p:nvPr/>
+      </p:nvGrpSpPr>
+      <p:grpSpPr>
+        <a:xfrm>
+          <a:off x="0" y="0"/>
+          <a:ext cx="0" cy="0"/>
+          <a:chOff x="0" y="0"/>
+          <a:chExt cx="0" cy="0"/>
+        </a:xfrm>
+      </p:grpSpPr>
+      <p:sp>
+        <p:nvSpPr>
+          <p:cNvPr id="2" name="Slide Image Placeholder 1"/>
+          <p:cNvSpPr>
+            <a:spLocks noGrp="1"/>
+          </p:cNvSpPr>
+          <p:nvPr>
+            <p:ph type="sldImg" idx="2"/>
+          </p:nvPr>
+        </p:nvSpPr>
+        <p:spPr/>
+      </p:sp>
+      <p:sp>
+        <p:nvSpPr>
+          <p:cNvPr id="3" name="Notes Placeholder 2"/>
+          <p:cNvSpPr>
+            <a:spLocks noGrp="1"/>
+          </p:cNvSpPr>
+          <p:nvPr>
+            <p:ph type="body" idx="3" sz="quarter"/>
+          </p:nvPr>
+        </p:nvSpPr>
+        <p:spPr/>
+        <p:txBody>
+          <a:bodyPr/>
+          <a:lstStyle/>
+          <a:p>
+            <a:r>
+              <a:t>THE HOOK:</a:t>
+            </a:r>
+          </a:p>
+          <a:p>
+            <a:r>
+              <a:t>"Every company in your portfolio has built an AI stack to process information faster. Yet when a critical strategic trigger fires, it still takes 30 days of committee meetings to do anything. We engineered the operating model that closes that gap permanently — a 3,600× execution head start."</a:t>
+            </a:r>
+          </a:p>
+          <a:p/>
+          <a:p>
+            <a:r>
+              <a:t>KEY FRAME: This is NOT an efficiency tool. It is a defense AND offense system for a volatile world.</a:t>
+            </a:r>
+          </a:p>
+        </p:txBody>
+      </p:sp>
+      <p:sp>
+        <p:nvSpPr>
+          <p:cNvPr id="4" name="Slide Number Placeholder 3"/>
+          <p:cNvSpPr>
+            <a:spLocks noGrp="1"/>
+          </p:cNvSpPr>
+          <p:nvPr>
+            <p:ph type="sldNum" idx="5" sz="quarter"/>
+          </p:nvPr>
+        </p:nvSpPr>
+        <p:spPr/>
+      </p:sp>
+    </p:spTree>
+  </p:cSld>
+  <p:clrMapOvr>
+    <a:masterClrMapping/>
+  </p:clrMapOvr>
+</p:notes>
+</file>
+
+<file path=ppt/notesSlides/notesSlide2.xml><?xml version="1.0" encoding="utf-8"?>
+<p:notes xmlns:a="http://schemas.openxmlformats.org/drawingml/2006/main" xmlns:p="http://schemas.openxmlformats.org/presentationml/2006/main" xmlns:r="http://schemas.openxmlformats.org/officeDocument/2006/relationships">
+  <p:cSld>
+    <p:spTree>
+      <p:nvGrpSpPr>
+        <p:cNvPr id="1" name=""/>
+        <p:cNvGrpSpPr/>
+        <p:nvPr/>
+      </p:nvGrpSpPr>
+      <p:grpSpPr>
+        <a:xfrm>
+          <a:off x="0" y="0"/>
+          <a:ext cx="0" cy="0"/>
+          <a:chOff x="0" y="0"/>
+          <a:chExt cx="0" cy="0"/>
+        </a:xfrm>
+      </p:grpSpPr>
+      <p:sp>
+        <p:nvSpPr>
+          <p:cNvPr id="2" name="Slide Image Placeholder 1"/>
+          <p:cNvSpPr>
+            <a:spLocks noGrp="1"/>
+          </p:cNvSpPr>
+          <p:nvPr>
+            <p:ph type="sldImg" idx="2"/>
+          </p:nvPr>
+        </p:nvSpPr>
+        <p:spPr/>
+      </p:sp>
+      <p:sp>
+        <p:nvSpPr>
+          <p:cNvPr id="3" name="Notes Placeholder 2"/>
+          <p:cNvSpPr>
+            <a:spLocks noGrp="1"/>
+          </p:cNvSpPr>
+          <p:nvPr>
+            <p:ph type="body" idx="3" sz="quarter"/>
+          </p:nvPr>
+        </p:nvSpPr>
+        <p:spPr/>
+        <p:txBody>
+          <a:bodyPr/>
+          <a:lstStyle/>
+          <a:p>
+            <a:r>
+              <a:t>THE PROBLEM:</a:t>
+            </a:r>
+          </a:p>
+          <a:p>
+            <a:r>
+              <a:t>"The market thinks companies have a strategy problem. They don't. They have an architecture problem. When a breach or activist strike happens, leadership spends the first two to three weeks figuring out who has authority to act. That 30-day delay is an existential window — activists, regulators, and competitors completely own it."</a:t>
+            </a:r>
+          </a:p>
+          <a:p/>
+          <a:p>
+            <a:r>
+              <a:t>POINT TO VISUAL: Detection &lt; 1 second. Mobilization 30 days. "We built the infrastructure that eliminates that gap."</a:t>
+            </a:r>
+          </a:p>
+        </p:txBody>
+      </p:sp>
+      <p:sp>
+        <p:nvSpPr>
+          <p:cNvPr id="4" name="Slide Number Placeholder 3"/>
+          <p:cNvSpPr>
+            <a:spLocks noGrp="1"/>
+          </p:cNvSpPr>
+          <p:nvPr>
+            <p:ph type="sldNum" idx="5" sz="quarter"/>
+          </p:nvPr>
+        </p:nvSpPr>
+        <p:spPr/>
+      </p:sp>
+    </p:spTree>
+  </p:cSld>
+  <p:clrMapOvr>
+    <a:masterClrMapping/>
+  </p:clrMapOvr>
+</p:notes>
+</file>
+
+<file path=ppt/notesSlides/notesSlide3.xml><?xml version="1.0" encoding="utf-8"?>
+<p:notes xmlns:a="http://schemas.openxmlformats.org/drawingml/2006/main" xmlns:p="http://schemas.openxmlformats.org/presentationml/2006/main" xmlns:r="http://schemas.openxmlformats.org/officeDocument/2006/relationships">
+  <p:cSld>
+    <p:spTree>
+      <p:nvGrpSpPr>
+        <p:cNvPr id="1" name=""/>
+        <p:cNvGrpSpPr/>
+        <p:nvPr/>
+      </p:nvGrpSpPr>
+      <p:grpSpPr>
+        <a:xfrm>
+          <a:off x="0" y="0"/>
+          <a:ext cx="0" cy="0"/>
+          <a:chOff x="0" y="0"/>
+          <a:chExt cx="0" cy="0"/>
+        </a:xfrm>
+      </p:grpSpPr>
+      <p:sp>
+        <p:nvSpPr>
+          <p:cNvPr id="2" name="Slide Image Placeholder 1"/>
+          <p:cNvSpPr>
+            <a:spLocks noGrp="1"/>
+          </p:cNvSpPr>
+          <p:nvPr>
+            <p:ph type="sldImg" idx="2"/>
+          </p:nvPr>
+        </p:nvSpPr>
+        <p:spPr/>
+      </p:sp>
+      <p:sp>
+        <p:nvSpPr>
+          <p:cNvPr id="3" name="Notes Placeholder 2"/>
+          <p:cNvSpPr>
+            <a:spLocks noGrp="1"/>
+          </p:cNvSpPr>
+          <p:nvPr>
+            <p:ph type="body" idx="3" sz="quarter"/>
+          </p:nvPr>
+        </p:nvSpPr>
+        <p:spPr/>
+        <p:txBody>
+          <a:bodyPr/>
+          <a:lstStyle/>
+          <a:p>
+            <a:r>
+              <a:t>THE FOUNDER:</a:t>
+            </a:r>
+          </a:p>
+          <a:p>
+            <a:r>
+              <a:t>"I am the only person in enterprise software who has operated at the intersection of Fortune 500 transformation and major college football preparation at this depth. At Stanford you don't design the play after the ball is snapped. The response is pre-staged before the pressure arrives. I watched that discipline completely missing from enterprise. VaughnMartin closes that gap permanently."</a:t>
+            </a:r>
+          </a:p>
+        </p:txBody>
+      </p:sp>
+      <p:sp>
+        <p:nvSpPr>
+          <p:cNvPr id="4" name="Slide Number Placeholder 3"/>
+          <p:cNvSpPr>
+            <a:spLocks noGrp="1"/>
+          </p:cNvSpPr>
+          <p:nvPr>
+            <p:ph type="sldNum" idx="5" sz="quarter"/>
+          </p:nvPr>
+        </p:nvSpPr>
+        <p:spPr/>
+      </p:sp>
+    </p:spTree>
+  </p:cSld>
+  <p:clrMapOvr>
+    <a:masterClrMapping/>
+  </p:clrMapOvr>
+</p:notes>
+</file>
+
+<file path=ppt/notesSlides/notesSlide4.xml><?xml version="1.0" encoding="utf-8"?>
+<p:notes xmlns:a="http://schemas.openxmlformats.org/drawingml/2006/main" xmlns:p="http://schemas.openxmlformats.org/presentationml/2006/main" xmlns:r="http://schemas.openxmlformats.org/officeDocument/2006/relationships">
+  <p:cSld>
+    <p:spTree>
+      <p:nvGrpSpPr>
+        <p:cNvPr id="1" name=""/>
+        <p:cNvGrpSpPr/>
+        <p:nvPr/>
+      </p:nvGrpSpPr>
+      <p:grpSpPr>
+        <a:xfrm>
+          <a:off x="0" y="0"/>
+          <a:ext cx="0" cy="0"/>
+          <a:chOff x="0" y="0"/>
+          <a:chExt cx="0" cy="0"/>
+        </a:xfrm>
+      </p:grpSpPr>
+      <p:sp>
+        <p:nvSpPr>
+          <p:cNvPr id="2" name="Slide Image Placeholder 1"/>
+          <p:cNvSpPr>
+            <a:spLocks noGrp="1"/>
+          </p:cNvSpPr>
+          <p:nvPr>
+            <p:ph type="sldImg" idx="2"/>
+          </p:nvPr>
+        </p:nvSpPr>
+        <p:spPr/>
+      </p:sp>
+      <p:sp>
+        <p:nvSpPr>
+          <p:cNvPr id="3" name="Notes Placeholder 2"/>
+          <p:cNvSpPr>
+            <a:spLocks noGrp="1"/>
+          </p:cNvSpPr>
+          <p:nvPr>
+            <p:ph type="body" idx="3" sz="quarter"/>
+          </p:nvPr>
+        </p:nvSpPr>
+        <p:spPr/>
+        <p:txBody>
+          <a:bodyPr/>
+          <a:lstStyle/>
+          <a:p>
+            <a:r>
+              <a:t>THE PRODUCT:</a:t>
+            </a:r>
+          </a:p>
+          <a:p>
+            <a:r>
+              <a:t>"When a ransomware signal hits, the system doesn't autonomously execute. In less than 120 seconds, it delivers a board-ready execution brief to the executive suite — pre-approved communication streams, mapped authority chain, pre-assigned tasks. The AI monitors, but humans decide. We turn 30 days of unmanaged chaos and a potential $47M penalty into a controlled, 12-minute executive sign-off."</a:t>
+            </a:r>
+          </a:p>
+          <a:p/>
+          <a:p>
+            <a:r>
+              <a:t>ONBOARDING: "They don't build 170 protocols from scratch. VaughnMartin ships with standard out-of-the-box protocols. Onboarding is configuration — not a consulting project. 90 days to live."</a:t>
+            </a:r>
+          </a:p>
+          <a:p/>
+          <a:p>
+            <a:r>
+              <a:t>KEY LINE: "The system stages the choice in seconds. The executive must click authorize."</a:t>
+            </a:r>
+          </a:p>
+        </p:txBody>
+      </p:sp>
+      <p:sp>
+        <p:nvSpPr>
+          <p:cNvPr id="4" name="Slide Number Placeholder 3"/>
+          <p:cNvSpPr>
+            <a:spLocks noGrp="1"/>
+          </p:cNvSpPr>
+          <p:nvPr>
+            <p:ph type="sldNum" idx="5" sz="quarter"/>
+          </p:nvPr>
+        </p:nvSpPr>
+        <p:spPr/>
+      </p:sp>
+    </p:spTree>
+  </p:cSld>
+  <p:clrMapOvr>
+    <a:masterClrMapping/>
+  </p:clrMapOvr>
+</p:notes>
+</file>
+
+<file path=ppt/notesSlides/notesSlide5.xml><?xml version="1.0" encoding="utf-8"?>
+<p:notes xmlns:a="http://schemas.openxmlformats.org/drawingml/2006/main" xmlns:p="http://schemas.openxmlformats.org/presentationml/2006/main" xmlns:r="http://schemas.openxmlformats.org/officeDocument/2006/relationships">
+  <p:cSld>
+    <p:spTree>
+      <p:nvGrpSpPr>
+        <p:cNvPr id="1" name=""/>
+        <p:cNvGrpSpPr/>
+        <p:nvPr/>
+      </p:nvGrpSpPr>
+      <p:grpSpPr>
+        <a:xfrm>
+          <a:off x="0" y="0"/>
+          <a:ext cx="0" cy="0"/>
+          <a:chOff x="0" y="0"/>
+          <a:chExt cx="0" cy="0"/>
+        </a:xfrm>
+      </p:grpSpPr>
+      <p:sp>
+        <p:nvSpPr>
+          <p:cNvPr id="2" name="Slide Image Placeholder 1"/>
+          <p:cNvSpPr>
+            <a:spLocks noGrp="1"/>
+          </p:cNvSpPr>
+          <p:nvPr>
+            <p:ph type="sldImg" idx="2"/>
+          </p:nvPr>
+        </p:nvSpPr>
+        <p:spPr/>
+      </p:sp>
+      <p:sp>
+        <p:nvSpPr>
+          <p:cNvPr id="3" name="Notes Placeholder 2"/>
+          <p:cNvSpPr>
+            <a:spLocks noGrp="1"/>
+          </p:cNvSpPr>
+          <p:nvPr>
+            <p:ph type="body" idx="3" sz="quarter"/>
+          </p:nvPr>
+        </p:nvSpPr>
+        <p:spPr/>
+        <p:txBody>
+          <a:bodyPr/>
+          <a:lstStyle/>
+          <a:p>
+            <a:r>
+              <a:t>WHY WE WIN:</a:t>
+            </a:r>
+          </a:p>
+          <a:p>
+            <a:r>
+              <a:t>"VaughnMartin is the orchestration layer that pre-stages the alignment before any competitor is even called. The data moat becomes completely unassailable over time."</a:t>
+            </a:r>
+          </a:p>
+          <a:p/>
+          <a:p>
+            <a:r>
+              <a:t>FATAL TRAP: "Can't ServiceNow just add this?"</a:t>
+            </a:r>
+          </a:p>
+          <a:p>
+            <a:r>
+              <a:t>ANSWER: "No. ServiceNow is an asynchronous ticketing router built for post-alignment execution. VaughnMartin is a synchronous readiness engine that pre-stages the organizational alignment itself. They track the work. We engineer the capability to do it."</a:t>
+            </a:r>
+          </a:p>
+        </p:txBody>
+      </p:sp>
+      <p:sp>
+        <p:nvSpPr>
+          <p:cNvPr id="4" name="Slide Number Placeholder 3"/>
+          <p:cNvSpPr>
+            <a:spLocks noGrp="1"/>
+          </p:cNvSpPr>
+          <p:nvPr>
+            <p:ph type="sldNum" idx="5" sz="quarter"/>
+          </p:nvPr>
+        </p:nvSpPr>
+        <p:spPr/>
+      </p:sp>
+    </p:spTree>
+  </p:cSld>
+  <p:clrMapOvr>
+    <a:masterClrMapping/>
+  </p:clrMapOvr>
+</p:notes>
+</file>
+
+<file path=ppt/notesSlides/notesSlide6.xml><?xml version="1.0" encoding="utf-8"?>
+<p:notes xmlns:a="http://schemas.openxmlformats.org/drawingml/2006/main" xmlns:p="http://schemas.openxmlformats.org/presentationml/2006/main" xmlns:r="http://schemas.openxmlformats.org/officeDocument/2006/relationships">
+  <p:cSld>
+    <p:spTree>
+      <p:nvGrpSpPr>
+        <p:cNvPr id="1" name=""/>
+        <p:cNvGrpSpPr/>
+        <p:nvPr/>
+      </p:nvGrpSpPr>
+      <p:grpSpPr>
+        <a:xfrm>
+          <a:off x="0" y="0"/>
+          <a:ext cx="0" cy="0"/>
+          <a:chOff x="0" y="0"/>
+          <a:chExt cx="0" cy="0"/>
+        </a:xfrm>
+      </p:grpSpPr>
+      <p:sp>
+        <p:nvSpPr>
+          <p:cNvPr id="2" name="Slide Image Placeholder 1"/>
+          <p:cNvSpPr>
+            <a:spLocks noGrp="1"/>
+          </p:cNvSpPr>
+          <p:nvPr>
+            <p:ph type="sldImg" idx="2"/>
+          </p:nvPr>
+        </p:nvSpPr>
+        <p:spPr/>
+      </p:sp>
+      <p:sp>
+        <p:nvSpPr>
+          <p:cNvPr id="3" name="Notes Placeholder 2"/>
+          <p:cNvSpPr>
+            <a:spLocks noGrp="1"/>
+          </p:cNvSpPr>
+          <p:nvPr>
+            <p:ph type="body" idx="3" sz="quarter"/>
+          </p:nvPr>
+        </p:nvSpPr>
+        <p:spPr/>
+        <p:txBody>
+          <a:bodyPr/>
+          <a:lstStyle/>
+          <a:p>
+            <a:r>
+              <a:t>HOW IT WORKS:</a:t>
+            </a:r>
+          </a:p>
+          <a:p>
+            <a:r>
+              <a:t>"When a ransomware signal hits, in less than 120 seconds the system delivers a board-ready execution brief — pre-approved communications, mapped authority chain, pre-assigned tasks. The AI monitors. Humans decide. 30 days of chaos becomes a 12-minute executive sign-off."</a:t>
+            </a:r>
+          </a:p>
+          <a:p/>
+          <a:p>
+            <a:r>
+              <a:t>SAY EXPLICITLY: "The system stages the choice in seconds. The executive must click authorize." Every time.</a:t>
+            </a:r>
+          </a:p>
+        </p:txBody>
+      </p:sp>
+      <p:sp>
+        <p:nvSpPr>
+          <p:cNvPr id="4" name="Slide Number Placeholder 3"/>
+          <p:cNvSpPr>
+            <a:spLocks noGrp="1"/>
+          </p:cNvSpPr>
+          <p:nvPr>
+            <p:ph type="sldNum" idx="5" sz="quarter"/>
+          </p:nvPr>
+        </p:nvSpPr>
+        <p:spPr/>
+      </p:sp>
+    </p:spTree>
+  </p:cSld>
+  <p:clrMapOvr>
+    <a:masterClrMapping/>
+  </p:clrMapOvr>
+</p:notes>
+</file>
+
+<file path=ppt/notesSlides/notesSlide7.xml><?xml version="1.0" encoding="utf-8"?>
+<p:notes xmlns:a="http://schemas.openxmlformats.org/drawingml/2006/main" xmlns:p="http://schemas.openxmlformats.org/presentationml/2006/main" xmlns:r="http://schemas.openxmlformats.org/officeDocument/2006/relationships">
+  <p:cSld>
+    <p:spTree>
+      <p:nvGrpSpPr>
+        <p:cNvPr id="1" name=""/>
+        <p:cNvGrpSpPr/>
+        <p:nvPr/>
+      </p:nvGrpSpPr>
+      <p:grpSpPr>
+        <a:xfrm>
+          <a:off x="0" y="0"/>
+          <a:ext cx="0" cy="0"/>
+          <a:chOff x="0" y="0"/>
+          <a:chExt cx="0" cy="0"/>
+        </a:xfrm>
+      </p:grpSpPr>
+      <p:sp>
+        <p:nvSpPr>
+          <p:cNvPr id="2" name="Slide Image Placeholder 1"/>
+          <p:cNvSpPr>
+            <a:spLocks noGrp="1"/>
+          </p:cNvSpPr>
+          <p:nvPr>
+            <p:ph type="sldImg" idx="2"/>
+          </p:nvPr>
+        </p:nvSpPr>
+        <p:spPr/>
+      </p:sp>
+      <p:sp>
+        <p:nvSpPr>
+          <p:cNvPr id="3" name="Notes Placeholder 2"/>
+          <p:cNvSpPr>
+            <a:spLocks noGrp="1"/>
+          </p:cNvSpPr>
+          <p:nvPr>
+            <p:ph type="body" idx="3" sz="quarter"/>
+          </p:nvPr>
+        </p:nvSpPr>
+        <p:spPr/>
+        <p:txBody>
+          <a:bodyPr/>
+          <a:lstStyle/>
+          <a:p>
+            <a:r>
+              <a:t>PROOF:</a:t>
+            </a:r>
+          </a:p>
+          <a:p>
+            <a:r>
+              <a:t>"Pull out your phone right now. Go to vaughnmartin.com/how-it-executes. Watch the complete 12-minute execution chain run live. Then run a scenario yourself on the 12-Minute Test Drive. This is not a roadmap concept. It is live and testable today."</a:t>
+            </a:r>
+          </a:p>
+          <a:p/>
+          <a:p>
+            <a:r>
+              <a:t>KEY LINE: "Same trigger. Same company. Entirely different outcome." Point to the side-by-side comparison.</a:t>
+            </a:r>
+          </a:p>
+        </p:txBody>
+      </p:sp>
+      <p:sp>
+        <p:nvSpPr>
+          <p:cNvPr id="4" name="Slide Number Placeholder 3"/>
+          <p:cNvSpPr>
+            <a:spLocks noGrp="1"/>
+          </p:cNvSpPr>
+          <p:nvPr>
+            <p:ph type="sldNum" idx="5" sz="quarter"/>
+          </p:nvPr>
+        </p:nvSpPr>
+        <p:spPr/>
+      </p:sp>
+    </p:spTree>
+  </p:cSld>
+  <p:clrMapOvr>
+    <a:masterClrMapping/>
+  </p:clrMapOvr>
+</p:notes>
+</file>
+
+<file path=ppt/notesSlides/notesSlide8.xml><?xml version="1.0" encoding="utf-8"?>
+<p:notes xmlns:a="http://schemas.openxmlformats.org/drawingml/2006/main" xmlns:p="http://schemas.openxmlformats.org/presentationml/2006/main" xmlns:r="http://schemas.openxmlformats.org/officeDocument/2006/relationships">
+  <p:cSld>
+    <p:spTree>
+      <p:nvGrpSpPr>
+        <p:cNvPr id="1" name=""/>
+        <p:cNvGrpSpPr/>
+        <p:nvPr/>
+      </p:nvGrpSpPr>
+      <p:grpSpPr>
+        <a:xfrm>
+          <a:off x="0" y="0"/>
+          <a:ext cx="0" cy="0"/>
+          <a:chOff x="0" y="0"/>
+          <a:chExt cx="0" cy="0"/>
+        </a:xfrm>
+      </p:grpSpPr>
+      <p:sp>
+        <p:nvSpPr>
+          <p:cNvPr id="2" name="Slide Image Placeholder 1"/>
+          <p:cNvSpPr>
+            <a:spLocks noGrp="1"/>
+          </p:cNvSpPr>
+          <p:nvPr>
+            <p:ph type="sldImg" idx="2"/>
+          </p:nvPr>
+        </p:nvSpPr>
+        <p:spPr/>
+      </p:sp>
+      <p:sp>
+        <p:nvSpPr>
+          <p:cNvPr id="3" name="Notes Placeholder 2"/>
+          <p:cNvSpPr>
+            <a:spLocks noGrp="1"/>
+          </p:cNvSpPr>
+          <p:nvPr>
+            <p:ph type="body" idx="3" sz="quarter"/>
+          </p:nvPr>
+        </p:nvSpPr>
+        <p:spPr/>
+        <p:txBody>
+          <a:bodyPr/>
+          <a:lstStyle/>
+          <a:p>
+            <a:r>
+              <a:t>BUSINESS CASE:</a:t>
+            </a:r>
+          </a:p>
+          <a:p>
+            <a:r>
+              <a:t>"We aren't asking CFOs to dig up net-new budget. Enterprises are already burning millions on reactive, post-trigger consulting retainers. We are converting that wasteful, panic-driven spend into repeatable software infrastructure. The $75K Founding Partner fee is not an expense — it is a trivial reallocation of waste that already exists in the budget."</a:t>
+            </a:r>
+          </a:p>
+        </p:txBody>
+      </p:sp>
+      <p:sp>
+        <p:nvSpPr>
+          <p:cNvPr id="4" name="Slide Number Placeholder 3"/>
+          <p:cNvSpPr>
+            <a:spLocks noGrp="1"/>
+          </p:cNvSpPr>
+          <p:nvPr>
+            <p:ph type="sldNum" idx="5" sz="quarter"/>
+          </p:nvPr>
+        </p:nvSpPr>
+        <p:spPr/>
+      </p:sp>
+    </p:spTree>
+  </p:cSld>
+  <p:clrMapOvr>
+    <a:masterClrMapping/>
+  </p:clrMapOvr>
+</p:notes>
+</file>
+
+<file path=ppt/notesSlides/notesSlide9.xml><?xml version="1.0" encoding="utf-8"?>
+<p:notes xmlns:a="http://schemas.openxmlformats.org/drawingml/2006/main" xmlns:p="http://schemas.openxmlformats.org/presentationml/2006/main" xmlns:r="http://schemas.openxmlformats.org/officeDocument/2006/relationships">
+  <p:cSld>
+    <p:spTree>
+      <p:nvGrpSpPr>
+        <p:cNvPr id="1" name=""/>
+        <p:cNvGrpSpPr/>
+        <p:nvPr/>
+      </p:nvGrpSpPr>
+      <p:grpSpPr>
+        <a:xfrm>
+          <a:off x="0" y="0"/>
+          <a:ext cx="0" cy="0"/>
+          <a:chOff x="0" y="0"/>
+          <a:chExt cx="0" cy="0"/>
+        </a:xfrm>
+      </p:grpSpPr>
+      <p:sp>
+        <p:nvSpPr>
+          <p:cNvPr id="2" name="Slide Image Placeholder 1"/>
+          <p:cNvSpPr>
+            <a:spLocks noGrp="1"/>
+          </p:cNvSpPr>
+          <p:nvPr>
+            <p:ph type="sldImg" idx="2"/>
+          </p:nvPr>
+        </p:nvSpPr>
+        <p:spPr/>
+      </p:sp>
+      <p:sp>
+        <p:nvSpPr>
+          <p:cNvPr id="3" name="Notes Placeholder 2"/>
+          <p:cNvSpPr>
+            <a:spLocks noGrp="1"/>
+          </p:cNvSpPr>
+          <p:nvPr>
+            <p:ph type="body" idx="3" sz="quarter"/>
+          </p:nvPr>
+        </p:nvSpPr>
+        <p:spPr/>
+        <p:txBody>
+          <a:bodyPr/>
+          <a:lstStyle/>
+          <a:p>
+            <a:r>
+              <a:t>THE ASK:</a:t>
+            </a:r>
+          </a:p>
+          <a:p>
+            <a:r>
+              <a:t>"We are raising up to $1,000,000 to harden enterprise access controls, certify our Microsoft integrations, and convert our initial Founding Partner cohort into recurring enterprise contracts. We are pioneering an entirely new software layer: Preparation Infrastructure. The platform is live, the metrics are undeniable, and we are built to be Series A ready in 18 months. This is a limited ticket onto a fast-moving train. Let's build the future of fearless execution together."</a:t>
+            </a:r>
+          </a:p>
+          <a:p/>
+          <a:p>
+            <a:r>
+              <a:t>URGENCY: 12 Founding Partner seats. Cohort forming now.</a:t>
+            </a:r>
+          </a:p>
+        </p:txBody>
+      </p:sp>
+      <p:sp>
+        <p:nvSpPr>
+          <p:cNvPr id="4" name="Slide Number Placeholder 3"/>
+          <p:cNvSpPr>
+            <a:spLocks noGrp="1"/>
+          </p:cNvSpPr>
+          <p:nvPr>
+            <p:ph type="sldNum" idx="5" sz="quarter"/>
+          </p:nvPr>
+        </p:nvSpPr>
+        <p:spPr/>
+      </p:sp>
+    </p:spTree>
+  </p:cSld>
+  <p:clrMapOvr>
+    <a:masterClrMapping/>
+  </p:clrMapOvr>
+</p:notes>
 </file>
 
 <file path=ppt/slideLayouts/slideLayout1.xml><?xml version="1.0" encoding="utf-8"?>
@@ -3426,7 +4504,7 @@
         <p:spPr>
           <a:xfrm>
             <a:off x="475488" y="3520440"/>
-            <a:ext cx="6858000" cy="292608"/>
+            <a:ext cx="6858000" cy="256032"/>
           </a:xfrm>
           <a:prstGeom prst="rect">
             <a:avLst/>
@@ -3441,26 +4519,61 @@
           <a:p>
             <a:pPr algn="l"/>
             <a:r>
-              <a:rPr sz="1000" b="1" i="0">
+              <a:rPr sz="950" b="1" i="0">
                 <a:solidFill>
                   <a:srgbClr val="B4BED6"/>
                 </a:solidFill>
                 <a:latin typeface="Barlow Condensed"/>
               </a:rPr>
-              <a:t>PREPARATION  →  READINESS  →  FEARLESS</a:t>
-            </a:r>
-          </a:p>
-        </p:txBody>
-      </p:sp>
-      <p:sp>
-        <p:nvSpPr>
-          <p:cNvPr id="11" name="Rectangle 10"/>
+              <a:t>PREPARATION INFRASTRUCTURE FOR A VOLATILE WORLD</a:t>
+            </a:r>
+          </a:p>
+        </p:txBody>
+      </p:sp>
+      <p:sp>
+        <p:nvSpPr>
+          <p:cNvPr id="11" name="TextBox 10"/>
+          <p:cNvSpPr txBox="1"/>
+          <p:nvPr/>
+        </p:nvSpPr>
+        <p:spPr>
+          <a:xfrm>
+            <a:off x="475488" y="3803904"/>
+            <a:ext cx="6766560" cy="256032"/>
+          </a:xfrm>
+          <a:prstGeom prst="rect">
+            <a:avLst/>
+          </a:prstGeom>
+          <a:noFill/>
+        </p:spPr>
+        <p:txBody>
+          <a:bodyPr wrap="square">
+            <a:spAutoFit/>
+          </a:bodyPr>
+          <a:lstStyle/>
+          <a:p>
+            <a:pPr algn="l"/>
+            <a:r>
+              <a:rPr sz="900" b="0" i="0">
+                <a:solidFill>
+                  <a:srgbClr val="B4BED6"/>
+                </a:solidFill>
+                <a:latin typeface="Barlow Condensed"/>
+              </a:rPr>
+              <a:t>Defense + Offense. Startup to Fortune 500. Pre-staged before the trigger fires.</a:t>
+            </a:r>
+          </a:p>
+        </p:txBody>
+      </p:sp>
+      <p:sp>
+        <p:nvSpPr>
+          <p:cNvPr id="12" name="Rectangle 11"/>
           <p:cNvSpPr/>
           <p:nvPr/>
         </p:nvSpPr>
         <p:spPr>
           <a:xfrm>
-            <a:off x="475488" y="3822191"/>
+            <a:off x="475488" y="4096512"/>
             <a:ext cx="6766560" cy="13716"/>
           </a:xfrm>
           <a:prstGeom prst="rect">
@@ -3497,14 +4610,14 @@
       </p:sp>
       <p:sp>
         <p:nvSpPr>
-          <p:cNvPr id="12" name="TextBox 11"/>
+          <p:cNvPr id="13" name="TextBox 12"/>
           <p:cNvSpPr txBox="1"/>
           <p:nvPr/>
         </p:nvSpPr>
         <p:spPr>
           <a:xfrm>
             <a:off x="7909560" y="1097280"/>
-            <a:ext cx="4023360" cy="256032"/>
+            <a:ext cx="4023360" cy="219456"/>
           </a:xfrm>
           <a:prstGeom prst="rect">
             <a:avLst/>
@@ -3519,48 +4632,13 @@
           <a:p>
             <a:pPr algn="l"/>
             <a:r>
-              <a:rPr sz="900" b="1" i="0">
+              <a:rPr sz="850" b="1" i="0">
                 <a:solidFill>
                   <a:srgbClr val="C9A84C"/>
                 </a:solidFill>
                 <a:latin typeface="Barlow Condensed"/>
               </a:rPr>
-              <a:t>INVESTOR BRIEF</a:t>
-            </a:r>
-          </a:p>
-        </p:txBody>
-      </p:sp>
-      <p:sp>
-        <p:nvSpPr>
-          <p:cNvPr id="13" name="TextBox 12"/>
-          <p:cNvSpPr txBox="1"/>
-          <p:nvPr/>
-        </p:nvSpPr>
-        <p:spPr>
-          <a:xfrm>
-            <a:off x="7909560" y="1371600"/>
-            <a:ext cx="4023360" cy="219456"/>
-          </a:xfrm>
-          <a:prstGeom prst="rect">
-            <a:avLst/>
-          </a:prstGeom>
-          <a:noFill/>
-        </p:spPr>
-        <p:txBody>
-          <a:bodyPr wrap="square">
-            <a:spAutoFit/>
-          </a:bodyPr>
-          <a:lstStyle/>
-          <a:p>
-            <a:pPr algn="l"/>
-            <a:r>
-              <a:rPr sz="900" b="0" i="0">
-                <a:solidFill>
-                  <a:srgbClr val="B4BED6"/>
-                </a:solidFill>
-                <a:latin typeface="Barlow Condensed"/>
-              </a:rPr>
-              <a:t>MAY 2026</a:t>
+              <a:t>INVESTOR BRIEF  ·  MAY 2026</a:t>
             </a:r>
           </a:p>
         </p:txBody>
@@ -3573,7 +4651,7 @@
         </p:nvSpPr>
         <p:spPr>
           <a:xfrm>
-            <a:off x="7909560" y="1664208"/>
+            <a:off x="7909560" y="1371600"/>
             <a:ext cx="3840480" cy="10972"/>
           </a:xfrm>
           <a:prstGeom prst="rect">
@@ -3616,7 +4694,7 @@
         </p:nvSpPr>
         <p:spPr>
           <a:xfrm>
-            <a:off x="7909560" y="1920240"/>
+            <a:off x="7909560" y="1572768"/>
             <a:ext cx="3840480" cy="566928"/>
           </a:xfrm>
           <a:prstGeom prst="rect">
@@ -3632,7 +4710,7 @@
           <a:p>
             <a:pPr algn="l"/>
             <a:r>
-              <a:rPr sz="3200" b="1" i="0">
+              <a:rPr sz="3400" b="1" i="0">
                 <a:solidFill>
                   <a:srgbClr val="C9A84C"/>
                 </a:solidFill>
@@ -3651,7 +4729,7 @@
         </p:nvSpPr>
         <p:spPr>
           <a:xfrm>
-            <a:off x="7909560" y="2468880"/>
+            <a:off x="7909560" y="2121408"/>
             <a:ext cx="3840480" cy="256032"/>
           </a:xfrm>
           <a:prstGeom prst="rect">
@@ -3686,7 +4764,7 @@
         </p:nvSpPr>
         <p:spPr>
           <a:xfrm>
-            <a:off x="7909560" y="2788920"/>
+            <a:off x="7909560" y="2450591"/>
             <a:ext cx="3840480" cy="10972"/>
           </a:xfrm>
           <a:prstGeom prst="rect">
@@ -3729,7 +4807,7 @@
         </p:nvSpPr>
         <p:spPr>
           <a:xfrm>
-            <a:off x="7909560" y="3035808"/>
+            <a:off x="7909560" y="2743200"/>
             <a:ext cx="3840480" cy="566928"/>
           </a:xfrm>
           <a:prstGeom prst="rect">
@@ -3745,7 +4823,7 @@
           <a:p>
             <a:pPr algn="l"/>
             <a:r>
-              <a:rPr sz="3200" b="1" i="0">
+              <a:rPr sz="3400" b="1" i="0">
                 <a:solidFill>
                   <a:srgbClr val="C9A84C"/>
                 </a:solidFill>
@@ -3764,7 +4842,7 @@
         </p:nvSpPr>
         <p:spPr>
           <a:xfrm>
-            <a:off x="7909560" y="3584448"/>
+            <a:off x="7909560" y="3291840"/>
             <a:ext cx="3840480" cy="256032"/>
           </a:xfrm>
           <a:prstGeom prst="rect">
@@ -3799,7 +4877,7 @@
         </p:nvSpPr>
         <p:spPr>
           <a:xfrm>
-            <a:off x="7909560" y="3904488"/>
+            <a:off x="7909560" y="3621024"/>
             <a:ext cx="3840480" cy="10972"/>
           </a:xfrm>
           <a:prstGeom prst="rect">
@@ -3842,7 +4920,7 @@
         </p:nvSpPr>
         <p:spPr>
           <a:xfrm>
-            <a:off x="7909560" y="4151376"/>
+            <a:off x="7909560" y="3913632"/>
             <a:ext cx="3840480" cy="566928"/>
           </a:xfrm>
           <a:prstGeom prst="rect">
@@ -3858,7 +4936,7 @@
           <a:p>
             <a:pPr algn="l"/>
             <a:r>
-              <a:rPr sz="3200" b="1" i="0">
+              <a:rPr sz="3400" b="1" i="0">
                 <a:solidFill>
                   <a:srgbClr val="C9A84C"/>
                 </a:solidFill>
@@ -3877,7 +4955,7 @@
         </p:nvSpPr>
         <p:spPr>
           <a:xfrm>
-            <a:off x="7909560" y="4700016"/>
+            <a:off x="7909560" y="4462272"/>
             <a:ext cx="3840480" cy="256032"/>
           </a:xfrm>
           <a:prstGeom prst="rect">
@@ -3912,7 +4990,7 @@
         </p:nvSpPr>
         <p:spPr>
           <a:xfrm>
-            <a:off x="7909560" y="5020056"/>
+            <a:off x="7909560" y="4791456"/>
             <a:ext cx="3840480" cy="10972"/>
           </a:xfrm>
           <a:prstGeom prst="rect">
@@ -3955,7 +5033,7 @@
         </p:nvSpPr>
         <p:spPr>
           <a:xfrm>
-            <a:off x="7909560" y="5266944"/>
+            <a:off x="7909560" y="5084064"/>
             <a:ext cx="3840480" cy="566928"/>
           </a:xfrm>
           <a:prstGeom prst="rect">
@@ -3971,7 +5049,7 @@
           <a:p>
             <a:pPr algn="l"/>
             <a:r>
-              <a:rPr sz="3200" b="1" i="0">
+              <a:rPr sz="3400" b="1" i="0">
                 <a:solidFill>
                   <a:srgbClr val="C9A84C"/>
                 </a:solidFill>
@@ -3990,7 +5068,7 @@
         </p:nvSpPr>
         <p:spPr>
           <a:xfrm>
-            <a:off x="7909560" y="5815583"/>
+            <a:off x="7909560" y="5632703"/>
             <a:ext cx="3840480" cy="256032"/>
           </a:xfrm>
           <a:prstGeom prst="rect">
@@ -4012,7 +5090,7 @@
                 </a:solidFill>
                 <a:latin typeface="Barlow Condensed"/>
               </a:rPr>
-              <a:t>Execution head start</a:t>
+              <a:t>Execution Head Start</a:t>
             </a:r>
           </a:p>
         </p:txBody>
@@ -4250,64 +5328,540 @@
         </p:nvSpPr>
         <p:spPr>
           <a:xfrm>
-            <a:off x="457200" y="2880360"/>
-            <a:ext cx="11274552" cy="384048"/>
-          </a:xfrm>
-          <a:prstGeom prst="rect">
-            <a:avLst/>
-          </a:prstGeom>
-          <a:noFill/>
-        </p:spPr>
-        <p:txBody>
-          <a:bodyPr wrap="square">
-            <a:spAutoFit/>
-          </a:bodyPr>
+            <a:off x="457200" y="182880"/>
+            <a:ext cx="10972800" cy="201168"/>
+          </a:xfrm>
+          <a:prstGeom prst="rect">
+            <a:avLst/>
+          </a:prstGeom>
+          <a:noFill/>
+        </p:spPr>
+        <p:txBody>
+          <a:bodyPr wrap="square">
+            <a:spAutoFit/>
+          </a:bodyPr>
+          <a:lstStyle/>
+          <a:p>
+            <a:pPr algn="l"/>
+            <a:r>
+              <a:rPr sz="800" b="1" i="0">
+                <a:solidFill>
+                  <a:srgbClr val="C9A84C"/>
+                </a:solidFill>
+                <a:latin typeface="Barlow Condensed"/>
+              </a:rPr>
+              <a:t>PITCH DEFENSE  ·  3 CRITICAL TRAPS TO AVOID</a:t>
+            </a:r>
+          </a:p>
+        </p:txBody>
+      </p:sp>
+      <p:sp>
+        <p:nvSpPr>
+          <p:cNvPr id="5" name="Rectangle 4"/>
+          <p:cNvSpPr/>
+          <p:nvPr/>
+        </p:nvSpPr>
+        <p:spPr>
+          <a:xfrm>
+            <a:off x="457200" y="457200"/>
+            <a:ext cx="11247120" cy="10972"/>
+          </a:xfrm>
+          <a:prstGeom prst="rect">
+            <a:avLst/>
+          </a:prstGeom>
+          <a:solidFill>
+            <a:srgbClr val="C9A84C"/>
+          </a:solidFill>
+          <a:ln>
+            <a:noFill/>
+          </a:ln>
+        </p:spPr>
+        <p:style>
+          <a:lnRef idx="1">
+            <a:schemeClr val="accent1"/>
+          </a:lnRef>
+          <a:fillRef idx="3">
+            <a:schemeClr val="accent1"/>
+          </a:fillRef>
+          <a:effectRef idx="2">
+            <a:schemeClr val="accent1"/>
+          </a:effectRef>
+          <a:fontRef idx="minor">
+            <a:schemeClr val="lt1"/>
+          </a:fontRef>
+        </p:style>
+        <p:txBody>
+          <a:bodyPr rtlCol="0" anchor="ctr"/>
           <a:lstStyle/>
           <a:p>
             <a:pPr algn="ctr"/>
-            <a:r>
-              <a:rPr sz="1300" b="1" i="0">
+          </a:p>
+        </p:txBody>
+      </p:sp>
+      <p:sp>
+        <p:nvSpPr>
+          <p:cNvPr id="6" name="Rectangle 5"/>
+          <p:cNvSpPr/>
+          <p:nvPr/>
+        </p:nvSpPr>
+        <p:spPr>
+          <a:xfrm>
+            <a:off x="411480" y="621792"/>
+            <a:ext cx="11365992" cy="1737360"/>
+          </a:xfrm>
+          <a:prstGeom prst="rect">
+            <a:avLst/>
+          </a:prstGeom>
+          <a:solidFill>
+            <a:srgbClr val="101842"/>
+          </a:solidFill>
+          <a:ln>
+            <a:noFill/>
+          </a:ln>
+        </p:spPr>
+        <p:style>
+          <a:lnRef idx="1">
+            <a:schemeClr val="accent1"/>
+          </a:lnRef>
+          <a:fillRef idx="3">
+            <a:schemeClr val="accent1"/>
+          </a:fillRef>
+          <a:effectRef idx="2">
+            <a:schemeClr val="accent1"/>
+          </a:effectRef>
+          <a:fontRef idx="minor">
+            <a:schemeClr val="lt1"/>
+          </a:fontRef>
+        </p:style>
+        <p:txBody>
+          <a:bodyPr rtlCol="0" anchor="ctr"/>
+          <a:lstStyle/>
+          <a:p>
+            <a:pPr algn="ctr"/>
+          </a:p>
+        </p:txBody>
+      </p:sp>
+      <p:sp>
+        <p:nvSpPr>
+          <p:cNvPr id="7" name="Rectangle 6"/>
+          <p:cNvSpPr/>
+          <p:nvPr/>
+        </p:nvSpPr>
+        <p:spPr>
+          <a:xfrm>
+            <a:off x="411480" y="621792"/>
+            <a:ext cx="11365992" cy="23774"/>
+          </a:xfrm>
+          <a:prstGeom prst="rect">
+            <a:avLst/>
+          </a:prstGeom>
+          <a:solidFill>
+            <a:srgbClr val="C9A84C"/>
+          </a:solidFill>
+          <a:ln>
+            <a:noFill/>
+          </a:ln>
+        </p:spPr>
+        <p:style>
+          <a:lnRef idx="1">
+            <a:schemeClr val="accent1"/>
+          </a:lnRef>
+          <a:fillRef idx="3">
+            <a:schemeClr val="accent1"/>
+          </a:fillRef>
+          <a:effectRef idx="2">
+            <a:schemeClr val="accent1"/>
+          </a:effectRef>
+          <a:fontRef idx="minor">
+            <a:schemeClr val="lt1"/>
+          </a:fontRef>
+        </p:style>
+        <p:txBody>
+          <a:bodyPr rtlCol="0" anchor="ctr"/>
+          <a:lstStyle/>
+          <a:p>
+            <a:pPr algn="ctr"/>
+          </a:p>
+        </p:txBody>
+      </p:sp>
+      <p:sp>
+        <p:nvSpPr>
+          <p:cNvPr id="8" name="TextBox 7"/>
+          <p:cNvSpPr txBox="1"/>
+          <p:nvPr/>
+        </p:nvSpPr>
+        <p:spPr>
+          <a:xfrm>
+            <a:off x="548640" y="676656"/>
+            <a:ext cx="11155680" cy="274320"/>
+          </a:xfrm>
+          <a:prstGeom prst="rect">
+            <a:avLst/>
+          </a:prstGeom>
+          <a:noFill/>
+        </p:spPr>
+        <p:txBody>
+          <a:bodyPr wrap="square">
+            <a:spAutoFit/>
+          </a:bodyPr>
+          <a:lstStyle/>
+          <a:p>
+            <a:pPr algn="l"/>
+            <a:r>
+              <a:rPr sz="1000" b="1" i="0">
                 <a:solidFill>
                   <a:srgbClr val="C9A84C"/>
                 </a:solidFill>
                 <a:latin typeface="Barlow Condensed"/>
               </a:rPr>
-              <a:t>APPENDIX  ·  SOURCES &amp; REFERENCES</a:t>
-            </a:r>
-          </a:p>
-        </p:txBody>
-      </p:sp>
-      <p:sp>
-        <p:nvSpPr>
-          <p:cNvPr id="5" name="TextBox 4"/>
-          <p:cNvSpPr txBox="1"/>
-          <p:nvPr/>
-        </p:nvSpPr>
-        <p:spPr>
-          <a:xfrm>
-            <a:off x="457200" y="3364992"/>
-            <a:ext cx="11274552" cy="274320"/>
-          </a:xfrm>
-          <a:prstGeom prst="rect">
-            <a:avLst/>
-          </a:prstGeom>
-          <a:noFill/>
-        </p:spPr>
-        <p:txBody>
-          <a:bodyPr wrap="square">
-            <a:spAutoFit/>
-          </a:bodyPr>
+              <a:t>TRAP 1  ·  "Can't ServiceNow just add this as a feature?"</a:t>
+            </a:r>
+          </a:p>
+        </p:txBody>
+      </p:sp>
+      <p:sp>
+        <p:nvSpPr>
+          <p:cNvPr id="9" name="TextBox 8"/>
+          <p:cNvSpPr txBox="1"/>
+          <p:nvPr/>
+        </p:nvSpPr>
+        <p:spPr>
+          <a:xfrm>
+            <a:off x="548640" y="987552"/>
+            <a:ext cx="11155680" cy="1188720"/>
+          </a:xfrm>
+          <a:prstGeom prst="rect">
+            <a:avLst/>
+          </a:prstGeom>
+          <a:noFill/>
+        </p:spPr>
+        <p:txBody>
+          <a:bodyPr wrap="square">
+            <a:spAutoFit/>
+          </a:bodyPr>
+          <a:lstStyle/>
+          <a:p>
+            <a:pPr algn="l"/>
+            <a:r>
+              <a:rPr sz="1000" b="0" i="1">
+                <a:solidFill>
+                  <a:srgbClr val="B4BED6"/>
+                </a:solidFill>
+                <a:latin typeface="Georgia"/>
+              </a:rPr>
+              <a:t>"No. ServiceNow is an asynchronous ticketing router built for post-alignment execution. VaughnMartin is a synchronous readiness engine that pre-stages the organizational alignment itself. They track the work. We engineer the capability to do it."</a:t>
+            </a:r>
+          </a:p>
+        </p:txBody>
+      </p:sp>
+      <p:sp>
+        <p:nvSpPr>
+          <p:cNvPr id="10" name="Rectangle 9"/>
+          <p:cNvSpPr/>
+          <p:nvPr/>
+        </p:nvSpPr>
+        <p:spPr>
+          <a:xfrm>
+            <a:off x="411480" y="2542032"/>
+            <a:ext cx="11365992" cy="1737360"/>
+          </a:xfrm>
+          <a:prstGeom prst="rect">
+            <a:avLst/>
+          </a:prstGeom>
+          <a:solidFill>
+            <a:srgbClr val="101842"/>
+          </a:solidFill>
+          <a:ln>
+            <a:noFill/>
+          </a:ln>
+        </p:spPr>
+        <p:style>
+          <a:lnRef idx="1">
+            <a:schemeClr val="accent1"/>
+          </a:lnRef>
+          <a:fillRef idx="3">
+            <a:schemeClr val="accent1"/>
+          </a:fillRef>
+          <a:effectRef idx="2">
+            <a:schemeClr val="accent1"/>
+          </a:effectRef>
+          <a:fontRef idx="minor">
+            <a:schemeClr val="lt1"/>
+          </a:fontRef>
+        </p:style>
+        <p:txBody>
+          <a:bodyPr rtlCol="0" anchor="ctr"/>
           <a:lstStyle/>
           <a:p>
             <a:pPr algn="ctr"/>
-            <a:r>
-              <a:rPr sz="1000" b="0" i="0">
+          </a:p>
+        </p:txBody>
+      </p:sp>
+      <p:sp>
+        <p:nvSpPr>
+          <p:cNvPr id="11" name="Rectangle 10"/>
+          <p:cNvSpPr/>
+          <p:nvPr/>
+        </p:nvSpPr>
+        <p:spPr>
+          <a:xfrm>
+            <a:off x="411480" y="2542032"/>
+            <a:ext cx="11365992" cy="23774"/>
+          </a:xfrm>
+          <a:prstGeom prst="rect">
+            <a:avLst/>
+          </a:prstGeom>
+          <a:solidFill>
+            <a:srgbClr val="2B8A6E"/>
+          </a:solidFill>
+          <a:ln>
+            <a:noFill/>
+          </a:ln>
+        </p:spPr>
+        <p:style>
+          <a:lnRef idx="1">
+            <a:schemeClr val="accent1"/>
+          </a:lnRef>
+          <a:fillRef idx="3">
+            <a:schemeClr val="accent1"/>
+          </a:fillRef>
+          <a:effectRef idx="2">
+            <a:schemeClr val="accent1"/>
+          </a:effectRef>
+          <a:fontRef idx="minor">
+            <a:schemeClr val="lt1"/>
+          </a:fontRef>
+        </p:style>
+        <p:txBody>
+          <a:bodyPr rtlCol="0" anchor="ctr"/>
+          <a:lstStyle/>
+          <a:p>
+            <a:pPr algn="ctr"/>
+          </a:p>
+        </p:txBody>
+      </p:sp>
+      <p:sp>
+        <p:nvSpPr>
+          <p:cNvPr id="12" name="TextBox 11"/>
+          <p:cNvSpPr txBox="1"/>
+          <p:nvPr/>
+        </p:nvSpPr>
+        <p:spPr>
+          <a:xfrm>
+            <a:off x="548640" y="2596896"/>
+            <a:ext cx="11155680" cy="274320"/>
+          </a:xfrm>
+          <a:prstGeom prst="rect">
+            <a:avLst/>
+          </a:prstGeom>
+          <a:noFill/>
+        </p:spPr>
+        <p:txBody>
+          <a:bodyPr wrap="square">
+            <a:spAutoFit/>
+          </a:bodyPr>
+          <a:lstStyle/>
+          <a:p>
+            <a:pPr algn="l"/>
+            <a:r>
+              <a:rPr sz="1000" b="1" i="0">
+                <a:solidFill>
+                  <a:srgbClr val="C9A84C"/>
+                </a:solidFill>
+                <a:latin typeface="Barlow Condensed"/>
+              </a:rPr>
+              <a:t>TRAP 2  ·  "What about AI taking autonomous action in a crisis?"</a:t>
+            </a:r>
+          </a:p>
+        </p:txBody>
+      </p:sp>
+      <p:sp>
+        <p:nvSpPr>
+          <p:cNvPr id="13" name="TextBox 12"/>
+          <p:cNvSpPr txBox="1"/>
+          <p:nvPr/>
+        </p:nvSpPr>
+        <p:spPr>
+          <a:xfrm>
+            <a:off x="548640" y="2907792"/>
+            <a:ext cx="11155680" cy="1188720"/>
+          </a:xfrm>
+          <a:prstGeom prst="rect">
+            <a:avLst/>
+          </a:prstGeom>
+          <a:noFill/>
+        </p:spPr>
+        <p:txBody>
+          <a:bodyPr wrap="square">
+            <a:spAutoFit/>
+          </a:bodyPr>
+          <a:lstStyle/>
+          <a:p>
+            <a:pPr algn="l"/>
+            <a:r>
+              <a:rPr sz="1000" b="0" i="1">
                 <a:solidFill>
                   <a:srgbClr val="B4BED6"/>
                 </a:solidFill>
-                <a:latin typeface="Barlow Condensed"/>
-              </a:rPr>
-              <a:t>VaughnMartin Readiness OS  ·  Investor Pitch  ·  May 2026  ·  vaughnmartin.com</a:t>
+                <a:latin typeface="Georgia"/>
+              </a:rPr>
+              <a:t>"The system stages the choice in seconds, but an executive must click authorize. No action deploys without explicit sign-off. Say this line every time you mention speed."</a:t>
+            </a:r>
+          </a:p>
+        </p:txBody>
+      </p:sp>
+      <p:sp>
+        <p:nvSpPr>
+          <p:cNvPr id="14" name="Rectangle 13"/>
+          <p:cNvSpPr/>
+          <p:nvPr/>
+        </p:nvSpPr>
+        <p:spPr>
+          <a:xfrm>
+            <a:off x="411480" y="4462272"/>
+            <a:ext cx="11365992" cy="1737360"/>
+          </a:xfrm>
+          <a:prstGeom prst="rect">
+            <a:avLst/>
+          </a:prstGeom>
+          <a:solidFill>
+            <a:srgbClr val="101842"/>
+          </a:solidFill>
+          <a:ln>
+            <a:noFill/>
+          </a:ln>
+        </p:spPr>
+        <p:style>
+          <a:lnRef idx="1">
+            <a:schemeClr val="accent1"/>
+          </a:lnRef>
+          <a:fillRef idx="3">
+            <a:schemeClr val="accent1"/>
+          </a:fillRef>
+          <a:effectRef idx="2">
+            <a:schemeClr val="accent1"/>
+          </a:effectRef>
+          <a:fontRef idx="minor">
+            <a:schemeClr val="lt1"/>
+          </a:fontRef>
+        </p:style>
+        <p:txBody>
+          <a:bodyPr rtlCol="0" anchor="ctr"/>
+          <a:lstStyle/>
+          <a:p>
+            <a:pPr algn="ctr"/>
+          </a:p>
+        </p:txBody>
+      </p:sp>
+      <p:sp>
+        <p:nvSpPr>
+          <p:cNvPr id="15" name="Rectangle 14"/>
+          <p:cNvSpPr/>
+          <p:nvPr/>
+        </p:nvSpPr>
+        <p:spPr>
+          <a:xfrm>
+            <a:off x="411480" y="4462272"/>
+            <a:ext cx="11365992" cy="23774"/>
+          </a:xfrm>
+          <a:prstGeom prst="rect">
+            <a:avLst/>
+          </a:prstGeom>
+          <a:solidFill>
+            <a:srgbClr val="B4BED6"/>
+          </a:solidFill>
+          <a:ln>
+            <a:noFill/>
+          </a:ln>
+        </p:spPr>
+        <p:style>
+          <a:lnRef idx="1">
+            <a:schemeClr val="accent1"/>
+          </a:lnRef>
+          <a:fillRef idx="3">
+            <a:schemeClr val="accent1"/>
+          </a:fillRef>
+          <a:effectRef idx="2">
+            <a:schemeClr val="accent1"/>
+          </a:effectRef>
+          <a:fontRef idx="minor">
+            <a:schemeClr val="lt1"/>
+          </a:fontRef>
+        </p:style>
+        <p:txBody>
+          <a:bodyPr rtlCol="0" anchor="ctr"/>
+          <a:lstStyle/>
+          <a:p>
+            <a:pPr algn="ctr"/>
+          </a:p>
+        </p:txBody>
+      </p:sp>
+      <p:sp>
+        <p:nvSpPr>
+          <p:cNvPr id="16" name="TextBox 15"/>
+          <p:cNvSpPr txBox="1"/>
+          <p:nvPr/>
+        </p:nvSpPr>
+        <p:spPr>
+          <a:xfrm>
+            <a:off x="548640" y="4517136"/>
+            <a:ext cx="11155680" cy="274320"/>
+          </a:xfrm>
+          <a:prstGeom prst="rect">
+            <a:avLst/>
+          </a:prstGeom>
+          <a:noFill/>
+        </p:spPr>
+        <p:txBody>
+          <a:bodyPr wrap="square">
+            <a:spAutoFit/>
+          </a:bodyPr>
+          <a:lstStyle/>
+          <a:p>
+            <a:pPr algn="l"/>
+            <a:r>
+              <a:rPr sz="1000" b="1" i="0">
+                <a:solidFill>
+                  <a:srgbClr val="C9A84C"/>
+                </a:solidFill>
+                <a:latin typeface="Barlow Condensed"/>
+              </a:rPr>
+              <a:t>TRAP 3  ·  "How long does it take to build 170 protocols for a new client?"</a:t>
+            </a:r>
+          </a:p>
+        </p:txBody>
+      </p:sp>
+      <p:sp>
+        <p:nvSpPr>
+          <p:cNvPr id="17" name="TextBox 16"/>
+          <p:cNvSpPr txBox="1"/>
+          <p:nvPr/>
+        </p:nvSpPr>
+        <p:spPr>
+          <a:xfrm>
+            <a:off x="548640" y="4828032"/>
+            <a:ext cx="11155680" cy="1188720"/>
+          </a:xfrm>
+          <a:prstGeom prst="rect">
+            <a:avLst/>
+          </a:prstGeom>
+          <a:noFill/>
+        </p:spPr>
+        <p:txBody>
+          <a:bodyPr wrap="square">
+            <a:spAutoFit/>
+          </a:bodyPr>
+          <a:lstStyle/>
+          <a:p>
+            <a:pPr algn="l"/>
+            <a:r>
+              <a:rPr sz="1000" b="0" i="1">
+                <a:solidFill>
+                  <a:srgbClr val="B4BED6"/>
+                </a:solidFill>
+                <a:latin typeface="Georgia"/>
+              </a:rPr>
+              <a:t>"They don't build from scratch. VaughnMartin ships with 170 out-of-the-box protocols for the most common enterprise threats. Onboarding is a configuration process — not a consulting project. 90 days to live."</a:t>
             </a:r>
           </a:p>
         </p:txBody>
@@ -4573,7 +6127,7 @@
         <p:spPr>
           <a:xfrm>
             <a:off x="411480" y="475488"/>
-            <a:ext cx="5669280" cy="582168"/>
+            <a:ext cx="5669280" cy="533400"/>
           </a:xfrm>
           <a:prstGeom prst="rect">
             <a:avLst/>
@@ -4588,13 +6142,13 @@
           <a:p>
             <a:pPr algn="l"/>
             <a:r>
-              <a:rPr sz="3300" b="1" i="0">
+              <a:rPr sz="3000" b="1" i="0">
                 <a:solidFill>
                   <a:srgbClr val="FFFFFF"/>
                 </a:solidFill>
                 <a:latin typeface="Barlow Condensed"/>
               </a:rPr>
-              <a:t>THE TRIGGER FIRES.</a:t>
+              <a:t>THE 30-DAY MOBILIZATION</a:t>
             </a:r>
           </a:p>
         </p:txBody>
@@ -4607,8 +6161,8 @@
         </p:nvSpPr>
         <p:spPr>
           <a:xfrm>
-            <a:off x="411480" y="1011936"/>
-            <a:ext cx="5669280" cy="582168"/>
+            <a:off x="411480" y="963167"/>
+            <a:ext cx="5669280" cy="533400"/>
           </a:xfrm>
           <a:prstGeom prst="rect">
             <a:avLst/>
@@ -4623,13 +6177,13 @@
           <a:p>
             <a:pPr algn="l"/>
             <a:r>
-              <a:rPr sz="3300" b="1" i="0">
+              <a:rPr sz="3000" b="1" i="0">
                 <a:solidFill>
                   <a:srgbClr val="C9A84C"/>
                 </a:solidFill>
                 <a:latin typeface="Barlow Condensed"/>
               </a:rPr>
-              <a:t>MOBILIZATION TAKES 30 DAYS.</a:t>
+              <a:t>BLACK HOLE.</a:t>
             </a:r>
           </a:p>
         </p:txBody>
@@ -4642,7 +6196,7 @@
         </p:nvSpPr>
         <p:spPr>
           <a:xfrm>
-            <a:off x="411480" y="1901952"/>
+            <a:off x="411480" y="1792224"/>
             <a:ext cx="5577840" cy="10972"/>
           </a:xfrm>
           <a:prstGeom prst="rect">
@@ -4679,13 +6233,432 @@
       </p:sp>
       <p:sp>
         <p:nvSpPr>
-          <p:cNvPr id="11" name="TextBox 10"/>
-          <p:cNvSpPr txBox="1"/>
-          <p:nvPr/>
-        </p:nvSpPr>
-        <p:spPr>
-          <a:xfrm>
-            <a:off x="411480" y="2029968"/>
+          <p:cNvPr id="11" name="Rectangle 10"/>
+          <p:cNvSpPr/>
+          <p:nvPr/>
+        </p:nvSpPr>
+        <p:spPr>
+          <a:xfrm>
+            <a:off x="411480" y="1920240"/>
+            <a:ext cx="2633472" cy="1444752"/>
+          </a:xfrm>
+          <a:prstGeom prst="rect">
+            <a:avLst/>
+          </a:prstGeom>
+          <a:solidFill>
+            <a:srgbClr val="1F6652"/>
+          </a:solidFill>
+          <a:ln>
+            <a:noFill/>
+          </a:ln>
+        </p:spPr>
+        <p:style>
+          <a:lnRef idx="1">
+            <a:schemeClr val="accent1"/>
+          </a:lnRef>
+          <a:fillRef idx="3">
+            <a:schemeClr val="accent1"/>
+          </a:fillRef>
+          <a:effectRef idx="2">
+            <a:schemeClr val="accent1"/>
+          </a:effectRef>
+          <a:fontRef idx="minor">
+            <a:schemeClr val="lt1"/>
+          </a:fontRef>
+        </p:style>
+        <p:txBody>
+          <a:bodyPr rtlCol="0" anchor="ctr"/>
+          <a:lstStyle/>
+          <a:p>
+            <a:pPr algn="ctr"/>
+          </a:p>
+        </p:txBody>
+      </p:sp>
+      <p:sp>
+        <p:nvSpPr>
+          <p:cNvPr id="12" name="Rectangle 11"/>
+          <p:cNvSpPr/>
+          <p:nvPr/>
+        </p:nvSpPr>
+        <p:spPr>
+          <a:xfrm>
+            <a:off x="411480" y="1920240"/>
+            <a:ext cx="2633472" cy="29260"/>
+          </a:xfrm>
+          <a:prstGeom prst="rect">
+            <a:avLst/>
+          </a:prstGeom>
+          <a:solidFill>
+            <a:srgbClr val="2B8A6E"/>
+          </a:solidFill>
+          <a:ln>
+            <a:noFill/>
+          </a:ln>
+        </p:spPr>
+        <p:style>
+          <a:lnRef idx="1">
+            <a:schemeClr val="accent1"/>
+          </a:lnRef>
+          <a:fillRef idx="3">
+            <a:schemeClr val="accent1"/>
+          </a:fillRef>
+          <a:effectRef idx="2">
+            <a:schemeClr val="accent1"/>
+          </a:effectRef>
+          <a:fontRef idx="minor">
+            <a:schemeClr val="lt1"/>
+          </a:fontRef>
+        </p:style>
+        <p:txBody>
+          <a:bodyPr rtlCol="0" anchor="ctr"/>
+          <a:lstStyle/>
+          <a:p>
+            <a:pPr algn="ctr"/>
+          </a:p>
+        </p:txBody>
+      </p:sp>
+      <p:sp>
+        <p:nvSpPr>
+          <p:cNvPr id="13" name="TextBox 12"/>
+          <p:cNvSpPr txBox="1"/>
+          <p:nvPr/>
+        </p:nvSpPr>
+        <p:spPr>
+          <a:xfrm>
+            <a:off x="530352" y="1965960"/>
+            <a:ext cx="2395728" cy="201168"/>
+          </a:xfrm>
+          <a:prstGeom prst="rect">
+            <a:avLst/>
+          </a:prstGeom>
+          <a:noFill/>
+        </p:spPr>
+        <p:txBody>
+          <a:bodyPr wrap="square">
+            <a:spAutoFit/>
+          </a:bodyPr>
+          <a:lstStyle/>
+          <a:p>
+            <a:pPr algn="l"/>
+            <a:r>
+              <a:rPr sz="800" b="1" i="0">
+                <a:solidFill>
+                  <a:srgbClr val="2B8A6E"/>
+                </a:solidFill>
+                <a:latin typeface="Barlow Condensed"/>
+              </a:rPr>
+              <a:t>DETECTION</a:t>
+            </a:r>
+          </a:p>
+        </p:txBody>
+      </p:sp>
+      <p:sp>
+        <p:nvSpPr>
+          <p:cNvPr id="14" name="TextBox 13"/>
+          <p:cNvSpPr txBox="1"/>
+          <p:nvPr/>
+        </p:nvSpPr>
+        <p:spPr>
+          <a:xfrm>
+            <a:off x="530352" y="2176272"/>
+            <a:ext cx="2395728" cy="640080"/>
+          </a:xfrm>
+          <a:prstGeom prst="rect">
+            <a:avLst/>
+          </a:prstGeom>
+          <a:noFill/>
+        </p:spPr>
+        <p:txBody>
+          <a:bodyPr wrap="square">
+            <a:spAutoFit/>
+          </a:bodyPr>
+          <a:lstStyle/>
+          <a:p>
+            <a:pPr algn="l"/>
+            <a:r>
+              <a:rPr sz="3600" b="1" i="0">
+                <a:solidFill>
+                  <a:srgbClr val="FFFFFF"/>
+                </a:solidFill>
+                <a:latin typeface="Barlow Condensed"/>
+              </a:rPr>
+              <a:t>&lt; 1 SEC</a:t>
+            </a:r>
+          </a:p>
+        </p:txBody>
+      </p:sp>
+      <p:sp>
+        <p:nvSpPr>
+          <p:cNvPr id="15" name="TextBox 14"/>
+          <p:cNvSpPr txBox="1"/>
+          <p:nvPr/>
+        </p:nvSpPr>
+        <p:spPr>
+          <a:xfrm>
+            <a:off x="530352" y="2816352"/>
+            <a:ext cx="2395728" cy="457200"/>
+          </a:xfrm>
+          <a:prstGeom prst="rect">
+            <a:avLst/>
+          </a:prstGeom>
+          <a:noFill/>
+        </p:spPr>
+        <p:txBody>
+          <a:bodyPr wrap="square">
+            <a:spAutoFit/>
+          </a:bodyPr>
+          <a:lstStyle/>
+          <a:p>
+            <a:pPr algn="l"/>
+            <a:r>
+              <a:rPr sz="850" b="0" i="0">
+                <a:solidFill>
+                  <a:srgbClr val="CCFFEE"/>
+                </a:solidFill>
+                <a:latin typeface="Barlow Condensed"/>
+              </a:rPr>
+              <a:t>Signal identified.
+Pattern matched. Score computed.</a:t>
+            </a:r>
+          </a:p>
+        </p:txBody>
+      </p:sp>
+      <p:sp>
+        <p:nvSpPr>
+          <p:cNvPr id="16" name="TextBox 15"/>
+          <p:cNvSpPr txBox="1"/>
+          <p:nvPr/>
+        </p:nvSpPr>
+        <p:spPr>
+          <a:xfrm>
+            <a:off x="3108960" y="2322576"/>
+            <a:ext cx="384048" cy="530352"/>
+          </a:xfrm>
+          <a:prstGeom prst="rect">
+            <a:avLst/>
+          </a:prstGeom>
+          <a:noFill/>
+        </p:spPr>
+        <p:txBody>
+          <a:bodyPr wrap="square">
+            <a:spAutoFit/>
+          </a:bodyPr>
+          <a:lstStyle/>
+          <a:p>
+            <a:pPr algn="ctr"/>
+            <a:r>
+              <a:rPr sz="2600" b="1" i="0">
+                <a:solidFill>
+                  <a:srgbClr val="C9A84C"/>
+                </a:solidFill>
+                <a:latin typeface="Barlow Condensed"/>
+              </a:rPr>
+              <a:t>→</a:t>
+            </a:r>
+          </a:p>
+        </p:txBody>
+      </p:sp>
+      <p:sp>
+        <p:nvSpPr>
+          <p:cNvPr id="17" name="Rectangle 16"/>
+          <p:cNvSpPr/>
+          <p:nvPr/>
+        </p:nvSpPr>
+        <p:spPr>
+          <a:xfrm>
+            <a:off x="3529584" y="1920240"/>
+            <a:ext cx="2450592" cy="1444752"/>
+          </a:xfrm>
+          <a:prstGeom prst="rect">
+            <a:avLst/>
+          </a:prstGeom>
+          <a:solidFill>
+            <a:srgbClr val="3A1010"/>
+          </a:solidFill>
+          <a:ln>
+            <a:noFill/>
+          </a:ln>
+        </p:spPr>
+        <p:style>
+          <a:lnRef idx="1">
+            <a:schemeClr val="accent1"/>
+          </a:lnRef>
+          <a:fillRef idx="3">
+            <a:schemeClr val="accent1"/>
+          </a:fillRef>
+          <a:effectRef idx="2">
+            <a:schemeClr val="accent1"/>
+          </a:effectRef>
+          <a:fontRef idx="minor">
+            <a:schemeClr val="lt1"/>
+          </a:fontRef>
+        </p:style>
+        <p:txBody>
+          <a:bodyPr rtlCol="0" anchor="ctr"/>
+          <a:lstStyle/>
+          <a:p>
+            <a:pPr algn="ctr"/>
+          </a:p>
+        </p:txBody>
+      </p:sp>
+      <p:sp>
+        <p:nvSpPr>
+          <p:cNvPr id="18" name="Rectangle 17"/>
+          <p:cNvSpPr/>
+          <p:nvPr/>
+        </p:nvSpPr>
+        <p:spPr>
+          <a:xfrm>
+            <a:off x="3529584" y="1920240"/>
+            <a:ext cx="2450592" cy="29260"/>
+          </a:xfrm>
+          <a:prstGeom prst="rect">
+            <a:avLst/>
+          </a:prstGeom>
+          <a:solidFill>
+            <a:srgbClr val="992222"/>
+          </a:solidFill>
+          <a:ln>
+            <a:noFill/>
+          </a:ln>
+        </p:spPr>
+        <p:style>
+          <a:lnRef idx="1">
+            <a:schemeClr val="accent1"/>
+          </a:lnRef>
+          <a:fillRef idx="3">
+            <a:schemeClr val="accent1"/>
+          </a:fillRef>
+          <a:effectRef idx="2">
+            <a:schemeClr val="accent1"/>
+          </a:effectRef>
+          <a:fontRef idx="minor">
+            <a:schemeClr val="lt1"/>
+          </a:fontRef>
+        </p:style>
+        <p:txBody>
+          <a:bodyPr rtlCol="0" anchor="ctr"/>
+          <a:lstStyle/>
+          <a:p>
+            <a:pPr algn="ctr"/>
+          </a:p>
+        </p:txBody>
+      </p:sp>
+      <p:sp>
+        <p:nvSpPr>
+          <p:cNvPr id="19" name="TextBox 18"/>
+          <p:cNvSpPr txBox="1"/>
+          <p:nvPr/>
+        </p:nvSpPr>
+        <p:spPr>
+          <a:xfrm>
+            <a:off x="3639312" y="1965960"/>
+            <a:ext cx="2231136" cy="201168"/>
+          </a:xfrm>
+          <a:prstGeom prst="rect">
+            <a:avLst/>
+          </a:prstGeom>
+          <a:noFill/>
+        </p:spPr>
+        <p:txBody>
+          <a:bodyPr wrap="square">
+            <a:spAutoFit/>
+          </a:bodyPr>
+          <a:lstStyle/>
+          <a:p>
+            <a:pPr algn="l"/>
+            <a:r>
+              <a:rPr sz="800" b="1" i="0">
+                <a:solidFill>
+                  <a:srgbClr val="FF6666"/>
+                </a:solidFill>
+                <a:latin typeface="Barlow Condensed"/>
+              </a:rPr>
+              <a:t>MOBILIZATION</a:t>
+            </a:r>
+          </a:p>
+        </p:txBody>
+      </p:sp>
+      <p:sp>
+        <p:nvSpPr>
+          <p:cNvPr id="20" name="TextBox 19"/>
+          <p:cNvSpPr txBox="1"/>
+          <p:nvPr/>
+        </p:nvSpPr>
+        <p:spPr>
+          <a:xfrm>
+            <a:off x="3639312" y="2176272"/>
+            <a:ext cx="2231136" cy="640080"/>
+          </a:xfrm>
+          <a:prstGeom prst="rect">
+            <a:avLst/>
+          </a:prstGeom>
+          <a:noFill/>
+        </p:spPr>
+        <p:txBody>
+          <a:bodyPr wrap="square">
+            <a:spAutoFit/>
+          </a:bodyPr>
+          <a:lstStyle/>
+          <a:p>
+            <a:pPr algn="l"/>
+            <a:r>
+              <a:rPr sz="3600" b="1" i="0">
+                <a:solidFill>
+                  <a:srgbClr val="FF8888"/>
+                </a:solidFill>
+                <a:latin typeface="Barlow Condensed"/>
+              </a:rPr>
+              <a:t>30 DAYS</a:t>
+            </a:r>
+          </a:p>
+        </p:txBody>
+      </p:sp>
+      <p:sp>
+        <p:nvSpPr>
+          <p:cNvPr id="21" name="TextBox 20"/>
+          <p:cNvSpPr txBox="1"/>
+          <p:nvPr/>
+        </p:nvSpPr>
+        <p:spPr>
+          <a:xfrm>
+            <a:off x="3639312" y="2816352"/>
+            <a:ext cx="2231136" cy="457200"/>
+          </a:xfrm>
+          <a:prstGeom prst="rect">
+            <a:avLst/>
+          </a:prstGeom>
+          <a:noFill/>
+        </p:spPr>
+        <p:txBody>
+          <a:bodyPr wrap="square">
+            <a:spAutoFit/>
+          </a:bodyPr>
+          <a:lstStyle/>
+          <a:p>
+            <a:pPr algn="l"/>
+            <a:r>
+              <a:rPr sz="850" b="0" i="0">
+                <a:solidFill>
+                  <a:srgbClr val="FFCCCC"/>
+                </a:solidFill>
+                <a:latin typeface="Barlow Condensed"/>
+              </a:rPr>
+              <a:t>Who decides? Who calls who?
+Who owns the response?</a:t>
+            </a:r>
+          </a:p>
+        </p:txBody>
+      </p:sp>
+      <p:sp>
+        <p:nvSpPr>
+          <p:cNvPr id="22" name="TextBox 21"/>
+          <p:cNvSpPr txBox="1"/>
+          <p:nvPr/>
+        </p:nvSpPr>
+        <p:spPr>
+          <a:xfrm>
+            <a:off x="411480" y="3529584"/>
             <a:ext cx="5669280" cy="365760"/>
           </a:xfrm>
           <a:prstGeom prst="rect">
@@ -4700,26 +6673,26 @@
           <a:lstStyle/>
           <a:p>
             <a:r>
-              <a:rPr sz="1150">
+              <a:rPr sz="1100">
                 <a:solidFill>
                   <a:srgbClr val="FFFFFF"/>
                 </a:solidFill>
                 <a:latin typeface="Barlow Condensed"/>
               </a:rPr>
-              <a:t>▶  Startup to Fortune 500 enterprises detect strategic triggers quickly</a:t>
-            </a:r>
-          </a:p>
-        </p:txBody>
-      </p:sp>
-      <p:sp>
-        <p:nvSpPr>
-          <p:cNvPr id="12" name="TextBox 11"/>
-          <p:cNvSpPr txBox="1"/>
-          <p:nvPr/>
-        </p:nvSpPr>
-        <p:spPr>
-          <a:xfrm>
-            <a:off x="411480" y="2382012"/>
+              <a:t>▶  Startup to Fortune 500: same trigger, identical 30-day delay</a:t>
+            </a:r>
+          </a:p>
+        </p:txBody>
+      </p:sp>
+      <p:sp>
+        <p:nvSpPr>
+          <p:cNvPr id="23" name="TextBox 22"/>
+          <p:cNvSpPr txBox="1"/>
+          <p:nvPr/>
+        </p:nvSpPr>
+        <p:spPr>
+          <a:xfrm>
+            <a:off x="411480" y="3881628"/>
             <a:ext cx="5669280" cy="365760"/>
           </a:xfrm>
           <a:prstGeom prst="rect">
@@ -4734,26 +6707,26 @@
           <a:lstStyle/>
           <a:p>
             <a:r>
-              <a:rPr sz="1150">
+              <a:rPr sz="1100">
                 <a:solidFill>
                   <a:srgbClr val="FFFFFF"/>
                 </a:solidFill>
                 <a:latin typeface="Barlow Condensed"/>
               </a:rPr>
-              <a:t>▶  Most spend 30 days aligning ownership, authority, and sequence before execution begins</a:t>
-            </a:r>
-          </a:p>
-        </p:txBody>
-      </p:sp>
-      <p:sp>
-        <p:nvSpPr>
-          <p:cNvPr id="13" name="TextBox 12"/>
-          <p:cNvSpPr txBox="1"/>
-          <p:nvPr/>
-        </p:nvSpPr>
-        <p:spPr>
-          <a:xfrm>
-            <a:off x="411480" y="2734056"/>
+              <a:t>▶  The delay is not execution — it is mobilization architecture</a:t>
+            </a:r>
+          </a:p>
+        </p:txBody>
+      </p:sp>
+      <p:sp>
+        <p:nvSpPr>
+          <p:cNvPr id="24" name="TextBox 23"/>
+          <p:cNvSpPr txBox="1"/>
+          <p:nvPr/>
+        </p:nvSpPr>
+        <p:spPr>
+          <a:xfrm>
+            <a:off x="411480" y="4233672"/>
             <a:ext cx="5669280" cy="365760"/>
           </a:xfrm>
           <a:prstGeom prst="rect">
@@ -4768,61 +6741,27 @@
           <a:lstStyle/>
           <a:p>
             <a:r>
-              <a:rPr sz="1150">
+              <a:rPr sz="1100">
                 <a:solidFill>
                   <a:srgbClr val="FFFFFF"/>
                 </a:solidFill>
                 <a:latin typeface="Barlow Condensed"/>
               </a:rPr>
-              <a:t>▶  The delay is not execution — it is mobilization</a:t>
-            </a:r>
-          </a:p>
-        </p:txBody>
-      </p:sp>
-      <p:sp>
-        <p:nvSpPr>
-          <p:cNvPr id="14" name="TextBox 13"/>
-          <p:cNvSpPr txBox="1"/>
-          <p:nvPr/>
-        </p:nvSpPr>
-        <p:spPr>
-          <a:xfrm>
-            <a:off x="411480" y="3086100"/>
-            <a:ext cx="5669280" cy="365760"/>
-          </a:xfrm>
-          <a:prstGeom prst="rect">
-            <a:avLst/>
-          </a:prstGeom>
-          <a:noFill/>
-        </p:spPr>
-        <p:txBody>
-          <a:bodyPr wrap="square">
-            <a:spAutoFit/>
-          </a:bodyPr>
-          <a:lstStyle/>
-          <a:p>
-            <a:r>
-              <a:rPr sz="1150">
-                <a:solidFill>
-                  <a:srgbClr val="FFFFFF"/>
-                </a:solidFill>
-                <a:latin typeface="Barlow Condensed"/>
-              </a:rPr>
-              <a:t>▶  Every week of delay is a window the competitor, regulator, or activist owns</a:t>
-            </a:r>
-          </a:p>
-        </p:txBody>
-      </p:sp>
-      <p:sp>
-        <p:nvSpPr>
-          <p:cNvPr id="15" name="Rectangle 14"/>
+              <a:t>▶  Every day of drift is a window activists, regulators, or competitors own</a:t>
+            </a:r>
+          </a:p>
+        </p:txBody>
+      </p:sp>
+      <p:sp>
+        <p:nvSpPr>
+          <p:cNvPr id="25" name="Rectangle 24"/>
           <p:cNvSpPr/>
           <p:nvPr/>
         </p:nvSpPr>
         <p:spPr>
           <a:xfrm>
-            <a:off x="411480" y="4114800"/>
-            <a:ext cx="2560320" cy="841248"/>
+            <a:off x="411480" y="4663440"/>
+            <a:ext cx="5596128" cy="566928"/>
           </a:xfrm>
           <a:prstGeom prst="rect">
             <a:avLst/>
@@ -4858,14 +6797,14 @@
       </p:sp>
       <p:sp>
         <p:nvSpPr>
-          <p:cNvPr id="16" name="Rectangle 15"/>
+          <p:cNvPr id="26" name="Rectangle 25"/>
           <p:cNvSpPr/>
           <p:nvPr/>
         </p:nvSpPr>
         <p:spPr>
           <a:xfrm>
-            <a:off x="411480" y="4114800"/>
-            <a:ext cx="2560320" cy="25603"/>
+            <a:off x="411480" y="4663440"/>
+            <a:ext cx="5596128" cy="21945"/>
           </a:xfrm>
           <a:prstGeom prst="rect">
             <a:avLst/>
@@ -4901,14 +6840,14 @@
       </p:sp>
       <p:sp>
         <p:nvSpPr>
-          <p:cNvPr id="17" name="TextBox 16"/>
-          <p:cNvSpPr txBox="1"/>
-          <p:nvPr/>
-        </p:nvSpPr>
-        <p:spPr>
-          <a:xfrm>
-            <a:off x="539496" y="4151376"/>
-            <a:ext cx="2377439" cy="475488"/>
+          <p:cNvPr id="27" name="TextBox 26"/>
+          <p:cNvSpPr txBox="1"/>
+          <p:nvPr/>
+        </p:nvSpPr>
+        <p:spPr>
+          <a:xfrm>
+            <a:off x="548640" y="4718304"/>
+            <a:ext cx="5449824" cy="457200"/>
           </a:xfrm>
           <a:prstGeom prst="rect">
             <a:avLst/>
@@ -4923,133 +6862,20 @@
           <a:p>
             <a:pPr algn="l"/>
             <a:r>
-              <a:rPr sz="3400" b="1" i="0">
-                <a:solidFill>
-                  <a:srgbClr val="C9A84C"/>
-                </a:solidFill>
-                <a:latin typeface="Barlow Condensed"/>
-              </a:rPr>
-              <a:t>3,600×</a:t>
-            </a:r>
-          </a:p>
-        </p:txBody>
-      </p:sp>
-      <p:sp>
-        <p:nvSpPr>
-          <p:cNvPr id="18" name="TextBox 17"/>
-          <p:cNvSpPr txBox="1"/>
-          <p:nvPr/>
-        </p:nvSpPr>
-        <p:spPr>
-          <a:xfrm>
-            <a:off x="539496" y="4617720"/>
-            <a:ext cx="2377439" cy="256032"/>
-          </a:xfrm>
-          <a:prstGeom prst="rect">
-            <a:avLst/>
-          </a:prstGeom>
-          <a:noFill/>
-        </p:spPr>
-        <p:txBody>
-          <a:bodyPr wrap="square">
-            <a:spAutoFit/>
-          </a:bodyPr>
-          <a:lstStyle/>
-          <a:p>
-            <a:pPr algn="l"/>
-            <a:r>
-              <a:rPr sz="850" b="0" i="0">
+              <a:rPr sz="900" b="0" i="0">
                 <a:solidFill>
                   <a:srgbClr val="B4BED6"/>
                 </a:solidFill>
                 <a:latin typeface="Barlow Condensed"/>
               </a:rPr>
-              <a:t>Execution Head Start  ·  30 days → 12 minutes</a:t>
-            </a:r>
-          </a:p>
-        </p:txBody>
-      </p:sp>
-      <p:sp>
-        <p:nvSpPr>
-          <p:cNvPr id="19" name="Rectangle 18"/>
-          <p:cNvSpPr/>
-          <p:nvPr/>
-        </p:nvSpPr>
-        <p:spPr>
-          <a:xfrm>
-            <a:off x="411480" y="5065776"/>
-            <a:ext cx="5596128" cy="530352"/>
-          </a:xfrm>
-          <a:prstGeom prst="rect">
-            <a:avLst/>
-          </a:prstGeom>
-          <a:solidFill>
-            <a:srgbClr val="101842"/>
-          </a:solidFill>
-          <a:ln>
-            <a:noFill/>
-          </a:ln>
-        </p:spPr>
-        <p:style>
-          <a:lnRef idx="1">
-            <a:schemeClr val="accent1"/>
-          </a:lnRef>
-          <a:fillRef idx="3">
-            <a:schemeClr val="accent1"/>
-          </a:fillRef>
-          <a:effectRef idx="2">
-            <a:schemeClr val="accent1"/>
-          </a:effectRef>
-          <a:fontRef idx="minor">
-            <a:schemeClr val="lt1"/>
-          </a:fontRef>
-        </p:style>
-        <p:txBody>
-          <a:bodyPr rtlCol="0" anchor="ctr"/>
-          <a:lstStyle/>
-          <a:p>
-            <a:pPr algn="ctr"/>
-          </a:p>
-        </p:txBody>
-      </p:sp>
-      <p:sp>
-        <p:nvSpPr>
-          <p:cNvPr id="20" name="TextBox 19"/>
-          <p:cNvSpPr txBox="1"/>
-          <p:nvPr/>
-        </p:nvSpPr>
-        <p:spPr>
-          <a:xfrm>
-            <a:off x="548640" y="5120640"/>
-            <a:ext cx="5449824" cy="457200"/>
-          </a:xfrm>
-          <a:prstGeom prst="rect">
-            <a:avLst/>
-          </a:prstGeom>
-          <a:noFill/>
-        </p:spPr>
-        <p:txBody>
-          <a:bodyPr wrap="square">
-            <a:spAutoFit/>
-          </a:bodyPr>
-          <a:lstStyle/>
-          <a:p>
-            <a:pPr algn="l"/>
-            <a:r>
-              <a:rPr sz="850" b="0" i="0">
-                <a:solidFill>
-                  <a:srgbClr val="B4BED6"/>
-                </a:solidFill>
-                <a:latin typeface="Barlow Condensed"/>
-              </a:rPr>
-              <a:t>$4.4T at risk annually from enterprise coordination failures. Preparation Infrastructure is the unclaimed software layer above every existing AI stack.</a:t>
-            </a:r>
-          </a:p>
-        </p:txBody>
-      </p:sp>
-      <p:sp>
-        <p:nvSpPr>
-          <p:cNvPr id="21" name="Rectangle 20"/>
+              <a:t>$4.4T AT RISK ANNUALLY  ·  Enterprise coordination failures  ·  Preparation Infrastructure is the unclaimed layer above every AI stack.</a:t>
+            </a:r>
+          </a:p>
+        </p:txBody>
+      </p:sp>
+      <p:sp>
+        <p:nvSpPr>
+          <p:cNvPr id="28" name="Rectangle 27"/>
           <p:cNvSpPr/>
           <p:nvPr/>
         </p:nvSpPr>
@@ -5092,7 +6918,7 @@
       </p:sp>
       <p:sp>
         <p:nvSpPr>
-          <p:cNvPr id="22" name="TextBox 21"/>
+          <p:cNvPr id="29" name="TextBox 28"/>
           <p:cNvSpPr txBox="1"/>
           <p:nvPr/>
         </p:nvSpPr>
@@ -5120,14 +6946,14 @@
                 </a:solidFill>
                 <a:latin typeface="Georgia"/>
               </a:rPr>
-              <a:t>"Most organizations do not have a strategy problem. They have a mobilization problem. When a trigger fires, the first weeks are spent figuring out who decides."</a:t>
-            </a:r>
-          </a:p>
-        </p:txBody>
-      </p:sp>
-      <p:sp>
-        <p:nvSpPr>
-          <p:cNvPr id="23" name="Rectangle 22"/>
+              <a:t>"The market thinks companies have a strategy problem. They don't. They have an architecture problem. That 30-day delay is an existential window — and competitors completely own it."</a:t>
+            </a:r>
+          </a:p>
+        </p:txBody>
+      </p:sp>
+      <p:sp>
+        <p:nvSpPr>
+          <p:cNvPr id="30" name="Rectangle 29"/>
           <p:cNvSpPr/>
           <p:nvPr/>
         </p:nvSpPr>
@@ -5170,7 +6996,7 @@
       </p:sp>
       <p:sp>
         <p:nvSpPr>
-          <p:cNvPr id="24" name="Rectangle 23"/>
+          <p:cNvPr id="31" name="Rectangle 30"/>
           <p:cNvSpPr/>
           <p:nvPr/>
         </p:nvSpPr>
@@ -5213,7 +7039,7 @@
       </p:sp>
       <p:pic>
         <p:nvPicPr>
-          <p:cNvPr id="25" name="Picture 24" descr="wow_command_tower.jpg"/>
+          <p:cNvPr id="32" name="Picture 31" descr="wow_command_tower.jpg"/>
           <p:cNvPicPr>
             <a:picLocks noChangeAspect="1"/>
           </p:cNvPicPr>
@@ -5237,7 +7063,7 @@
       </p:pic>
       <p:sp>
         <p:nvSpPr>
-          <p:cNvPr id="26" name="Rectangle 25"/>
+          <p:cNvPr id="33" name="Rectangle 32"/>
           <p:cNvSpPr/>
           <p:nvPr/>
         </p:nvSpPr>
@@ -5539,7 +7365,7 @@
         <p:spPr>
           <a:xfrm>
             <a:off x="411480" y="475488"/>
-            <a:ext cx="11338560" cy="663448"/>
+            <a:ext cx="11338560" cy="533400"/>
           </a:xfrm>
           <a:prstGeom prst="rect">
             <a:avLst/>
@@ -5554,26 +7380,61 @@
           <a:p>
             <a:pPr algn="l"/>
             <a:r>
-              <a:rPr sz="3800" b="1" i="0">
+              <a:rPr sz="3000" b="1" i="0">
+                <a:solidFill>
+                  <a:srgbClr val="C9A84C"/>
+                </a:solidFill>
+                <a:latin typeface="Barlow Condensed"/>
+              </a:rPr>
+              <a:t>THE ONLY TEAM ALIVE</a:t>
+            </a:r>
+          </a:p>
+        </p:txBody>
+      </p:sp>
+      <p:sp>
+        <p:nvSpPr>
+          <p:cNvPr id="9" name="TextBox 8"/>
+          <p:cNvSpPr txBox="1"/>
+          <p:nvPr/>
+        </p:nvSpPr>
+        <p:spPr>
+          <a:xfrm>
+            <a:off x="411480" y="963167"/>
+            <a:ext cx="11338560" cy="533400"/>
+          </a:xfrm>
+          <a:prstGeom prst="rect">
+            <a:avLst/>
+          </a:prstGeom>
+          <a:noFill/>
+        </p:spPr>
+        <p:txBody>
+          <a:bodyPr wrap="square">
+            <a:spAutoFit/>
+          </a:bodyPr>
+          <a:lstStyle/>
+          <a:p>
+            <a:pPr algn="l"/>
+            <a:r>
+              <a:rPr sz="3000" b="1" i="0">
                 <a:solidFill>
                   <a:srgbClr val="FFFFFF"/>
                 </a:solidFill>
                 <a:latin typeface="Barlow Condensed"/>
               </a:rPr>
-              <a:t>BUILT FROM BOTH WORLDS.</a:t>
-            </a:r>
-          </a:p>
-        </p:txBody>
-      </p:sp>
-      <p:sp>
-        <p:nvSpPr>
-          <p:cNvPr id="9" name="Rectangle 8"/>
+              <a:t>THAT COULD BUILD THIS.</a:t>
+            </a:r>
+          </a:p>
+        </p:txBody>
+      </p:sp>
+      <p:sp>
+        <p:nvSpPr>
+          <p:cNvPr id="10" name="Rectangle 9"/>
           <p:cNvSpPr/>
           <p:nvPr/>
         </p:nvSpPr>
         <p:spPr>
           <a:xfrm>
-            <a:off x="411480" y="1554480"/>
+            <a:off x="411480" y="1719072"/>
             <a:ext cx="11155680" cy="10972"/>
           </a:xfrm>
           <a:prstGeom prst="rect">
@@ -5610,13 +7471,13 @@
       </p:sp>
       <p:sp>
         <p:nvSpPr>
-          <p:cNvPr id="10" name="Rectangle 9"/>
+          <p:cNvPr id="11" name="Rectangle 10"/>
           <p:cNvSpPr/>
           <p:nvPr/>
         </p:nvSpPr>
         <p:spPr>
           <a:xfrm>
-            <a:off x="411480" y="1719072"/>
+            <a:off x="411480" y="1847088"/>
             <a:ext cx="5285232" cy="237744"/>
           </a:xfrm>
           <a:prstGeom prst="rect">
@@ -5653,13 +7514,13 @@
       </p:sp>
       <p:sp>
         <p:nvSpPr>
-          <p:cNvPr id="11" name="TextBox 10"/>
-          <p:cNvSpPr txBox="1"/>
-          <p:nvPr/>
-        </p:nvSpPr>
-        <p:spPr>
-          <a:xfrm>
-            <a:off x="521208" y="1737360"/>
+          <p:cNvPr id="12" name="TextBox 11"/>
+          <p:cNvSpPr txBox="1"/>
+          <p:nvPr/>
+        </p:nvSpPr>
+        <p:spPr>
+          <a:xfrm>
+            <a:off x="521208" y="1865376"/>
             <a:ext cx="5102352" cy="201168"/>
           </a:xfrm>
           <a:prstGeom prst="rect">
@@ -5688,13 +7549,13 @@
       </p:sp>
       <p:sp>
         <p:nvSpPr>
-          <p:cNvPr id="12" name="TextBox 11"/>
-          <p:cNvSpPr txBox="1"/>
-          <p:nvPr/>
-        </p:nvSpPr>
-        <p:spPr>
-          <a:xfrm>
-            <a:off x="521208" y="2048256"/>
+          <p:cNvPr id="13" name="TextBox 12"/>
+          <p:cNvSpPr txBox="1"/>
+          <p:nvPr/>
+        </p:nvSpPr>
+        <p:spPr>
+          <a:xfrm>
+            <a:off x="521208" y="2176272"/>
             <a:ext cx="5102352" cy="329184"/>
           </a:xfrm>
           <a:prstGeom prst="rect">
@@ -5723,13 +7584,13 @@
       </p:sp>
       <p:sp>
         <p:nvSpPr>
-          <p:cNvPr id="13" name="TextBox 12"/>
-          <p:cNvSpPr txBox="1"/>
-          <p:nvPr/>
-        </p:nvSpPr>
-        <p:spPr>
-          <a:xfrm>
-            <a:off x="521208" y="2395728"/>
+          <p:cNvPr id="14" name="TextBox 13"/>
+          <p:cNvSpPr txBox="1"/>
+          <p:nvPr/>
+        </p:nvSpPr>
+        <p:spPr>
+          <a:xfrm>
+            <a:off x="521208" y="2523744"/>
             <a:ext cx="5102352" cy="329184"/>
           </a:xfrm>
           <a:prstGeom prst="rect">
@@ -5751,20 +7612,20 @@
                 </a:solidFill>
                 <a:latin typeface="Barlow Condensed"/>
               </a:rPr>
-              <a:t>·  Watched the 30-day mobilization failure repeat across every organization</a:t>
-            </a:r>
-          </a:p>
-        </p:txBody>
-      </p:sp>
-      <p:sp>
-        <p:nvSpPr>
-          <p:cNvPr id="14" name="TextBox 13"/>
-          <p:cNvSpPr txBox="1"/>
-          <p:nvPr/>
-        </p:nvSpPr>
-        <p:spPr>
-          <a:xfrm>
-            <a:off x="521208" y="2743200"/>
+              <a:t>·  Watched the 30-day mobilization failure repeat across every vertical</a:t>
+            </a:r>
+          </a:p>
+        </p:txBody>
+      </p:sp>
+      <p:sp>
+        <p:nvSpPr>
+          <p:cNvPr id="15" name="TextBox 14"/>
+          <p:cNvSpPr txBox="1"/>
+          <p:nvPr/>
+        </p:nvSpPr>
+        <p:spPr>
+          <a:xfrm>
+            <a:off x="521208" y="2871215"/>
             <a:ext cx="5102352" cy="329184"/>
           </a:xfrm>
           <a:prstGeom prst="rect">
@@ -5786,20 +7647,20 @@
                 </a:solidFill>
                 <a:latin typeface="Barlow Condensed"/>
               </a:rPr>
-              <a:t>·  Same preparation gap — different trigger, identical delay</a:t>
-            </a:r>
-          </a:p>
-        </p:txBody>
-      </p:sp>
-      <p:sp>
-        <p:nvSpPr>
-          <p:cNvPr id="15" name="TextBox 14"/>
-          <p:cNvSpPr txBox="1"/>
-          <p:nvPr/>
-        </p:nvSpPr>
-        <p:spPr>
-          <a:xfrm>
-            <a:off x="521208" y="3090672"/>
+              <a:t>·  Same architecture gap — different trigger, identical delay</a:t>
+            </a:r>
+          </a:p>
+        </p:txBody>
+      </p:sp>
+      <p:sp>
+        <p:nvSpPr>
+          <p:cNvPr id="16" name="TextBox 15"/>
+          <p:cNvSpPr txBox="1"/>
+          <p:nvPr/>
+        </p:nvSpPr>
+        <p:spPr>
+          <a:xfrm>
+            <a:off x="521208" y="3218688"/>
             <a:ext cx="5102352" cy="329184"/>
           </a:xfrm>
           <a:prstGeom prst="rect">
@@ -5828,13 +7689,13 @@
       </p:sp>
       <p:sp>
         <p:nvSpPr>
-          <p:cNvPr id="16" name="Rectangle 15"/>
+          <p:cNvPr id="17" name="Rectangle 16"/>
           <p:cNvSpPr/>
           <p:nvPr/>
         </p:nvSpPr>
         <p:spPr>
           <a:xfrm>
-            <a:off x="6400800" y="1719072"/>
+            <a:off x="6400800" y="1847088"/>
             <a:ext cx="5285232" cy="237744"/>
           </a:xfrm>
           <a:prstGeom prst="rect">
@@ -5871,13 +7732,13 @@
       </p:sp>
       <p:sp>
         <p:nvSpPr>
-          <p:cNvPr id="17" name="TextBox 16"/>
-          <p:cNvSpPr txBox="1"/>
-          <p:nvPr/>
-        </p:nvSpPr>
-        <p:spPr>
-          <a:xfrm>
-            <a:off x="6510528" y="1737360"/>
+          <p:cNvPr id="18" name="TextBox 17"/>
+          <p:cNvSpPr txBox="1"/>
+          <p:nvPr/>
+        </p:nvSpPr>
+        <p:spPr>
+          <a:xfrm>
+            <a:off x="6510528" y="1865376"/>
             <a:ext cx="5102352" cy="201168"/>
           </a:xfrm>
           <a:prstGeom prst="rect">
@@ -5906,13 +7767,13 @@
       </p:sp>
       <p:sp>
         <p:nvSpPr>
-          <p:cNvPr id="18" name="TextBox 17"/>
-          <p:cNvSpPr txBox="1"/>
-          <p:nvPr/>
-        </p:nvSpPr>
-        <p:spPr>
-          <a:xfrm>
-            <a:off x="6510528" y="2048256"/>
+          <p:cNvPr id="19" name="TextBox 18"/>
+          <p:cNvSpPr txBox="1"/>
+          <p:nvPr/>
+        </p:nvSpPr>
+        <p:spPr>
+          <a:xfrm>
+            <a:off x="6510528" y="2176272"/>
             <a:ext cx="5102352" cy="329184"/>
           </a:xfrm>
           <a:prstGeom prst="rect">
@@ -5934,20 +7795,20 @@
                 </a:solidFill>
                 <a:latin typeface="Barlow Condensed"/>
               </a:rPr>
-              <a:t>·  Major college football — a billion-dollar coordinated operation</a:t>
-            </a:r>
-          </a:p>
-        </p:txBody>
-      </p:sp>
-      <p:sp>
-        <p:nvSpPr>
-          <p:cNvPr id="19" name="TextBox 18"/>
-          <p:cNvSpPr txBox="1"/>
-          <p:nvPr/>
-        </p:nvSpPr>
-        <p:spPr>
-          <a:xfrm>
-            <a:off x="6510528" y="2395728"/>
+              <a:t>·  Major college football — billion-dollar coordinated operation under pressure</a:t>
+            </a:r>
+          </a:p>
+        </p:txBody>
+      </p:sp>
+      <p:sp>
+        <p:nvSpPr>
+          <p:cNvPr id="20" name="TextBox 19"/>
+          <p:cNvSpPr txBox="1"/>
+          <p:nvPr/>
+        </p:nvSpPr>
+        <p:spPr>
+          <a:xfrm>
+            <a:off x="6510528" y="2523744"/>
             <a:ext cx="5102352" cy="329184"/>
           </a:xfrm>
           <a:prstGeom prst="rect">
@@ -5969,20 +7830,20 @@
                 </a:solidFill>
                 <a:latin typeface="Barlow Condensed"/>
               </a:rPr>
-              <a:t>·  40-second play clock — full organizational response under pressure</a:t>
-            </a:r>
-          </a:p>
-        </p:txBody>
-      </p:sp>
-      <p:sp>
-        <p:nvSpPr>
-          <p:cNvPr id="20" name="TextBox 19"/>
-          <p:cNvSpPr txBox="1"/>
-          <p:nvPr/>
-        </p:nvSpPr>
-        <p:spPr>
-          <a:xfrm>
-            <a:off x="6510528" y="2743200"/>
+              <a:t>·  40-second play clock — full organizational response, no committee</a:t>
+            </a:r>
+          </a:p>
+        </p:txBody>
+      </p:sp>
+      <p:sp>
+        <p:nvSpPr>
+          <p:cNvPr id="21" name="TextBox 20"/>
+          <p:cNvSpPr txBox="1"/>
+          <p:nvPr/>
+        </p:nvSpPr>
+        <p:spPr>
+          <a:xfrm>
+            <a:off x="6510528" y="2871215"/>
             <a:ext cx="5102352" cy="329184"/>
           </a:xfrm>
           <a:prstGeom prst="rect">
@@ -6004,20 +7865,20 @@
                 </a:solidFill>
                 <a:latin typeface="Barlow Condensed"/>
               </a:rPr>
-              <a:t>·  Every response pre-staged before the trigger fires</a:t>
-            </a:r>
-          </a:p>
-        </p:txBody>
-      </p:sp>
-      <p:sp>
-        <p:nvSpPr>
-          <p:cNvPr id="21" name="TextBox 20"/>
-          <p:cNvSpPr txBox="1"/>
-          <p:nvPr/>
-        </p:nvSpPr>
-        <p:spPr>
-          <a:xfrm>
-            <a:off x="6510528" y="3090672"/>
+              <a:t>·  You don't design the play after the snap — the response is pre-staged</a:t>
+            </a:r>
+          </a:p>
+        </p:txBody>
+      </p:sp>
+      <p:sp>
+        <p:nvSpPr>
+          <p:cNvPr id="22" name="TextBox 21"/>
+          <p:cNvSpPr txBox="1"/>
+          <p:nvPr/>
+        </p:nvSpPr>
+        <p:spPr>
+          <a:xfrm>
+            <a:off x="6510528" y="3218688"/>
             <a:ext cx="5102352" cy="329184"/>
           </a:xfrm>
           <a:prstGeom prst="rect">
@@ -6039,21 +7900,21 @@
                 </a:solidFill>
                 <a:latin typeface="Barlow Condensed"/>
               </a:rPr>
-              <a:t>·  The preparation IS the execution — not a metaphor, the architecture</a:t>
-            </a:r>
-          </a:p>
-        </p:txBody>
-      </p:sp>
-      <p:sp>
-        <p:nvSpPr>
-          <p:cNvPr id="22" name="Rectangle 21"/>
+              <a:t>·  The preparation IS the execution. Not a metaphor. The architecture.</a:t>
+            </a:r>
+          </a:p>
+        </p:txBody>
+      </p:sp>
+      <p:sp>
+        <p:nvSpPr>
+          <p:cNvPr id="23" name="Rectangle 22"/>
           <p:cNvSpPr/>
           <p:nvPr/>
         </p:nvSpPr>
         <p:spPr>
           <a:xfrm>
-            <a:off x="411480" y="3566160"/>
-            <a:ext cx="11155680" cy="274320"/>
+            <a:off x="411480" y="3712463"/>
+            <a:ext cx="11155680" cy="310896"/>
           </a:xfrm>
           <a:prstGeom prst="rect">
             <a:avLst/>
@@ -6089,14 +7950,14 @@
       </p:sp>
       <p:sp>
         <p:nvSpPr>
-          <p:cNvPr id="23" name="TextBox 22"/>
-          <p:cNvSpPr txBox="1"/>
-          <p:nvPr/>
-        </p:nvSpPr>
-        <p:spPr>
-          <a:xfrm>
-            <a:off x="411480" y="3584448"/>
-            <a:ext cx="11155680" cy="237744"/>
+          <p:cNvPr id="24" name="TextBox 23"/>
+          <p:cNvSpPr txBox="1"/>
+          <p:nvPr/>
+        </p:nvSpPr>
+        <p:spPr>
+          <a:xfrm>
+            <a:off x="530352" y="3739896"/>
+            <a:ext cx="11018520" cy="256032"/>
           </a:xfrm>
           <a:prstGeom prst="rect">
             <a:avLst/>
@@ -6111,20 +7972,20 @@
           <a:p>
             <a:pPr algn="ctr"/>
             <a:r>
-              <a:rPr sz="850" b="1" i="0">
+              <a:rPr sz="900" b="1" i="0">
                 <a:solidFill>
                   <a:srgbClr val="C9A84C"/>
                 </a:solidFill>
                 <a:latin typeface="Barlow Condensed"/>
               </a:rPr>
-              <a:t>THE INTERSECTION  —  WHERE PREPARATION DISCIPLINE MEETS ENTERPRISE EXECUTION FAILURE</a:t>
-            </a:r>
-          </a:p>
-        </p:txBody>
-      </p:sp>
-      <p:sp>
-        <p:nvSpPr>
-          <p:cNvPr id="24" name="Rectangle 23"/>
+              <a:t>THE INTERSECTION — THE PREPARATION DISCIPLINE THAT WINS UNDER PRESSURE WAS MISSING FROM ENTERPRISE.</a:t>
+            </a:r>
+          </a:p>
+        </p:txBody>
+      </p:sp>
+      <p:sp>
+        <p:nvSpPr>
+          <p:cNvPr id="25" name="Rectangle 24"/>
           <p:cNvSpPr/>
           <p:nvPr/>
         </p:nvSpPr>
@@ -6167,7 +8028,7 @@
       </p:sp>
       <p:sp>
         <p:nvSpPr>
-          <p:cNvPr id="25" name="TextBox 24"/>
+          <p:cNvPr id="26" name="TextBox 25"/>
           <p:cNvSpPr txBox="1"/>
           <p:nvPr/>
         </p:nvSpPr>
@@ -6195,7 +8056,7 @@
                 </a:solidFill>
                 <a:latin typeface="Georgia"/>
               </a:rPr>
-              <a:t>"Very few people get exposure to both worlds at the depth where those lessons translate directly. I did. And I built the infrastructure that closes the gap permanently."</a:t>
+              <a:t>"I spent 20 years watching the exact same mobilization failure repeat at the world's largest companies. And 5 years at Stanford pre-staging responses against a 40-second clock. I built the infrastructure that closes that gap permanently."</a:t>
             </a:r>
           </a:p>
         </p:txBody>
@@ -6663,7 +8524,7 @@
                 </a:solidFill>
                 <a:latin typeface="Barlow Condensed"/>
               </a:rPr>
-              <a:t>▶  221 strategic trigger patterns monitored continuously</a:t>
+              <a:t>▶  221 strategic trigger patterns monitored continuously across 8 data sources</a:t>
             </a:r>
           </a:p>
         </p:txBody>
@@ -6765,7 +8626,7 @@
                 </a:solidFill>
                 <a:latin typeface="Barlow Condensed"/>
               </a:rPr>
-              <a:t>▶  3,600× Execution Head Start — 30 days compressed to 12 minutes</a:t>
+              <a:t>▶  Onboarding is configuration — not a consulting project. 90 days to live.</a:t>
             </a:r>
           </a:p>
         </p:txBody>
@@ -6773,6 +8634,162 @@
       <p:sp>
         <p:nvSpPr>
           <p:cNvPr id="17" name="Rectangle 16"/>
+          <p:cNvSpPr/>
+          <p:nvPr/>
+        </p:nvSpPr>
+        <p:spPr>
+          <a:xfrm>
+            <a:off x="411480" y="4535424"/>
+            <a:ext cx="5596128" cy="566928"/>
+          </a:xfrm>
+          <a:prstGeom prst="rect">
+            <a:avLst/>
+          </a:prstGeom>
+          <a:solidFill>
+            <a:srgbClr val="101842"/>
+          </a:solidFill>
+          <a:ln>
+            <a:noFill/>
+          </a:ln>
+        </p:spPr>
+        <p:style>
+          <a:lnRef idx="1">
+            <a:schemeClr val="accent1"/>
+          </a:lnRef>
+          <a:fillRef idx="3">
+            <a:schemeClr val="accent1"/>
+          </a:fillRef>
+          <a:effectRef idx="2">
+            <a:schemeClr val="accent1"/>
+          </a:effectRef>
+          <a:fontRef idx="minor">
+            <a:schemeClr val="lt1"/>
+          </a:fontRef>
+        </p:style>
+        <p:txBody>
+          <a:bodyPr rtlCol="0" anchor="ctr"/>
+          <a:lstStyle/>
+          <a:p>
+            <a:pPr algn="ctr"/>
+          </a:p>
+        </p:txBody>
+      </p:sp>
+      <p:sp>
+        <p:nvSpPr>
+          <p:cNvPr id="18" name="Rectangle 17"/>
+          <p:cNvSpPr/>
+          <p:nvPr/>
+        </p:nvSpPr>
+        <p:spPr>
+          <a:xfrm>
+            <a:off x="411480" y="4535424"/>
+            <a:ext cx="5596128" cy="23774"/>
+          </a:xfrm>
+          <a:prstGeom prst="rect">
+            <a:avLst/>
+          </a:prstGeom>
+          <a:solidFill>
+            <a:srgbClr val="2B8A6E"/>
+          </a:solidFill>
+          <a:ln>
+            <a:noFill/>
+          </a:ln>
+        </p:spPr>
+        <p:style>
+          <a:lnRef idx="1">
+            <a:schemeClr val="accent1"/>
+          </a:lnRef>
+          <a:fillRef idx="3">
+            <a:schemeClr val="accent1"/>
+          </a:fillRef>
+          <a:effectRef idx="2">
+            <a:schemeClr val="accent1"/>
+          </a:effectRef>
+          <a:fontRef idx="minor">
+            <a:schemeClr val="lt1"/>
+          </a:fontRef>
+        </p:style>
+        <p:txBody>
+          <a:bodyPr rtlCol="0" anchor="ctr"/>
+          <a:lstStyle/>
+          <a:p>
+            <a:pPr algn="ctr"/>
+          </a:p>
+        </p:txBody>
+      </p:sp>
+      <p:sp>
+        <p:nvSpPr>
+          <p:cNvPr id="19" name="TextBox 18"/>
+          <p:cNvSpPr txBox="1"/>
+          <p:nvPr/>
+        </p:nvSpPr>
+        <p:spPr>
+          <a:xfrm>
+            <a:off x="548640" y="4572000"/>
+            <a:ext cx="5449824" cy="256032"/>
+          </a:xfrm>
+          <a:prstGeom prst="rect">
+            <a:avLst/>
+          </a:prstGeom>
+          <a:noFill/>
+        </p:spPr>
+        <p:txBody>
+          <a:bodyPr wrap="square">
+            <a:spAutoFit/>
+          </a:bodyPr>
+          <a:lstStyle/>
+          <a:p>
+            <a:pPr algn="l"/>
+            <a:r>
+              <a:rPr sz="1000" b="1" i="0">
+                <a:solidFill>
+                  <a:srgbClr val="2B8A6E"/>
+                </a:solidFill>
+                <a:latin typeface="Barlow Condensed"/>
+              </a:rPr>
+              <a:t>THE SYSTEM STAGES THE CHOICE IN SECONDS. THE EXECUTIVE MUST CLICK AUTHORIZE.</a:t>
+            </a:r>
+          </a:p>
+        </p:txBody>
+      </p:sp>
+      <p:sp>
+        <p:nvSpPr>
+          <p:cNvPr id="20" name="TextBox 19"/>
+          <p:cNvSpPr txBox="1"/>
+          <p:nvPr/>
+        </p:nvSpPr>
+        <p:spPr>
+          <a:xfrm>
+            <a:off x="548640" y="4828032"/>
+            <a:ext cx="5449824" cy="219456"/>
+          </a:xfrm>
+          <a:prstGeom prst="rect">
+            <a:avLst/>
+          </a:prstGeom>
+          <a:noFill/>
+        </p:spPr>
+        <p:txBody>
+          <a:bodyPr wrap="square">
+            <a:spAutoFit/>
+          </a:bodyPr>
+          <a:lstStyle/>
+          <a:p>
+            <a:pPr algn="l"/>
+            <a:r>
+              <a:rPr sz="900" b="0" i="0">
+                <a:solidFill>
+                  <a:srgbClr val="B4BED6"/>
+                </a:solidFill>
+                <a:latin typeface="Barlow Condensed"/>
+              </a:rPr>
+              <a:t>No autonomous action. No rogue execution. Executive authority preserved at every step.</a:t>
+            </a:r>
+          </a:p>
+        </p:txBody>
+      </p:sp>
+      <p:sp>
+        <p:nvSpPr>
+          <p:cNvPr id="21" name="Rectangle 20"/>
           <p:cNvSpPr/>
           <p:nvPr/>
         </p:nvSpPr>
@@ -6815,7 +8832,7 @@
       </p:sp>
       <p:sp>
         <p:nvSpPr>
-          <p:cNvPr id="18" name="TextBox 17"/>
+          <p:cNvPr id="22" name="TextBox 21"/>
           <p:cNvSpPr txBox="1"/>
           <p:nvPr/>
         </p:nvSpPr>
@@ -6850,7 +8867,7 @@
       </p:sp>
       <p:sp>
         <p:nvSpPr>
-          <p:cNvPr id="19" name="Rectangle 18"/>
+          <p:cNvPr id="23" name="Rectangle 22"/>
           <p:cNvSpPr/>
           <p:nvPr/>
         </p:nvSpPr>
@@ -6893,7 +8910,7 @@
       </p:sp>
       <p:sp>
         <p:nvSpPr>
-          <p:cNvPr id="20" name="Rectangle 19"/>
+          <p:cNvPr id="24" name="Rectangle 23"/>
           <p:cNvSpPr/>
           <p:nvPr/>
         </p:nvSpPr>
@@ -6936,7 +8953,7 @@
       </p:sp>
       <p:pic>
         <p:nvPicPr>
-          <p:cNvPr id="21" name="Picture 20" descr="wow_executes_chain.jpg"/>
+          <p:cNvPr id="25" name="Picture 24" descr="wow_executes_chain.jpg"/>
           <p:cNvPicPr>
             <a:picLocks noChangeAspect="1"/>
           </p:cNvPicPr>
@@ -6960,7 +8977,7 @@
       </p:pic>
       <p:sp>
         <p:nvSpPr>
-          <p:cNvPr id="22" name="Rectangle 21"/>
+          <p:cNvPr id="26" name="Rectangle 25"/>
           <p:cNvSpPr/>
           <p:nvPr/>
         </p:nvSpPr>
@@ -7396,7 +9413,7 @@
                 </a:solidFill>
                 <a:latin typeface="Barlow Condensed"/>
               </a:rPr>
-              <a:t>WHERE COMPETITORS STOP SHORT</a:t>
+              <a:t>STRUCTURAL MATRIX — THEY STOP AT ROUTING. WE PRE-STAGE THE ALIGNMENT.</a:t>
             </a:r>
           </a:p>
         </p:txBody>
@@ -7579,7 +9596,7 @@
                 </a:solidFill>
                 <a:latin typeface="Barlow Condensed"/>
               </a:rPr>
-              <a:t>Automates workflows after alignment. We pre-stage the alignment.</a:t>
+              <a:t>Async workflow router for post-alignment execution. We pre-stage the alignment itself.</a:t>
             </a:r>
           </a:p>
         </p:txBody>
@@ -7692,7 +9709,7 @@
                 </a:solidFill>
                 <a:latin typeface="Barlow Condensed"/>
               </a:rPr>
-              <a:t>Produces intelligence. We pre-stage the organizational response to it.</a:t>
+              <a:t>Produces intelligence. We pre-stage the organizational response to that intelligence.</a:t>
             </a:r>
           </a:p>
         </p:txBody>
@@ -7805,7 +9822,7 @@
                 </a:solidFill>
                 <a:latin typeface="Barlow Condensed"/>
               </a:rPr>
-              <a:t>Arrives after the trigger fires. We were ready before it.</a:t>
+              <a:t>Retainer-based. Arrives after the trigger fires. We were ready before the first call.</a:t>
             </a:r>
           </a:p>
         </p:txBody>
@@ -7855,49 +9872,14 @@
       </p:sp>
       <p:sp>
         <p:nvSpPr>
-          <p:cNvPr id="24" name="TextBox 23"/>
-          <p:cNvSpPr txBox="1"/>
-          <p:nvPr/>
-        </p:nvSpPr>
-        <p:spPr>
-          <a:xfrm>
-            <a:off x="6400800" y="1883664"/>
-            <a:ext cx="5486400" cy="201168"/>
-          </a:xfrm>
-          <a:prstGeom prst="rect">
-            <a:avLst/>
-          </a:prstGeom>
-          <a:noFill/>
-        </p:spPr>
-        <p:txBody>
-          <a:bodyPr wrap="square">
-            <a:spAutoFit/>
-          </a:bodyPr>
-          <a:lstStyle/>
-          <a:p>
-            <a:pPr algn="l"/>
-            <a:r>
-              <a:rPr sz="800" b="1" i="0">
-                <a:solidFill>
-                  <a:srgbClr val="C9A84C"/>
-                </a:solidFill>
-                <a:latin typeface="Barlow Condensed"/>
-              </a:rPr>
-              <a:t>THE MOAT — WHAT MAKES US HARD TO CATCH</a:t>
-            </a:r>
-          </a:p>
-        </p:txBody>
-      </p:sp>
-      <p:sp>
-        <p:nvSpPr>
-          <p:cNvPr id="25" name="Rectangle 24"/>
+          <p:cNvPr id="24" name="Rectangle 23"/>
           <p:cNvSpPr/>
           <p:nvPr/>
         </p:nvSpPr>
         <p:spPr>
           <a:xfrm>
-            <a:off x="6400800" y="2084831"/>
-            <a:ext cx="5486400" cy="274320"/>
+            <a:off x="411480" y="3621024"/>
+            <a:ext cx="5596128" cy="347472"/>
           </a:xfrm>
           <a:prstGeom prst="rect">
             <a:avLst/>
@@ -7933,14 +9915,49 @@
       </p:sp>
       <p:sp>
         <p:nvSpPr>
+          <p:cNvPr id="25" name="TextBox 24"/>
+          <p:cNvSpPr txBox="1"/>
+          <p:nvPr/>
+        </p:nvSpPr>
+        <p:spPr>
+          <a:xfrm>
+            <a:off x="548640" y="3648456"/>
+            <a:ext cx="5449824" cy="292608"/>
+          </a:xfrm>
+          <a:prstGeom prst="rect">
+            <a:avLst/>
+          </a:prstGeom>
+          <a:noFill/>
+        </p:spPr>
+        <p:txBody>
+          <a:bodyPr wrap="square">
+            <a:spAutoFit/>
+          </a:bodyPr>
+          <a:lstStyle/>
+          <a:p>
+            <a:pPr algn="l"/>
+            <a:r>
+              <a:rPr sz="1000" b="1" i="1">
+                <a:solidFill>
+                  <a:srgbClr val="C9A84C"/>
+                </a:solidFill>
+                <a:latin typeface="Georgia"/>
+              </a:rPr>
+              <a:t>"They track the work. We engineer the capability to do it."</a:t>
+            </a:r>
+          </a:p>
+        </p:txBody>
+      </p:sp>
+      <p:sp>
+        <p:nvSpPr>
           <p:cNvPr id="26" name="TextBox 25"/>
           <p:cNvSpPr txBox="1"/>
           <p:nvPr/>
         </p:nvSpPr>
         <p:spPr>
           <a:xfrm>
-            <a:off x="6510528" y="2121408"/>
-            <a:ext cx="5349240" cy="219456"/>
+            <a:off x="6400800" y="1883664"/>
+            <a:ext cx="5486400" cy="201168"/>
           </a:xfrm>
           <a:prstGeom prst="rect">
             <a:avLst/>
@@ -7955,62 +9972,27 @@
           <a:p>
             <a:pPr algn="l"/>
             <a:r>
-              <a:rPr sz="1050" b="1" i="0">
+              <a:rPr sz="800" b="1" i="0">
                 <a:solidFill>
                   <a:srgbClr val="C9A84C"/>
                 </a:solidFill>
                 <a:latin typeface="Barlow Condensed"/>
               </a:rPr>
-              <a:t>Compounding Loop</a:t>
-            </a:r>
-          </a:p>
-        </p:txBody>
-      </p:sp>
-      <p:sp>
-        <p:nvSpPr>
-          <p:cNvPr id="27" name="TextBox 26"/>
-          <p:cNvSpPr txBox="1"/>
-          <p:nvPr/>
-        </p:nvSpPr>
-        <p:spPr>
-          <a:xfrm>
-            <a:off x="6510528" y="2414015"/>
-            <a:ext cx="5349240" cy="548640"/>
-          </a:xfrm>
-          <a:prstGeom prst="rect">
-            <a:avLst/>
-          </a:prstGeom>
-          <a:noFill/>
-        </p:spPr>
-        <p:txBody>
-          <a:bodyPr wrap="square">
-            <a:spAutoFit/>
-          </a:bodyPr>
-          <a:lstStyle/>
-          <a:p>
-            <a:pPr algn="l"/>
-            <a:r>
-              <a:rPr sz="1000" b="0" i="0">
-                <a:solidFill>
-                  <a:srgbClr val="B4BED6"/>
-                </a:solidFill>
-                <a:latin typeface="Barlow Condensed"/>
-              </a:rPr>
-              <a:t>Every activation encodes what held. Preparation compounds after each cycle.</a:t>
-            </a:r>
-          </a:p>
-        </p:txBody>
-      </p:sp>
-      <p:sp>
-        <p:nvSpPr>
-          <p:cNvPr id="28" name="Rectangle 27"/>
+              <a:t>THE MOAT — WHAT MAKES US HARD TO CATCH</a:t>
+            </a:r>
+          </a:p>
+        </p:txBody>
+      </p:sp>
+      <p:sp>
+        <p:nvSpPr>
+          <p:cNvPr id="27" name="Rectangle 26"/>
           <p:cNvSpPr/>
           <p:nvPr/>
         </p:nvSpPr>
         <p:spPr>
           <a:xfrm>
-            <a:off x="6400800" y="3044952"/>
-            <a:ext cx="5440680" cy="10972"/>
+            <a:off x="6400800" y="2084831"/>
+            <a:ext cx="5486400" cy="274320"/>
           </a:xfrm>
           <a:prstGeom prst="rect">
             <a:avLst/>
@@ -8046,14 +10028,84 @@
       </p:sp>
       <p:sp>
         <p:nvSpPr>
-          <p:cNvPr id="29" name="Rectangle 28"/>
+          <p:cNvPr id="28" name="TextBox 27"/>
+          <p:cNvSpPr txBox="1"/>
+          <p:nvPr/>
+        </p:nvSpPr>
+        <p:spPr>
+          <a:xfrm>
+            <a:off x="6510528" y="2121408"/>
+            <a:ext cx="5349240" cy="219456"/>
+          </a:xfrm>
+          <a:prstGeom prst="rect">
+            <a:avLst/>
+          </a:prstGeom>
+          <a:noFill/>
+        </p:spPr>
+        <p:txBody>
+          <a:bodyPr wrap="square">
+            <a:spAutoFit/>
+          </a:bodyPr>
+          <a:lstStyle/>
+          <a:p>
+            <a:pPr algn="l"/>
+            <a:r>
+              <a:rPr sz="1050" b="1" i="0">
+                <a:solidFill>
+                  <a:srgbClr val="C9A84C"/>
+                </a:solidFill>
+                <a:latin typeface="Barlow Condensed"/>
+              </a:rPr>
+              <a:t>Compounding Loop</a:t>
+            </a:r>
+          </a:p>
+        </p:txBody>
+      </p:sp>
+      <p:sp>
+        <p:nvSpPr>
+          <p:cNvPr id="29" name="TextBox 28"/>
+          <p:cNvSpPr txBox="1"/>
+          <p:nvPr/>
+        </p:nvSpPr>
+        <p:spPr>
+          <a:xfrm>
+            <a:off x="6510528" y="2414015"/>
+            <a:ext cx="5349240" cy="548640"/>
+          </a:xfrm>
+          <a:prstGeom prst="rect">
+            <a:avLst/>
+          </a:prstGeom>
+          <a:noFill/>
+        </p:spPr>
+        <p:txBody>
+          <a:bodyPr wrap="square">
+            <a:spAutoFit/>
+          </a:bodyPr>
+          <a:lstStyle/>
+          <a:p>
+            <a:pPr algn="l"/>
+            <a:r>
+              <a:rPr sz="1000" b="0" i="0">
+                <a:solidFill>
+                  <a:srgbClr val="B4BED6"/>
+                </a:solidFill>
+                <a:latin typeface="Barlow Condensed"/>
+              </a:rPr>
+              <a:t>Every activation encodes what held. Preparation compounds after each cycle — permanently.</a:t>
+            </a:r>
+          </a:p>
+        </p:txBody>
+      </p:sp>
+      <p:sp>
+        <p:nvSpPr>
+          <p:cNvPr id="30" name="Rectangle 29"/>
           <p:cNvSpPr/>
           <p:nvPr/>
         </p:nvSpPr>
         <p:spPr>
           <a:xfrm>
-            <a:off x="6400800" y="3291839"/>
-            <a:ext cx="5486400" cy="274320"/>
+            <a:off x="6400800" y="3044952"/>
+            <a:ext cx="5440680" cy="10972"/>
           </a:xfrm>
           <a:prstGeom prst="rect">
             <a:avLst/>
@@ -8089,84 +10141,14 @@
       </p:sp>
       <p:sp>
         <p:nvSpPr>
-          <p:cNvPr id="30" name="TextBox 29"/>
-          <p:cNvSpPr txBox="1"/>
-          <p:nvPr/>
-        </p:nvSpPr>
-        <p:spPr>
-          <a:xfrm>
-            <a:off x="6510528" y="3328415"/>
-            <a:ext cx="5349240" cy="219456"/>
-          </a:xfrm>
-          <a:prstGeom prst="rect">
-            <a:avLst/>
-          </a:prstGeom>
-          <a:noFill/>
-        </p:spPr>
-        <p:txBody>
-          <a:bodyPr wrap="square">
-            <a:spAutoFit/>
-          </a:bodyPr>
-          <a:lstStyle/>
-          <a:p>
-            <a:pPr algn="l"/>
-            <a:r>
-              <a:rPr sz="1050" b="1" i="0">
-                <a:solidFill>
-                  <a:srgbClr val="C9A84C"/>
-                </a:solidFill>
-                <a:latin typeface="Barlow Condensed"/>
-              </a:rPr>
-              <a:t>Org Context Intelligence</a:t>
-            </a:r>
-          </a:p>
-        </p:txBody>
-      </p:sp>
-      <p:sp>
-        <p:nvSpPr>
-          <p:cNvPr id="31" name="TextBox 30"/>
-          <p:cNvSpPr txBox="1"/>
-          <p:nvPr/>
-        </p:nvSpPr>
-        <p:spPr>
-          <a:xfrm>
-            <a:off x="6510528" y="3621023"/>
-            <a:ext cx="5349240" cy="548640"/>
-          </a:xfrm>
-          <a:prstGeom prst="rect">
-            <a:avLst/>
-          </a:prstGeom>
-          <a:noFill/>
-        </p:spPr>
-        <p:txBody>
-          <a:bodyPr wrap="square">
-            <a:spAutoFit/>
-          </a:bodyPr>
-          <a:lstStyle/>
-          <a:p>
-            <a:pPr algn="l"/>
-            <a:r>
-              <a:rPr sz="1000" b="0" i="0">
-                <a:solidFill>
-                  <a:srgbClr val="B4BED6"/>
-                </a:solidFill>
-                <a:latin typeface="Barlow Condensed"/>
-              </a:rPr>
-              <a:t>Signal confidence + preparedness score. No generic platform replicates this.</a:t>
-            </a:r>
-          </a:p>
-        </p:txBody>
-      </p:sp>
-      <p:sp>
-        <p:nvSpPr>
-          <p:cNvPr id="32" name="Rectangle 31"/>
+          <p:cNvPr id="31" name="Rectangle 30"/>
           <p:cNvSpPr/>
           <p:nvPr/>
         </p:nvSpPr>
         <p:spPr>
           <a:xfrm>
-            <a:off x="6400800" y="4251959"/>
-            <a:ext cx="5440680" cy="10972"/>
+            <a:off x="6400800" y="3291839"/>
+            <a:ext cx="5486400" cy="274320"/>
           </a:xfrm>
           <a:prstGeom prst="rect">
             <a:avLst/>
@@ -8202,14 +10184,84 @@
       </p:sp>
       <p:sp>
         <p:nvSpPr>
-          <p:cNvPr id="33" name="Rectangle 32"/>
+          <p:cNvPr id="32" name="TextBox 31"/>
+          <p:cNvSpPr txBox="1"/>
+          <p:nvPr/>
+        </p:nvSpPr>
+        <p:spPr>
+          <a:xfrm>
+            <a:off x="6510528" y="3328415"/>
+            <a:ext cx="5349240" cy="219456"/>
+          </a:xfrm>
+          <a:prstGeom prst="rect">
+            <a:avLst/>
+          </a:prstGeom>
+          <a:noFill/>
+        </p:spPr>
+        <p:txBody>
+          <a:bodyPr wrap="square">
+            <a:spAutoFit/>
+          </a:bodyPr>
+          <a:lstStyle/>
+          <a:p>
+            <a:pPr algn="l"/>
+            <a:r>
+              <a:rPr sz="1050" b="1" i="0">
+                <a:solidFill>
+                  <a:srgbClr val="C9A84C"/>
+                </a:solidFill>
+                <a:latin typeface="Barlow Condensed"/>
+              </a:rPr>
+              <a:t>Org Context Intelligence</a:t>
+            </a:r>
+          </a:p>
+        </p:txBody>
+      </p:sp>
+      <p:sp>
+        <p:nvSpPr>
+          <p:cNvPr id="33" name="TextBox 32"/>
+          <p:cNvSpPr txBox="1"/>
+          <p:nvPr/>
+        </p:nvSpPr>
+        <p:spPr>
+          <a:xfrm>
+            <a:off x="6510528" y="3621023"/>
+            <a:ext cx="5349240" cy="548640"/>
+          </a:xfrm>
+          <a:prstGeom prst="rect">
+            <a:avLst/>
+          </a:prstGeom>
+          <a:noFill/>
+        </p:spPr>
+        <p:txBody>
+          <a:bodyPr wrap="square">
+            <a:spAutoFit/>
+          </a:bodyPr>
+          <a:lstStyle/>
+          <a:p>
+            <a:pPr algn="l"/>
+            <a:r>
+              <a:rPr sz="1000" b="0" i="0">
+                <a:solidFill>
+                  <a:srgbClr val="B4BED6"/>
+                </a:solidFill>
+                <a:latin typeface="Barlow Condensed"/>
+              </a:rPr>
+              <a:t>Signal confidence + preparedness score unique to each org. No generic platform replicates this.</a:t>
+            </a:r>
+          </a:p>
+        </p:txBody>
+      </p:sp>
+      <p:sp>
+        <p:nvSpPr>
+          <p:cNvPr id="34" name="Rectangle 33"/>
           <p:cNvSpPr/>
           <p:nvPr/>
         </p:nvSpPr>
         <p:spPr>
           <a:xfrm>
-            <a:off x="6400800" y="4498848"/>
-            <a:ext cx="5486400" cy="274320"/>
+            <a:off x="6400800" y="4251959"/>
+            <a:ext cx="5440680" cy="10972"/>
           </a:xfrm>
           <a:prstGeom prst="rect">
             <a:avLst/>
@@ -8245,7 +10297,50 @@
       </p:sp>
       <p:sp>
         <p:nvSpPr>
-          <p:cNvPr id="34" name="TextBox 33"/>
+          <p:cNvPr id="35" name="Rectangle 34"/>
+          <p:cNvSpPr/>
+          <p:nvPr/>
+        </p:nvSpPr>
+        <p:spPr>
+          <a:xfrm>
+            <a:off x="6400800" y="4498848"/>
+            <a:ext cx="5486400" cy="274320"/>
+          </a:xfrm>
+          <a:prstGeom prst="rect">
+            <a:avLst/>
+          </a:prstGeom>
+          <a:solidFill>
+            <a:srgbClr val="101842"/>
+          </a:solidFill>
+          <a:ln>
+            <a:noFill/>
+          </a:ln>
+        </p:spPr>
+        <p:style>
+          <a:lnRef idx="1">
+            <a:schemeClr val="accent1"/>
+          </a:lnRef>
+          <a:fillRef idx="3">
+            <a:schemeClr val="accent1"/>
+          </a:fillRef>
+          <a:effectRef idx="2">
+            <a:schemeClr val="accent1"/>
+          </a:effectRef>
+          <a:fontRef idx="minor">
+            <a:schemeClr val="lt1"/>
+          </a:fontRef>
+        </p:style>
+        <p:txBody>
+          <a:bodyPr rtlCol="0" anchor="ctr"/>
+          <a:lstStyle/>
+          <a:p>
+            <a:pPr algn="ctr"/>
+          </a:p>
+        </p:txBody>
+      </p:sp>
+      <p:sp>
+        <p:nvSpPr>
+          <p:cNvPr id="36" name="TextBox 35"/>
           <p:cNvSpPr txBox="1"/>
           <p:nvPr/>
         </p:nvSpPr>
@@ -8280,7 +10375,7 @@
       </p:sp>
       <p:sp>
         <p:nvSpPr>
-          <p:cNvPr id="35" name="TextBox 34"/>
+          <p:cNvPr id="37" name="TextBox 36"/>
           <p:cNvSpPr txBox="1"/>
           <p:nvPr/>
         </p:nvSpPr>
@@ -8315,7 +10410,7 @@
       </p:sp>
       <p:sp>
         <p:nvSpPr>
-          <p:cNvPr id="36" name="Rectangle 35"/>
+          <p:cNvPr id="38" name="Rectangle 37"/>
           <p:cNvSpPr/>
           <p:nvPr/>
         </p:nvSpPr>
@@ -8358,7 +10453,7 @@
       </p:sp>
       <p:sp>
         <p:nvSpPr>
-          <p:cNvPr id="37" name="TextBox 36"/>
+          <p:cNvPr id="39" name="TextBox 38"/>
           <p:cNvSpPr txBox="1"/>
           <p:nvPr/>
         </p:nvSpPr>
@@ -8961,7 +11056,7 @@
                 </a:solidFill>
                 <a:latin typeface="Barlow Condensed"/>
               </a:rPr>
-              <a:t>Execution Brief delivered — full decision context pre-staged, ready to authorize</a:t>
+              <a:t>Board-ready execution brief delivered — pre-approved communication streams, authority chain</a:t>
             </a:r>
           </a:p>
         </p:txBody>
@@ -9335,7 +11430,7 @@
                 </a:solidFill>
                 <a:latin typeface="Georgia"/>
               </a:rPr>
-              <a:t>"The preparation is the execution. When the trigger fires, the response is already designed, assigned, and waiting for executive authorization."</a:t>
+              <a:t>"The AI monitors, but humans decide. We turn 30 days of unmanaged chaos and a potential $47M penalty into a controlled, 12-minute executive sign-off."</a:t>
             </a:r>
           </a:p>
         </p:txBody>
@@ -10024,7 +12119,7 @@
                 </a:solidFill>
                 <a:latin typeface="Barlow Condensed"/>
               </a:rPr>
-              <a:t>▶  12-Minute Test Drive — run any of 7 real scenarios now</a:t>
+              <a:t>▶  12-Minute Test Drive — run any of 7 real scenarios now, live</a:t>
             </a:r>
           </a:p>
         </p:txBody>
@@ -10136,7 +12231,7 @@
                 </a:solidFill>
                 <a:latin typeface="Georgia"/>
               </a:rPr>
-              <a:t>"This is not a roadmap concept. The platform is live, running, and testable. Run a full scenario now at vaughnmartin.com/how-it-executes."</a:t>
+              <a:t>"Same trigger. Same company. Entirely different outcome. The only variable: whether the response was pre-staged before the trigger fired."</a:t>
             </a:r>
           </a:p>
         </p:txBody>
@@ -10555,7 +12650,7 @@
         <p:spPr>
           <a:xfrm>
             <a:off x="411480" y="475488"/>
-            <a:ext cx="5669280" cy="500888"/>
+            <a:ext cx="5669280" cy="549656"/>
           </a:xfrm>
           <a:prstGeom prst="rect">
             <a:avLst/>
@@ -10570,13 +12665,13 @@
           <a:p>
             <a:pPr algn="l"/>
             <a:r>
-              <a:rPr sz="2800" b="1" i="0">
+              <a:rPr sz="3100" b="1" i="0">
                 <a:solidFill>
                   <a:srgbClr val="FFFFFF"/>
                 </a:solidFill>
                 <a:latin typeface="Barlow Condensed"/>
               </a:rPr>
-              <a:t>REPLACE EXISTING RESPONSE</a:t>
+              <a:t>A TRIVIAL REALLOCATION</a:t>
             </a:r>
           </a:p>
         </p:txBody>
@@ -10589,8 +12684,8 @@
         </p:nvSpPr>
         <p:spPr>
           <a:xfrm>
-            <a:off x="411480" y="930656"/>
-            <a:ext cx="5669280" cy="500888"/>
+            <a:off x="411480" y="979424"/>
+            <a:ext cx="5669280" cy="549656"/>
           </a:xfrm>
           <a:prstGeom prst="rect">
             <a:avLst/>
@@ -10605,61 +12700,26 @@
           <a:p>
             <a:pPr algn="l"/>
             <a:r>
-              <a:rPr sz="2800" b="1" i="0">
-                <a:solidFill>
-                  <a:srgbClr val="FFFFFF"/>
-                </a:solidFill>
-                <a:latin typeface="Barlow Condensed"/>
-              </a:rPr>
-              <a:t>SPEND WITH EXECUTION</a:t>
-            </a:r>
-          </a:p>
-        </p:txBody>
-      </p:sp>
-      <p:sp>
-        <p:nvSpPr>
-          <p:cNvPr id="10" name="TextBox 9"/>
-          <p:cNvSpPr txBox="1"/>
-          <p:nvPr/>
-        </p:nvSpPr>
-        <p:spPr>
-          <a:xfrm>
-            <a:off x="411480" y="1385824"/>
-            <a:ext cx="5669280" cy="500888"/>
-          </a:xfrm>
-          <a:prstGeom prst="rect">
-            <a:avLst/>
-          </a:prstGeom>
-          <a:noFill/>
-        </p:spPr>
-        <p:txBody>
-          <a:bodyPr wrap="square">
-            <a:spAutoFit/>
-          </a:bodyPr>
-          <a:lstStyle/>
-          <a:p>
-            <a:pPr algn="l"/>
-            <a:r>
-              <a:rPr sz="2800" b="1" i="0">
+              <a:rPr sz="3100" b="1" i="0">
                 <a:solidFill>
                   <a:srgbClr val="C9A84C"/>
                 </a:solidFill>
                 <a:latin typeface="Barlow Condensed"/>
               </a:rPr>
-              <a:t>INFRASTRUCTURE.</a:t>
-            </a:r>
-          </a:p>
-        </p:txBody>
-      </p:sp>
-      <p:sp>
-        <p:nvSpPr>
-          <p:cNvPr id="11" name="Rectangle 10"/>
+              <a:t>OF EXISTING WASTE.</a:t>
+            </a:r>
+          </a:p>
+        </p:txBody>
+      </p:sp>
+      <p:sp>
+        <p:nvSpPr>
+          <p:cNvPr id="10" name="Rectangle 9"/>
           <p:cNvSpPr/>
           <p:nvPr/>
         </p:nvSpPr>
         <p:spPr>
           <a:xfrm>
-            <a:off x="411480" y="2304288"/>
+            <a:off x="411480" y="1792224"/>
             <a:ext cx="5577840" cy="10972"/>
           </a:xfrm>
           <a:prstGeom prst="rect">
@@ -10696,13 +12756,47 @@
       </p:sp>
       <p:sp>
         <p:nvSpPr>
+          <p:cNvPr id="11" name="TextBox 10"/>
+          <p:cNvSpPr txBox="1"/>
+          <p:nvPr/>
+        </p:nvSpPr>
+        <p:spPr>
+          <a:xfrm>
+            <a:off x="411480" y="1920240"/>
+            <a:ext cx="5669280" cy="365760"/>
+          </a:xfrm>
+          <a:prstGeom prst="rect">
+            <a:avLst/>
+          </a:prstGeom>
+          <a:noFill/>
+        </p:spPr>
+        <p:txBody>
+          <a:bodyPr wrap="square">
+            <a:spAutoFit/>
+          </a:bodyPr>
+          <a:lstStyle/>
+          <a:p>
+            <a:r>
+              <a:rPr sz="1150">
+                <a:solidFill>
+                  <a:srgbClr val="FFFFFF"/>
+                </a:solidFill>
+                <a:latin typeface="Barlow Condensed"/>
+              </a:rPr>
+              <a:t>▶  Enterprises already burn millions on reactive, post-trigger consulting retainers</a:t>
+            </a:r>
+          </a:p>
+        </p:txBody>
+      </p:sp>
+      <p:sp>
+        <p:nvSpPr>
           <p:cNvPr id="12" name="TextBox 11"/>
           <p:cNvSpPr txBox="1"/>
           <p:nvPr/>
         </p:nvSpPr>
         <p:spPr>
           <a:xfrm>
-            <a:off x="411480" y="2432304"/>
+            <a:off x="411480" y="2272284"/>
             <a:ext cx="5669280" cy="365760"/>
           </a:xfrm>
           <a:prstGeom prst="rect">
@@ -10717,13 +12811,13 @@
           <a:lstStyle/>
           <a:p>
             <a:r>
-              <a:rPr sz="1100">
+              <a:rPr sz="1150">
                 <a:solidFill>
                   <a:srgbClr val="FFFFFF"/>
                 </a:solidFill>
                 <a:latin typeface="Barlow Condensed"/>
               </a:rPr>
-              <a:t>▶  Existing budgets already fund reactive, post-trigger response motions</a:t>
+              <a:t>▶  Readiness OS converts panic-driven spend into repeatable software infrastructure</a:t>
             </a:r>
           </a:p>
         </p:txBody>
@@ -10736,7 +12830,7 @@
         </p:nvSpPr>
         <p:spPr>
           <a:xfrm>
-            <a:off x="411480" y="2784348"/>
+            <a:off x="411480" y="2624328"/>
             <a:ext cx="5669280" cy="365760"/>
           </a:xfrm>
           <a:prstGeom prst="rect">
@@ -10751,13 +12845,13 @@
           <a:lstStyle/>
           <a:p>
             <a:r>
-              <a:rPr sz="1100">
+              <a:rPr sz="1150">
                 <a:solidFill>
                   <a:srgbClr val="FFFFFF"/>
                 </a:solidFill>
                 <a:latin typeface="Barlow Condensed"/>
               </a:rPr>
-              <a:t>▶  Readiness OS shifts spend to pre-staged execution readiness</a:t>
+              <a:t>▶  We are not asking for net-new budget — we are replacing existing waste</a:t>
             </a:r>
           </a:p>
         </p:txBody>
@@ -10770,7 +12864,7 @@
         </p:nvSpPr>
         <p:spPr>
           <a:xfrm>
-            <a:off x="411480" y="3136391"/>
+            <a:off x="411480" y="2976372"/>
             <a:ext cx="5669280" cy="365760"/>
           </a:xfrm>
           <a:prstGeom prst="rect">
@@ -10785,7 +12879,7 @@
           <a:lstStyle/>
           <a:p>
             <a:r>
-              <a:rPr sz="1100">
+              <a:rPr sz="1150">
                 <a:solidFill>
                   <a:srgbClr val="FFFFFF"/>
                 </a:solidFill>
@@ -10804,28 +12898,29 @@
         </p:nvSpPr>
         <p:spPr>
           <a:xfrm>
-            <a:off x="411480" y="3488435"/>
-            <a:ext cx="5669280" cy="365760"/>
-          </a:xfrm>
-          <a:prstGeom prst="rect">
-            <a:avLst/>
-          </a:prstGeom>
-          <a:noFill/>
-        </p:spPr>
-        <p:txBody>
-          <a:bodyPr wrap="square">
-            <a:spAutoFit/>
-          </a:bodyPr>
-          <a:lstStyle/>
-          <a:p>
-            <a:r>
-              <a:rPr sz="1100">
-                <a:solidFill>
-                  <a:srgbClr val="FFFFFF"/>
-                </a:solidFill>
-                <a:latin typeface="Barlow Condensed"/>
-              </a:rPr>
-              <a:t>▶  Replaces $400K–$800K consulting retainer with repeatable infrastructure</a:t>
+            <a:off x="411480" y="3657600"/>
+            <a:ext cx="5669280" cy="201168"/>
+          </a:xfrm>
+          <a:prstGeom prst="rect">
+            <a:avLst/>
+          </a:prstGeom>
+          <a:noFill/>
+        </p:spPr>
+        <p:txBody>
+          <a:bodyPr wrap="square">
+            <a:spAutoFit/>
+          </a:bodyPr>
+          <a:lstStyle/>
+          <a:p>
+            <a:pPr algn="l"/>
+            <a:r>
+              <a:rPr sz="800" b="1" i="0">
+                <a:solidFill>
+                  <a:srgbClr val="C9A84C"/>
+                </a:solidFill>
+                <a:latin typeface="Barlow Condensed"/>
+              </a:rPr>
+              <a:t>PRICING — FOUNDED ON REALLOCATION LOGIC</a:t>
             </a:r>
           </a:p>
         </p:txBody>
@@ -10838,8 +12933,8 @@
         </p:nvSpPr>
         <p:spPr>
           <a:xfrm>
-            <a:off x="411480" y="4023360"/>
-            <a:ext cx="5669280" cy="201168"/>
+            <a:off x="411480" y="3858768"/>
+            <a:ext cx="1920240" cy="274320"/>
           </a:xfrm>
           <a:prstGeom prst="rect">
             <a:avLst/>
@@ -10854,13 +12949,13 @@
           <a:p>
             <a:pPr algn="l"/>
             <a:r>
-              <a:rPr sz="800" b="1" i="0">
+              <a:rPr sz="1000" b="1" i="0">
                 <a:solidFill>
                   <a:srgbClr val="C9A84C"/>
                 </a:solidFill>
                 <a:latin typeface="Barlow Condensed"/>
               </a:rPr>
-              <a:t>PRICING</a:t>
+              <a:t>Founding Partner</a:t>
             </a:r>
           </a:p>
         </p:txBody>
@@ -10873,8 +12968,8 @@
         </p:nvSpPr>
         <p:spPr>
           <a:xfrm>
-            <a:off x="411480" y="4224528"/>
-            <a:ext cx="1828800" cy="274320"/>
+            <a:off x="2423160" y="3858768"/>
+            <a:ext cx="3657600" cy="274320"/>
           </a:xfrm>
           <a:prstGeom prst="rect">
             <a:avLst/>
@@ -10889,41 +12984,6 @@
           <a:p>
             <a:pPr algn="l"/>
             <a:r>
-              <a:rPr sz="1000" b="1" i="0">
-                <a:solidFill>
-                  <a:srgbClr val="C9A84C"/>
-                </a:solidFill>
-                <a:latin typeface="Barlow Condensed"/>
-              </a:rPr>
-              <a:t>Founding Partner</a:t>
-            </a:r>
-          </a:p>
-        </p:txBody>
-      </p:sp>
-      <p:sp>
-        <p:nvSpPr>
-          <p:cNvPr id="18" name="TextBox 17"/>
-          <p:cNvSpPr txBox="1"/>
-          <p:nvPr/>
-        </p:nvSpPr>
-        <p:spPr>
-          <a:xfrm>
-            <a:off x="2331720" y="4224528"/>
-            <a:ext cx="3749039" cy="274320"/>
-          </a:xfrm>
-          <a:prstGeom prst="rect">
-            <a:avLst/>
-          </a:prstGeom>
-          <a:noFill/>
-        </p:spPr>
-        <p:txBody>
-          <a:bodyPr wrap="square">
-            <a:spAutoFit/>
-          </a:bodyPr>
-          <a:lstStyle/>
-          <a:p>
-            <a:pPr algn="l"/>
-            <a:r>
               <a:rPr sz="1000" b="0" i="0">
                 <a:solidFill>
                   <a:srgbClr val="B4BED6"/>
@@ -10937,13 +12997,13 @@
       </p:sp>
       <p:sp>
         <p:nvSpPr>
-          <p:cNvPr id="19" name="Rectangle 18"/>
+          <p:cNvPr id="18" name="Rectangle 17"/>
           <p:cNvSpPr/>
           <p:nvPr/>
         </p:nvSpPr>
         <p:spPr>
           <a:xfrm>
-            <a:off x="411480" y="4480560"/>
+            <a:off x="411480" y="4114800"/>
             <a:ext cx="5577840" cy="10972"/>
           </a:xfrm>
           <a:prstGeom prst="rect">
@@ -10980,14 +13040,49 @@
       </p:sp>
       <p:sp>
         <p:nvSpPr>
+          <p:cNvPr id="19" name="TextBox 18"/>
+          <p:cNvSpPr txBox="1"/>
+          <p:nvPr/>
+        </p:nvSpPr>
+        <p:spPr>
+          <a:xfrm>
+            <a:off x="411480" y="4197096"/>
+            <a:ext cx="1920240" cy="274320"/>
+          </a:xfrm>
+          <a:prstGeom prst="rect">
+            <a:avLst/>
+          </a:prstGeom>
+          <a:noFill/>
+        </p:spPr>
+        <p:txBody>
+          <a:bodyPr wrap="square">
+            <a:spAutoFit/>
+          </a:bodyPr>
+          <a:lstStyle/>
+          <a:p>
+            <a:pPr algn="l"/>
+            <a:r>
+              <a:rPr sz="1000" b="1" i="0">
+                <a:solidFill>
+                  <a:srgbClr val="C9A84C"/>
+                </a:solidFill>
+                <a:latin typeface="Barlow Condensed"/>
+              </a:rPr>
+              <a:t>Growth</a:t>
+            </a:r>
+          </a:p>
+        </p:txBody>
+      </p:sp>
+      <p:sp>
+        <p:nvSpPr>
           <p:cNvPr id="20" name="TextBox 19"/>
           <p:cNvSpPr txBox="1"/>
           <p:nvPr/>
         </p:nvSpPr>
         <p:spPr>
           <a:xfrm>
-            <a:off x="411480" y="4562856"/>
-            <a:ext cx="1828800" cy="274320"/>
+            <a:off x="2423160" y="4197096"/>
+            <a:ext cx="3657600" cy="274320"/>
           </a:xfrm>
           <a:prstGeom prst="rect">
             <a:avLst/>
@@ -11002,61 +13097,26 @@
           <a:p>
             <a:pPr algn="l"/>
             <a:r>
-              <a:rPr sz="1000" b="1" i="0">
-                <a:solidFill>
-                  <a:srgbClr val="C9A84C"/>
-                </a:solidFill>
-                <a:latin typeface="Barlow Condensed"/>
-              </a:rPr>
-              <a:t>Growth</a:t>
-            </a:r>
-          </a:p>
-        </p:txBody>
-      </p:sp>
-      <p:sp>
-        <p:nvSpPr>
-          <p:cNvPr id="21" name="TextBox 20"/>
-          <p:cNvSpPr txBox="1"/>
-          <p:nvPr/>
-        </p:nvSpPr>
-        <p:spPr>
-          <a:xfrm>
-            <a:off x="2331720" y="4562856"/>
-            <a:ext cx="3749039" cy="274320"/>
-          </a:xfrm>
-          <a:prstGeom prst="rect">
-            <a:avLst/>
-          </a:prstGeom>
-          <a:noFill/>
-        </p:spPr>
-        <p:txBody>
-          <a:bodyPr wrap="square">
-            <a:spAutoFit/>
-          </a:bodyPr>
-          <a:lstStyle/>
-          <a:p>
-            <a:pPr algn="l"/>
-            <a:r>
               <a:rPr sz="1000" b="0" i="0">
                 <a:solidFill>
                   <a:srgbClr val="B4BED6"/>
                 </a:solidFill>
                 <a:latin typeface="Barlow Condensed"/>
               </a:rPr>
-              <a:t>$75K–$250K annually  ·  Annual recurring  ·  No per-seat pricing</a:t>
-            </a:r>
-          </a:p>
-        </p:txBody>
-      </p:sp>
-      <p:sp>
-        <p:nvSpPr>
-          <p:cNvPr id="22" name="Rectangle 21"/>
+              <a:t>$75K–$250K annually  ·  Replaces $400K–$800K consulting retainer</a:t>
+            </a:r>
+          </a:p>
+        </p:txBody>
+      </p:sp>
+      <p:sp>
+        <p:nvSpPr>
+          <p:cNvPr id="21" name="Rectangle 20"/>
           <p:cNvSpPr/>
           <p:nvPr/>
         </p:nvSpPr>
         <p:spPr>
           <a:xfrm>
-            <a:off x="411480" y="4818888"/>
+            <a:off x="411480" y="4453128"/>
             <a:ext cx="5577840" cy="10972"/>
           </a:xfrm>
           <a:prstGeom prst="rect">
@@ -11093,14 +13153,49 @@
       </p:sp>
       <p:sp>
         <p:nvSpPr>
+          <p:cNvPr id="22" name="TextBox 21"/>
+          <p:cNvSpPr txBox="1"/>
+          <p:nvPr/>
+        </p:nvSpPr>
+        <p:spPr>
+          <a:xfrm>
+            <a:off x="411480" y="4535424"/>
+            <a:ext cx="1920240" cy="274320"/>
+          </a:xfrm>
+          <a:prstGeom prst="rect">
+            <a:avLst/>
+          </a:prstGeom>
+          <a:noFill/>
+        </p:spPr>
+        <p:txBody>
+          <a:bodyPr wrap="square">
+            <a:spAutoFit/>
+          </a:bodyPr>
+          <a:lstStyle/>
+          <a:p>
+            <a:pPr algn="l"/>
+            <a:r>
+              <a:rPr sz="1000" b="1" i="0">
+                <a:solidFill>
+                  <a:srgbClr val="C9A84C"/>
+                </a:solidFill>
+                <a:latin typeface="Barlow Condensed"/>
+              </a:rPr>
+              <a:t>Enterprise</a:t>
+            </a:r>
+          </a:p>
+        </p:txBody>
+      </p:sp>
+      <p:sp>
+        <p:nvSpPr>
           <p:cNvPr id="23" name="TextBox 22"/>
           <p:cNvSpPr txBox="1"/>
           <p:nvPr/>
         </p:nvSpPr>
         <p:spPr>
           <a:xfrm>
-            <a:off x="411480" y="4901184"/>
-            <a:ext cx="1828800" cy="274320"/>
+            <a:off x="2423160" y="4535424"/>
+            <a:ext cx="3657600" cy="274320"/>
           </a:xfrm>
           <a:prstGeom prst="rect">
             <a:avLst/>
@@ -11115,41 +13210,6 @@
           <a:p>
             <a:pPr algn="l"/>
             <a:r>
-              <a:rPr sz="1000" b="1" i="0">
-                <a:solidFill>
-                  <a:srgbClr val="C9A84C"/>
-                </a:solidFill>
-                <a:latin typeface="Barlow Condensed"/>
-              </a:rPr>
-              <a:t>Enterprise</a:t>
-            </a:r>
-          </a:p>
-        </p:txBody>
-      </p:sp>
-      <p:sp>
-        <p:nvSpPr>
-          <p:cNvPr id="24" name="TextBox 23"/>
-          <p:cNvSpPr txBox="1"/>
-          <p:nvPr/>
-        </p:nvSpPr>
-        <p:spPr>
-          <a:xfrm>
-            <a:off x="2331720" y="4901184"/>
-            <a:ext cx="3749039" cy="274320"/>
-          </a:xfrm>
-          <a:prstGeom prst="rect">
-            <a:avLst/>
-          </a:prstGeom>
-          <a:noFill/>
-        </p:spPr>
-        <p:txBody>
-          <a:bodyPr wrap="square">
-            <a:spAutoFit/>
-          </a:bodyPr>
-          <a:lstStyle/>
-          <a:p>
-            <a:pPr algn="l"/>
-            <a:r>
               <a:rPr sz="1000" b="0" i="0">
                 <a:solidFill>
                   <a:srgbClr val="B4BED6"/>
@@ -11163,13 +13223,13 @@
       </p:sp>
       <p:sp>
         <p:nvSpPr>
-          <p:cNvPr id="25" name="Rectangle 24"/>
+          <p:cNvPr id="24" name="Rectangle 23"/>
           <p:cNvSpPr/>
           <p:nvPr/>
         </p:nvSpPr>
         <p:spPr>
           <a:xfrm>
-            <a:off x="411480" y="5157216"/>
+            <a:off x="411480" y="4791456"/>
             <a:ext cx="5577840" cy="10972"/>
           </a:xfrm>
           <a:prstGeom prst="rect">
@@ -11206,7 +13266,7 @@
       </p:sp>
       <p:sp>
         <p:nvSpPr>
-          <p:cNvPr id="26" name="Rectangle 25"/>
+          <p:cNvPr id="25" name="Rectangle 24"/>
           <p:cNvSpPr/>
           <p:nvPr/>
         </p:nvSpPr>
@@ -11249,7 +13309,7 @@
       </p:sp>
       <p:sp>
         <p:nvSpPr>
-          <p:cNvPr id="27" name="TextBox 26"/>
+          <p:cNvPr id="26" name="TextBox 25"/>
           <p:cNvSpPr txBox="1"/>
           <p:nvPr/>
         </p:nvSpPr>
@@ -11277,14 +13337,14 @@
                 </a:solidFill>
                 <a:latin typeface="Georgia"/>
               </a:rPr>
-              <a:t>"We are not asking enterprises to invent new budget. We are replacing existing response spend with a repeatable operating model that compounds in value with every activation."</a:t>
-            </a:r>
-          </a:p>
-        </p:txBody>
-      </p:sp>
-      <p:sp>
-        <p:nvSpPr>
-          <p:cNvPr id="28" name="Rectangle 27"/>
+              <a:t>"We are not asking CFOs to find net-new budget in a tight economy. We are converting that wasteful, panic-driven spend into repeatable software infrastructure that generates immediate, compounding ROI."</a:t>
+            </a:r>
+          </a:p>
+        </p:txBody>
+      </p:sp>
+      <p:sp>
+        <p:nvSpPr>
+          <p:cNvPr id="27" name="Rectangle 26"/>
           <p:cNvSpPr/>
           <p:nvPr/>
         </p:nvSpPr>
@@ -11327,7 +13387,7 @@
       </p:sp>
       <p:sp>
         <p:nvSpPr>
-          <p:cNvPr id="29" name="Rectangle 28"/>
+          <p:cNvPr id="28" name="Rectangle 27"/>
           <p:cNvSpPr/>
           <p:nvPr/>
         </p:nvSpPr>
@@ -11370,7 +13430,7 @@
       </p:sp>
       <p:pic>
         <p:nvPicPr>
-          <p:cNvPr id="30" name="Picture 29" descr="wow_roi_results.jpg"/>
+          <p:cNvPr id="29" name="Picture 28" descr="wow_roi_results.jpg"/>
           <p:cNvPicPr>
             <a:picLocks noChangeAspect="1"/>
           </p:cNvPicPr>
@@ -11394,7 +13454,7 @@
       </p:pic>
       <p:sp>
         <p:nvSpPr>
-          <p:cNvPr id="31" name="Rectangle 30"/>
+          <p:cNvPr id="30" name="Rectangle 29"/>
           <p:cNvSpPr/>
           <p:nvPr/>
         </p:nvSpPr>
@@ -11910,7 +13970,162 @@
         </p:nvSpPr>
         <p:spPr>
           <a:xfrm>
-            <a:off x="411480" y="3108960"/>
+            <a:off x="411480" y="3012948"/>
+            <a:ext cx="5669280" cy="365760"/>
+          </a:xfrm>
+          <a:prstGeom prst="rect">
+            <a:avLst/>
+          </a:prstGeom>
+          <a:noFill/>
+        </p:spPr>
+        <p:txBody>
+          <a:bodyPr wrap="square">
+            <a:spAutoFit/>
+          </a:bodyPr>
+          <a:lstStyle/>
+          <a:p>
+            <a:r>
+              <a:rPr sz="1200">
+                <a:solidFill>
+                  <a:srgbClr val="FFFFFF"/>
+                </a:solidFill>
+                <a:latin typeface="Barlow Condensed"/>
+              </a:rPr>
+              <a:t>▶  Microsoft integration certification</a:t>
+            </a:r>
+          </a:p>
+        </p:txBody>
+      </p:sp>
+      <p:sp>
+        <p:nvSpPr>
+          <p:cNvPr id="15" name="Rectangle 14"/>
+          <p:cNvSpPr/>
+          <p:nvPr/>
+        </p:nvSpPr>
+        <p:spPr>
+          <a:xfrm>
+            <a:off x="411480" y="3127248"/>
+            <a:ext cx="5596128" cy="420624"/>
+          </a:xfrm>
+          <a:prstGeom prst="rect">
+            <a:avLst/>
+          </a:prstGeom>
+          <a:solidFill>
+            <a:srgbClr val="1A2452"/>
+          </a:solidFill>
+          <a:ln>
+            <a:noFill/>
+          </a:ln>
+        </p:spPr>
+        <p:style>
+          <a:lnRef idx="1">
+            <a:schemeClr val="accent1"/>
+          </a:lnRef>
+          <a:fillRef idx="3">
+            <a:schemeClr val="accent1"/>
+          </a:fillRef>
+          <a:effectRef idx="2">
+            <a:schemeClr val="accent1"/>
+          </a:effectRef>
+          <a:fontRef idx="minor">
+            <a:schemeClr val="lt1"/>
+          </a:fontRef>
+        </p:style>
+        <p:txBody>
+          <a:bodyPr rtlCol="0" anchor="ctr"/>
+          <a:lstStyle/>
+          <a:p>
+            <a:pPr algn="ctr"/>
+          </a:p>
+        </p:txBody>
+      </p:sp>
+      <p:sp>
+        <p:nvSpPr>
+          <p:cNvPr id="16" name="Rectangle 15"/>
+          <p:cNvSpPr/>
+          <p:nvPr/>
+        </p:nvSpPr>
+        <p:spPr>
+          <a:xfrm>
+            <a:off x="411480" y="3127248"/>
+            <a:ext cx="5596128" cy="23774"/>
+          </a:xfrm>
+          <a:prstGeom prst="rect">
+            <a:avLst/>
+          </a:prstGeom>
+          <a:solidFill>
+            <a:srgbClr val="C9A84C"/>
+          </a:solidFill>
+          <a:ln>
+            <a:noFill/>
+          </a:ln>
+        </p:spPr>
+        <p:style>
+          <a:lnRef idx="1">
+            <a:schemeClr val="accent1"/>
+          </a:lnRef>
+          <a:fillRef idx="3">
+            <a:schemeClr val="accent1"/>
+          </a:fillRef>
+          <a:effectRef idx="2">
+            <a:schemeClr val="accent1"/>
+          </a:effectRef>
+          <a:fontRef idx="minor">
+            <a:schemeClr val="lt1"/>
+          </a:fontRef>
+        </p:style>
+        <p:txBody>
+          <a:bodyPr rtlCol="0" anchor="ctr"/>
+          <a:lstStyle/>
+          <a:p>
+            <a:pPr algn="ctr"/>
+          </a:p>
+        </p:txBody>
+      </p:sp>
+      <p:sp>
+        <p:nvSpPr>
+          <p:cNvPr id="17" name="TextBox 16"/>
+          <p:cNvSpPr txBox="1"/>
+          <p:nvPr/>
+        </p:nvSpPr>
+        <p:spPr>
+          <a:xfrm>
+            <a:off x="548640" y="3163824"/>
+            <a:ext cx="5449824" cy="329184"/>
+          </a:xfrm>
+          <a:prstGeom prst="rect">
+            <a:avLst/>
+          </a:prstGeom>
+          <a:noFill/>
+        </p:spPr>
+        <p:txBody>
+          <a:bodyPr wrap="square">
+            <a:spAutoFit/>
+          </a:bodyPr>
+          <a:lstStyle/>
+          <a:p>
+            <a:pPr algn="l"/>
+            <a:r>
+              <a:rPr sz="950" b="1" i="0">
+                <a:solidFill>
+                  <a:srgbClr val="C9A84C"/>
+                </a:solidFill>
+                <a:latin typeface="Barlow Condensed"/>
+              </a:rPr>
+              <a:t>FOUNDING PARTNER COHORT  ·  12 SEATS  ·  FORMING NOW  ·  LIMITED AVAILABILITY</a:t>
+            </a:r>
+          </a:p>
+        </p:txBody>
+      </p:sp>
+      <p:sp>
+        <p:nvSpPr>
+          <p:cNvPr id="18" name="TextBox 17"/>
+          <p:cNvSpPr txBox="1"/>
+          <p:nvPr/>
+        </p:nvSpPr>
+        <p:spPr>
+          <a:xfrm>
+            <a:off x="411480" y="3675887"/>
             <a:ext cx="5669280" cy="201168"/>
           </a:xfrm>
           <a:prstGeom prst="rect">
@@ -11932,20 +14147,20 @@
                 </a:solidFill>
                 <a:latin typeface="Barlow Condensed"/>
               </a:rPr>
-              <a:t>18-MONTH RUNWAY</a:t>
-            </a:r>
-          </a:p>
-        </p:txBody>
-      </p:sp>
-      <p:sp>
-        <p:nvSpPr>
-          <p:cNvPr id="15" name="TextBox 14"/>
-          <p:cNvSpPr txBox="1"/>
-          <p:nvPr/>
-        </p:nvSpPr>
-        <p:spPr>
-          <a:xfrm>
-            <a:off x="411480" y="3310128"/>
+              <a:t>18-MONTH RUNWAY TO SERIES A</a:t>
+            </a:r>
+          </a:p>
+        </p:txBody>
+      </p:sp>
+      <p:sp>
+        <p:nvSpPr>
+          <p:cNvPr id="19" name="TextBox 18"/>
+          <p:cNvSpPr txBox="1"/>
+          <p:nvPr/>
+        </p:nvSpPr>
+        <p:spPr>
+          <a:xfrm>
+            <a:off x="411480" y="3877056"/>
             <a:ext cx="914400" cy="274320"/>
           </a:xfrm>
           <a:prstGeom prst="rect">
@@ -11974,13 +14189,13 @@
       </p:sp>
       <p:sp>
         <p:nvSpPr>
-          <p:cNvPr id="16" name="TextBox 15"/>
-          <p:cNvSpPr txBox="1"/>
-          <p:nvPr/>
-        </p:nvSpPr>
-        <p:spPr>
-          <a:xfrm>
-            <a:off x="1417320" y="3310128"/>
+          <p:cNvPr id="20" name="TextBox 19"/>
+          <p:cNvSpPr txBox="1"/>
+          <p:nvPr/>
+        </p:nvSpPr>
+        <p:spPr>
+          <a:xfrm>
+            <a:off x="1417320" y="3877056"/>
             <a:ext cx="4663440" cy="274320"/>
           </a:xfrm>
           <a:prstGeom prst="rect">
@@ -12009,13 +14224,13 @@
       </p:sp>
       <p:sp>
         <p:nvSpPr>
-          <p:cNvPr id="17" name="Rectangle 16"/>
+          <p:cNvPr id="21" name="Rectangle 20"/>
           <p:cNvSpPr/>
           <p:nvPr/>
         </p:nvSpPr>
         <p:spPr>
           <a:xfrm>
-            <a:off x="411480" y="3566160"/>
+            <a:off x="411480" y="4133088"/>
             <a:ext cx="5577840" cy="10972"/>
           </a:xfrm>
           <a:prstGeom prst="rect">
@@ -12052,13 +14267,13 @@
       </p:sp>
       <p:sp>
         <p:nvSpPr>
-          <p:cNvPr id="18" name="TextBox 17"/>
-          <p:cNvSpPr txBox="1"/>
-          <p:nvPr/>
-        </p:nvSpPr>
-        <p:spPr>
-          <a:xfrm>
-            <a:off x="411480" y="3648456"/>
+          <p:cNvPr id="22" name="TextBox 21"/>
+          <p:cNvSpPr txBox="1"/>
+          <p:nvPr/>
+        </p:nvSpPr>
+        <p:spPr>
+          <a:xfrm>
+            <a:off x="411480" y="4215384"/>
             <a:ext cx="914400" cy="274320"/>
           </a:xfrm>
           <a:prstGeom prst="rect">
@@ -12087,13 +14302,13 @@
       </p:sp>
       <p:sp>
         <p:nvSpPr>
-          <p:cNvPr id="19" name="TextBox 18"/>
-          <p:cNvSpPr txBox="1"/>
-          <p:nvPr/>
-        </p:nvSpPr>
-        <p:spPr>
-          <a:xfrm>
-            <a:off x="1417320" y="3648456"/>
+          <p:cNvPr id="23" name="TextBox 22"/>
+          <p:cNvSpPr txBox="1"/>
+          <p:nvPr/>
+        </p:nvSpPr>
+        <p:spPr>
+          <a:xfrm>
+            <a:off x="1417320" y="4215384"/>
             <a:ext cx="4663440" cy="274320"/>
           </a:xfrm>
           <a:prstGeom prst="rect">
@@ -12122,13 +14337,13 @@
       </p:sp>
       <p:sp>
         <p:nvSpPr>
-          <p:cNvPr id="20" name="Rectangle 19"/>
+          <p:cNvPr id="24" name="Rectangle 23"/>
           <p:cNvSpPr/>
           <p:nvPr/>
         </p:nvSpPr>
         <p:spPr>
           <a:xfrm>
-            <a:off x="411480" y="3904488"/>
+            <a:off x="411480" y="4471416"/>
             <a:ext cx="5577840" cy="10972"/>
           </a:xfrm>
           <a:prstGeom prst="rect">
@@ -12165,13 +14380,13 @@
       </p:sp>
       <p:sp>
         <p:nvSpPr>
-          <p:cNvPr id="21" name="TextBox 20"/>
-          <p:cNvSpPr txBox="1"/>
-          <p:nvPr/>
-        </p:nvSpPr>
-        <p:spPr>
-          <a:xfrm>
-            <a:off x="411480" y="3986784"/>
+          <p:cNvPr id="25" name="TextBox 24"/>
+          <p:cNvSpPr txBox="1"/>
+          <p:nvPr/>
+        </p:nvSpPr>
+        <p:spPr>
+          <a:xfrm>
+            <a:off x="411480" y="4553712"/>
             <a:ext cx="914400" cy="274320"/>
           </a:xfrm>
           <a:prstGeom prst="rect">
@@ -12200,13 +14415,13 @@
       </p:sp>
       <p:sp>
         <p:nvSpPr>
-          <p:cNvPr id="22" name="TextBox 21"/>
-          <p:cNvSpPr txBox="1"/>
-          <p:nvPr/>
-        </p:nvSpPr>
-        <p:spPr>
-          <a:xfrm>
-            <a:off x="1417320" y="3986784"/>
+          <p:cNvPr id="26" name="TextBox 25"/>
+          <p:cNvSpPr txBox="1"/>
+          <p:nvPr/>
+        </p:nvSpPr>
+        <p:spPr>
+          <a:xfrm>
+            <a:off x="1417320" y="4553712"/>
             <a:ext cx="4663440" cy="274320"/>
           </a:xfrm>
           <a:prstGeom prst="rect">
@@ -12235,13 +14450,13 @@
       </p:sp>
       <p:sp>
         <p:nvSpPr>
-          <p:cNvPr id="23" name="Rectangle 22"/>
+          <p:cNvPr id="27" name="Rectangle 26"/>
           <p:cNvSpPr/>
           <p:nvPr/>
         </p:nvSpPr>
         <p:spPr>
           <a:xfrm>
-            <a:off x="411480" y="4242816"/>
+            <a:off x="411480" y="4809744"/>
             <a:ext cx="5577840" cy="10972"/>
           </a:xfrm>
           <a:prstGeom prst="rect">
@@ -12278,13 +14493,13 @@
       </p:sp>
       <p:sp>
         <p:nvSpPr>
-          <p:cNvPr id="24" name="TextBox 23"/>
-          <p:cNvSpPr txBox="1"/>
-          <p:nvPr/>
-        </p:nvSpPr>
-        <p:spPr>
-          <a:xfrm>
-            <a:off x="411480" y="4325112"/>
+          <p:cNvPr id="28" name="TextBox 27"/>
+          <p:cNvSpPr txBox="1"/>
+          <p:nvPr/>
+        </p:nvSpPr>
+        <p:spPr>
+          <a:xfrm>
+            <a:off x="411480" y="4892040"/>
             <a:ext cx="914400" cy="274320"/>
           </a:xfrm>
           <a:prstGeom prst="rect">
@@ -12313,13 +14528,13 @@
       </p:sp>
       <p:sp>
         <p:nvSpPr>
-          <p:cNvPr id="25" name="TextBox 24"/>
-          <p:cNvSpPr txBox="1"/>
-          <p:nvPr/>
-        </p:nvSpPr>
-        <p:spPr>
-          <a:xfrm>
-            <a:off x="1417320" y="4325112"/>
+          <p:cNvPr id="29" name="TextBox 28"/>
+          <p:cNvSpPr txBox="1"/>
+          <p:nvPr/>
+        </p:nvSpPr>
+        <p:spPr>
+          <a:xfrm>
+            <a:off x="1417320" y="4892040"/>
             <a:ext cx="4663440" cy="274320"/>
           </a:xfrm>
           <a:prstGeom prst="rect">
@@ -12348,13 +14563,13 @@
       </p:sp>
       <p:sp>
         <p:nvSpPr>
-          <p:cNvPr id="26" name="Rectangle 25"/>
+          <p:cNvPr id="30" name="Rectangle 29"/>
           <p:cNvSpPr/>
           <p:nvPr/>
         </p:nvSpPr>
         <p:spPr>
           <a:xfrm>
-            <a:off x="411480" y="4581144"/>
+            <a:off x="411480" y="5148072"/>
             <a:ext cx="5577840" cy="10972"/>
           </a:xfrm>
           <a:prstGeom prst="rect">
@@ -12391,14 +14606,14 @@
       </p:sp>
       <p:sp>
         <p:nvSpPr>
-          <p:cNvPr id="27" name="Rectangle 26"/>
+          <p:cNvPr id="31" name="Rectangle 30"/>
           <p:cNvSpPr/>
           <p:nvPr/>
         </p:nvSpPr>
         <p:spPr>
           <a:xfrm>
-            <a:off x="411480" y="5157216"/>
-            <a:ext cx="5596128" cy="713232"/>
+            <a:off x="411480" y="5193792"/>
+            <a:ext cx="5596128" cy="658368"/>
           </a:xfrm>
           <a:prstGeom prst="rect">
             <a:avLst/>
@@ -12434,13 +14649,13 @@
       </p:sp>
       <p:sp>
         <p:nvSpPr>
-          <p:cNvPr id="28" name="Rectangle 27"/>
+          <p:cNvPr id="32" name="Rectangle 31"/>
           <p:cNvSpPr/>
           <p:nvPr/>
         </p:nvSpPr>
         <p:spPr>
           <a:xfrm>
-            <a:off x="411480" y="5157216"/>
+            <a:off x="411480" y="5193792"/>
             <a:ext cx="5596128" cy="23774"/>
           </a:xfrm>
           <a:prstGeom prst="rect">
@@ -12477,13 +14692,13 @@
       </p:sp>
       <p:sp>
         <p:nvSpPr>
-          <p:cNvPr id="29" name="TextBox 28"/>
-          <p:cNvSpPr txBox="1"/>
-          <p:nvPr/>
-        </p:nvSpPr>
-        <p:spPr>
-          <a:xfrm>
-            <a:off x="548640" y="5193792"/>
+          <p:cNvPr id="33" name="TextBox 32"/>
+          <p:cNvSpPr txBox="1"/>
+          <p:nvPr/>
+        </p:nvSpPr>
+        <p:spPr>
+          <a:xfrm>
+            <a:off x="548640" y="5230368"/>
             <a:ext cx="5449824" cy="256032"/>
           </a:xfrm>
           <a:prstGeom prst="rect">
@@ -12512,14 +14727,14 @@
       </p:sp>
       <p:sp>
         <p:nvSpPr>
-          <p:cNvPr id="30" name="TextBox 29"/>
-          <p:cNvSpPr txBox="1"/>
-          <p:nvPr/>
-        </p:nvSpPr>
-        <p:spPr>
-          <a:xfrm>
-            <a:off x="548640" y="5449824"/>
-            <a:ext cx="5449824" cy="365760"/>
+          <p:cNvPr id="34" name="TextBox 33"/>
+          <p:cNvSpPr txBox="1"/>
+          <p:nvPr/>
+        </p:nvSpPr>
+        <p:spPr>
+          <a:xfrm>
+            <a:off x="548640" y="5486400"/>
+            <a:ext cx="5449824" cy="310896"/>
           </a:xfrm>
           <a:prstGeom prst="rect">
             <a:avLst/>
@@ -12547,7 +14762,7 @@
       </p:sp>
       <p:sp>
         <p:nvSpPr>
-          <p:cNvPr id="31" name="Rectangle 30"/>
+          <p:cNvPr id="35" name="Rectangle 34"/>
           <p:cNvSpPr/>
           <p:nvPr/>
         </p:nvSpPr>
@@ -12590,7 +14805,7 @@
       </p:sp>
       <p:sp>
         <p:nvSpPr>
-          <p:cNvPr id="32" name="TextBox 31"/>
+          <p:cNvPr id="36" name="TextBox 35"/>
           <p:cNvSpPr txBox="1"/>
           <p:nvPr/>
         </p:nvSpPr>
@@ -12618,14 +14833,14 @@
                 </a:solidFill>
                 <a:latin typeface="Georgia"/>
               </a:rPr>
-              <a:t>"Every enterprise has AI capability. Very few have mobilization readiness. We built that layer. The response is ready before the trigger fires."</a:t>
-            </a:r>
-          </a:p>
-        </p:txBody>
-      </p:sp>
-      <p:sp>
-        <p:nvSpPr>
-          <p:cNvPr id="33" name="Rectangle 32"/>
+              <a:t>"The platform is live. The metrics are undeniable. We are 18 months from Series A ready. Let's build the future of fearless execution together."</a:t>
+            </a:r>
+          </a:p>
+        </p:txBody>
+      </p:sp>
+      <p:sp>
+        <p:nvSpPr>
+          <p:cNvPr id="37" name="Rectangle 36"/>
           <p:cNvSpPr/>
           <p:nvPr/>
         </p:nvSpPr>
@@ -12668,7 +14883,7 @@
       </p:sp>
       <p:sp>
         <p:nvSpPr>
-          <p:cNvPr id="34" name="Rectangle 33"/>
+          <p:cNvPr id="38" name="Rectangle 37"/>
           <p:cNvSpPr/>
           <p:nvPr/>
         </p:nvSpPr>
@@ -12711,7 +14926,7 @@
       </p:sp>
       <p:pic>
         <p:nvPicPr>
-          <p:cNvPr id="35" name="Picture 34" descr="wow_exec_brief.jpg"/>
+          <p:cNvPr id="39" name="Picture 38" descr="wow_exec_brief.jpg"/>
           <p:cNvPicPr>
             <a:picLocks noChangeAspect="1"/>
           </p:cNvPicPr>
@@ -12735,7 +14950,7 @@
       </p:pic>
       <p:sp>
         <p:nvSpPr>
-          <p:cNvPr id="36" name="Rectangle 35"/>
+          <p:cNvPr id="40" name="Rectangle 39"/>
           <p:cNvSpPr/>
           <p:nvPr/>
         </p:nvSpPr>
@@ -13102,4 +15317,324 @@
   </a:objectDefaults>
   <a:extraClrSchemeLst/>
 </a:theme>
+</file>
+
+<file path=ppt/theme/theme2.xml><?xml version="1.0" encoding="utf-8"?>
+<a:theme xmlns:a="http://schemas.openxmlformats.org/drawingml/2006/main" name="Office Theme">
+  <a:themeElements>
+    <a:clrScheme name="Office">
+      <a:dk1>
+        <a:sysClr val="windowText" lastClr="000000"/>
+      </a:dk1>
+      <a:lt1>
+        <a:sysClr val="window" lastClr="FFFFFF"/>
+      </a:lt1>
+      <a:dk2>
+        <a:srgbClr val="1F497D"/>
+      </a:dk2>
+      <a:lt2>
+        <a:srgbClr val="EEECE1"/>
+      </a:lt2>
+      <a:accent1>
+        <a:srgbClr val="4F81BD"/>
+      </a:accent1>
+      <a:accent2>
+        <a:srgbClr val="C0504D"/>
+      </a:accent2>
+      <a:accent3>
+        <a:srgbClr val="9BBB59"/>
+      </a:accent3>
+      <a:accent4>
+        <a:srgbClr val="8064A2"/>
+      </a:accent4>
+      <a:accent5>
+        <a:srgbClr val="4BACC6"/>
+      </a:accent5>
+      <a:accent6>
+        <a:srgbClr val="F79646"/>
+      </a:accent6>
+      <a:hlink>
+        <a:srgbClr val="0000FF"/>
+      </a:hlink>
+      <a:folHlink>
+        <a:srgbClr val="800080"/>
+      </a:folHlink>
+    </a:clrScheme>
+    <a:fontScheme name="Office">
+      <a:majorFont>
+        <a:latin typeface="Calibri"/>
+        <a:ea typeface=""/>
+        <a:cs typeface=""/>
+        <a:font script="Jpan" typeface="ＭＳ Ｐゴシック"/>
+        <a:font script="Hang" typeface="맑은 고딕"/>
+        <a:font script="Hans" typeface="宋体"/>
+        <a:font script="Hant" typeface="新細明體"/>
+        <a:font script="Arab" typeface="Times New Roman"/>
+        <a:font script="Hebr" typeface="Times New Roman"/>
+        <a:font script="Thai" typeface="Angsana New"/>
+        <a:font script="Ethi" typeface="Nyala"/>
+        <a:font script="Beng" typeface="Vrinda"/>
+        <a:font script="Gujr" typeface="Shruti"/>
+        <a:font script="Khmr" typeface="MoolBoran"/>
+        <a:font script="Knda" typeface="Tunga"/>
+        <a:font script="Guru" typeface="Raavi"/>
+        <a:font script="Cans" typeface="Euphemia"/>
+        <a:font script="Cher" typeface="Plantagenet Cherokee"/>
+        <a:font script="Yiii" typeface="Microsoft Yi Baiti"/>
+        <a:font script="Tibt" typeface="Microsoft Himalaya"/>
+        <a:font script="Thaa" typeface="MV Boli"/>
+        <a:font script="Deva" typeface="Mangal"/>
+        <a:font script="Telu" typeface="Gautami"/>
+        <a:font script="Taml" typeface="Latha"/>
+        <a:font script="Syrc" typeface="Estrangelo Edessa"/>
+        <a:font script="Orya" typeface="Kalinga"/>
+        <a:font script="Mlym" typeface="Kartika"/>
+        <a:font script="Laoo" typeface="DokChampa"/>
+        <a:font script="Sinh" typeface="Iskoola Pota"/>
+        <a:font script="Mong" typeface="Mongolian Baiti"/>
+        <a:font script="Viet" typeface="Times New Roman"/>
+        <a:font script="Uigh" typeface="Microsoft Uighur"/>
+        <a:font script="Geor" typeface="Sylfaen"/>
+      </a:majorFont>
+      <a:minorFont>
+        <a:latin typeface="Calibri"/>
+        <a:ea typeface=""/>
+        <a:cs typeface=""/>
+        <a:font script="Jpan" typeface="ＭＳ Ｐゴシック"/>
+        <a:font script="Hang" typeface="맑은 고딕"/>
+        <a:font script="Hans" typeface="宋体"/>
+        <a:font script="Hant" typeface="新細明體"/>
+        <a:font script="Arab" typeface="Arial"/>
+        <a:font script="Hebr" typeface="Arial"/>
+        <a:font script="Thai" typeface="Cordia New"/>
+        <a:font script="Ethi" typeface="Nyala"/>
+        <a:font script="Beng" typeface="Vrinda"/>
+        <a:font script="Gujr" typeface="Shruti"/>
+        <a:font script="Khmr" typeface="DaunPenh"/>
+        <a:font script="Knda" typeface="Tunga"/>
+        <a:font script="Guru" typeface="Raavi"/>
+        <a:font script="Cans" typeface="Euphemia"/>
+        <a:font script="Cher" typeface="Plantagenet Cherokee"/>
+        <a:font script="Yiii" typeface="Microsoft Yi Baiti"/>
+        <a:font script="Tibt" typeface="Microsoft Himalaya"/>
+        <a:font script="Thaa" typeface="MV Boli"/>
+        <a:font script="Deva" typeface="Mangal"/>
+        <a:font script="Telu" typeface="Gautami"/>
+        <a:font script="Taml" typeface="Latha"/>
+        <a:font script="Syrc" typeface="Estrangelo Edessa"/>
+        <a:font script="Orya" typeface="Kalinga"/>
+        <a:font script="Mlym" typeface="Kartika"/>
+        <a:font script="Laoo" typeface="DokChampa"/>
+        <a:font script="Sinh" typeface="Iskoola Pota"/>
+        <a:font script="Mong" typeface="Mongolian Baiti"/>
+        <a:font script="Viet" typeface="Arial"/>
+        <a:font script="Uigh" typeface="Microsoft Uighur"/>
+        <a:font script="Geor" typeface="Sylfaen"/>
+      </a:minorFont>
+    </a:fontScheme>
+    <a:fmtScheme name="Office">
+      <a:fillStyleLst>
+        <a:solidFill>
+          <a:schemeClr val="phClr"/>
+        </a:solidFill>
+        <a:gradFill rotWithShape="1">
+          <a:gsLst>
+            <a:gs pos="0">
+              <a:schemeClr val="phClr">
+                <a:tint val="50000"/>
+                <a:satMod val="300000"/>
+              </a:schemeClr>
+            </a:gs>
+            <a:gs pos="35000">
+              <a:schemeClr val="phClr">
+                <a:tint val="37000"/>
+                <a:satMod val="300000"/>
+              </a:schemeClr>
+            </a:gs>
+            <a:gs pos="100000">
+              <a:schemeClr val="phClr">
+                <a:tint val="15000"/>
+                <a:satMod val="350000"/>
+              </a:schemeClr>
+            </a:gs>
+          </a:gsLst>
+          <a:lin ang="16200000" scaled="1"/>
+        </a:gradFill>
+        <a:gradFill rotWithShape="1">
+          <a:gsLst>
+            <a:gs pos="0">
+              <a:schemeClr val="phClr">
+                <a:tint val="100000"/>
+                <a:shade val="100000"/>
+                <a:satMod val="130000"/>
+              </a:schemeClr>
+            </a:gs>
+            <a:gs pos="100000">
+              <a:schemeClr val="phClr">
+                <a:tint val="50000"/>
+                <a:shade val="100000"/>
+                <a:satMod val="350000"/>
+              </a:schemeClr>
+            </a:gs>
+          </a:gsLst>
+          <a:lin ang="16200000" scaled="0"/>
+        </a:gradFill>
+      </a:fillStyleLst>
+      <a:lnStyleLst>
+        <a:ln w="9525" cap="flat" cmpd="sng" algn="ctr">
+          <a:solidFill>
+            <a:schemeClr val="phClr">
+              <a:shade val="95000"/>
+              <a:satMod val="105000"/>
+            </a:schemeClr>
+          </a:solidFill>
+          <a:prstDash val="solid"/>
+        </a:ln>
+        <a:ln w="25400" cap="flat" cmpd="sng" algn="ctr">
+          <a:solidFill>
+            <a:schemeClr val="phClr"/>
+          </a:solidFill>
+          <a:prstDash val="solid"/>
+        </a:ln>
+        <a:ln w="38100" cap="flat" cmpd="sng" algn="ctr">
+          <a:solidFill>
+            <a:schemeClr val="phClr"/>
+          </a:solidFill>
+          <a:prstDash val="solid"/>
+        </a:ln>
+      </a:lnStyleLst>
+      <a:effectStyleLst>
+        <a:effectStyle>
+          <a:effectLst>
+            <a:outerShdw blurRad="40000" dist="20000" dir="5400000" rotWithShape="0">
+              <a:srgbClr val="000000">
+                <a:alpha val="38000"/>
+              </a:srgbClr>
+            </a:outerShdw>
+          </a:effectLst>
+        </a:effectStyle>
+        <a:effectStyle>
+          <a:effectLst>
+            <a:outerShdw blurRad="40000" dist="23000" dir="5400000" rotWithShape="0">
+              <a:srgbClr val="000000">
+                <a:alpha val="35000"/>
+              </a:srgbClr>
+            </a:outerShdw>
+          </a:effectLst>
+        </a:effectStyle>
+        <a:effectStyle>
+          <a:effectLst>
+            <a:outerShdw blurRad="40000" dist="23000" dir="5400000" rotWithShape="0">
+              <a:srgbClr val="000000">
+                <a:alpha val="35000"/>
+              </a:srgbClr>
+            </a:outerShdw>
+          </a:effectLst>
+          <a:scene3d>
+            <a:camera prst="orthographicFront">
+              <a:rot lat="0" lon="0" rev="0"/>
+            </a:camera>
+            <a:lightRig rig="threePt" dir="t">
+              <a:rot lat="0" lon="0" rev="1200000"/>
+            </a:lightRig>
+          </a:scene3d>
+          <a:sp3d>
+            <a:bevelT w="63500" h="25400"/>
+          </a:sp3d>
+        </a:effectStyle>
+      </a:effectStyleLst>
+      <a:bgFillStyleLst>
+        <a:solidFill>
+          <a:schemeClr val="phClr"/>
+        </a:solidFill>
+        <a:gradFill rotWithShape="1">
+          <a:gsLst>
+            <a:gs pos="0">
+              <a:schemeClr val="phClr">
+                <a:tint val="40000"/>
+                <a:satMod val="350000"/>
+              </a:schemeClr>
+            </a:gs>
+            <a:gs pos="40000">
+              <a:schemeClr val="phClr">
+                <a:tint val="45000"/>
+                <a:shade val="99000"/>
+                <a:satMod val="350000"/>
+              </a:schemeClr>
+            </a:gs>
+            <a:gs pos="100000">
+              <a:schemeClr val="phClr">
+                <a:shade val="20000"/>
+                <a:satMod val="255000"/>
+              </a:schemeClr>
+            </a:gs>
+          </a:gsLst>
+          <a:path path="circle">
+            <a:fillToRect l="50000" t="-80000" r="50000" b="180000"/>
+          </a:path>
+        </a:gradFill>
+        <a:gradFill rotWithShape="1">
+          <a:gsLst>
+            <a:gs pos="0">
+              <a:schemeClr val="phClr">
+                <a:tint val="80000"/>
+                <a:satMod val="300000"/>
+              </a:schemeClr>
+            </a:gs>
+            <a:gs pos="100000">
+              <a:schemeClr val="phClr">
+                <a:shade val="30000"/>
+                <a:satMod val="200000"/>
+              </a:schemeClr>
+            </a:gs>
+          </a:gsLst>
+          <a:path path="circle">
+            <a:fillToRect l="50000" t="50000" r="50000" b="50000"/>
+          </a:path>
+        </a:gradFill>
+      </a:bgFillStyleLst>
+    </a:fmtScheme>
+  </a:themeElements>
+  <a:objectDefaults>
+    <a:spDef>
+      <a:spPr/>
+      <a:bodyPr/>
+      <a:lstStyle/>
+      <a:style>
+        <a:lnRef idx="1">
+          <a:schemeClr val="accent1"/>
+        </a:lnRef>
+        <a:fillRef idx="3">
+          <a:schemeClr val="accent1"/>
+        </a:fillRef>
+        <a:effectRef idx="2">
+          <a:schemeClr val="accent1"/>
+        </a:effectRef>
+        <a:fontRef idx="minor">
+          <a:schemeClr val="lt1"/>
+        </a:fontRef>
+      </a:style>
+    </a:spDef>
+    <a:lnDef>
+      <a:spPr/>
+      <a:bodyPr/>
+      <a:lstStyle/>
+      <a:style>
+        <a:lnRef idx="2">
+          <a:schemeClr val="accent1"/>
+        </a:lnRef>
+        <a:fillRef idx="0">
+          <a:schemeClr val="accent1"/>
+        </a:fillRef>
+        <a:effectRef idx="1">
+          <a:schemeClr val="accent1"/>
+        </a:effectRef>
+        <a:fontRef idx="minor">
+          <a:schemeClr val="tx1"/>
+        </a:fontRef>
+      </a:style>
+    </a:lnDef>
+  </a:objectDefaults>
+  <a:extraClrSchemeLst/>
+</a:theme>
 </file>
--- a/attached_assets/VaughnMartin-Investor-Deck-v13-final.pptx
+++ b/attached_assets/VaughnMartin-Investor-Deck-v13-final.pptx
@@ -516,13 +516,13 @@
           </a:p>
           <a:p>
             <a:r>
-              <a:t>"Every company in your portfolio has built an AI stack to process information faster. Yet when a critical strategic trigger fires, it still takes 30 days of committee meetings to do anything. We engineered the operating model that closes that gap permanently — a 3,600× execution head start."</a:t>
+              <a:t>"Every company in your portfolio has built an AI stack. Yet when a critical strategic trigger fires, it still takes 30 days of committee meetings to act. We engineered the operating model that closes that gap — a 3,600× execution head start."</a:t>
             </a:r>
           </a:p>
           <a:p/>
           <a:p>
             <a:r>
-              <a:t>KEY FRAME: This is NOT an efficiency tool. It is a defense AND offense system for a volatile world.</a:t>
+              <a:t>FRAME: NOT an efficiency tool. Defense + offense system for a volatile world.</a:t>
             </a:r>
           </a:p>
         </p:txBody>
@@ -597,13 +597,13 @@
           </a:p>
           <a:p>
             <a:r>
-              <a:t>"The market thinks companies have a strategy problem. They don't. They have an architecture problem. When a breach or activist strike happens, leadership spends the first two to three weeks figuring out who has authority to act. That 30-day delay is an existential window — activists, regulators, and competitors completely own it."</a:t>
+              <a:t>"The market thinks companies have a strategy problem. They don't. They have an architecture problem. That 30-day delay is an existential window — and competitors completely own it."</a:t>
             </a:r>
           </a:p>
           <a:p/>
           <a:p>
             <a:r>
-              <a:t>POINT TO VISUAL: Detection &lt; 1 second. Mobilization 30 days. "We built the infrastructure that eliminates that gap."</a:t>
+              <a:t>POINT TO VISUAL: Detection &lt;1 second. Mobilization 30 days. "We built the infrastructure that eliminates that gap permanently."</a:t>
             </a:r>
           </a:p>
         </p:txBody>
@@ -678,7 +678,7 @@
           </a:p>
           <a:p>
             <a:r>
-              <a:t>"I am the only person in enterprise software who has operated at the intersection of Fortune 500 transformation and major college football preparation at this depth. At Stanford you don't design the play after the ball is snapped. The response is pre-staged before the pressure arrives. I watched that discipline completely missing from enterprise. VaughnMartin closes that gap permanently."</a:t>
+              <a:t>"I am the only person in enterprise software who has operated at the intersection of Fortune 500 transformation and major college football preparation at this depth. At Stanford you don't design the play after the snap — the response is pre-staged. VaughnMartin closes that gap permanently."</a:t>
             </a:r>
           </a:p>
         </p:txBody>
@@ -753,16 +753,15 @@
           </a:p>
           <a:p>
             <a:r>
-              <a:t>"When a ransomware signal hits, the system doesn't autonomously execute. In less than 120 seconds, it delivers a board-ready execution brief to the executive suite — pre-approved communication streams, mapped authority chain, pre-assigned tasks. The AI monitors, but humans decide. We turn 30 days of unmanaged chaos and a potential $47M penalty into a controlled, 12-minute executive sign-off."</a:t>
+              <a:t>"When a ransomware signal hits, the system delivers a board-ready execution brief in under 120 seconds. The AI monitors. Humans decide. 30 days of chaos becomes a 12-minute executive sign-off."</a:t>
             </a:r>
           </a:p>
           <a:p/>
           <a:p>
             <a:r>
-              <a:t>ONBOARDING: "They don't build 170 protocols from scratch. VaughnMartin ships with standard out-of-the-box protocols. Onboarding is configuration — not a consulting project. 90 days to live."</a:t>
-            </a:r>
-          </a:p>
-          <a:p/>
+              <a:t>ONBOARDING: "Onboarding is configuration — not a consulting project."</a:t>
+            </a:r>
+          </a:p>
           <a:p>
             <a:r>
               <a:t>KEY LINE: "The system stages the choice in seconds. The executive must click authorize."</a:t>
@@ -840,18 +839,18 @@
           </a:p>
           <a:p>
             <a:r>
-              <a:t>"VaughnMartin is the orchestration layer that pre-stages the alignment before any competitor is even called. The data moat becomes completely unassailable over time."</a:t>
+              <a:t>"VaughnMartin is the orchestration layer that pre-stages the alignment before any competitor is even called."</a:t>
             </a:r>
           </a:p>
           <a:p/>
           <a:p>
             <a:r>
-              <a:t>FATAL TRAP: "Can't ServiceNow just add this?"</a:t>
-            </a:r>
-          </a:p>
-          <a:p>
-            <a:r>
-              <a:t>ANSWER: "No. ServiceNow is an asynchronous ticketing router built for post-alignment execution. VaughnMartin is a synchronous readiness engine that pre-stages the organizational alignment itself. They track the work. We engineer the capability to do it."</a:t>
+              <a:t>FATAL TRAP — "Can't ServiceNow add this?"</a:t>
+            </a:r>
+          </a:p>
+          <a:p>
+            <a:r>
+              <a:t>ANSWER: "No. ServiceNow is an async ticketing router for post-alignment execution. VaughnMartin is a synchronous readiness engine that pre-stages the alignment itself. They track the work. We engineer the capability to do it."</a:t>
             </a:r>
           </a:p>
         </p:txBody>
@@ -926,13 +925,13 @@
           </a:p>
           <a:p>
             <a:r>
-              <a:t>"When a ransomware signal hits, in less than 120 seconds the system delivers a board-ready execution brief — pre-approved communications, mapped authority chain, pre-assigned tasks. The AI monitors. Humans decide. 30 days of chaos becomes a 12-minute executive sign-off."</a:t>
+              <a:t>"When a ransomware signal hits, in under 120 seconds the system delivers a board-ready execution brief — pre-approved communications, mapped authority chain, pre-assigned tasks. The AI monitors. Humans decide."</a:t>
             </a:r>
           </a:p>
           <a:p/>
           <a:p>
             <a:r>
-              <a:t>SAY EXPLICITLY: "The system stages the choice in seconds. The executive must click authorize." Every time.</a:t>
+              <a:t>SAY EXPLICITLY: "The system stages the choice in seconds. The executive must click authorize."</a:t>
             </a:r>
           </a:p>
         </p:txBody>
@@ -1007,13 +1006,13 @@
           </a:p>
           <a:p>
             <a:r>
-              <a:t>"Pull out your phone right now. Go to vaughnmartin.com/how-it-executes. Watch the complete 12-minute execution chain run live. Then run a scenario yourself on the 12-Minute Test Drive. This is not a roadmap concept. It is live and testable today."</a:t>
+              <a:t>"Pull out your phone. Go to vaughnmartin.com/how-it-executes. Watch the complete 12-minute execution chain run live. This is not a roadmap concept — it is live and testable today."</a:t>
             </a:r>
           </a:p>
           <a:p/>
           <a:p>
             <a:r>
-              <a:t>KEY LINE: "Same trigger. Same company. Entirely different outcome." Point to the side-by-side comparison.</a:t>
+              <a:t>KEY: "Same trigger. Same company. Entirely different outcome."</a:t>
             </a:r>
           </a:p>
         </p:txBody>
@@ -1088,7 +1087,7 @@
           </a:p>
           <a:p>
             <a:r>
-              <a:t>"We aren't asking CFOs to dig up net-new budget. Enterprises are already burning millions on reactive, post-trigger consulting retainers. We are converting that wasteful, panic-driven spend into repeatable software infrastructure. The $75K Founding Partner fee is not an expense — it is a trivial reallocation of waste that already exists in the budget."</a:t>
+              <a:t>"We aren't asking CFOs to dig up net-new budget. Enterprises are already burning millions on reactive, post-trigger consulting retainers. The $75K Founding Partner fee is a trivial reallocation of waste that already exists in the budget."</a:t>
             </a:r>
           </a:p>
         </p:txBody>
@@ -1163,7 +1162,7 @@
           </a:p>
           <a:p>
             <a:r>
-              <a:t>"We are raising up to $1,000,000 to harden enterprise access controls, certify our Microsoft integrations, and convert our initial Founding Partner cohort into recurring enterprise contracts. We are pioneering an entirely new software layer: Preparation Infrastructure. The platform is live, the metrics are undeniable, and we are built to be Series A ready in 18 months. This is a limited ticket onto a fast-moving train. Let's build the future of fearless execution together."</a:t>
+              <a:t>"We are raising up to $1,000,000 to harden enterprise access controls, certify our Microsoft integrations, and convert our Founding Partner cohort into recurring enterprise contracts. The platform is live. 18 months to Series A ready. This is a limited ticket onto a fast-moving train. Let's build the future of fearless execution together."</a:t>
             </a:r>
           </a:p>
           <a:p/>
@@ -4171,7 +4170,7 @@
     <p:bg>
       <p:bgPr>
         <a:solidFill>
-          <a:srgbClr val="0A0F2E"/>
+          <a:srgbClr val="05081E"/>
         </a:solidFill>
         <a:effectLst/>
       </p:bgPr>
@@ -4192,49 +4191,6 @@
         <p:spPr>
           <a:xfrm>
             <a:off x="0" y="0"/>
-            <a:ext cx="12188952" cy="6858000"/>
-          </a:xfrm>
-          <a:prstGeom prst="rect">
-            <a:avLst/>
-          </a:prstGeom>
-          <a:solidFill>
-            <a:srgbClr val="080C22"/>
-          </a:solidFill>
-          <a:ln>
-            <a:noFill/>
-          </a:ln>
-        </p:spPr>
-        <p:style>
-          <a:lnRef idx="1">
-            <a:schemeClr val="accent1"/>
-          </a:lnRef>
-          <a:fillRef idx="3">
-            <a:schemeClr val="accent1"/>
-          </a:fillRef>
-          <a:effectRef idx="2">
-            <a:schemeClr val="accent1"/>
-          </a:effectRef>
-          <a:fontRef idx="minor">
-            <a:schemeClr val="lt1"/>
-          </a:fontRef>
-        </p:style>
-        <p:txBody>
-          <a:bodyPr rtlCol="0" anchor="ctr"/>
-          <a:lstStyle/>
-          <a:p>
-            <a:pPr algn="ctr"/>
-          </a:p>
-        </p:txBody>
-      </p:sp>
-      <p:sp>
-        <p:nvSpPr>
-          <p:cNvPr id="3" name="Rectangle 2"/>
-          <p:cNvSpPr/>
-          <p:nvPr/>
-        </p:nvSpPr>
-        <p:spPr>
-          <a:xfrm>
-            <a:off x="0" y="0"/>
             <a:ext cx="50292" cy="6858000"/>
           </a:xfrm>
           <a:prstGeom prst="rect">
@@ -4271,20 +4227,20 @@
       </p:sp>
       <p:sp>
         <p:nvSpPr>
-          <p:cNvPr id="4" name="Rectangle 3"/>
+          <p:cNvPr id="3" name="Rectangle 2"/>
           <p:cNvSpPr/>
           <p:nvPr/>
         </p:nvSpPr>
         <p:spPr>
           <a:xfrm>
-            <a:off x="7680960" y="0"/>
-            <a:ext cx="4507992" cy="6858000"/>
+            <a:off x="7790688" y="0"/>
+            <a:ext cx="4398264" cy="6858000"/>
           </a:xfrm>
           <a:prstGeom prst="rect">
             <a:avLst/>
           </a:prstGeom>
           <a:solidFill>
-            <a:srgbClr val="080D28"/>
+            <a:srgbClr val="070B24"/>
           </a:solidFill>
           <a:ln>
             <a:noFill/>
@@ -4314,7 +4270,7 @@
       </p:sp>
       <p:sp>
         <p:nvSpPr>
-          <p:cNvPr id="5" name="TextBox 4"/>
+          <p:cNvPr id="4" name="TextBox 3"/>
           <p:cNvSpPr txBox="1"/>
           <p:nvPr/>
         </p:nvSpPr>
@@ -4340,7 +4296,7 @@
                 <a:solidFill>
                   <a:srgbClr val="FFFFFF"/>
                 </a:solidFill>
-                <a:latin typeface="Barlow Condensed"/>
+                <a:latin typeface="Calibri"/>
               </a:rPr>
               <a:t>VaughnMartin</a:t>
             </a:r>
@@ -4349,14 +4305,14 @@
       </p:sp>
       <p:sp>
         <p:nvSpPr>
-          <p:cNvPr id="6" name="TextBox 5"/>
-          <p:cNvSpPr txBox="1"/>
-          <p:nvPr/>
-        </p:nvSpPr>
-        <p:spPr>
-          <a:xfrm>
-            <a:off x="475488" y="914400"/>
-            <a:ext cx="4572000" cy="256032"/>
+          <p:cNvPr id="5" name="TextBox 4"/>
+          <p:cNvSpPr txBox="1"/>
+          <p:nvPr/>
+        </p:nvSpPr>
+        <p:spPr>
+          <a:xfrm>
+            <a:off x="475488" y="950976"/>
+            <a:ext cx="4572000" cy="237744"/>
           </a:xfrm>
           <a:prstGeom prst="rect">
             <a:avLst/>
@@ -4375,7 +4331,7 @@
                 <a:solidFill>
                   <a:srgbClr val="C9A84C"/>
                 </a:solidFill>
-                <a:latin typeface="Barlow Condensed"/>
+                <a:latin typeface="Calibri"/>
               </a:rPr>
               <a:t>READINESS OS</a:t>
             </a:r>
@@ -4384,14 +4340,14 @@
       </p:sp>
       <p:sp>
         <p:nvSpPr>
-          <p:cNvPr id="7" name="Rectangle 6"/>
+          <p:cNvPr id="6" name="Rectangle 5"/>
           <p:cNvSpPr/>
           <p:nvPr/>
         </p:nvSpPr>
         <p:spPr>
           <a:xfrm>
-            <a:off x="475488" y="1261872"/>
-            <a:ext cx="4572000" cy="16459"/>
+            <a:off x="475488" y="1243584"/>
+            <a:ext cx="4389120" cy="9144"/>
           </a:xfrm>
           <a:prstGeom prst="rect">
             <a:avLst/>
@@ -4427,14 +4383,49 @@
       </p:sp>
       <p:sp>
         <p:nvSpPr>
+          <p:cNvPr id="7" name="TextBox 6"/>
+          <p:cNvSpPr txBox="1"/>
+          <p:nvPr/>
+        </p:nvSpPr>
+        <p:spPr>
+          <a:xfrm>
+            <a:off x="475488" y="1463040"/>
+            <a:ext cx="7132320" cy="950976"/>
+          </a:xfrm>
+          <a:prstGeom prst="rect">
+            <a:avLst/>
+          </a:prstGeom>
+          <a:noFill/>
+        </p:spPr>
+        <p:txBody>
+          <a:bodyPr wrap="square">
+            <a:spAutoFit/>
+          </a:bodyPr>
+          <a:lstStyle/>
+          <a:p>
+            <a:pPr algn="l"/>
+            <a:r>
+              <a:rPr sz="5000" b="0" i="0">
+                <a:solidFill>
+                  <a:srgbClr val="FFFFFF"/>
+                </a:solidFill>
+                <a:latin typeface="Georgia"/>
+              </a:rPr>
+              <a:t>The response is ready</a:t>
+            </a:r>
+          </a:p>
+        </p:txBody>
+      </p:sp>
+      <p:sp>
+        <p:nvSpPr>
           <p:cNvPr id="8" name="TextBox 7"/>
           <p:cNvSpPr txBox="1"/>
           <p:nvPr/>
         </p:nvSpPr>
         <p:spPr>
           <a:xfrm>
-            <a:off x="475488" y="1508760"/>
-            <a:ext cx="7040880" cy="1005840"/>
+            <a:off x="475488" y="2414016"/>
+            <a:ext cx="7132320" cy="950976"/>
           </a:xfrm>
           <a:prstGeom prst="rect">
             <a:avLst/>
@@ -4449,13 +4440,13 @@
           <a:p>
             <a:pPr algn="l"/>
             <a:r>
-              <a:rPr sz="5200" b="0" i="0">
-                <a:solidFill>
-                  <a:srgbClr val="FFFFFF"/>
+              <a:rPr sz="5000" b="0" i="1">
+                <a:solidFill>
+                  <a:srgbClr val="C9A84C"/>
                 </a:solidFill>
                 <a:latin typeface="Georgia"/>
               </a:rPr>
-              <a:t>The response is ready</a:t>
+              <a:t>before the trigger fires.</a:t>
             </a:r>
           </a:p>
         </p:txBody>
@@ -4468,8 +4459,8 @@
         </p:nvSpPr>
         <p:spPr>
           <a:xfrm>
-            <a:off x="475488" y="2423160"/>
-            <a:ext cx="7040880" cy="1005840"/>
+            <a:off x="475488" y="3493008"/>
+            <a:ext cx="6858000" cy="237744"/>
           </a:xfrm>
           <a:prstGeom prst="rect">
             <a:avLst/>
@@ -4484,13 +4475,13 @@
           <a:p>
             <a:pPr algn="l"/>
             <a:r>
-              <a:rPr sz="5200" b="0" i="1">
-                <a:solidFill>
-                  <a:srgbClr val="C9A84C"/>
-                </a:solidFill>
-                <a:latin typeface="Georgia"/>
-              </a:rPr>
-              <a:t>before the trigger fires.</a:t>
+              <a:rPr sz="950" b="1" i="0">
+                <a:solidFill>
+                  <a:srgbClr val="AAB4CC"/>
+                </a:solidFill>
+                <a:latin typeface="Calibri"/>
+              </a:rPr>
+              <a:t>PREPARATION INFRASTRUCTURE FOR A VOLATILE WORLD</a:t>
             </a:r>
           </a:p>
         </p:txBody>
@@ -4503,8 +4494,8 @@
         </p:nvSpPr>
         <p:spPr>
           <a:xfrm>
-            <a:off x="475488" y="3520440"/>
-            <a:ext cx="6858000" cy="256032"/>
+            <a:off x="475488" y="3767328"/>
+            <a:ext cx="6766560" cy="237744"/>
           </a:xfrm>
           <a:prstGeom prst="rect">
             <a:avLst/>
@@ -4519,62 +4510,27 @@
           <a:p>
             <a:pPr algn="l"/>
             <a:r>
-              <a:rPr sz="950" b="1" i="0">
-                <a:solidFill>
-                  <a:srgbClr val="B4BED6"/>
-                </a:solidFill>
-                <a:latin typeface="Barlow Condensed"/>
-              </a:rPr>
-              <a:t>PREPARATION INFRASTRUCTURE FOR A VOLATILE WORLD</a:t>
-            </a:r>
-          </a:p>
-        </p:txBody>
-      </p:sp>
-      <p:sp>
-        <p:nvSpPr>
-          <p:cNvPr id="11" name="TextBox 10"/>
-          <p:cNvSpPr txBox="1"/>
-          <p:nvPr/>
-        </p:nvSpPr>
-        <p:spPr>
-          <a:xfrm>
-            <a:off x="475488" y="3803904"/>
-            <a:ext cx="6766560" cy="256032"/>
-          </a:xfrm>
-          <a:prstGeom prst="rect">
-            <a:avLst/>
-          </a:prstGeom>
-          <a:noFill/>
-        </p:spPr>
-        <p:txBody>
-          <a:bodyPr wrap="square">
-            <a:spAutoFit/>
-          </a:bodyPr>
-          <a:lstStyle/>
-          <a:p>
-            <a:pPr algn="l"/>
-            <a:r>
               <a:rPr sz="900" b="0" i="0">
                 <a:solidFill>
-                  <a:srgbClr val="B4BED6"/>
-                </a:solidFill>
-                <a:latin typeface="Barlow Condensed"/>
-              </a:rPr>
-              <a:t>Defense + Offense. Startup to Fortune 500. Pre-staged before the trigger fires.</a:t>
-            </a:r>
-          </a:p>
-        </p:txBody>
-      </p:sp>
-      <p:sp>
-        <p:nvSpPr>
-          <p:cNvPr id="12" name="Rectangle 11"/>
+                  <a:srgbClr val="AAB4CC"/>
+                </a:solidFill>
+                <a:latin typeface="Calibri"/>
+              </a:rPr>
+              <a:t>Defense + Offense.  Startup to Fortune 500.  Pre-staged before the trigger fires.</a:t>
+            </a:r>
+          </a:p>
+        </p:txBody>
+      </p:sp>
+      <p:sp>
+        <p:nvSpPr>
+          <p:cNvPr id="11" name="Rectangle 10"/>
           <p:cNvSpPr/>
           <p:nvPr/>
         </p:nvSpPr>
         <p:spPr>
           <a:xfrm>
-            <a:off x="475488" y="4096512"/>
-            <a:ext cx="6766560" cy="13716"/>
+            <a:off x="475488" y="4059936"/>
+            <a:ext cx="6675120" cy="9144"/>
           </a:xfrm>
           <a:prstGeom prst="rect">
             <a:avLst/>
@@ -4610,13 +4566,13 @@
       </p:sp>
       <p:sp>
         <p:nvSpPr>
-          <p:cNvPr id="13" name="TextBox 12"/>
-          <p:cNvSpPr txBox="1"/>
-          <p:nvPr/>
-        </p:nvSpPr>
-        <p:spPr>
-          <a:xfrm>
-            <a:off x="7909560" y="1097280"/>
+          <p:cNvPr id="12" name="TextBox 11"/>
+          <p:cNvSpPr txBox="1"/>
+          <p:nvPr/>
+        </p:nvSpPr>
+        <p:spPr>
+          <a:xfrm>
+            <a:off x="7936992" y="1115568"/>
             <a:ext cx="4023360" cy="219456"/>
           </a:xfrm>
           <a:prstGeom prst="rect">
@@ -4636,7 +4592,7 @@
                 <a:solidFill>
                   <a:srgbClr val="C9A84C"/>
                 </a:solidFill>
-                <a:latin typeface="Barlow Condensed"/>
+                <a:latin typeface="Calibri"/>
               </a:rPr>
               <a:t>INVESTOR BRIEF  ·  MAY 2026</a:t>
             </a:r>
@@ -4645,20 +4601,20 @@
       </p:sp>
       <p:sp>
         <p:nvSpPr>
-          <p:cNvPr id="14" name="Rectangle 13"/>
+          <p:cNvPr id="13" name="Rectangle 12"/>
           <p:cNvSpPr/>
           <p:nvPr/>
         </p:nvSpPr>
         <p:spPr>
           <a:xfrm>
-            <a:off x="7909560" y="1371600"/>
-            <a:ext cx="3840480" cy="10972"/>
+            <a:off x="7936992" y="1371600"/>
+            <a:ext cx="3749039" cy="9144"/>
           </a:xfrm>
           <a:prstGeom prst="rect">
             <a:avLst/>
           </a:prstGeom>
           <a:solidFill>
-            <a:srgbClr val="A08230"/>
+            <a:srgbClr val="9A7E2C"/>
           </a:solidFill>
           <a:ln>
             <a:noFill/>
@@ -4688,14 +4644,49 @@
       </p:sp>
       <p:sp>
         <p:nvSpPr>
+          <p:cNvPr id="14" name="TextBox 13"/>
+          <p:cNvSpPr txBox="1"/>
+          <p:nvPr/>
+        </p:nvSpPr>
+        <p:spPr>
+          <a:xfrm>
+            <a:off x="7936992" y="1572768"/>
+            <a:ext cx="3657600" cy="548640"/>
+          </a:xfrm>
+          <a:prstGeom prst="rect">
+            <a:avLst/>
+          </a:prstGeom>
+          <a:noFill/>
+        </p:spPr>
+        <p:txBody>
+          <a:bodyPr wrap="square">
+            <a:spAutoFit/>
+          </a:bodyPr>
+          <a:lstStyle/>
+          <a:p>
+            <a:pPr algn="l"/>
+            <a:r>
+              <a:rPr sz="3400" b="1" i="0">
+                <a:solidFill>
+                  <a:srgbClr val="C9A84C"/>
+                </a:solidFill>
+                <a:latin typeface="Calibri"/>
+              </a:rPr>
+              <a:t>170</a:t>
+            </a:r>
+          </a:p>
+        </p:txBody>
+      </p:sp>
+      <p:sp>
+        <p:nvSpPr>
           <p:cNvPr id="15" name="TextBox 14"/>
           <p:cNvSpPr txBox="1"/>
           <p:nvPr/>
         </p:nvSpPr>
         <p:spPr>
           <a:xfrm>
-            <a:off x="7909560" y="1572768"/>
-            <a:ext cx="3840480" cy="566928"/>
+            <a:off x="7936992" y="2157984"/>
+            <a:ext cx="3657600" cy="237744"/>
           </a:xfrm>
           <a:prstGeom prst="rect">
             <a:avLst/>
@@ -4710,46 +4701,11 @@
           <a:p>
             <a:pPr algn="l"/>
             <a:r>
-              <a:rPr sz="3400" b="1" i="0">
-                <a:solidFill>
-                  <a:srgbClr val="C9A84C"/>
-                </a:solidFill>
-                <a:latin typeface="Barlow Condensed"/>
-              </a:rPr>
-              <a:t>170</a:t>
-            </a:r>
-          </a:p>
-        </p:txBody>
-      </p:sp>
-      <p:sp>
-        <p:nvSpPr>
-          <p:cNvPr id="16" name="TextBox 15"/>
-          <p:cNvSpPr txBox="1"/>
-          <p:nvPr/>
-        </p:nvSpPr>
-        <p:spPr>
-          <a:xfrm>
-            <a:off x="7909560" y="2121408"/>
-            <a:ext cx="3840480" cy="256032"/>
-          </a:xfrm>
-          <a:prstGeom prst="rect">
-            <a:avLst/>
-          </a:prstGeom>
-          <a:noFill/>
-        </p:spPr>
-        <p:txBody>
-          <a:bodyPr wrap="square">
-            <a:spAutoFit/>
-          </a:bodyPr>
-          <a:lstStyle/>
-          <a:p>
-            <a:pPr algn="l"/>
-            <a:r>
               <a:rPr sz="900" b="0" i="0">
                 <a:solidFill>
-                  <a:srgbClr val="B4BED6"/>
-                </a:solidFill>
-                <a:latin typeface="Barlow Condensed"/>
+                  <a:srgbClr val="AAB4CC"/>
+                </a:solidFill>
+                <a:latin typeface="Calibri"/>
               </a:rPr>
               <a:t>Readiness Protocols pre-staged</a:t>
             </a:r>
@@ -4758,20 +4714,20 @@
       </p:sp>
       <p:sp>
         <p:nvSpPr>
-          <p:cNvPr id="17" name="Rectangle 16"/>
+          <p:cNvPr id="16" name="Rectangle 15"/>
           <p:cNvSpPr/>
           <p:nvPr/>
         </p:nvSpPr>
         <p:spPr>
           <a:xfrm>
-            <a:off x="7909560" y="2450591"/>
-            <a:ext cx="3840480" cy="10972"/>
+            <a:off x="7936992" y="2450591"/>
+            <a:ext cx="3749039" cy="9144"/>
           </a:xfrm>
           <a:prstGeom prst="rect">
             <a:avLst/>
           </a:prstGeom>
           <a:solidFill>
-            <a:srgbClr val="101842"/>
+            <a:srgbClr val="0E163C"/>
           </a:solidFill>
           <a:ln>
             <a:noFill/>
@@ -4801,14 +4757,49 @@
       </p:sp>
       <p:sp>
         <p:nvSpPr>
+          <p:cNvPr id="17" name="TextBox 16"/>
+          <p:cNvSpPr txBox="1"/>
+          <p:nvPr/>
+        </p:nvSpPr>
+        <p:spPr>
+          <a:xfrm>
+            <a:off x="7936992" y="2834639"/>
+            <a:ext cx="3657600" cy="548640"/>
+          </a:xfrm>
+          <a:prstGeom prst="rect">
+            <a:avLst/>
+          </a:prstGeom>
+          <a:noFill/>
+        </p:spPr>
+        <p:txBody>
+          <a:bodyPr wrap="square">
+            <a:spAutoFit/>
+          </a:bodyPr>
+          <a:lstStyle/>
+          <a:p>
+            <a:pPr algn="l"/>
+            <a:r>
+              <a:rPr sz="3400" b="1" i="0">
+                <a:solidFill>
+                  <a:srgbClr val="C9A84C"/>
+                </a:solidFill>
+                <a:latin typeface="Calibri"/>
+              </a:rPr>
+              <a:t>221</a:t>
+            </a:r>
+          </a:p>
+        </p:txBody>
+      </p:sp>
+      <p:sp>
+        <p:nvSpPr>
           <p:cNvPr id="18" name="TextBox 17"/>
           <p:cNvSpPr txBox="1"/>
           <p:nvPr/>
         </p:nvSpPr>
         <p:spPr>
           <a:xfrm>
-            <a:off x="7909560" y="2743200"/>
-            <a:ext cx="3840480" cy="566928"/>
+            <a:off x="7936992" y="3419856"/>
+            <a:ext cx="3657600" cy="237744"/>
           </a:xfrm>
           <a:prstGeom prst="rect">
             <a:avLst/>
@@ -4823,46 +4814,11 @@
           <a:p>
             <a:pPr algn="l"/>
             <a:r>
-              <a:rPr sz="3400" b="1" i="0">
-                <a:solidFill>
-                  <a:srgbClr val="C9A84C"/>
-                </a:solidFill>
-                <a:latin typeface="Barlow Condensed"/>
-              </a:rPr>
-              <a:t>221</a:t>
-            </a:r>
-          </a:p>
-        </p:txBody>
-      </p:sp>
-      <p:sp>
-        <p:nvSpPr>
-          <p:cNvPr id="19" name="TextBox 18"/>
-          <p:cNvSpPr txBox="1"/>
-          <p:nvPr/>
-        </p:nvSpPr>
-        <p:spPr>
-          <a:xfrm>
-            <a:off x="7909560" y="3291840"/>
-            <a:ext cx="3840480" cy="256032"/>
-          </a:xfrm>
-          <a:prstGeom prst="rect">
-            <a:avLst/>
-          </a:prstGeom>
-          <a:noFill/>
-        </p:spPr>
-        <p:txBody>
-          <a:bodyPr wrap="square">
-            <a:spAutoFit/>
-          </a:bodyPr>
-          <a:lstStyle/>
-          <a:p>
-            <a:pPr algn="l"/>
-            <a:r>
               <a:rPr sz="900" b="0" i="0">
                 <a:solidFill>
-                  <a:srgbClr val="B4BED6"/>
-                </a:solidFill>
-                <a:latin typeface="Barlow Condensed"/>
+                  <a:srgbClr val="AAB4CC"/>
+                </a:solidFill>
+                <a:latin typeface="Calibri"/>
               </a:rPr>
               <a:t>Strategic triggers monitored</a:t>
             </a:r>
@@ -4871,20 +4827,20 @@
       </p:sp>
       <p:sp>
         <p:nvSpPr>
-          <p:cNvPr id="20" name="Rectangle 19"/>
+          <p:cNvPr id="19" name="Rectangle 18"/>
           <p:cNvSpPr/>
           <p:nvPr/>
         </p:nvSpPr>
         <p:spPr>
           <a:xfrm>
-            <a:off x="7909560" y="3621024"/>
-            <a:ext cx="3840480" cy="10972"/>
+            <a:off x="7936992" y="3712463"/>
+            <a:ext cx="3749039" cy="9144"/>
           </a:xfrm>
           <a:prstGeom prst="rect">
             <a:avLst/>
           </a:prstGeom>
           <a:solidFill>
-            <a:srgbClr val="101842"/>
+            <a:srgbClr val="0E163C"/>
           </a:solidFill>
           <a:ln>
             <a:noFill/>
@@ -4914,14 +4870,49 @@
       </p:sp>
       <p:sp>
         <p:nvSpPr>
+          <p:cNvPr id="20" name="TextBox 19"/>
+          <p:cNvSpPr txBox="1"/>
+          <p:nvPr/>
+        </p:nvSpPr>
+        <p:spPr>
+          <a:xfrm>
+            <a:off x="7936992" y="4096511"/>
+            <a:ext cx="3657600" cy="548640"/>
+          </a:xfrm>
+          <a:prstGeom prst="rect">
+            <a:avLst/>
+          </a:prstGeom>
+          <a:noFill/>
+        </p:spPr>
+        <p:txBody>
+          <a:bodyPr wrap="square">
+            <a:spAutoFit/>
+          </a:bodyPr>
+          <a:lstStyle/>
+          <a:p>
+            <a:pPr algn="l"/>
+            <a:r>
+              <a:rPr sz="3400" b="1" i="0">
+                <a:solidFill>
+                  <a:srgbClr val="C9A84C"/>
+                </a:solidFill>
+                <a:latin typeface="Calibri"/>
+              </a:rPr>
+              <a:t>12 MIN</a:t>
+            </a:r>
+          </a:p>
+        </p:txBody>
+      </p:sp>
+      <p:sp>
+        <p:nvSpPr>
           <p:cNvPr id="21" name="TextBox 20"/>
           <p:cNvSpPr txBox="1"/>
           <p:nvPr/>
         </p:nvSpPr>
         <p:spPr>
           <a:xfrm>
-            <a:off x="7909560" y="3913632"/>
-            <a:ext cx="3840480" cy="566928"/>
+            <a:off x="7936992" y="4681727"/>
+            <a:ext cx="3657600" cy="237744"/>
           </a:xfrm>
           <a:prstGeom prst="rect">
             <a:avLst/>
@@ -4936,46 +4927,11 @@
           <a:p>
             <a:pPr algn="l"/>
             <a:r>
-              <a:rPr sz="3400" b="1" i="0">
-                <a:solidFill>
-                  <a:srgbClr val="C9A84C"/>
-                </a:solidFill>
-                <a:latin typeface="Barlow Condensed"/>
-              </a:rPr>
-              <a:t>12 MIN</a:t>
-            </a:r>
-          </a:p>
-        </p:txBody>
-      </p:sp>
-      <p:sp>
-        <p:nvSpPr>
-          <p:cNvPr id="22" name="TextBox 21"/>
-          <p:cNvSpPr txBox="1"/>
-          <p:nvPr/>
-        </p:nvSpPr>
-        <p:spPr>
-          <a:xfrm>
-            <a:off x="7909560" y="4462272"/>
-            <a:ext cx="3840480" cy="256032"/>
-          </a:xfrm>
-          <a:prstGeom prst="rect">
-            <a:avLst/>
-          </a:prstGeom>
-          <a:noFill/>
-        </p:spPr>
-        <p:txBody>
-          <a:bodyPr wrap="square">
-            <a:spAutoFit/>
-          </a:bodyPr>
-          <a:lstStyle/>
-          <a:p>
-            <a:pPr algn="l"/>
-            <a:r>
               <a:rPr sz="900" b="0" i="0">
                 <a:solidFill>
-                  <a:srgbClr val="B4BED6"/>
-                </a:solidFill>
-                <a:latin typeface="Barlow Condensed"/>
+                  <a:srgbClr val="AAB4CC"/>
+                </a:solidFill>
+                <a:latin typeface="Calibri"/>
               </a:rPr>
               <a:t>30 days → execution complete</a:t>
             </a:r>
@@ -4984,20 +4940,20 @@
       </p:sp>
       <p:sp>
         <p:nvSpPr>
-          <p:cNvPr id="23" name="Rectangle 22"/>
+          <p:cNvPr id="22" name="Rectangle 21"/>
           <p:cNvSpPr/>
           <p:nvPr/>
         </p:nvSpPr>
         <p:spPr>
           <a:xfrm>
-            <a:off x="7909560" y="4791456"/>
-            <a:ext cx="3840480" cy="10972"/>
+            <a:off x="7936992" y="4974336"/>
+            <a:ext cx="3749039" cy="9144"/>
           </a:xfrm>
           <a:prstGeom prst="rect">
             <a:avLst/>
           </a:prstGeom>
           <a:solidFill>
-            <a:srgbClr val="101842"/>
+            <a:srgbClr val="0E163C"/>
           </a:solidFill>
           <a:ln>
             <a:noFill/>
@@ -5027,14 +4983,49 @@
       </p:sp>
       <p:sp>
         <p:nvSpPr>
+          <p:cNvPr id="23" name="TextBox 22"/>
+          <p:cNvSpPr txBox="1"/>
+          <p:nvPr/>
+        </p:nvSpPr>
+        <p:spPr>
+          <a:xfrm>
+            <a:off x="7936992" y="5358383"/>
+            <a:ext cx="3657600" cy="548640"/>
+          </a:xfrm>
+          <a:prstGeom prst="rect">
+            <a:avLst/>
+          </a:prstGeom>
+          <a:noFill/>
+        </p:spPr>
+        <p:txBody>
+          <a:bodyPr wrap="square">
+            <a:spAutoFit/>
+          </a:bodyPr>
+          <a:lstStyle/>
+          <a:p>
+            <a:pPr algn="l"/>
+            <a:r>
+              <a:rPr sz="3400" b="1" i="0">
+                <a:solidFill>
+                  <a:srgbClr val="C9A84C"/>
+                </a:solidFill>
+                <a:latin typeface="Calibri"/>
+              </a:rPr>
+              <a:t>3,600×</a:t>
+            </a:r>
+          </a:p>
+        </p:txBody>
+      </p:sp>
+      <p:sp>
+        <p:nvSpPr>
           <p:cNvPr id="24" name="TextBox 23"/>
           <p:cNvSpPr txBox="1"/>
           <p:nvPr/>
         </p:nvSpPr>
         <p:spPr>
           <a:xfrm>
-            <a:off x="7909560" y="5084064"/>
-            <a:ext cx="3840480" cy="566928"/>
+            <a:off x="7936992" y="5943599"/>
+            <a:ext cx="3657600" cy="237744"/>
           </a:xfrm>
           <a:prstGeom prst="rect">
             <a:avLst/>
@@ -5049,46 +5040,11 @@
           <a:p>
             <a:pPr algn="l"/>
             <a:r>
-              <a:rPr sz="3400" b="1" i="0">
-                <a:solidFill>
-                  <a:srgbClr val="C9A84C"/>
-                </a:solidFill>
-                <a:latin typeface="Barlow Condensed"/>
-              </a:rPr>
-              <a:t>3,600×</a:t>
-            </a:r>
-          </a:p>
-        </p:txBody>
-      </p:sp>
-      <p:sp>
-        <p:nvSpPr>
-          <p:cNvPr id="25" name="TextBox 24"/>
-          <p:cNvSpPr txBox="1"/>
-          <p:nvPr/>
-        </p:nvSpPr>
-        <p:spPr>
-          <a:xfrm>
-            <a:off x="7909560" y="5632703"/>
-            <a:ext cx="3840480" cy="256032"/>
-          </a:xfrm>
-          <a:prstGeom prst="rect">
-            <a:avLst/>
-          </a:prstGeom>
-          <a:noFill/>
-        </p:spPr>
-        <p:txBody>
-          <a:bodyPr wrap="square">
-            <a:spAutoFit/>
-          </a:bodyPr>
-          <a:lstStyle/>
-          <a:p>
-            <a:pPr algn="l"/>
-            <a:r>
               <a:rPr sz="900" b="0" i="0">
                 <a:solidFill>
-                  <a:srgbClr val="B4BED6"/>
-                </a:solidFill>
-                <a:latin typeface="Barlow Condensed"/>
+                  <a:srgbClr val="AAB4CC"/>
+                </a:solidFill>
+                <a:latin typeface="Calibri"/>
               </a:rPr>
               <a:t>Execution Head Start</a:t>
             </a:r>
@@ -5097,20 +5053,20 @@
       </p:sp>
       <p:sp>
         <p:nvSpPr>
-          <p:cNvPr id="26" name="Rectangle 25"/>
+          <p:cNvPr id="25" name="Rectangle 24"/>
           <p:cNvSpPr/>
           <p:nvPr/>
         </p:nvSpPr>
         <p:spPr>
           <a:xfrm>
-            <a:off x="0" y="6656832"/>
-            <a:ext cx="12188952" cy="201168"/>
+            <a:off x="0" y="6675120"/>
+            <a:ext cx="12188952" cy="182880"/>
           </a:xfrm>
           <a:prstGeom prst="rect">
             <a:avLst/>
           </a:prstGeom>
           <a:solidFill>
-            <a:srgbClr val="080D28"/>
+            <a:srgbClr val="070B24"/>
           </a:solidFill>
           <a:ln>
             <a:noFill/>
@@ -5140,68 +5096,68 @@
       </p:sp>
       <p:sp>
         <p:nvSpPr>
+          <p:cNvPr id="26" name="TextBox 25"/>
+          <p:cNvSpPr txBox="1"/>
+          <p:nvPr/>
+        </p:nvSpPr>
+        <p:spPr>
+          <a:xfrm>
+            <a:off x="475488" y="6693408"/>
+            <a:ext cx="4572000" cy="146304"/>
+          </a:xfrm>
+          <a:prstGeom prst="rect">
+            <a:avLst/>
+          </a:prstGeom>
+          <a:noFill/>
+        </p:spPr>
+        <p:txBody>
+          <a:bodyPr wrap="square">
+            <a:spAutoFit/>
+          </a:bodyPr>
+          <a:lstStyle/>
+          <a:p>
+            <a:pPr algn="l"/>
+            <a:r>
+              <a:rPr sz="800" b="0" i="0">
+                <a:solidFill>
+                  <a:srgbClr val="AAB4CC"/>
+                </a:solidFill>
+                <a:latin typeface="Calibri"/>
+              </a:rPr>
+              <a:t>vaughnmartin.com</a:t>
+            </a:r>
+          </a:p>
+        </p:txBody>
+      </p:sp>
+      <p:sp>
+        <p:nvSpPr>
           <p:cNvPr id="27" name="TextBox 26"/>
           <p:cNvSpPr txBox="1"/>
           <p:nvPr/>
         </p:nvSpPr>
         <p:spPr>
           <a:xfrm>
-            <a:off x="475488" y="6675120"/>
-            <a:ext cx="4572000" cy="164592"/>
-          </a:xfrm>
-          <a:prstGeom prst="rect">
-            <a:avLst/>
-          </a:prstGeom>
-          <a:noFill/>
-        </p:spPr>
-        <p:txBody>
-          <a:bodyPr wrap="square">
-            <a:spAutoFit/>
-          </a:bodyPr>
-          <a:lstStyle/>
-          <a:p>
-            <a:pPr algn="l"/>
+            <a:off x="7315200" y="6693408"/>
+            <a:ext cx="4663440" cy="146304"/>
+          </a:xfrm>
+          <a:prstGeom prst="rect">
+            <a:avLst/>
+          </a:prstGeom>
+          <a:noFill/>
+        </p:spPr>
+        <p:txBody>
+          <a:bodyPr wrap="square">
+            <a:spAutoFit/>
+          </a:bodyPr>
+          <a:lstStyle/>
+          <a:p>
+            <a:pPr algn="r"/>
             <a:r>
               <a:rPr sz="800" b="0" i="0">
                 <a:solidFill>
-                  <a:srgbClr val="B4BED6"/>
-                </a:solidFill>
-                <a:latin typeface="Barlow Condensed"/>
-              </a:rPr>
-              <a:t>vaughnmartin.com</a:t>
-            </a:r>
-          </a:p>
-        </p:txBody>
-      </p:sp>
-      <p:sp>
-        <p:nvSpPr>
-          <p:cNvPr id="28" name="TextBox 27"/>
-          <p:cNvSpPr txBox="1"/>
-          <p:nvPr/>
-        </p:nvSpPr>
-        <p:spPr>
-          <a:xfrm>
-            <a:off x="7315200" y="6675120"/>
-            <a:ext cx="4663440" cy="164592"/>
-          </a:xfrm>
-          <a:prstGeom prst="rect">
-            <a:avLst/>
-          </a:prstGeom>
-          <a:noFill/>
-        </p:spPr>
-        <p:txBody>
-          <a:bodyPr wrap="square">
-            <a:spAutoFit/>
-          </a:bodyPr>
-          <a:lstStyle/>
-          <a:p>
-            <a:pPr algn="r"/>
-            <a:r>
-              <a:rPr sz="800" b="0" i="0">
-                <a:solidFill>
-                  <a:srgbClr val="B4BED6"/>
-                </a:solidFill>
-                <a:latin typeface="Barlow Condensed"/>
+                  <a:srgbClr val="AAB4CC"/>
+                </a:solidFill>
+                <a:latin typeface="Calibri"/>
               </a:rPr>
               <a:t>CONFIDENTIAL  ·  NOT FOR DISTRIBUTION</a:t>
             </a:r>
@@ -5222,7 +5178,7 @@
     <p:bg>
       <p:bgPr>
         <a:solidFill>
-          <a:srgbClr val="080D28"/>
+          <a:srgbClr val="070B24"/>
         </a:solidFill>
         <a:effectLst/>
       </p:bgPr>
@@ -5249,7 +5205,7 @@
             <a:avLst/>
           </a:prstGeom>
           <a:solidFill>
-            <a:srgbClr val="101842"/>
+            <a:srgbClr val="0E163C"/>
           </a:solidFill>
           <a:ln>
             <a:noFill/>
@@ -5285,14 +5241,14 @@
         </p:nvSpPr>
         <p:spPr>
           <a:xfrm>
-            <a:off x="0" y="6693408"/>
-            <a:ext cx="12188952" cy="164592"/>
+            <a:off x="0" y="6729984"/>
+            <a:ext cx="12188952" cy="128016"/>
           </a:xfrm>
           <a:prstGeom prst="rect">
             <a:avLst/>
           </a:prstGeom>
           <a:solidFill>
-            <a:srgbClr val="101842"/>
+            <a:srgbClr val="05081E"/>
           </a:solidFill>
           <a:ln>
             <a:noFill/>
@@ -5328,8 +5284,8 @@
         </p:nvSpPr>
         <p:spPr>
           <a:xfrm>
-            <a:off x="457200" y="182880"/>
-            <a:ext cx="10972800" cy="201168"/>
+            <a:off x="457200" y="164592"/>
+            <a:ext cx="11155680" cy="192024"/>
           </a:xfrm>
           <a:prstGeom prst="rect">
             <a:avLst/>
@@ -5348,9 +5304,9 @@
                 <a:solidFill>
                   <a:srgbClr val="C9A84C"/>
                 </a:solidFill>
-                <a:latin typeface="Barlow Condensed"/>
-              </a:rPr>
-              <a:t>PITCH DEFENSE  ·  3 CRITICAL TRAPS TO AVOID</a:t>
+                <a:latin typeface="Calibri"/>
+              </a:rPr>
+              <a:t>PITCH DEFENSE  ·  3 OBJECTIONS, 3 ANSWERS</a:t>
             </a:r>
           </a:p>
         </p:txBody>
@@ -5363,8 +5319,8 @@
         </p:nvSpPr>
         <p:spPr>
           <a:xfrm>
-            <a:off x="457200" y="457200"/>
-            <a:ext cx="11247120" cy="10972"/>
+            <a:off x="457200" y="402336"/>
+            <a:ext cx="11247120" cy="9144"/>
           </a:xfrm>
           <a:prstGeom prst="rect">
             <a:avLst/>
@@ -5406,14 +5362,14 @@
         </p:nvSpPr>
         <p:spPr>
           <a:xfrm>
-            <a:off x="411480" y="621792"/>
-            <a:ext cx="11365992" cy="1737360"/>
+            <a:off x="411480" y="548640"/>
+            <a:ext cx="11365992" cy="1883664"/>
           </a:xfrm>
           <a:prstGeom prst="rect">
             <a:avLst/>
           </a:prstGeom>
           <a:solidFill>
-            <a:srgbClr val="101842"/>
+            <a:srgbClr val="0E163C"/>
           </a:solidFill>
           <a:ln>
             <a:noFill/>
@@ -5449,8 +5405,8 @@
         </p:nvSpPr>
         <p:spPr>
           <a:xfrm>
-            <a:off x="411480" y="621792"/>
-            <a:ext cx="11365992" cy="23774"/>
+            <a:off x="411480" y="548640"/>
+            <a:ext cx="11365992" cy="20116"/>
           </a:xfrm>
           <a:prstGeom prst="rect">
             <a:avLst/>
@@ -5492,8 +5448,8 @@
         </p:nvSpPr>
         <p:spPr>
           <a:xfrm>
-            <a:off x="548640" y="676656"/>
-            <a:ext cx="11155680" cy="274320"/>
+            <a:off x="548640" y="603503"/>
+            <a:ext cx="11155680" cy="237744"/>
           </a:xfrm>
           <a:prstGeom prst="rect">
             <a:avLst/>
@@ -5508,13 +5464,13 @@
           <a:p>
             <a:pPr algn="l"/>
             <a:r>
-              <a:rPr sz="1000" b="1" i="0">
+              <a:rPr sz="950" b="1" i="0">
                 <a:solidFill>
                   <a:srgbClr val="C9A84C"/>
                 </a:solidFill>
-                <a:latin typeface="Barlow Condensed"/>
-              </a:rPr>
-              <a:t>TRAP 1  ·  "Can't ServiceNow just add this as a feature?"</a:t>
+                <a:latin typeface="Calibri"/>
+              </a:rPr>
+              <a:t>TRAP 1  ·  "Can't ServiceNow just add this?"</a:t>
             </a:r>
           </a:p>
         </p:txBody>
@@ -5527,8 +5483,8 @@
         </p:nvSpPr>
         <p:spPr>
           <a:xfrm>
-            <a:off x="548640" y="987552"/>
-            <a:ext cx="11155680" cy="1188720"/>
+            <a:off x="548640" y="877824"/>
+            <a:ext cx="11155680" cy="1426464"/>
           </a:xfrm>
           <a:prstGeom prst="rect">
             <a:avLst/>
@@ -5543,13 +5499,13 @@
           <a:p>
             <a:pPr algn="l"/>
             <a:r>
-              <a:rPr sz="1000" b="0" i="1">
-                <a:solidFill>
-                  <a:srgbClr val="B4BED6"/>
+              <a:rPr sz="1050" b="0" i="1">
+                <a:solidFill>
+                  <a:srgbClr val="AAB4CC"/>
                 </a:solidFill>
                 <a:latin typeface="Georgia"/>
               </a:rPr>
-              <a:t>"No. ServiceNow is an asynchronous ticketing router built for post-alignment execution. VaughnMartin is a synchronous readiness engine that pre-stages the organizational alignment itself. They track the work. We engineer the capability to do it."</a:t>
+              <a:t>"No. ServiceNow is an async ticketing router for post-alignment execution. VaughnMartin pre-stages the organizational alignment itself. They track the work. We engineer the capability to do it."</a:t>
             </a:r>
           </a:p>
         </p:txBody>
@@ -5562,14 +5518,14 @@
         </p:nvSpPr>
         <p:spPr>
           <a:xfrm>
-            <a:off x="411480" y="2542032"/>
-            <a:ext cx="11365992" cy="1737360"/>
+            <a:off x="411480" y="2578608"/>
+            <a:ext cx="11365992" cy="1883664"/>
           </a:xfrm>
           <a:prstGeom prst="rect">
             <a:avLst/>
           </a:prstGeom>
           <a:solidFill>
-            <a:srgbClr val="101842"/>
+            <a:srgbClr val="0E163C"/>
           </a:solidFill>
           <a:ln>
             <a:noFill/>
@@ -5605,8 +5561,8 @@
         </p:nvSpPr>
         <p:spPr>
           <a:xfrm>
-            <a:off x="411480" y="2542032"/>
-            <a:ext cx="11365992" cy="23774"/>
+            <a:off x="411480" y="2578608"/>
+            <a:ext cx="11365992" cy="20116"/>
           </a:xfrm>
           <a:prstGeom prst="rect">
             <a:avLst/>
@@ -5648,8 +5604,8 @@
         </p:nvSpPr>
         <p:spPr>
           <a:xfrm>
-            <a:off x="548640" y="2596896"/>
-            <a:ext cx="11155680" cy="274320"/>
+            <a:off x="548640" y="2633472"/>
+            <a:ext cx="11155680" cy="237744"/>
           </a:xfrm>
           <a:prstGeom prst="rect">
             <a:avLst/>
@@ -5664,13 +5620,13 @@
           <a:p>
             <a:pPr algn="l"/>
             <a:r>
-              <a:rPr sz="1000" b="1" i="0">
+              <a:rPr sz="950" b="1" i="0">
                 <a:solidFill>
                   <a:srgbClr val="C9A84C"/>
                 </a:solidFill>
-                <a:latin typeface="Barlow Condensed"/>
-              </a:rPr>
-              <a:t>TRAP 2  ·  "What about AI taking autonomous action in a crisis?"</a:t>
+                <a:latin typeface="Calibri"/>
+              </a:rPr>
+              <a:t>TRAP 2  ·  "What about AI taking autonomous action?"</a:t>
             </a:r>
           </a:p>
         </p:txBody>
@@ -5684,7 +5640,7 @@
         <p:spPr>
           <a:xfrm>
             <a:off x="548640" y="2907792"/>
-            <a:ext cx="11155680" cy="1188720"/>
+            <a:ext cx="11155680" cy="1426464"/>
           </a:xfrm>
           <a:prstGeom prst="rect">
             <a:avLst/>
@@ -5699,13 +5655,13 @@
           <a:p>
             <a:pPr algn="l"/>
             <a:r>
-              <a:rPr sz="1000" b="0" i="1">
-                <a:solidFill>
-                  <a:srgbClr val="B4BED6"/>
+              <a:rPr sz="1050" b="0" i="1">
+                <a:solidFill>
+                  <a:srgbClr val="AAB4CC"/>
                 </a:solidFill>
                 <a:latin typeface="Georgia"/>
               </a:rPr>
-              <a:t>"The system stages the choice in seconds, but an executive must click authorize. No action deploys without explicit sign-off. Say this line every time you mention speed."</a:t>
+              <a:t>"The system stages the choice in seconds, but an executive must click authorize. No action deploys without explicit sign-off. Say this explicitly every time you mention speed."</a:t>
             </a:r>
           </a:p>
         </p:txBody>
@@ -5718,14 +5674,14 @@
         </p:nvSpPr>
         <p:spPr>
           <a:xfrm>
-            <a:off x="411480" y="4462272"/>
-            <a:ext cx="11365992" cy="1737360"/>
+            <a:off x="411480" y="4608576"/>
+            <a:ext cx="11365992" cy="1883664"/>
           </a:xfrm>
           <a:prstGeom prst="rect">
             <a:avLst/>
           </a:prstGeom>
           <a:solidFill>
-            <a:srgbClr val="101842"/>
+            <a:srgbClr val="0E163C"/>
           </a:solidFill>
           <a:ln>
             <a:noFill/>
@@ -5761,14 +5717,14 @@
         </p:nvSpPr>
         <p:spPr>
           <a:xfrm>
-            <a:off x="411480" y="4462272"/>
-            <a:ext cx="11365992" cy="23774"/>
+            <a:off x="411480" y="4608576"/>
+            <a:ext cx="11365992" cy="20116"/>
           </a:xfrm>
           <a:prstGeom prst="rect">
             <a:avLst/>
           </a:prstGeom>
           <a:solidFill>
-            <a:srgbClr val="B4BED6"/>
+            <a:srgbClr val="AAB4CC"/>
           </a:solidFill>
           <a:ln>
             <a:noFill/>
@@ -5804,8 +5760,8 @@
         </p:nvSpPr>
         <p:spPr>
           <a:xfrm>
-            <a:off x="548640" y="4517136"/>
-            <a:ext cx="11155680" cy="274320"/>
+            <a:off x="548640" y="4663440"/>
+            <a:ext cx="11155680" cy="237744"/>
           </a:xfrm>
           <a:prstGeom prst="rect">
             <a:avLst/>
@@ -5820,13 +5776,13 @@
           <a:p>
             <a:pPr algn="l"/>
             <a:r>
-              <a:rPr sz="1000" b="1" i="0">
+              <a:rPr sz="950" b="1" i="0">
                 <a:solidFill>
                   <a:srgbClr val="C9A84C"/>
                 </a:solidFill>
-                <a:latin typeface="Barlow Condensed"/>
-              </a:rPr>
-              <a:t>TRAP 3  ·  "How long does it take to build 170 protocols for a new client?"</a:t>
+                <a:latin typeface="Calibri"/>
+              </a:rPr>
+              <a:t>TRAP 3  ·  "How long to build 170 protocols for a new client?"</a:t>
             </a:r>
           </a:p>
         </p:txBody>
@@ -5839,8 +5795,8 @@
         </p:nvSpPr>
         <p:spPr>
           <a:xfrm>
-            <a:off x="548640" y="4828032"/>
-            <a:ext cx="11155680" cy="1188720"/>
+            <a:off x="548640" y="4937760"/>
+            <a:ext cx="11155680" cy="1426464"/>
           </a:xfrm>
           <a:prstGeom prst="rect">
             <a:avLst/>
@@ -5855,13 +5811,13 @@
           <a:p>
             <a:pPr algn="l"/>
             <a:r>
-              <a:rPr sz="1000" b="0" i="1">
-                <a:solidFill>
-                  <a:srgbClr val="B4BED6"/>
+              <a:rPr sz="1050" b="0" i="1">
+                <a:solidFill>
+                  <a:srgbClr val="AAB4CC"/>
                 </a:solidFill>
                 <a:latin typeface="Georgia"/>
               </a:rPr>
-              <a:t>"They don't build from scratch. VaughnMartin ships with 170 out-of-the-box protocols for the most common enterprise threats. Onboarding is a configuration process — not a consulting project. 90 days to live."</a:t>
+              <a:t>"They don't build from scratch. VaughnMartin ships with 170 out-of-the-box protocols for the most common enterprise threats. Onboarding is configuration — not a consulting project. 90 days to live."</a:t>
             </a:r>
           </a:p>
         </p:txBody>
@@ -5943,8 +5899,8 @@
         </p:nvSpPr>
         <p:spPr>
           <a:xfrm>
-            <a:off x="10698480" y="82296"/>
-            <a:ext cx="1371600" cy="219456"/>
+            <a:off x="10789920" y="73152"/>
+            <a:ext cx="1280160" cy="173736"/>
           </a:xfrm>
           <a:prstGeom prst="rect">
             <a:avLst/>
@@ -5961,11 +5917,11 @@
             <a:r>
               <a:rPr sz="750" b="1" i="0">
                 <a:solidFill>
-                  <a:srgbClr val="C9A84C"/>
-                </a:solidFill>
-                <a:latin typeface="Barlow Condensed"/>
-              </a:rPr>
-              <a:t>SLIDE 01  ·  08</a:t>
+                  <a:srgbClr val="0A0F2E"/>
+                </a:solidFill>
+                <a:latin typeface="Calibri"/>
+              </a:rPr>
+              <a:t>01  /  08</a:t>
             </a:r>
           </a:p>
         </p:txBody>
@@ -5985,7 +5941,7 @@
             <a:avLst/>
           </a:prstGeom>
           <a:solidFill>
-            <a:srgbClr val="080D28"/>
+            <a:srgbClr val="070B24"/>
           </a:solidFill>
           <a:ln>
             <a:noFill/>
@@ -6021,8 +5977,8 @@
         </p:nvSpPr>
         <p:spPr>
           <a:xfrm>
-            <a:off x="411480" y="6748272"/>
-            <a:ext cx="4572000" cy="182880"/>
+            <a:off x="411480" y="6744614"/>
+            <a:ext cx="5029200" cy="155448"/>
           </a:xfrm>
           <a:prstGeom prst="rect">
             <a:avLst/>
@@ -6041,7 +5997,7 @@
                 <a:solidFill>
                   <a:srgbClr val="C9A84C"/>
                 </a:solidFill>
-                <a:latin typeface="Barlow Condensed"/>
+                <a:latin typeface="Calibri"/>
               </a:rPr>
               <a:t>VaughnMartin  ·  READINESS OS</a:t>
             </a:r>
@@ -6056,8 +6012,8 @@
         </p:nvSpPr>
         <p:spPr>
           <a:xfrm>
-            <a:off x="7315200" y="6748272"/>
-            <a:ext cx="4663440" cy="182880"/>
+            <a:off x="7132320" y="6744614"/>
+            <a:ext cx="4937760" cy="155448"/>
           </a:xfrm>
           <a:prstGeom prst="rect">
             <a:avLst/>
@@ -6074,9 +6030,9 @@
             <a:r>
               <a:rPr sz="750" b="0" i="0">
                 <a:solidFill>
-                  <a:srgbClr val="B4BED6"/>
-                </a:solidFill>
-                <a:latin typeface="Barlow Condensed"/>
+                  <a:srgbClr val="AAB4CC"/>
+                </a:solidFill>
+                <a:latin typeface="Calibri"/>
               </a:rPr>
               <a:t>vaughnmartin.com</a:t>
             </a:r>
@@ -6092,7 +6048,7 @@
         <p:spPr>
           <a:xfrm>
             <a:off x="411480" y="237744"/>
-            <a:ext cx="5669280" cy="201168"/>
+            <a:ext cx="5577840" cy="192024"/>
           </a:xfrm>
           <a:prstGeom prst="rect">
             <a:avLst/>
@@ -6111,7 +6067,7 @@
                 <a:solidFill>
                   <a:srgbClr val="C9A84C"/>
                 </a:solidFill>
-                <a:latin typeface="Barlow Condensed"/>
+                <a:latin typeface="Calibri"/>
               </a:rPr>
               <a:t>THE PROBLEM</a:t>
             </a:r>
@@ -6127,7 +6083,7 @@
         <p:spPr>
           <a:xfrm>
             <a:off x="411480" y="475488"/>
-            <a:ext cx="5669280" cy="533400"/>
+            <a:ext cx="5577840" cy="487680"/>
           </a:xfrm>
           <a:prstGeom prst="rect">
             <a:avLst/>
@@ -6146,7 +6102,7 @@
                 <a:solidFill>
                   <a:srgbClr val="FFFFFF"/>
                 </a:solidFill>
-                <a:latin typeface="Barlow Condensed"/>
+                <a:latin typeface="Calibri"/>
               </a:rPr>
               <a:t>THE 30-DAY MOBILIZATION</a:t>
             </a:r>
@@ -6162,7 +6118,7 @@
         <p:spPr>
           <a:xfrm>
             <a:off x="411480" y="963167"/>
-            <a:ext cx="5669280" cy="533400"/>
+            <a:ext cx="5577840" cy="487680"/>
           </a:xfrm>
           <a:prstGeom prst="rect">
             <a:avLst/>
@@ -6181,7 +6137,7 @@
                 <a:solidFill>
                   <a:srgbClr val="C9A84C"/>
                 </a:solidFill>
-                <a:latin typeface="Barlow Condensed"/>
+                <a:latin typeface="Calibri"/>
               </a:rPr>
               <a:t>BLACK HOLE.</a:t>
             </a:r>
@@ -6196,8 +6152,577 @@
         </p:nvSpPr>
         <p:spPr>
           <a:xfrm>
-            <a:off x="411480" y="1792224"/>
-            <a:ext cx="5577840" cy="10972"/>
+            <a:off x="411480" y="1652320"/>
+            <a:ext cx="2560320" cy="1499616"/>
+          </a:xfrm>
+          <a:prstGeom prst="rect">
+            <a:avLst/>
+          </a:prstGeom>
+          <a:solidFill>
+            <a:srgbClr val="1F6652"/>
+          </a:solidFill>
+          <a:ln>
+            <a:noFill/>
+          </a:ln>
+        </p:spPr>
+        <p:style>
+          <a:lnRef idx="1">
+            <a:schemeClr val="accent1"/>
+          </a:lnRef>
+          <a:fillRef idx="3">
+            <a:schemeClr val="accent1"/>
+          </a:fillRef>
+          <a:effectRef idx="2">
+            <a:schemeClr val="accent1"/>
+          </a:effectRef>
+          <a:fontRef idx="minor">
+            <a:schemeClr val="lt1"/>
+          </a:fontRef>
+        </p:style>
+        <p:txBody>
+          <a:bodyPr rtlCol="0" anchor="ctr"/>
+          <a:lstStyle/>
+          <a:p>
+            <a:pPr algn="ctr"/>
+          </a:p>
+        </p:txBody>
+      </p:sp>
+      <p:sp>
+        <p:nvSpPr>
+          <p:cNvPr id="11" name="Rectangle 10"/>
+          <p:cNvSpPr/>
+          <p:nvPr/>
+        </p:nvSpPr>
+        <p:spPr>
+          <a:xfrm>
+            <a:off x="411480" y="1652320"/>
+            <a:ext cx="2560320" cy="21945"/>
+          </a:xfrm>
+          <a:prstGeom prst="rect">
+            <a:avLst/>
+          </a:prstGeom>
+          <a:solidFill>
+            <a:srgbClr val="2B8A6E"/>
+          </a:solidFill>
+          <a:ln>
+            <a:noFill/>
+          </a:ln>
+        </p:spPr>
+        <p:style>
+          <a:lnRef idx="1">
+            <a:schemeClr val="accent1"/>
+          </a:lnRef>
+          <a:fillRef idx="3">
+            <a:schemeClr val="accent1"/>
+          </a:fillRef>
+          <a:effectRef idx="2">
+            <a:schemeClr val="accent1"/>
+          </a:effectRef>
+          <a:fontRef idx="minor">
+            <a:schemeClr val="lt1"/>
+          </a:fontRef>
+        </p:style>
+        <p:txBody>
+          <a:bodyPr rtlCol="0" anchor="ctr"/>
+          <a:lstStyle/>
+          <a:p>
+            <a:pPr algn="ctr"/>
+          </a:p>
+        </p:txBody>
+      </p:sp>
+      <p:sp>
+        <p:nvSpPr>
+          <p:cNvPr id="12" name="TextBox 11"/>
+          <p:cNvSpPr txBox="1"/>
+          <p:nvPr/>
+        </p:nvSpPr>
+        <p:spPr>
+          <a:xfrm>
+            <a:off x="530352" y="1707184"/>
+            <a:ext cx="2340864" cy="182880"/>
+          </a:xfrm>
+          <a:prstGeom prst="rect">
+            <a:avLst/>
+          </a:prstGeom>
+          <a:noFill/>
+        </p:spPr>
+        <p:txBody>
+          <a:bodyPr wrap="square">
+            <a:spAutoFit/>
+          </a:bodyPr>
+          <a:lstStyle/>
+          <a:p>
+            <a:pPr algn="l"/>
+            <a:r>
+              <a:rPr sz="800" b="1" i="0">
+                <a:solidFill>
+                  <a:srgbClr val="2B8A6E"/>
+                </a:solidFill>
+                <a:latin typeface="Calibri"/>
+              </a:rPr>
+              <a:t>DETECTION</a:t>
+            </a:r>
+          </a:p>
+        </p:txBody>
+      </p:sp>
+      <p:sp>
+        <p:nvSpPr>
+          <p:cNvPr id="13" name="TextBox 12"/>
+          <p:cNvSpPr txBox="1"/>
+          <p:nvPr/>
+        </p:nvSpPr>
+        <p:spPr>
+          <a:xfrm>
+            <a:off x="530352" y="1908352"/>
+            <a:ext cx="2340864" cy="621792"/>
+          </a:xfrm>
+          <a:prstGeom prst="rect">
+            <a:avLst/>
+          </a:prstGeom>
+          <a:noFill/>
+        </p:spPr>
+        <p:txBody>
+          <a:bodyPr wrap="square">
+            <a:spAutoFit/>
+          </a:bodyPr>
+          <a:lstStyle/>
+          <a:p>
+            <a:pPr algn="l"/>
+            <a:r>
+              <a:rPr sz="3400" b="1" i="0">
+                <a:solidFill>
+                  <a:srgbClr val="FFFFFF"/>
+                </a:solidFill>
+                <a:latin typeface="Calibri"/>
+              </a:rPr>
+              <a:t>&lt; 1 SEC</a:t>
+            </a:r>
+          </a:p>
+        </p:txBody>
+      </p:sp>
+      <p:sp>
+        <p:nvSpPr>
+          <p:cNvPr id="14" name="TextBox 13"/>
+          <p:cNvSpPr txBox="1"/>
+          <p:nvPr/>
+        </p:nvSpPr>
+        <p:spPr>
+          <a:xfrm>
+            <a:off x="530352" y="2548432"/>
+            <a:ext cx="2340864" cy="530352"/>
+          </a:xfrm>
+          <a:prstGeom prst="rect">
+            <a:avLst/>
+          </a:prstGeom>
+          <a:noFill/>
+        </p:spPr>
+        <p:txBody>
+          <a:bodyPr wrap="square">
+            <a:spAutoFit/>
+          </a:bodyPr>
+          <a:lstStyle/>
+          <a:p>
+            <a:pPr algn="l"/>
+            <a:r>
+              <a:rPr sz="850" b="0" i="0">
+                <a:solidFill>
+                  <a:srgbClr val="CCFFEE"/>
+                </a:solidFill>
+                <a:latin typeface="Calibri"/>
+              </a:rPr>
+              <a:t>Signal identified.
+Pattern matched.
+Score computed.</a:t>
+            </a:r>
+          </a:p>
+        </p:txBody>
+      </p:sp>
+      <p:sp>
+        <p:nvSpPr>
+          <p:cNvPr id="15" name="TextBox 14"/>
+          <p:cNvSpPr txBox="1"/>
+          <p:nvPr/>
+        </p:nvSpPr>
+        <p:spPr>
+          <a:xfrm>
+            <a:off x="3017520" y="2072944"/>
+            <a:ext cx="402336" cy="512064"/>
+          </a:xfrm>
+          <a:prstGeom prst="rect">
+            <a:avLst/>
+          </a:prstGeom>
+          <a:noFill/>
+        </p:spPr>
+        <p:txBody>
+          <a:bodyPr wrap="square">
+            <a:spAutoFit/>
+          </a:bodyPr>
+          <a:lstStyle/>
+          <a:p>
+            <a:pPr algn="ctr"/>
+            <a:r>
+              <a:rPr sz="2400" b="1" i="0">
+                <a:solidFill>
+                  <a:srgbClr val="C9A84C"/>
+                </a:solidFill>
+                <a:latin typeface="Calibri"/>
+              </a:rPr>
+              <a:t>→</a:t>
+            </a:r>
+          </a:p>
+        </p:txBody>
+      </p:sp>
+      <p:sp>
+        <p:nvSpPr>
+          <p:cNvPr id="16" name="Rectangle 15"/>
+          <p:cNvSpPr/>
+          <p:nvPr/>
+        </p:nvSpPr>
+        <p:spPr>
+          <a:xfrm>
+            <a:off x="3456432" y="1652320"/>
+            <a:ext cx="2523744" cy="1499616"/>
+          </a:xfrm>
+          <a:prstGeom prst="rect">
+            <a:avLst/>
+          </a:prstGeom>
+          <a:solidFill>
+            <a:srgbClr val="380E0E"/>
+          </a:solidFill>
+          <a:ln>
+            <a:noFill/>
+          </a:ln>
+        </p:spPr>
+        <p:style>
+          <a:lnRef idx="1">
+            <a:schemeClr val="accent1"/>
+          </a:lnRef>
+          <a:fillRef idx="3">
+            <a:schemeClr val="accent1"/>
+          </a:fillRef>
+          <a:effectRef idx="2">
+            <a:schemeClr val="accent1"/>
+          </a:effectRef>
+          <a:fontRef idx="minor">
+            <a:schemeClr val="lt1"/>
+          </a:fontRef>
+        </p:style>
+        <p:txBody>
+          <a:bodyPr rtlCol="0" anchor="ctr"/>
+          <a:lstStyle/>
+          <a:p>
+            <a:pPr algn="ctr"/>
+          </a:p>
+        </p:txBody>
+      </p:sp>
+      <p:sp>
+        <p:nvSpPr>
+          <p:cNvPr id="17" name="Rectangle 16"/>
+          <p:cNvSpPr/>
+          <p:nvPr/>
+        </p:nvSpPr>
+        <p:spPr>
+          <a:xfrm>
+            <a:off x="3456432" y="1652320"/>
+            <a:ext cx="2523744" cy="21945"/>
+          </a:xfrm>
+          <a:prstGeom prst="rect">
+            <a:avLst/>
+          </a:prstGeom>
+          <a:solidFill>
+            <a:srgbClr val="992222"/>
+          </a:solidFill>
+          <a:ln>
+            <a:noFill/>
+          </a:ln>
+        </p:spPr>
+        <p:style>
+          <a:lnRef idx="1">
+            <a:schemeClr val="accent1"/>
+          </a:lnRef>
+          <a:fillRef idx="3">
+            <a:schemeClr val="accent1"/>
+          </a:fillRef>
+          <a:effectRef idx="2">
+            <a:schemeClr val="accent1"/>
+          </a:effectRef>
+          <a:fontRef idx="minor">
+            <a:schemeClr val="lt1"/>
+          </a:fontRef>
+        </p:style>
+        <p:txBody>
+          <a:bodyPr rtlCol="0" anchor="ctr"/>
+          <a:lstStyle/>
+          <a:p>
+            <a:pPr algn="ctr"/>
+          </a:p>
+        </p:txBody>
+      </p:sp>
+      <p:sp>
+        <p:nvSpPr>
+          <p:cNvPr id="18" name="TextBox 17"/>
+          <p:cNvSpPr txBox="1"/>
+          <p:nvPr/>
+        </p:nvSpPr>
+        <p:spPr>
+          <a:xfrm>
+            <a:off x="3566160" y="1707184"/>
+            <a:ext cx="2322576" cy="182880"/>
+          </a:xfrm>
+          <a:prstGeom prst="rect">
+            <a:avLst/>
+          </a:prstGeom>
+          <a:noFill/>
+        </p:spPr>
+        <p:txBody>
+          <a:bodyPr wrap="square">
+            <a:spAutoFit/>
+          </a:bodyPr>
+          <a:lstStyle/>
+          <a:p>
+            <a:pPr algn="l"/>
+            <a:r>
+              <a:rPr sz="800" b="1" i="0">
+                <a:solidFill>
+                  <a:srgbClr val="FF6666"/>
+                </a:solidFill>
+                <a:latin typeface="Calibri"/>
+              </a:rPr>
+              <a:t>MOBILIZATION</a:t>
+            </a:r>
+          </a:p>
+        </p:txBody>
+      </p:sp>
+      <p:sp>
+        <p:nvSpPr>
+          <p:cNvPr id="19" name="TextBox 18"/>
+          <p:cNvSpPr txBox="1"/>
+          <p:nvPr/>
+        </p:nvSpPr>
+        <p:spPr>
+          <a:xfrm>
+            <a:off x="3566160" y="1908352"/>
+            <a:ext cx="2322576" cy="621792"/>
+          </a:xfrm>
+          <a:prstGeom prst="rect">
+            <a:avLst/>
+          </a:prstGeom>
+          <a:noFill/>
+        </p:spPr>
+        <p:txBody>
+          <a:bodyPr wrap="square">
+            <a:spAutoFit/>
+          </a:bodyPr>
+          <a:lstStyle/>
+          <a:p>
+            <a:pPr algn="l"/>
+            <a:r>
+              <a:rPr sz="3400" b="1" i="0">
+                <a:solidFill>
+                  <a:srgbClr val="FF8888"/>
+                </a:solidFill>
+                <a:latin typeface="Calibri"/>
+              </a:rPr>
+              <a:t>30 DAYS</a:t>
+            </a:r>
+          </a:p>
+        </p:txBody>
+      </p:sp>
+      <p:sp>
+        <p:nvSpPr>
+          <p:cNvPr id="20" name="TextBox 19"/>
+          <p:cNvSpPr txBox="1"/>
+          <p:nvPr/>
+        </p:nvSpPr>
+        <p:spPr>
+          <a:xfrm>
+            <a:off x="3566160" y="2548432"/>
+            <a:ext cx="2322576" cy="530352"/>
+          </a:xfrm>
+          <a:prstGeom prst="rect">
+            <a:avLst/>
+          </a:prstGeom>
+          <a:noFill/>
+        </p:spPr>
+        <p:txBody>
+          <a:bodyPr wrap="square">
+            <a:spAutoFit/>
+          </a:bodyPr>
+          <a:lstStyle/>
+          <a:p>
+            <a:pPr algn="l"/>
+            <a:r>
+              <a:rPr sz="850" b="0" i="0">
+                <a:solidFill>
+                  <a:srgbClr val="FFCCCC"/>
+                </a:solidFill>
+                <a:latin typeface="Calibri"/>
+              </a:rPr>
+              <a:t>Who decides?
+Who calls who?
+Who owns the response?</a:t>
+            </a:r>
+          </a:p>
+        </p:txBody>
+      </p:sp>
+      <p:sp>
+        <p:nvSpPr>
+          <p:cNvPr id="21" name="TextBox 20"/>
+          <p:cNvSpPr txBox="1"/>
+          <p:nvPr/>
+        </p:nvSpPr>
+        <p:spPr>
+          <a:xfrm>
+            <a:off x="411480" y="3316528"/>
+            <a:ext cx="5577840" cy="365760"/>
+          </a:xfrm>
+          <a:prstGeom prst="rect">
+            <a:avLst/>
+          </a:prstGeom>
+          <a:noFill/>
+        </p:spPr>
+        <p:txBody>
+          <a:bodyPr wrap="square">
+            <a:spAutoFit/>
+          </a:bodyPr>
+          <a:lstStyle/>
+          <a:p>
+            <a:pPr algn="l"/>
+            <a:r>
+              <a:rPr sz="1050" b="0" i="0">
+                <a:solidFill>
+                  <a:srgbClr val="FFFFFF"/>
+                </a:solidFill>
+                <a:latin typeface="Calibri"/>
+              </a:rPr>
+              <a:t>▸  Startup to Fortune 500: same trigger, identical 30-day delay</a:t>
+            </a:r>
+          </a:p>
+        </p:txBody>
+      </p:sp>
+      <p:sp>
+        <p:nvSpPr>
+          <p:cNvPr id="22" name="TextBox 21"/>
+          <p:cNvSpPr txBox="1"/>
+          <p:nvPr/>
+        </p:nvSpPr>
+        <p:spPr>
+          <a:xfrm>
+            <a:off x="411480" y="3718864"/>
+            <a:ext cx="5577840" cy="365760"/>
+          </a:xfrm>
+          <a:prstGeom prst="rect">
+            <a:avLst/>
+          </a:prstGeom>
+          <a:noFill/>
+        </p:spPr>
+        <p:txBody>
+          <a:bodyPr wrap="square">
+            <a:spAutoFit/>
+          </a:bodyPr>
+          <a:lstStyle/>
+          <a:p>
+            <a:pPr algn="l"/>
+            <a:r>
+              <a:rPr sz="1050" b="0" i="0">
+                <a:solidFill>
+                  <a:srgbClr val="FFFFFF"/>
+                </a:solidFill>
+                <a:latin typeface="Calibri"/>
+              </a:rPr>
+              <a:t>▸  The delay is not execution — it is mobilization architecture</a:t>
+            </a:r>
+          </a:p>
+        </p:txBody>
+      </p:sp>
+      <p:sp>
+        <p:nvSpPr>
+          <p:cNvPr id="23" name="TextBox 22"/>
+          <p:cNvSpPr txBox="1"/>
+          <p:nvPr/>
+        </p:nvSpPr>
+        <p:spPr>
+          <a:xfrm>
+            <a:off x="411480" y="4121200"/>
+            <a:ext cx="5577840" cy="365760"/>
+          </a:xfrm>
+          <a:prstGeom prst="rect">
+            <a:avLst/>
+          </a:prstGeom>
+          <a:noFill/>
+        </p:spPr>
+        <p:txBody>
+          <a:bodyPr wrap="square">
+            <a:spAutoFit/>
+          </a:bodyPr>
+          <a:lstStyle/>
+          <a:p>
+            <a:pPr algn="l"/>
+            <a:r>
+              <a:rPr sz="1050" b="0" i="0">
+                <a:solidFill>
+                  <a:srgbClr val="FFFFFF"/>
+                </a:solidFill>
+                <a:latin typeface="Calibri"/>
+              </a:rPr>
+              <a:t>▸  Every day of drift is a window activists, regulators, and competitors own</a:t>
+            </a:r>
+          </a:p>
+        </p:txBody>
+      </p:sp>
+      <p:sp>
+        <p:nvSpPr>
+          <p:cNvPr id="24" name="Rectangle 23"/>
+          <p:cNvSpPr/>
+          <p:nvPr/>
+        </p:nvSpPr>
+        <p:spPr>
+          <a:xfrm>
+            <a:off x="411480" y="4633264"/>
+            <a:ext cx="5577840" cy="694944"/>
+          </a:xfrm>
+          <a:prstGeom prst="rect">
+            <a:avLst/>
+          </a:prstGeom>
+          <a:solidFill>
+            <a:srgbClr val="0E163C"/>
+          </a:solidFill>
+          <a:ln>
+            <a:noFill/>
+          </a:ln>
+        </p:spPr>
+        <p:style>
+          <a:lnRef idx="1">
+            <a:schemeClr val="accent1"/>
+          </a:lnRef>
+          <a:fillRef idx="3">
+            <a:schemeClr val="accent1"/>
+          </a:fillRef>
+          <a:effectRef idx="2">
+            <a:schemeClr val="accent1"/>
+          </a:effectRef>
+          <a:fontRef idx="minor">
+            <a:schemeClr val="lt1"/>
+          </a:fontRef>
+        </p:style>
+        <p:txBody>
+          <a:bodyPr rtlCol="0" anchor="ctr"/>
+          <a:lstStyle/>
+          <a:p>
+            <a:pPr algn="ctr"/>
+          </a:p>
+        </p:txBody>
+      </p:sp>
+      <p:sp>
+        <p:nvSpPr>
+          <p:cNvPr id="25" name="Rectangle 24"/>
+          <p:cNvSpPr/>
+          <p:nvPr/>
+        </p:nvSpPr>
+        <p:spPr>
+          <a:xfrm>
+            <a:off x="411480" y="4633264"/>
+            <a:ext cx="5577840" cy="20116"/>
           </a:xfrm>
           <a:prstGeom prst="rect">
             <a:avLst/>
@@ -6233,20 +6758,90 @@
       </p:sp>
       <p:sp>
         <p:nvSpPr>
-          <p:cNvPr id="11" name="Rectangle 10"/>
+          <p:cNvPr id="26" name="TextBox 25"/>
+          <p:cNvSpPr txBox="1"/>
+          <p:nvPr/>
+        </p:nvSpPr>
+        <p:spPr>
+          <a:xfrm>
+            <a:off x="539496" y="4678984"/>
+            <a:ext cx="5376672" cy="256032"/>
+          </a:xfrm>
+          <a:prstGeom prst="rect">
+            <a:avLst/>
+          </a:prstGeom>
+          <a:noFill/>
+        </p:spPr>
+        <p:txBody>
+          <a:bodyPr wrap="square">
+            <a:spAutoFit/>
+          </a:bodyPr>
+          <a:lstStyle/>
+          <a:p>
+            <a:pPr algn="l"/>
+            <a:r>
+              <a:rPr sz="1000" b="1" i="0">
+                <a:solidFill>
+                  <a:srgbClr val="C9A84C"/>
+                </a:solidFill>
+                <a:latin typeface="Calibri"/>
+              </a:rPr>
+              <a:t>$4.4T AT RISK ANNUALLY</a:t>
+            </a:r>
+          </a:p>
+        </p:txBody>
+      </p:sp>
+      <p:sp>
+        <p:nvSpPr>
+          <p:cNvPr id="27" name="TextBox 26"/>
+          <p:cNvSpPr txBox="1"/>
+          <p:nvPr/>
+        </p:nvSpPr>
+        <p:spPr>
+          <a:xfrm>
+            <a:off x="539496" y="4962448"/>
+            <a:ext cx="5376672" cy="274320"/>
+          </a:xfrm>
+          <a:prstGeom prst="rect">
+            <a:avLst/>
+          </a:prstGeom>
+          <a:noFill/>
+        </p:spPr>
+        <p:txBody>
+          <a:bodyPr wrap="square">
+            <a:spAutoFit/>
+          </a:bodyPr>
+          <a:lstStyle/>
+          <a:p>
+            <a:pPr algn="l"/>
+            <a:r>
+              <a:rPr sz="850" b="0" i="0">
+                <a:solidFill>
+                  <a:srgbClr val="AAB4CC"/>
+                </a:solidFill>
+                <a:latin typeface="Calibri"/>
+              </a:rPr>
+              <a:t>Enterprise coordination failures  ·  Preparation Infrastructure is the unclaimed layer above every AI stack.</a:t>
+            </a:r>
+          </a:p>
+        </p:txBody>
+      </p:sp>
+      <p:sp>
+        <p:nvSpPr>
+          <p:cNvPr id="28" name="Rectangle 27"/>
           <p:cNvSpPr/>
           <p:nvPr/>
         </p:nvSpPr>
         <p:spPr>
           <a:xfrm>
-            <a:off x="411480" y="1920240"/>
-            <a:ext cx="2633472" cy="1444752"/>
+            <a:off x="6483096" y="566928"/>
+            <a:ext cx="5394960" cy="6035040"/>
           </a:xfrm>
           <a:prstGeom prst="rect">
             <a:avLst/>
           </a:prstGeom>
           <a:solidFill>
-            <a:srgbClr val="1F6652"/>
+            <a:srgbClr val="030514"/>
           </a:solidFill>
           <a:ln>
             <a:noFill/>
@@ -6276,535 +6871,14 @@
       </p:sp>
       <p:sp>
         <p:nvSpPr>
-          <p:cNvPr id="12" name="Rectangle 11"/>
+          <p:cNvPr id="29" name="Rectangle 28"/>
           <p:cNvSpPr/>
           <p:nvPr/>
         </p:nvSpPr>
         <p:spPr>
           <a:xfrm>
-            <a:off x="411480" y="1920240"/>
-            <a:ext cx="2633472" cy="29260"/>
-          </a:xfrm>
-          <a:prstGeom prst="rect">
-            <a:avLst/>
-          </a:prstGeom>
-          <a:solidFill>
-            <a:srgbClr val="2B8A6E"/>
-          </a:solidFill>
-          <a:ln>
-            <a:noFill/>
-          </a:ln>
-        </p:spPr>
-        <p:style>
-          <a:lnRef idx="1">
-            <a:schemeClr val="accent1"/>
-          </a:lnRef>
-          <a:fillRef idx="3">
-            <a:schemeClr val="accent1"/>
-          </a:fillRef>
-          <a:effectRef idx="2">
-            <a:schemeClr val="accent1"/>
-          </a:effectRef>
-          <a:fontRef idx="minor">
-            <a:schemeClr val="lt1"/>
-          </a:fontRef>
-        </p:style>
-        <p:txBody>
-          <a:bodyPr rtlCol="0" anchor="ctr"/>
-          <a:lstStyle/>
-          <a:p>
-            <a:pPr algn="ctr"/>
-          </a:p>
-        </p:txBody>
-      </p:sp>
-      <p:sp>
-        <p:nvSpPr>
-          <p:cNvPr id="13" name="TextBox 12"/>
-          <p:cNvSpPr txBox="1"/>
-          <p:nvPr/>
-        </p:nvSpPr>
-        <p:spPr>
-          <a:xfrm>
-            <a:off x="530352" y="1965960"/>
-            <a:ext cx="2395728" cy="201168"/>
-          </a:xfrm>
-          <a:prstGeom prst="rect">
-            <a:avLst/>
-          </a:prstGeom>
-          <a:noFill/>
-        </p:spPr>
-        <p:txBody>
-          <a:bodyPr wrap="square">
-            <a:spAutoFit/>
-          </a:bodyPr>
-          <a:lstStyle/>
-          <a:p>
-            <a:pPr algn="l"/>
-            <a:r>
-              <a:rPr sz="800" b="1" i="0">
-                <a:solidFill>
-                  <a:srgbClr val="2B8A6E"/>
-                </a:solidFill>
-                <a:latin typeface="Barlow Condensed"/>
-              </a:rPr>
-              <a:t>DETECTION</a:t>
-            </a:r>
-          </a:p>
-        </p:txBody>
-      </p:sp>
-      <p:sp>
-        <p:nvSpPr>
-          <p:cNvPr id="14" name="TextBox 13"/>
-          <p:cNvSpPr txBox="1"/>
-          <p:nvPr/>
-        </p:nvSpPr>
-        <p:spPr>
-          <a:xfrm>
-            <a:off x="530352" y="2176272"/>
-            <a:ext cx="2395728" cy="640080"/>
-          </a:xfrm>
-          <a:prstGeom prst="rect">
-            <a:avLst/>
-          </a:prstGeom>
-          <a:noFill/>
-        </p:spPr>
-        <p:txBody>
-          <a:bodyPr wrap="square">
-            <a:spAutoFit/>
-          </a:bodyPr>
-          <a:lstStyle/>
-          <a:p>
-            <a:pPr algn="l"/>
-            <a:r>
-              <a:rPr sz="3600" b="1" i="0">
-                <a:solidFill>
-                  <a:srgbClr val="FFFFFF"/>
-                </a:solidFill>
-                <a:latin typeface="Barlow Condensed"/>
-              </a:rPr>
-              <a:t>&lt; 1 SEC</a:t>
-            </a:r>
-          </a:p>
-        </p:txBody>
-      </p:sp>
-      <p:sp>
-        <p:nvSpPr>
-          <p:cNvPr id="15" name="TextBox 14"/>
-          <p:cNvSpPr txBox="1"/>
-          <p:nvPr/>
-        </p:nvSpPr>
-        <p:spPr>
-          <a:xfrm>
-            <a:off x="530352" y="2816352"/>
-            <a:ext cx="2395728" cy="457200"/>
-          </a:xfrm>
-          <a:prstGeom prst="rect">
-            <a:avLst/>
-          </a:prstGeom>
-          <a:noFill/>
-        </p:spPr>
-        <p:txBody>
-          <a:bodyPr wrap="square">
-            <a:spAutoFit/>
-          </a:bodyPr>
-          <a:lstStyle/>
-          <a:p>
-            <a:pPr algn="l"/>
-            <a:r>
-              <a:rPr sz="850" b="0" i="0">
-                <a:solidFill>
-                  <a:srgbClr val="CCFFEE"/>
-                </a:solidFill>
-                <a:latin typeface="Barlow Condensed"/>
-              </a:rPr>
-              <a:t>Signal identified.
-Pattern matched. Score computed.</a:t>
-            </a:r>
-          </a:p>
-        </p:txBody>
-      </p:sp>
-      <p:sp>
-        <p:nvSpPr>
-          <p:cNvPr id="16" name="TextBox 15"/>
-          <p:cNvSpPr txBox="1"/>
-          <p:nvPr/>
-        </p:nvSpPr>
-        <p:spPr>
-          <a:xfrm>
-            <a:off x="3108960" y="2322576"/>
-            <a:ext cx="384048" cy="530352"/>
-          </a:xfrm>
-          <a:prstGeom prst="rect">
-            <a:avLst/>
-          </a:prstGeom>
-          <a:noFill/>
-        </p:spPr>
-        <p:txBody>
-          <a:bodyPr wrap="square">
-            <a:spAutoFit/>
-          </a:bodyPr>
-          <a:lstStyle/>
-          <a:p>
-            <a:pPr algn="ctr"/>
-            <a:r>
-              <a:rPr sz="2600" b="1" i="0">
-                <a:solidFill>
-                  <a:srgbClr val="C9A84C"/>
-                </a:solidFill>
-                <a:latin typeface="Barlow Condensed"/>
-              </a:rPr>
-              <a:t>→</a:t>
-            </a:r>
-          </a:p>
-        </p:txBody>
-      </p:sp>
-      <p:sp>
-        <p:nvSpPr>
-          <p:cNvPr id="17" name="Rectangle 16"/>
-          <p:cNvSpPr/>
-          <p:nvPr/>
-        </p:nvSpPr>
-        <p:spPr>
-          <a:xfrm>
-            <a:off x="3529584" y="1920240"/>
-            <a:ext cx="2450592" cy="1444752"/>
-          </a:xfrm>
-          <a:prstGeom prst="rect">
-            <a:avLst/>
-          </a:prstGeom>
-          <a:solidFill>
-            <a:srgbClr val="3A1010"/>
-          </a:solidFill>
-          <a:ln>
-            <a:noFill/>
-          </a:ln>
-        </p:spPr>
-        <p:style>
-          <a:lnRef idx="1">
-            <a:schemeClr val="accent1"/>
-          </a:lnRef>
-          <a:fillRef idx="3">
-            <a:schemeClr val="accent1"/>
-          </a:fillRef>
-          <a:effectRef idx="2">
-            <a:schemeClr val="accent1"/>
-          </a:effectRef>
-          <a:fontRef idx="minor">
-            <a:schemeClr val="lt1"/>
-          </a:fontRef>
-        </p:style>
-        <p:txBody>
-          <a:bodyPr rtlCol="0" anchor="ctr"/>
-          <a:lstStyle/>
-          <a:p>
-            <a:pPr algn="ctr"/>
-          </a:p>
-        </p:txBody>
-      </p:sp>
-      <p:sp>
-        <p:nvSpPr>
-          <p:cNvPr id="18" name="Rectangle 17"/>
-          <p:cNvSpPr/>
-          <p:nvPr/>
-        </p:nvSpPr>
-        <p:spPr>
-          <a:xfrm>
-            <a:off x="3529584" y="1920240"/>
-            <a:ext cx="2450592" cy="29260"/>
-          </a:xfrm>
-          <a:prstGeom prst="rect">
-            <a:avLst/>
-          </a:prstGeom>
-          <a:solidFill>
-            <a:srgbClr val="992222"/>
-          </a:solidFill>
-          <a:ln>
-            <a:noFill/>
-          </a:ln>
-        </p:spPr>
-        <p:style>
-          <a:lnRef idx="1">
-            <a:schemeClr val="accent1"/>
-          </a:lnRef>
-          <a:fillRef idx="3">
-            <a:schemeClr val="accent1"/>
-          </a:fillRef>
-          <a:effectRef idx="2">
-            <a:schemeClr val="accent1"/>
-          </a:effectRef>
-          <a:fontRef idx="minor">
-            <a:schemeClr val="lt1"/>
-          </a:fontRef>
-        </p:style>
-        <p:txBody>
-          <a:bodyPr rtlCol="0" anchor="ctr"/>
-          <a:lstStyle/>
-          <a:p>
-            <a:pPr algn="ctr"/>
-          </a:p>
-        </p:txBody>
-      </p:sp>
-      <p:sp>
-        <p:nvSpPr>
-          <p:cNvPr id="19" name="TextBox 18"/>
-          <p:cNvSpPr txBox="1"/>
-          <p:nvPr/>
-        </p:nvSpPr>
-        <p:spPr>
-          <a:xfrm>
-            <a:off x="3639312" y="1965960"/>
-            <a:ext cx="2231136" cy="201168"/>
-          </a:xfrm>
-          <a:prstGeom prst="rect">
-            <a:avLst/>
-          </a:prstGeom>
-          <a:noFill/>
-        </p:spPr>
-        <p:txBody>
-          <a:bodyPr wrap="square">
-            <a:spAutoFit/>
-          </a:bodyPr>
-          <a:lstStyle/>
-          <a:p>
-            <a:pPr algn="l"/>
-            <a:r>
-              <a:rPr sz="800" b="1" i="0">
-                <a:solidFill>
-                  <a:srgbClr val="FF6666"/>
-                </a:solidFill>
-                <a:latin typeface="Barlow Condensed"/>
-              </a:rPr>
-              <a:t>MOBILIZATION</a:t>
-            </a:r>
-          </a:p>
-        </p:txBody>
-      </p:sp>
-      <p:sp>
-        <p:nvSpPr>
-          <p:cNvPr id="20" name="TextBox 19"/>
-          <p:cNvSpPr txBox="1"/>
-          <p:nvPr/>
-        </p:nvSpPr>
-        <p:spPr>
-          <a:xfrm>
-            <a:off x="3639312" y="2176272"/>
-            <a:ext cx="2231136" cy="640080"/>
-          </a:xfrm>
-          <a:prstGeom prst="rect">
-            <a:avLst/>
-          </a:prstGeom>
-          <a:noFill/>
-        </p:spPr>
-        <p:txBody>
-          <a:bodyPr wrap="square">
-            <a:spAutoFit/>
-          </a:bodyPr>
-          <a:lstStyle/>
-          <a:p>
-            <a:pPr algn="l"/>
-            <a:r>
-              <a:rPr sz="3600" b="1" i="0">
-                <a:solidFill>
-                  <a:srgbClr val="FF8888"/>
-                </a:solidFill>
-                <a:latin typeface="Barlow Condensed"/>
-              </a:rPr>
-              <a:t>30 DAYS</a:t>
-            </a:r>
-          </a:p>
-        </p:txBody>
-      </p:sp>
-      <p:sp>
-        <p:nvSpPr>
-          <p:cNvPr id="21" name="TextBox 20"/>
-          <p:cNvSpPr txBox="1"/>
-          <p:nvPr/>
-        </p:nvSpPr>
-        <p:spPr>
-          <a:xfrm>
-            <a:off x="3639312" y="2816352"/>
-            <a:ext cx="2231136" cy="457200"/>
-          </a:xfrm>
-          <a:prstGeom prst="rect">
-            <a:avLst/>
-          </a:prstGeom>
-          <a:noFill/>
-        </p:spPr>
-        <p:txBody>
-          <a:bodyPr wrap="square">
-            <a:spAutoFit/>
-          </a:bodyPr>
-          <a:lstStyle/>
-          <a:p>
-            <a:pPr algn="l"/>
-            <a:r>
-              <a:rPr sz="850" b="0" i="0">
-                <a:solidFill>
-                  <a:srgbClr val="FFCCCC"/>
-                </a:solidFill>
-                <a:latin typeface="Barlow Condensed"/>
-              </a:rPr>
-              <a:t>Who decides? Who calls who?
-Who owns the response?</a:t>
-            </a:r>
-          </a:p>
-        </p:txBody>
-      </p:sp>
-      <p:sp>
-        <p:nvSpPr>
-          <p:cNvPr id="22" name="TextBox 21"/>
-          <p:cNvSpPr txBox="1"/>
-          <p:nvPr/>
-        </p:nvSpPr>
-        <p:spPr>
-          <a:xfrm>
-            <a:off x="411480" y="3529584"/>
-            <a:ext cx="5669280" cy="365760"/>
-          </a:xfrm>
-          <a:prstGeom prst="rect">
-            <a:avLst/>
-          </a:prstGeom>
-          <a:noFill/>
-        </p:spPr>
-        <p:txBody>
-          <a:bodyPr wrap="square">
-            <a:spAutoFit/>
-          </a:bodyPr>
-          <a:lstStyle/>
-          <a:p>
-            <a:r>
-              <a:rPr sz="1100">
-                <a:solidFill>
-                  <a:srgbClr val="FFFFFF"/>
-                </a:solidFill>
-                <a:latin typeface="Barlow Condensed"/>
-              </a:rPr>
-              <a:t>▶  Startup to Fortune 500: same trigger, identical 30-day delay</a:t>
-            </a:r>
-          </a:p>
-        </p:txBody>
-      </p:sp>
-      <p:sp>
-        <p:nvSpPr>
-          <p:cNvPr id="23" name="TextBox 22"/>
-          <p:cNvSpPr txBox="1"/>
-          <p:nvPr/>
-        </p:nvSpPr>
-        <p:spPr>
-          <a:xfrm>
-            <a:off x="411480" y="3881628"/>
-            <a:ext cx="5669280" cy="365760"/>
-          </a:xfrm>
-          <a:prstGeom prst="rect">
-            <a:avLst/>
-          </a:prstGeom>
-          <a:noFill/>
-        </p:spPr>
-        <p:txBody>
-          <a:bodyPr wrap="square">
-            <a:spAutoFit/>
-          </a:bodyPr>
-          <a:lstStyle/>
-          <a:p>
-            <a:r>
-              <a:rPr sz="1100">
-                <a:solidFill>
-                  <a:srgbClr val="FFFFFF"/>
-                </a:solidFill>
-                <a:latin typeface="Barlow Condensed"/>
-              </a:rPr>
-              <a:t>▶  The delay is not execution — it is mobilization architecture</a:t>
-            </a:r>
-          </a:p>
-        </p:txBody>
-      </p:sp>
-      <p:sp>
-        <p:nvSpPr>
-          <p:cNvPr id="24" name="TextBox 23"/>
-          <p:cNvSpPr txBox="1"/>
-          <p:nvPr/>
-        </p:nvSpPr>
-        <p:spPr>
-          <a:xfrm>
-            <a:off x="411480" y="4233672"/>
-            <a:ext cx="5669280" cy="365760"/>
-          </a:xfrm>
-          <a:prstGeom prst="rect">
-            <a:avLst/>
-          </a:prstGeom>
-          <a:noFill/>
-        </p:spPr>
-        <p:txBody>
-          <a:bodyPr wrap="square">
-            <a:spAutoFit/>
-          </a:bodyPr>
-          <a:lstStyle/>
-          <a:p>
-            <a:r>
-              <a:rPr sz="1100">
-                <a:solidFill>
-                  <a:srgbClr val="FFFFFF"/>
-                </a:solidFill>
-                <a:latin typeface="Barlow Condensed"/>
-              </a:rPr>
-              <a:t>▶  Every day of drift is a window activists, regulators, or competitors own</a:t>
-            </a:r>
-          </a:p>
-        </p:txBody>
-      </p:sp>
-      <p:sp>
-        <p:nvSpPr>
-          <p:cNvPr id="25" name="Rectangle 24"/>
-          <p:cNvSpPr/>
-          <p:nvPr/>
-        </p:nvSpPr>
-        <p:spPr>
-          <a:xfrm>
-            <a:off x="411480" y="4663440"/>
-            <a:ext cx="5596128" cy="566928"/>
-          </a:xfrm>
-          <a:prstGeom prst="rect">
-            <a:avLst/>
-          </a:prstGeom>
-          <a:solidFill>
-            <a:srgbClr val="101842"/>
-          </a:solidFill>
-          <a:ln>
-            <a:noFill/>
-          </a:ln>
-        </p:spPr>
-        <p:style>
-          <a:lnRef idx="1">
-            <a:schemeClr val="accent1"/>
-          </a:lnRef>
-          <a:fillRef idx="3">
-            <a:schemeClr val="accent1"/>
-          </a:fillRef>
-          <a:effectRef idx="2">
-            <a:schemeClr val="accent1"/>
-          </a:effectRef>
-          <a:fontRef idx="minor">
-            <a:schemeClr val="lt1"/>
-          </a:fontRef>
-        </p:style>
-        <p:txBody>
-          <a:bodyPr rtlCol="0" anchor="ctr"/>
-          <a:lstStyle/>
-          <a:p>
-            <a:pPr algn="ctr"/>
-          </a:p>
-        </p:txBody>
-      </p:sp>
-      <p:sp>
-        <p:nvSpPr>
-          <p:cNvPr id="26" name="Rectangle 25"/>
-          <p:cNvSpPr/>
-          <p:nvPr/>
-        </p:nvSpPr>
-        <p:spPr>
-          <a:xfrm>
-            <a:off x="411480" y="4663440"/>
-            <a:ext cx="5596128" cy="21945"/>
+            <a:off x="6382512" y="502920"/>
+            <a:ext cx="36576" cy="6035040"/>
           </a:xfrm>
           <a:prstGeom prst="rect">
             <a:avLst/>
@@ -6838,208 +6912,9 @@
           </a:p>
         </p:txBody>
       </p:sp>
-      <p:sp>
-        <p:nvSpPr>
-          <p:cNvPr id="27" name="TextBox 26"/>
-          <p:cNvSpPr txBox="1"/>
-          <p:nvPr/>
-        </p:nvSpPr>
-        <p:spPr>
-          <a:xfrm>
-            <a:off x="548640" y="4718304"/>
-            <a:ext cx="5449824" cy="457200"/>
-          </a:xfrm>
-          <a:prstGeom prst="rect">
-            <a:avLst/>
-          </a:prstGeom>
-          <a:noFill/>
-        </p:spPr>
-        <p:txBody>
-          <a:bodyPr wrap="square">
-            <a:spAutoFit/>
-          </a:bodyPr>
-          <a:lstStyle/>
-          <a:p>
-            <a:pPr algn="l"/>
-            <a:r>
-              <a:rPr sz="900" b="0" i="0">
-                <a:solidFill>
-                  <a:srgbClr val="B4BED6"/>
-                </a:solidFill>
-                <a:latin typeface="Barlow Condensed"/>
-              </a:rPr>
-              <a:t>$4.4T AT RISK ANNUALLY  ·  Enterprise coordination failures  ·  Preparation Infrastructure is the unclaimed layer above every AI stack.</a:t>
-            </a:r>
-          </a:p>
-        </p:txBody>
-      </p:sp>
-      <p:sp>
-        <p:nvSpPr>
-          <p:cNvPr id="28" name="Rectangle 27"/>
-          <p:cNvSpPr/>
-          <p:nvPr/>
-        </p:nvSpPr>
-        <p:spPr>
-          <a:xfrm>
-            <a:off x="411480" y="5449824"/>
-            <a:ext cx="5394960" cy="10972"/>
-          </a:xfrm>
-          <a:prstGeom prst="rect">
-            <a:avLst/>
-          </a:prstGeom>
-          <a:solidFill>
-            <a:srgbClr val="A08230"/>
-          </a:solidFill>
-          <a:ln>
-            <a:noFill/>
-          </a:ln>
-        </p:spPr>
-        <p:style>
-          <a:lnRef idx="1">
-            <a:schemeClr val="accent1"/>
-          </a:lnRef>
-          <a:fillRef idx="3">
-            <a:schemeClr val="accent1"/>
-          </a:fillRef>
-          <a:effectRef idx="2">
-            <a:schemeClr val="accent1"/>
-          </a:effectRef>
-          <a:fontRef idx="minor">
-            <a:schemeClr val="lt1"/>
-          </a:fontRef>
-        </p:style>
-        <p:txBody>
-          <a:bodyPr rtlCol="0" anchor="ctr"/>
-          <a:lstStyle/>
-          <a:p>
-            <a:pPr algn="ctr"/>
-          </a:p>
-        </p:txBody>
-      </p:sp>
-      <p:sp>
-        <p:nvSpPr>
-          <p:cNvPr id="29" name="TextBox 28"/>
-          <p:cNvSpPr txBox="1"/>
-          <p:nvPr/>
-        </p:nvSpPr>
-        <p:spPr>
-          <a:xfrm>
-            <a:off x="411480" y="5513832"/>
-            <a:ext cx="5669280" cy="768096"/>
-          </a:xfrm>
-          <a:prstGeom prst="rect">
-            <a:avLst/>
-          </a:prstGeom>
-          <a:noFill/>
-        </p:spPr>
-        <p:txBody>
-          <a:bodyPr wrap="square">
-            <a:spAutoFit/>
-          </a:bodyPr>
-          <a:lstStyle/>
-          <a:p>
-            <a:pPr algn="l"/>
-            <a:r>
-              <a:rPr sz="900" b="0" i="1">
-                <a:solidFill>
-                  <a:srgbClr val="B4BED6"/>
-                </a:solidFill>
-                <a:latin typeface="Georgia"/>
-              </a:rPr>
-              <a:t>"The market thinks companies have a strategy problem. They don't. They have an architecture problem. That 30-day delay is an existential window — and competitors completely own it."</a:t>
-            </a:r>
-          </a:p>
-        </p:txBody>
-      </p:sp>
-      <p:sp>
-        <p:nvSpPr>
-          <p:cNvPr id="30" name="Rectangle 29"/>
-          <p:cNvSpPr/>
-          <p:nvPr/>
-        </p:nvSpPr>
-        <p:spPr>
-          <a:xfrm>
-            <a:off x="6455664" y="557784"/>
-            <a:ext cx="5468112" cy="5888736"/>
-          </a:xfrm>
-          <a:prstGeom prst="rect">
-            <a:avLst/>
-          </a:prstGeom>
-          <a:solidFill>
-            <a:srgbClr val="040718"/>
-          </a:solidFill>
-          <a:ln>
-            <a:noFill/>
-          </a:ln>
-        </p:spPr>
-        <p:style>
-          <a:lnRef idx="1">
-            <a:schemeClr val="accent1"/>
-          </a:lnRef>
-          <a:fillRef idx="3">
-            <a:schemeClr val="accent1"/>
-          </a:fillRef>
-          <a:effectRef idx="2">
-            <a:schemeClr val="accent1"/>
-          </a:effectRef>
-          <a:fontRef idx="minor">
-            <a:schemeClr val="lt1"/>
-          </a:fontRef>
-        </p:style>
-        <p:txBody>
-          <a:bodyPr rtlCol="0" anchor="ctr"/>
-          <a:lstStyle/>
-          <a:p>
-            <a:pPr algn="ctr"/>
-          </a:p>
-        </p:txBody>
-      </p:sp>
-      <p:sp>
-        <p:nvSpPr>
-          <p:cNvPr id="31" name="Rectangle 30"/>
-          <p:cNvSpPr/>
-          <p:nvPr/>
-        </p:nvSpPr>
-        <p:spPr>
-          <a:xfrm>
-            <a:off x="6364224" y="502920"/>
-            <a:ext cx="36576" cy="5888736"/>
-          </a:xfrm>
-          <a:prstGeom prst="rect">
-            <a:avLst/>
-          </a:prstGeom>
-          <a:solidFill>
-            <a:srgbClr val="C9A84C"/>
-          </a:solidFill>
-          <a:ln>
-            <a:noFill/>
-          </a:ln>
-        </p:spPr>
-        <p:style>
-          <a:lnRef idx="1">
-            <a:schemeClr val="accent1"/>
-          </a:lnRef>
-          <a:fillRef idx="3">
-            <a:schemeClr val="accent1"/>
-          </a:fillRef>
-          <a:effectRef idx="2">
-            <a:schemeClr val="accent1"/>
-          </a:effectRef>
-          <a:fontRef idx="minor">
-            <a:schemeClr val="lt1"/>
-          </a:fontRef>
-        </p:style>
-        <p:txBody>
-          <a:bodyPr rtlCol="0" anchor="ctr"/>
-          <a:lstStyle/>
-          <a:p>
-            <a:pPr algn="ctr"/>
-          </a:p>
-        </p:txBody>
-      </p:sp>
       <p:pic>
         <p:nvPicPr>
-          <p:cNvPr id="32" name="Picture 31" descr="wow_command_tower.jpg"/>
+          <p:cNvPr id="30" name="Picture 29" descr="hq_command_tower.jpg"/>
           <p:cNvPicPr>
             <a:picLocks noChangeAspect="1"/>
           </p:cNvPicPr>
@@ -7053,8 +6928,8 @@
         </p:blipFill>
         <p:spPr>
           <a:xfrm>
-            <a:off x="6400800" y="502920"/>
-            <a:ext cx="5468112" cy="5888736"/>
+            <a:off x="6419088" y="502920"/>
+            <a:ext cx="5394960" cy="6035040"/>
           </a:xfrm>
           <a:prstGeom prst="rect">
             <a:avLst/>
@@ -7063,14 +6938,14 @@
       </p:pic>
       <p:sp>
         <p:nvSpPr>
-          <p:cNvPr id="33" name="Rectangle 32"/>
+          <p:cNvPr id="31" name="Rectangle 30"/>
           <p:cNvSpPr/>
           <p:nvPr/>
         </p:nvSpPr>
         <p:spPr>
           <a:xfrm>
-            <a:off x="6400800" y="6190488"/>
-            <a:ext cx="5468112" cy="201168"/>
+            <a:off x="6419088" y="6355079"/>
+            <a:ext cx="5394960" cy="182880"/>
           </a:xfrm>
           <a:prstGeom prst="rect">
             <a:avLst/>
@@ -7181,8 +7056,8 @@
         </p:nvSpPr>
         <p:spPr>
           <a:xfrm>
-            <a:off x="10698480" y="82296"/>
-            <a:ext cx="1371600" cy="219456"/>
+            <a:off x="10789920" y="73152"/>
+            <a:ext cx="1280160" cy="173736"/>
           </a:xfrm>
           <a:prstGeom prst="rect">
             <a:avLst/>
@@ -7199,11 +7074,11 @@
             <a:r>
               <a:rPr sz="750" b="1" i="0">
                 <a:solidFill>
-                  <a:srgbClr val="C9A84C"/>
-                </a:solidFill>
-                <a:latin typeface="Barlow Condensed"/>
-              </a:rPr>
-              <a:t>SLIDE 02  ·  08</a:t>
+                  <a:srgbClr val="0A0F2E"/>
+                </a:solidFill>
+                <a:latin typeface="Calibri"/>
+              </a:rPr>
+              <a:t>02  /  08</a:t>
             </a:r>
           </a:p>
         </p:txBody>
@@ -7223,7 +7098,7 @@
             <a:avLst/>
           </a:prstGeom>
           <a:solidFill>
-            <a:srgbClr val="080D28"/>
+            <a:srgbClr val="070B24"/>
           </a:solidFill>
           <a:ln>
             <a:noFill/>
@@ -7259,8 +7134,8 @@
         </p:nvSpPr>
         <p:spPr>
           <a:xfrm>
-            <a:off x="411480" y="6748272"/>
-            <a:ext cx="4572000" cy="182880"/>
+            <a:off x="411480" y="6744614"/>
+            <a:ext cx="5029200" cy="155448"/>
           </a:xfrm>
           <a:prstGeom prst="rect">
             <a:avLst/>
@@ -7279,7 +7154,7 @@
                 <a:solidFill>
                   <a:srgbClr val="C9A84C"/>
                 </a:solidFill>
-                <a:latin typeface="Barlow Condensed"/>
+                <a:latin typeface="Calibri"/>
               </a:rPr>
               <a:t>VaughnMartin  ·  READINESS OS</a:t>
             </a:r>
@@ -7294,8 +7169,8 @@
         </p:nvSpPr>
         <p:spPr>
           <a:xfrm>
-            <a:off x="7315200" y="6748272"/>
-            <a:ext cx="4663440" cy="182880"/>
+            <a:off x="7132320" y="6744614"/>
+            <a:ext cx="4937760" cy="155448"/>
           </a:xfrm>
           <a:prstGeom prst="rect">
             <a:avLst/>
@@ -7312,9 +7187,9 @@
             <a:r>
               <a:rPr sz="750" b="0" i="0">
                 <a:solidFill>
-                  <a:srgbClr val="B4BED6"/>
-                </a:solidFill>
-                <a:latin typeface="Barlow Condensed"/>
+                  <a:srgbClr val="AAB4CC"/>
+                </a:solidFill>
+                <a:latin typeface="Calibri"/>
               </a:rPr>
               <a:t>vaughnmartin.com</a:t>
             </a:r>
@@ -7330,7 +7205,7 @@
         <p:spPr>
           <a:xfrm>
             <a:off x="411480" y="237744"/>
-            <a:ext cx="11338560" cy="201168"/>
+            <a:ext cx="11338560" cy="192024"/>
           </a:xfrm>
           <a:prstGeom prst="rect">
             <a:avLst/>
@@ -7349,7 +7224,7 @@
                 <a:solidFill>
                   <a:srgbClr val="C9A84C"/>
                 </a:solidFill>
-                <a:latin typeface="Barlow Condensed"/>
+                <a:latin typeface="Calibri"/>
               </a:rPr>
               <a:t>THE FOUNDER</a:t>
             </a:r>
@@ -7365,7 +7240,7 @@
         <p:spPr>
           <a:xfrm>
             <a:off x="411480" y="475488"/>
-            <a:ext cx="11338560" cy="533400"/>
+            <a:ext cx="11338560" cy="487680"/>
           </a:xfrm>
           <a:prstGeom prst="rect">
             <a:avLst/>
@@ -7384,7 +7259,7 @@
                 <a:solidFill>
                   <a:srgbClr val="C9A84C"/>
                 </a:solidFill>
-                <a:latin typeface="Barlow Condensed"/>
+                <a:latin typeface="Calibri"/>
               </a:rPr>
               <a:t>THE ONLY TEAM ALIVE</a:t>
             </a:r>
@@ -7400,7 +7275,7 @@
         <p:spPr>
           <a:xfrm>
             <a:off x="411480" y="963167"/>
-            <a:ext cx="11338560" cy="533400"/>
+            <a:ext cx="11338560" cy="487680"/>
           </a:xfrm>
           <a:prstGeom prst="rect">
             <a:avLst/>
@@ -7419,7 +7294,7 @@
                 <a:solidFill>
                   <a:srgbClr val="FFFFFF"/>
                 </a:solidFill>
-                <a:latin typeface="Barlow Condensed"/>
+                <a:latin typeface="Calibri"/>
               </a:rPr>
               <a:t>THAT COULD BUILD THIS.</a:t>
             </a:r>
@@ -7434,8 +7309,8 @@
         </p:nvSpPr>
         <p:spPr>
           <a:xfrm>
-            <a:off x="411480" y="1719072"/>
-            <a:ext cx="11155680" cy="10972"/>
+            <a:off x="411480" y="1578864"/>
+            <a:ext cx="11155680" cy="9144"/>
           </a:xfrm>
           <a:prstGeom prst="rect">
             <a:avLst/>
@@ -7477,14 +7352,14 @@
         </p:nvSpPr>
         <p:spPr>
           <a:xfrm>
-            <a:off x="411480" y="1847088"/>
-            <a:ext cx="5285232" cy="237744"/>
+            <a:off x="411480" y="1725472"/>
+            <a:ext cx="5266944" cy="237744"/>
           </a:xfrm>
           <a:prstGeom prst="rect">
             <a:avLst/>
           </a:prstGeom>
           <a:solidFill>
-            <a:srgbClr val="101842"/>
+            <a:srgbClr val="0E163C"/>
           </a:solidFill>
           <a:ln>
             <a:noFill/>
@@ -7520,8 +7395,8 @@
         </p:nvSpPr>
         <p:spPr>
           <a:xfrm>
-            <a:off x="521208" y="1865376"/>
-            <a:ext cx="5102352" cy="201168"/>
+            <a:off x="521208" y="1762048"/>
+            <a:ext cx="5120640" cy="182880"/>
           </a:xfrm>
           <a:prstGeom prst="rect">
             <a:avLst/>
@@ -7540,7 +7415,7 @@
                 <a:solidFill>
                   <a:srgbClr val="C9A84C"/>
                 </a:solidFill>
-                <a:latin typeface="Barlow Condensed"/>
+                <a:latin typeface="Calibri"/>
               </a:rPr>
               <a:t>FORTUNE 500 OPERATIONS  ·  20 YEARS</a:t>
             </a:r>
@@ -7555,8 +7430,8 @@
         </p:nvSpPr>
         <p:spPr>
           <a:xfrm>
-            <a:off x="521208" y="2176272"/>
-            <a:ext cx="5102352" cy="329184"/>
+            <a:off x="521208" y="2036368"/>
+            <a:ext cx="5120640" cy="347472"/>
           </a:xfrm>
           <a:prstGeom prst="rect">
             <a:avLst/>
@@ -7571,11 +7446,11 @@
           <a:p>
             <a:pPr algn="l"/>
             <a:r>
-              <a:rPr sz="1050" b="0" i="0">
+              <a:rPr sz="1000" b="0" i="0">
                 <a:solidFill>
                   <a:srgbClr val="FFFFFF"/>
                 </a:solidFill>
-                <a:latin typeface="Barlow Condensed"/>
+                <a:latin typeface="Calibri"/>
               </a:rPr>
               <a:t>·  Ford · Toyota · Lockheed Martin · Charles Schwab</a:t>
             </a:r>
@@ -7590,8 +7465,8 @@
         </p:nvSpPr>
         <p:spPr>
           <a:xfrm>
-            <a:off x="521208" y="2523744"/>
-            <a:ext cx="5102352" cy="329184"/>
+            <a:off x="521208" y="2420416"/>
+            <a:ext cx="5120640" cy="347472"/>
           </a:xfrm>
           <a:prstGeom prst="rect">
             <a:avLst/>
@@ -7606,11 +7481,11 @@
           <a:p>
             <a:pPr algn="l"/>
             <a:r>
-              <a:rPr sz="1050" b="0" i="0">
+              <a:rPr sz="1000" b="0" i="0">
                 <a:solidFill>
                   <a:srgbClr val="FFFFFF"/>
                 </a:solidFill>
-                <a:latin typeface="Barlow Condensed"/>
+                <a:latin typeface="Calibri"/>
               </a:rPr>
               <a:t>·  Watched the 30-day mobilization failure repeat across every vertical</a:t>
             </a:r>
@@ -7625,8 +7500,8 @@
         </p:nvSpPr>
         <p:spPr>
           <a:xfrm>
-            <a:off x="521208" y="2871215"/>
-            <a:ext cx="5102352" cy="329184"/>
+            <a:off x="521208" y="2804464"/>
+            <a:ext cx="5120640" cy="347472"/>
           </a:xfrm>
           <a:prstGeom prst="rect">
             <a:avLst/>
@@ -7641,11 +7516,11 @@
           <a:p>
             <a:pPr algn="l"/>
             <a:r>
-              <a:rPr sz="1050" b="0" i="0">
+              <a:rPr sz="1000" b="0" i="0">
                 <a:solidFill>
                   <a:srgbClr val="FFFFFF"/>
                 </a:solidFill>
-                <a:latin typeface="Barlow Condensed"/>
+                <a:latin typeface="Calibri"/>
               </a:rPr>
               <a:t>·  Same architecture gap — different trigger, identical delay</a:t>
             </a:r>
@@ -7660,8 +7535,8 @@
         </p:nvSpPr>
         <p:spPr>
           <a:xfrm>
-            <a:off x="521208" y="3218688"/>
-            <a:ext cx="5102352" cy="329184"/>
+            <a:off x="521208" y="3188512"/>
+            <a:ext cx="5120640" cy="347472"/>
           </a:xfrm>
           <a:prstGeom prst="rect">
             <a:avLst/>
@@ -7676,11 +7551,11 @@
           <a:p>
             <a:pPr algn="l"/>
             <a:r>
-              <a:rPr sz="1050" b="0" i="0">
+              <a:rPr sz="1000" b="0" i="0">
                 <a:solidFill>
                   <a:srgbClr val="FFFFFF"/>
                 </a:solidFill>
-                <a:latin typeface="Barlow Condensed"/>
+                <a:latin typeface="Calibri"/>
               </a:rPr>
               <a:t>·  Built Readiness OS in 2023 to end that pattern permanently</a:t>
             </a:r>
@@ -7695,14 +7570,14 @@
         </p:nvSpPr>
         <p:spPr>
           <a:xfrm>
-            <a:off x="6400800" y="1847088"/>
-            <a:ext cx="5285232" cy="237744"/>
+            <a:off x="6419088" y="1725472"/>
+            <a:ext cx="5266944" cy="237744"/>
           </a:xfrm>
           <a:prstGeom prst="rect">
             <a:avLst/>
           </a:prstGeom>
           <a:solidFill>
-            <a:srgbClr val="101842"/>
+            <a:srgbClr val="0E163C"/>
           </a:solidFill>
           <a:ln>
             <a:noFill/>
@@ -7738,8 +7613,8 @@
         </p:nvSpPr>
         <p:spPr>
           <a:xfrm>
-            <a:off x="6510528" y="1865376"/>
-            <a:ext cx="5102352" cy="201168"/>
+            <a:off x="6528816" y="1762048"/>
+            <a:ext cx="5120640" cy="182880"/>
           </a:xfrm>
           <a:prstGeom prst="rect">
             <a:avLst/>
@@ -7758,7 +7633,7 @@
                 <a:solidFill>
                   <a:srgbClr val="2B8A6E"/>
                 </a:solidFill>
-                <a:latin typeface="Barlow Condensed"/>
+                <a:latin typeface="Calibri"/>
               </a:rPr>
               <a:t>STANFORD UNIVERSITY  ·  FOOTBALL COACHING  ·  5 YEARS</a:t>
             </a:r>
@@ -7773,8 +7648,8 @@
         </p:nvSpPr>
         <p:spPr>
           <a:xfrm>
-            <a:off x="6510528" y="2176272"/>
-            <a:ext cx="5102352" cy="329184"/>
+            <a:off x="6528816" y="2036368"/>
+            <a:ext cx="5120640" cy="347472"/>
           </a:xfrm>
           <a:prstGeom prst="rect">
             <a:avLst/>
@@ -7789,13 +7664,13 @@
           <a:p>
             <a:pPr algn="l"/>
             <a:r>
-              <a:rPr sz="1050" b="0" i="0">
+              <a:rPr sz="1000" b="0" i="0">
                 <a:solidFill>
                   <a:srgbClr val="FFFFFF"/>
                 </a:solidFill>
-                <a:latin typeface="Barlow Condensed"/>
-              </a:rPr>
-              <a:t>·  Major college football — billion-dollar coordinated operation under pressure</a:t>
+                <a:latin typeface="Calibri"/>
+              </a:rPr>
+              <a:t>·  Major college football — billion-dollar coordinated operation</a:t>
             </a:r>
           </a:p>
         </p:txBody>
@@ -7808,8 +7683,8 @@
         </p:nvSpPr>
         <p:spPr>
           <a:xfrm>
-            <a:off x="6510528" y="2523744"/>
-            <a:ext cx="5102352" cy="329184"/>
+            <a:off x="6528816" y="2420416"/>
+            <a:ext cx="5120640" cy="347472"/>
           </a:xfrm>
           <a:prstGeom prst="rect">
             <a:avLst/>
@@ -7824,13 +7699,13 @@
           <a:p>
             <a:pPr algn="l"/>
             <a:r>
-              <a:rPr sz="1050" b="0" i="0">
+              <a:rPr sz="1000" b="0" i="0">
                 <a:solidFill>
                   <a:srgbClr val="FFFFFF"/>
                 </a:solidFill>
-                <a:latin typeface="Barlow Condensed"/>
-              </a:rPr>
-              <a:t>·  40-second play clock — full organizational response, no committee</a:t>
+                <a:latin typeface="Calibri"/>
+              </a:rPr>
+              <a:t>·  40-second play clock: full response without a committee meeting</a:t>
             </a:r>
           </a:p>
         </p:txBody>
@@ -7843,8 +7718,8 @@
         </p:nvSpPr>
         <p:spPr>
           <a:xfrm>
-            <a:off x="6510528" y="2871215"/>
-            <a:ext cx="5102352" cy="329184"/>
+            <a:off x="6528816" y="2804464"/>
+            <a:ext cx="5120640" cy="347472"/>
           </a:xfrm>
           <a:prstGeom prst="rect">
             <a:avLst/>
@@ -7859,11 +7734,11 @@
           <a:p>
             <a:pPr algn="l"/>
             <a:r>
-              <a:rPr sz="1050" b="0" i="0">
+              <a:rPr sz="1000" b="0" i="0">
                 <a:solidFill>
                   <a:srgbClr val="FFFFFF"/>
                 </a:solidFill>
-                <a:latin typeface="Barlow Condensed"/>
+                <a:latin typeface="Calibri"/>
               </a:rPr>
               <a:t>·  You don't design the play after the snap — the response is pre-staged</a:t>
             </a:r>
@@ -7878,8 +7753,8 @@
         </p:nvSpPr>
         <p:spPr>
           <a:xfrm>
-            <a:off x="6510528" y="3218688"/>
-            <a:ext cx="5102352" cy="329184"/>
+            <a:off x="6528816" y="3188512"/>
+            <a:ext cx="5120640" cy="347472"/>
           </a:xfrm>
           <a:prstGeom prst="rect">
             <a:avLst/>
@@ -7894,11 +7769,11 @@
           <a:p>
             <a:pPr algn="l"/>
             <a:r>
-              <a:rPr sz="1050" b="0" i="0">
+              <a:rPr sz="1000" b="0" i="0">
                 <a:solidFill>
                   <a:srgbClr val="FFFFFF"/>
                 </a:solidFill>
-                <a:latin typeface="Barlow Condensed"/>
+                <a:latin typeface="Calibri"/>
               </a:rPr>
               <a:t>·  The preparation IS the execution. Not a metaphor. The architecture.</a:t>
             </a:r>
@@ -7913,14 +7788,14 @@
         </p:nvSpPr>
         <p:spPr>
           <a:xfrm>
-            <a:off x="411480" y="3712463"/>
-            <a:ext cx="11155680" cy="310896"/>
+            <a:off x="411480" y="3700576"/>
+            <a:ext cx="11155680" cy="274320"/>
           </a:xfrm>
           <a:prstGeom prst="rect">
             <a:avLst/>
           </a:prstGeom>
           <a:solidFill>
-            <a:srgbClr val="162052"/>
+            <a:srgbClr val="141E50"/>
           </a:solidFill>
           <a:ln>
             <a:noFill/>
@@ -7956,8 +7831,8 @@
         </p:nvSpPr>
         <p:spPr>
           <a:xfrm>
-            <a:off x="530352" y="3739896"/>
-            <a:ext cx="11018520" cy="256032"/>
+            <a:off x="530352" y="3755440"/>
+            <a:ext cx="11018520" cy="182880"/>
           </a:xfrm>
           <a:prstGeom prst="rect">
             <a:avLst/>
@@ -7972,13 +7847,13 @@
           <a:p>
             <a:pPr algn="ctr"/>
             <a:r>
-              <a:rPr sz="900" b="1" i="0">
+              <a:rPr sz="850" b="1" i="0">
                 <a:solidFill>
                   <a:srgbClr val="C9A84C"/>
                 </a:solidFill>
-                <a:latin typeface="Barlow Condensed"/>
-              </a:rPr>
-              <a:t>THE INTERSECTION — THE PREPARATION DISCIPLINE THAT WINS UNDER PRESSURE WAS MISSING FROM ENTERPRISE.</a:t>
+                <a:latin typeface="Calibri"/>
+              </a:rPr>
+              <a:t>THE INTERSECTION — PREPARATION DISCIPLINE THAT WINS UNDER PRESSURE WAS MISSING FROM ENTERPRISE.</a:t>
             </a:r>
           </a:p>
         </p:txBody>
@@ -7991,14 +7866,14 @@
         </p:nvSpPr>
         <p:spPr>
           <a:xfrm>
-            <a:off x="411480" y="5449824"/>
-            <a:ext cx="10881359" cy="10972"/>
+            <a:off x="411480" y="4102912"/>
+            <a:ext cx="10881360" cy="9144"/>
           </a:xfrm>
           <a:prstGeom prst="rect">
             <a:avLst/>
           </a:prstGeom>
           <a:solidFill>
-            <a:srgbClr val="A08230"/>
+            <a:srgbClr val="9A7E2C"/>
           </a:solidFill>
           <a:ln>
             <a:noFill/>
@@ -8034,8 +7909,8 @@
         </p:nvSpPr>
         <p:spPr>
           <a:xfrm>
-            <a:off x="411480" y="5513832"/>
-            <a:ext cx="11155680" cy="768096"/>
+            <a:off x="411480" y="4176064"/>
+            <a:ext cx="11064240" cy="914400"/>
           </a:xfrm>
           <a:prstGeom prst="rect">
             <a:avLst/>
@@ -8050,9 +7925,9 @@
           <a:p>
             <a:pPr algn="l"/>
             <a:r>
-              <a:rPr sz="900" b="0" i="1">
-                <a:solidFill>
-                  <a:srgbClr val="B4BED6"/>
+              <a:rPr sz="950" b="0" i="1">
+                <a:solidFill>
+                  <a:srgbClr val="AAB4CC"/>
                 </a:solidFill>
                 <a:latin typeface="Georgia"/>
               </a:rPr>
@@ -8138,8 +8013,8 @@
         </p:nvSpPr>
         <p:spPr>
           <a:xfrm>
-            <a:off x="10698480" y="82296"/>
-            <a:ext cx="1371600" cy="219456"/>
+            <a:off x="10789920" y="73152"/>
+            <a:ext cx="1280160" cy="173736"/>
           </a:xfrm>
           <a:prstGeom prst="rect">
             <a:avLst/>
@@ -8156,11 +8031,11 @@
             <a:r>
               <a:rPr sz="750" b="1" i="0">
                 <a:solidFill>
-                  <a:srgbClr val="C9A84C"/>
-                </a:solidFill>
-                <a:latin typeface="Barlow Condensed"/>
-              </a:rPr>
-              <a:t>SLIDE 03  ·  08</a:t>
+                  <a:srgbClr val="0A0F2E"/>
+                </a:solidFill>
+                <a:latin typeface="Calibri"/>
+              </a:rPr>
+              <a:t>03  /  08</a:t>
             </a:r>
           </a:p>
         </p:txBody>
@@ -8180,7 +8055,7 @@
             <a:avLst/>
           </a:prstGeom>
           <a:solidFill>
-            <a:srgbClr val="080D28"/>
+            <a:srgbClr val="070B24"/>
           </a:solidFill>
           <a:ln>
             <a:noFill/>
@@ -8216,8 +8091,8 @@
         </p:nvSpPr>
         <p:spPr>
           <a:xfrm>
-            <a:off x="411480" y="6748272"/>
-            <a:ext cx="4572000" cy="182880"/>
+            <a:off x="411480" y="6744614"/>
+            <a:ext cx="5029200" cy="155448"/>
           </a:xfrm>
           <a:prstGeom prst="rect">
             <a:avLst/>
@@ -8236,7 +8111,7 @@
                 <a:solidFill>
                   <a:srgbClr val="C9A84C"/>
                 </a:solidFill>
-                <a:latin typeface="Barlow Condensed"/>
+                <a:latin typeface="Calibri"/>
               </a:rPr>
               <a:t>VaughnMartin  ·  READINESS OS</a:t>
             </a:r>
@@ -8251,8 +8126,8 @@
         </p:nvSpPr>
         <p:spPr>
           <a:xfrm>
-            <a:off x="7315200" y="6748272"/>
-            <a:ext cx="4663440" cy="182880"/>
+            <a:off x="7132320" y="6744614"/>
+            <a:ext cx="4937760" cy="155448"/>
           </a:xfrm>
           <a:prstGeom prst="rect">
             <a:avLst/>
@@ -8269,9 +8144,9 @@
             <a:r>
               <a:rPr sz="750" b="0" i="0">
                 <a:solidFill>
-                  <a:srgbClr val="B4BED6"/>
-                </a:solidFill>
-                <a:latin typeface="Barlow Condensed"/>
+                  <a:srgbClr val="AAB4CC"/>
+                </a:solidFill>
+                <a:latin typeface="Calibri"/>
               </a:rPr>
               <a:t>vaughnmartin.com/how-it-executes</a:t>
             </a:r>
@@ -8287,7 +8162,7 @@
         <p:spPr>
           <a:xfrm>
             <a:off x="411480" y="237744"/>
-            <a:ext cx="5669280" cy="201168"/>
+            <a:ext cx="5577840" cy="192024"/>
           </a:xfrm>
           <a:prstGeom prst="rect">
             <a:avLst/>
@@ -8306,7 +8181,7 @@
                 <a:solidFill>
                   <a:srgbClr val="C9A84C"/>
                 </a:solidFill>
-                <a:latin typeface="Barlow Condensed"/>
+                <a:latin typeface="Calibri"/>
               </a:rPr>
               <a:t>THE PRODUCT</a:t>
             </a:r>
@@ -8322,7 +8197,7 @@
         <p:spPr>
           <a:xfrm>
             <a:off x="411480" y="475488"/>
-            <a:ext cx="5669280" cy="354584"/>
+            <a:ext cx="5577840" cy="292608"/>
           </a:xfrm>
           <a:prstGeom prst="rect">
             <a:avLst/>
@@ -8337,11 +8212,11 @@
           <a:p>
             <a:pPr algn="l"/>
             <a:r>
-              <a:rPr sz="1900" b="1" i="0">
+              <a:rPr sz="1800" b="1" i="0">
                 <a:solidFill>
                   <a:srgbClr val="C9A84C"/>
                 </a:solidFill>
-                <a:latin typeface="Barlow Condensed"/>
+                <a:latin typeface="Calibri"/>
               </a:rPr>
               <a:t>READINESS OS:</a:t>
             </a:r>
@@ -8356,8 +8231,8 @@
         </p:nvSpPr>
         <p:spPr>
           <a:xfrm>
-            <a:off x="411480" y="784352"/>
-            <a:ext cx="5669280" cy="484632"/>
+            <a:off x="411480" y="768096"/>
+            <a:ext cx="5577840" cy="422656"/>
           </a:xfrm>
           <a:prstGeom prst="rect">
             <a:avLst/>
@@ -8372,11 +8247,11 @@
           <a:p>
             <a:pPr algn="l"/>
             <a:r>
-              <a:rPr sz="2700" b="1" i="0">
+              <a:rPr sz="2600" b="1" i="0">
                 <a:solidFill>
                   <a:srgbClr val="FFFFFF"/>
                 </a:solidFill>
-                <a:latin typeface="Barlow Condensed"/>
+                <a:latin typeface="Calibri"/>
               </a:rPr>
               <a:t>THE RESPONSE IS READY</a:t>
             </a:r>
@@ -8391,8 +8266,8 @@
         </p:nvSpPr>
         <p:spPr>
           <a:xfrm>
-            <a:off x="411480" y="1223264"/>
-            <a:ext cx="5669280" cy="484632"/>
+            <a:off x="411480" y="1190752"/>
+            <a:ext cx="5577840" cy="422656"/>
           </a:xfrm>
           <a:prstGeom prst="rect">
             <a:avLst/>
@@ -8407,11 +8282,11 @@
           <a:p>
             <a:pPr algn="l"/>
             <a:r>
-              <a:rPr sz="2700" b="1" i="0">
+              <a:rPr sz="2600" b="1" i="0">
                 <a:solidFill>
                   <a:srgbClr val="C9A84C"/>
                 </a:solidFill>
-                <a:latin typeface="Barlow Condensed"/>
+                <a:latin typeface="Calibri"/>
               </a:rPr>
               <a:t>BEFORE THE TRIGGER FIRES.</a:t>
             </a:r>
@@ -8426,8 +8301,8 @@
         </p:nvSpPr>
         <p:spPr>
           <a:xfrm>
-            <a:off x="411480" y="2286000"/>
-            <a:ext cx="5577840" cy="10972"/>
+            <a:off x="411480" y="1741424"/>
+            <a:ext cx="5486400" cy="9144"/>
           </a:xfrm>
           <a:prstGeom prst="rect">
             <a:avLst/>
@@ -8469,28 +8344,29 @@
         </p:nvSpPr>
         <p:spPr>
           <a:xfrm>
-            <a:off x="411480" y="2414016"/>
-            <a:ext cx="5669280" cy="365760"/>
-          </a:xfrm>
-          <a:prstGeom prst="rect">
-            <a:avLst/>
-          </a:prstGeom>
-          <a:noFill/>
-        </p:spPr>
-        <p:txBody>
-          <a:bodyPr wrap="square">
-            <a:spAutoFit/>
-          </a:bodyPr>
-          <a:lstStyle/>
-          <a:p>
-            <a:r>
-              <a:rPr sz="1100">
+            <a:off x="411480" y="1887321"/>
+            <a:ext cx="5577840" cy="365760"/>
+          </a:xfrm>
+          <a:prstGeom prst="rect">
+            <a:avLst/>
+          </a:prstGeom>
+          <a:noFill/>
+        </p:spPr>
+        <p:txBody>
+          <a:bodyPr wrap="square">
+            <a:spAutoFit/>
+          </a:bodyPr>
+          <a:lstStyle/>
+          <a:p>
+            <a:pPr algn="l"/>
+            <a:r>
+              <a:rPr sz="1050" b="0" i="0">
                 <a:solidFill>
                   <a:srgbClr val="FFFFFF"/>
                 </a:solidFill>
-                <a:latin typeface="Barlow Condensed"/>
-              </a:rPr>
-              <a:t>▶  170 Readiness Protocols — Growth &amp; Positioning, Risk &amp; Resilience, Transformation</a:t>
+                <a:latin typeface="Calibri"/>
+              </a:rPr>
+              <a:t>▸  170 Readiness Protocols — Growth &amp; Positioning, Risk &amp; Resilience, Transformation</a:t>
             </a:r>
           </a:p>
         </p:txBody>
@@ -8503,28 +8379,29 @@
         </p:nvSpPr>
         <p:spPr>
           <a:xfrm>
-            <a:off x="411480" y="2766060"/>
-            <a:ext cx="5669280" cy="365760"/>
-          </a:xfrm>
-          <a:prstGeom prst="rect">
-            <a:avLst/>
-          </a:prstGeom>
-          <a:noFill/>
-        </p:spPr>
-        <p:txBody>
-          <a:bodyPr wrap="square">
-            <a:spAutoFit/>
-          </a:bodyPr>
-          <a:lstStyle/>
-          <a:p>
-            <a:r>
-              <a:rPr sz="1100">
+            <a:off x="411480" y="2289657"/>
+            <a:ext cx="5577840" cy="365760"/>
+          </a:xfrm>
+          <a:prstGeom prst="rect">
+            <a:avLst/>
+          </a:prstGeom>
+          <a:noFill/>
+        </p:spPr>
+        <p:txBody>
+          <a:bodyPr wrap="square">
+            <a:spAutoFit/>
+          </a:bodyPr>
+          <a:lstStyle/>
+          <a:p>
+            <a:pPr algn="l"/>
+            <a:r>
+              <a:rPr sz="1050" b="0" i="0">
                 <a:solidFill>
                   <a:srgbClr val="FFFFFF"/>
                 </a:solidFill>
-                <a:latin typeface="Barlow Condensed"/>
-              </a:rPr>
-              <a:t>▶  221 strategic trigger patterns monitored continuously across 8 data sources</a:t>
+                <a:latin typeface="Calibri"/>
+              </a:rPr>
+              <a:t>▸  221 strategic trigger patterns monitored across 8 data sources</a:t>
             </a:r>
           </a:p>
         </p:txBody>
@@ -8537,28 +8414,29 @@
         </p:nvSpPr>
         <p:spPr>
           <a:xfrm>
-            <a:off x="411480" y="3118104"/>
-            <a:ext cx="5669280" cy="365760"/>
-          </a:xfrm>
-          <a:prstGeom prst="rect">
-            <a:avLst/>
-          </a:prstGeom>
-          <a:noFill/>
-        </p:spPr>
-        <p:txBody>
-          <a:bodyPr wrap="square">
-            <a:spAutoFit/>
-          </a:bodyPr>
-          <a:lstStyle/>
-          <a:p>
-            <a:r>
-              <a:rPr sz="1100">
+            <a:off x="411480" y="2691993"/>
+            <a:ext cx="5577840" cy="365760"/>
+          </a:xfrm>
+          <a:prstGeom prst="rect">
+            <a:avLst/>
+          </a:prstGeom>
+          <a:noFill/>
+        </p:spPr>
+        <p:txBody>
+          <a:bodyPr wrap="square">
+            <a:spAutoFit/>
+          </a:bodyPr>
+          <a:lstStyle/>
+          <a:p>
+            <a:pPr algn="l"/>
+            <a:r>
+              <a:rPr sz="1050" b="0" i="0">
                 <a:solidFill>
                   <a:srgbClr val="FFFFFF"/>
                 </a:solidFill>
-                <a:latin typeface="Barlow Condensed"/>
-              </a:rPr>
-              <a:t>▶  248+ data points confidence-scored every 15 minutes</a:t>
+                <a:latin typeface="Calibri"/>
+              </a:rPr>
+              <a:t>▸  248+ data points confidence-scored every 15 minutes</a:t>
             </a:r>
           </a:p>
         </p:txBody>
@@ -8571,28 +8449,29 @@
         </p:nvSpPr>
         <p:spPr>
           <a:xfrm>
-            <a:off x="411480" y="3470148"/>
-            <a:ext cx="5669280" cy="365760"/>
-          </a:xfrm>
-          <a:prstGeom prst="rect">
-            <a:avLst/>
-          </a:prstGeom>
-          <a:noFill/>
-        </p:spPr>
-        <p:txBody>
-          <a:bodyPr wrap="square">
-            <a:spAutoFit/>
-          </a:bodyPr>
-          <a:lstStyle/>
-          <a:p>
-            <a:r>
-              <a:rPr sz="1100">
+            <a:off x="411480" y="3094329"/>
+            <a:ext cx="5577840" cy="365760"/>
+          </a:xfrm>
+          <a:prstGeom prst="rect">
+            <a:avLst/>
+          </a:prstGeom>
+          <a:noFill/>
+        </p:spPr>
+        <p:txBody>
+          <a:bodyPr wrap="square">
+            <a:spAutoFit/>
+          </a:bodyPr>
+          <a:lstStyle/>
+          <a:p>
+            <a:pPr algn="l"/>
+            <a:r>
+              <a:rPr sz="1050" b="0" i="0">
                 <a:solidFill>
                   <a:srgbClr val="FFFFFF"/>
                 </a:solidFill>
-                <a:latin typeface="Barlow Condensed"/>
-              </a:rPr>
-              <a:t>▶  AI monitors. Executives authorize. No protocol activates without sign-off.</a:t>
+                <a:latin typeface="Calibri"/>
+              </a:rPr>
+              <a:t>▸  AI monitors. Executives authorize. No protocol activates without sign-off.</a:t>
             </a:r>
           </a:p>
         </p:txBody>
@@ -8605,28 +8484,29 @@
         </p:nvSpPr>
         <p:spPr>
           <a:xfrm>
-            <a:off x="411480" y="3822191"/>
-            <a:ext cx="5669280" cy="365760"/>
-          </a:xfrm>
-          <a:prstGeom prst="rect">
-            <a:avLst/>
-          </a:prstGeom>
-          <a:noFill/>
-        </p:spPr>
-        <p:txBody>
-          <a:bodyPr wrap="square">
-            <a:spAutoFit/>
-          </a:bodyPr>
-          <a:lstStyle/>
-          <a:p>
-            <a:r>
-              <a:rPr sz="1100">
+            <a:off x="411480" y="3496665"/>
+            <a:ext cx="5577840" cy="365760"/>
+          </a:xfrm>
+          <a:prstGeom prst="rect">
+            <a:avLst/>
+          </a:prstGeom>
+          <a:noFill/>
+        </p:spPr>
+        <p:txBody>
+          <a:bodyPr wrap="square">
+            <a:spAutoFit/>
+          </a:bodyPr>
+          <a:lstStyle/>
+          <a:p>
+            <a:pPr algn="l"/>
+            <a:r>
+              <a:rPr sz="1050" b="0" i="0">
                 <a:solidFill>
                   <a:srgbClr val="FFFFFF"/>
                 </a:solidFill>
-                <a:latin typeface="Barlow Condensed"/>
-              </a:rPr>
-              <a:t>▶  Onboarding is configuration — not a consulting project. 90 days to live.</a:t>
+                <a:latin typeface="Calibri"/>
+              </a:rPr>
+              <a:t>▸  Onboarding = configuration, not a consulting project. 90 days to live.</a:t>
             </a:r>
           </a:p>
         </p:txBody>
@@ -8639,14 +8519,14 @@
         </p:nvSpPr>
         <p:spPr>
           <a:xfrm>
-            <a:off x="411480" y="4535424"/>
-            <a:ext cx="5596128" cy="566928"/>
+            <a:off x="411480" y="4027017"/>
+            <a:ext cx="5577840" cy="566928"/>
           </a:xfrm>
           <a:prstGeom prst="rect">
             <a:avLst/>
           </a:prstGeom>
           <a:solidFill>
-            <a:srgbClr val="101842"/>
+            <a:srgbClr val="0E163C"/>
           </a:solidFill>
           <a:ln>
             <a:noFill/>
@@ -8682,8 +8562,8 @@
         </p:nvSpPr>
         <p:spPr>
           <a:xfrm>
-            <a:off x="411480" y="4535424"/>
-            <a:ext cx="5596128" cy="23774"/>
+            <a:off x="411480" y="4027017"/>
+            <a:ext cx="5577840" cy="20116"/>
           </a:xfrm>
           <a:prstGeom prst="rect">
             <a:avLst/>
@@ -8725,8 +8605,8 @@
         </p:nvSpPr>
         <p:spPr>
           <a:xfrm>
-            <a:off x="548640" y="4572000"/>
-            <a:ext cx="5449824" cy="256032"/>
+            <a:off x="530352" y="4081881"/>
+            <a:ext cx="5431536" cy="219456"/>
           </a:xfrm>
           <a:prstGeom prst="rect">
             <a:avLst/>
@@ -8745,9 +8625,9 @@
                 <a:solidFill>
                   <a:srgbClr val="2B8A6E"/>
                 </a:solidFill>
-                <a:latin typeface="Barlow Condensed"/>
-              </a:rPr>
-              <a:t>THE SYSTEM STAGES THE CHOICE IN SECONDS. THE EXECUTIVE MUST CLICK AUTHORIZE.</a:t>
+                <a:latin typeface="Calibri"/>
+              </a:rPr>
+              <a:t>THE SYSTEM STAGES THE CHOICE IN SECONDS.</a:t>
             </a:r>
           </a:p>
         </p:txBody>
@@ -8760,8 +8640,8 @@
         </p:nvSpPr>
         <p:spPr>
           <a:xfrm>
-            <a:off x="548640" y="4828032"/>
-            <a:ext cx="5449824" cy="219456"/>
+            <a:off x="530352" y="4319625"/>
+            <a:ext cx="5431536" cy="219456"/>
           </a:xfrm>
           <a:prstGeom prst="rect">
             <a:avLst/>
@@ -8776,13 +8656,13 @@
           <a:p>
             <a:pPr algn="l"/>
             <a:r>
-              <a:rPr sz="900" b="0" i="0">
-                <a:solidFill>
-                  <a:srgbClr val="B4BED6"/>
-                </a:solidFill>
-                <a:latin typeface="Barlow Condensed"/>
-              </a:rPr>
-              <a:t>No autonomous action. No rogue execution. Executive authority preserved at every step.</a:t>
+              <a:rPr sz="1000" b="1" i="0">
+                <a:solidFill>
+                  <a:srgbClr val="2B8A6E"/>
+                </a:solidFill>
+                <a:latin typeface="Calibri"/>
+              </a:rPr>
+              <a:t>THE EXECUTIVE MUST CLICK AUTHORIZE.</a:t>
             </a:r>
           </a:p>
         </p:txBody>
@@ -8795,14 +8675,14 @@
         </p:nvSpPr>
         <p:spPr>
           <a:xfrm>
-            <a:off x="411480" y="5449824"/>
-            <a:ext cx="5394960" cy="10972"/>
+            <a:off x="411480" y="4758537"/>
+            <a:ext cx="5303520" cy="9144"/>
           </a:xfrm>
           <a:prstGeom prst="rect">
             <a:avLst/>
           </a:prstGeom>
           <a:solidFill>
-            <a:srgbClr val="A08230"/>
+            <a:srgbClr val="9A7E2C"/>
           </a:solidFill>
           <a:ln>
             <a:noFill/>
@@ -8838,8 +8718,8 @@
         </p:nvSpPr>
         <p:spPr>
           <a:xfrm>
-            <a:off x="411480" y="5513832"/>
-            <a:ext cx="5669280" cy="768096"/>
+            <a:off x="411480" y="4822545"/>
+            <a:ext cx="5577840" cy="768096"/>
           </a:xfrm>
           <a:prstGeom prst="rect">
             <a:avLst/>
@@ -8854,9 +8734,9 @@
           <a:p>
             <a:pPr algn="l"/>
             <a:r>
-              <a:rPr sz="900" b="0" i="1">
-                <a:solidFill>
-                  <a:srgbClr val="B4BED6"/>
+              <a:rPr sz="850" b="0" i="1">
+                <a:solidFill>
+                  <a:srgbClr val="AAB4CC"/>
                 </a:solidFill>
                 <a:latin typeface="Georgia"/>
               </a:rPr>
@@ -8873,14 +8753,14 @@
         </p:nvSpPr>
         <p:spPr>
           <a:xfrm>
-            <a:off x="6455664" y="557784"/>
-            <a:ext cx="5468112" cy="5888736"/>
+            <a:off x="6483096" y="566928"/>
+            <a:ext cx="5394960" cy="6035040"/>
           </a:xfrm>
           <a:prstGeom prst="rect">
             <a:avLst/>
           </a:prstGeom>
           <a:solidFill>
-            <a:srgbClr val="040718"/>
+            <a:srgbClr val="030514"/>
           </a:solidFill>
           <a:ln>
             <a:noFill/>
@@ -8916,8 +8796,8 @@
         </p:nvSpPr>
         <p:spPr>
           <a:xfrm>
-            <a:off x="6364224" y="502920"/>
-            <a:ext cx="36576" cy="5888736"/>
+            <a:off x="6382512" y="502920"/>
+            <a:ext cx="36576" cy="6035040"/>
           </a:xfrm>
           <a:prstGeom prst="rect">
             <a:avLst/>
@@ -8953,7 +8833,7 @@
       </p:sp>
       <p:pic>
         <p:nvPicPr>
-          <p:cNvPr id="25" name="Picture 24" descr="wow_executes_chain.jpg"/>
+          <p:cNvPr id="25" name="Picture 24" descr="hq_executes_chain.jpg"/>
           <p:cNvPicPr>
             <a:picLocks noChangeAspect="1"/>
           </p:cNvPicPr>
@@ -8967,8 +8847,8 @@
         </p:blipFill>
         <p:spPr>
           <a:xfrm>
-            <a:off x="6400800" y="502920"/>
-            <a:ext cx="5468112" cy="5888736"/>
+            <a:off x="6419088" y="502920"/>
+            <a:ext cx="5394960" cy="6035040"/>
           </a:xfrm>
           <a:prstGeom prst="rect">
             <a:avLst/>
@@ -8983,8 +8863,8 @@
         </p:nvSpPr>
         <p:spPr>
           <a:xfrm>
-            <a:off x="6400800" y="6190488"/>
-            <a:ext cx="5468112" cy="201168"/>
+            <a:off x="6419088" y="6355079"/>
+            <a:ext cx="5394960" cy="182880"/>
           </a:xfrm>
           <a:prstGeom prst="rect">
             <a:avLst/>
@@ -9095,8 +8975,8 @@
         </p:nvSpPr>
         <p:spPr>
           <a:xfrm>
-            <a:off x="10698480" y="82296"/>
-            <a:ext cx="1371600" cy="219456"/>
+            <a:off x="10789920" y="73152"/>
+            <a:ext cx="1280160" cy="173736"/>
           </a:xfrm>
           <a:prstGeom prst="rect">
             <a:avLst/>
@@ -9113,11 +8993,11 @@
             <a:r>
               <a:rPr sz="750" b="1" i="0">
                 <a:solidFill>
-                  <a:srgbClr val="C9A84C"/>
-                </a:solidFill>
-                <a:latin typeface="Barlow Condensed"/>
-              </a:rPr>
-              <a:t>SLIDE 04  ·  08</a:t>
+                  <a:srgbClr val="0A0F2E"/>
+                </a:solidFill>
+                <a:latin typeface="Calibri"/>
+              </a:rPr>
+              <a:t>04  /  08</a:t>
             </a:r>
           </a:p>
         </p:txBody>
@@ -9137,7 +9017,7 @@
             <a:avLst/>
           </a:prstGeom>
           <a:solidFill>
-            <a:srgbClr val="080D28"/>
+            <a:srgbClr val="070B24"/>
           </a:solidFill>
           <a:ln>
             <a:noFill/>
@@ -9173,8 +9053,8 @@
         </p:nvSpPr>
         <p:spPr>
           <a:xfrm>
-            <a:off x="411480" y="6748272"/>
-            <a:ext cx="4572000" cy="182880"/>
+            <a:off x="411480" y="6744614"/>
+            <a:ext cx="5029200" cy="155448"/>
           </a:xfrm>
           <a:prstGeom prst="rect">
             <a:avLst/>
@@ -9193,7 +9073,7 @@
                 <a:solidFill>
                   <a:srgbClr val="C9A84C"/>
                 </a:solidFill>
-                <a:latin typeface="Barlow Condensed"/>
+                <a:latin typeface="Calibri"/>
               </a:rPr>
               <a:t>VaughnMartin  ·  READINESS OS</a:t>
             </a:r>
@@ -9208,8 +9088,8 @@
         </p:nvSpPr>
         <p:spPr>
           <a:xfrm>
-            <a:off x="7315200" y="6748272"/>
-            <a:ext cx="4663440" cy="182880"/>
+            <a:off x="7132320" y="6744614"/>
+            <a:ext cx="4937760" cy="155448"/>
           </a:xfrm>
           <a:prstGeom prst="rect">
             <a:avLst/>
@@ -9226,11 +9106,11 @@
             <a:r>
               <a:rPr sz="750" b="0" i="0">
                 <a:solidFill>
-                  <a:srgbClr val="B4BED6"/>
-                </a:solidFill>
-                <a:latin typeface="Barlow Condensed"/>
-              </a:rPr>
-              <a:t>vaughnmartin.com/platform-reality</a:t>
+                  <a:srgbClr val="AAB4CC"/>
+                </a:solidFill>
+                <a:latin typeface="Calibri"/>
+              </a:rPr>
+              <a:t>vaughnmartin.com</a:t>
             </a:r>
           </a:p>
         </p:txBody>
@@ -9244,7 +9124,7 @@
         <p:spPr>
           <a:xfrm>
             <a:off x="411480" y="237744"/>
-            <a:ext cx="11338560" cy="201168"/>
+            <a:ext cx="11338560" cy="192024"/>
           </a:xfrm>
           <a:prstGeom prst="rect">
             <a:avLst/>
@@ -9263,7 +9143,7 @@
                 <a:solidFill>
                   <a:srgbClr val="C9A84C"/>
                 </a:solidFill>
-                <a:latin typeface="Barlow Condensed"/>
+                <a:latin typeface="Calibri"/>
               </a:rPr>
               <a:t>WHY WE WIN</a:t>
             </a:r>
@@ -9279,7 +9159,7 @@
         <p:spPr>
           <a:xfrm>
             <a:off x="411480" y="475488"/>
-            <a:ext cx="11338560" cy="598424"/>
+            <a:ext cx="11338560" cy="536448"/>
           </a:xfrm>
           <a:prstGeom prst="rect">
             <a:avLst/>
@@ -9294,11 +9174,11 @@
           <a:p>
             <a:pPr algn="l"/>
             <a:r>
-              <a:rPr sz="3400" b="1" i="0">
+              <a:rPr sz="3300" b="1" i="0">
                 <a:solidFill>
                   <a:srgbClr val="FFFFFF"/>
                 </a:solidFill>
-                <a:latin typeface="Barlow Condensed"/>
+                <a:latin typeface="Calibri"/>
               </a:rPr>
               <a:t>THE MOAT COMPOUNDS.</a:t>
             </a:r>
@@ -9313,8 +9193,8 @@
         </p:nvSpPr>
         <p:spPr>
           <a:xfrm>
-            <a:off x="411480" y="1028191"/>
-            <a:ext cx="11338560" cy="419607"/>
+            <a:off x="411480" y="1011936"/>
+            <a:ext cx="11338560" cy="357632"/>
           </a:xfrm>
           <a:prstGeom prst="rect">
             <a:avLst/>
@@ -9329,11 +9209,11 @@
           <a:p>
             <a:pPr algn="l"/>
             <a:r>
-              <a:rPr sz="2300" b="1" i="0">
-                <a:solidFill>
-                  <a:srgbClr val="B4BED6"/>
-                </a:solidFill>
-                <a:latin typeface="Barlow Condensed"/>
+              <a:rPr sz="2200" b="1" i="0">
+                <a:solidFill>
+                  <a:srgbClr val="AAB4CC"/>
+                </a:solidFill>
+                <a:latin typeface="Calibri"/>
               </a:rPr>
               <a:t>COMPETITORS START AT ZERO.</a:t>
             </a:r>
@@ -9348,8 +9228,8 @@
         </p:nvSpPr>
         <p:spPr>
           <a:xfrm>
-            <a:off x="411480" y="1737360"/>
-            <a:ext cx="11155680" cy="10972"/>
+            <a:off x="411480" y="1497584"/>
+            <a:ext cx="11155680" cy="9144"/>
           </a:xfrm>
           <a:prstGeom prst="rect">
             <a:avLst/>
@@ -9391,8 +9271,8 @@
         </p:nvSpPr>
         <p:spPr>
           <a:xfrm>
-            <a:off x="411480" y="1883664"/>
-            <a:ext cx="5669280" cy="201168"/>
+            <a:off x="411480" y="1644091"/>
+            <a:ext cx="5486400" cy="192024"/>
           </a:xfrm>
           <a:prstGeom prst="rect">
             <a:avLst/>
@@ -9411,9 +9291,9 @@
                 <a:solidFill>
                   <a:srgbClr val="C9A84C"/>
                 </a:solidFill>
-                <a:latin typeface="Barlow Condensed"/>
-              </a:rPr>
-              <a:t>STRUCTURAL MATRIX — THEY STOP AT ROUTING. WE PRE-STAGE THE ALIGNMENT.</a:t>
+                <a:latin typeface="Calibri"/>
+              </a:rPr>
+              <a:t>THEY STOP AT ROUTING. WE PRE-STAGE THE ALIGNMENT.</a:t>
             </a:r>
           </a:p>
         </p:txBody>
@@ -9426,8 +9306,8 @@
         </p:nvSpPr>
         <p:spPr>
           <a:xfrm>
-            <a:off x="411480" y="2084831"/>
-            <a:ext cx="1920240" cy="274320"/>
+            <a:off x="411480" y="1863547"/>
+            <a:ext cx="1892807" cy="256032"/>
           </a:xfrm>
           <a:prstGeom prst="rect">
             <a:avLst/>
@@ -9442,11 +9322,11 @@
           <a:p>
             <a:pPr algn="l"/>
             <a:r>
-              <a:rPr sz="1000" b="1" i="0">
+              <a:rPr sz="950" b="1" i="0">
                 <a:solidFill>
                   <a:srgbClr val="C9A84C"/>
                 </a:solidFill>
-                <a:latin typeface="Barlow Condensed"/>
+                <a:latin typeface="Calibri"/>
               </a:rPr>
               <a:t>Signal Labs</a:t>
             </a:r>
@@ -9461,8 +9341,8 @@
         </p:nvSpPr>
         <p:spPr>
           <a:xfrm>
-            <a:off x="2423160" y="2084831"/>
-            <a:ext cx="3657600" cy="274320"/>
+            <a:off x="2377440" y="1863547"/>
+            <a:ext cx="3520440" cy="256032"/>
           </a:xfrm>
           <a:prstGeom prst="rect">
             <a:avLst/>
@@ -9477,11 +9357,11 @@
           <a:p>
             <a:pPr algn="l"/>
             <a:r>
-              <a:rPr sz="1000" b="0" i="0">
-                <a:solidFill>
-                  <a:srgbClr val="B4BED6"/>
-                </a:solidFill>
-                <a:latin typeface="Barlow Condensed"/>
+              <a:rPr sz="950" b="0" i="0">
+                <a:solidFill>
+                  <a:srgbClr val="AAB4CC"/>
+                </a:solidFill>
+                <a:latin typeface="Calibri"/>
               </a:rPr>
               <a:t>Routes the signal. Stops before the response is staged.</a:t>
             </a:r>
@@ -9496,14 +9376,14 @@
         </p:nvSpPr>
         <p:spPr>
           <a:xfrm>
-            <a:off x="411480" y="2340863"/>
-            <a:ext cx="5577840" cy="10972"/>
+            <a:off x="411480" y="2119579"/>
+            <a:ext cx="5394960" cy="9144"/>
           </a:xfrm>
           <a:prstGeom prst="rect">
             <a:avLst/>
           </a:prstGeom>
           <a:solidFill>
-            <a:srgbClr val="101842"/>
+            <a:srgbClr val="0E163C"/>
           </a:solidFill>
           <a:ln>
             <a:noFill/>
@@ -9539,8 +9419,8 @@
         </p:nvSpPr>
         <p:spPr>
           <a:xfrm>
-            <a:off x="411480" y="2423160"/>
-            <a:ext cx="1920240" cy="274320"/>
+            <a:off x="411480" y="2211019"/>
+            <a:ext cx="1892807" cy="256032"/>
           </a:xfrm>
           <a:prstGeom prst="rect">
             <a:avLst/>
@@ -9555,11 +9435,11 @@
           <a:p>
             <a:pPr algn="l"/>
             <a:r>
-              <a:rPr sz="1000" b="1" i="0">
+              <a:rPr sz="950" b="1" i="0">
                 <a:solidFill>
                   <a:srgbClr val="C9A84C"/>
                 </a:solidFill>
-                <a:latin typeface="Barlow Condensed"/>
+                <a:latin typeface="Calibri"/>
               </a:rPr>
               <a:t>ServiceNow</a:t>
             </a:r>
@@ -9574,8 +9454,8 @@
         </p:nvSpPr>
         <p:spPr>
           <a:xfrm>
-            <a:off x="2423160" y="2423160"/>
-            <a:ext cx="3657600" cy="274320"/>
+            <a:off x="2377440" y="2211019"/>
+            <a:ext cx="3520440" cy="256032"/>
           </a:xfrm>
           <a:prstGeom prst="rect">
             <a:avLst/>
@@ -9590,13 +9470,13 @@
           <a:p>
             <a:pPr algn="l"/>
             <a:r>
-              <a:rPr sz="1000" b="0" i="0">
-                <a:solidFill>
-                  <a:srgbClr val="B4BED6"/>
-                </a:solidFill>
-                <a:latin typeface="Barlow Condensed"/>
-              </a:rPr>
-              <a:t>Async workflow router for post-alignment execution. We pre-stage the alignment itself.</a:t>
+              <a:rPr sz="950" b="0" i="0">
+                <a:solidFill>
+                  <a:srgbClr val="AAB4CC"/>
+                </a:solidFill>
+                <a:latin typeface="Calibri"/>
+              </a:rPr>
+              <a:t>Async workflow router — post-alignment only. We pre-stage the alignment.</a:t>
             </a:r>
           </a:p>
         </p:txBody>
@@ -9609,14 +9489,14 @@
         </p:nvSpPr>
         <p:spPr>
           <a:xfrm>
-            <a:off x="411480" y="2679191"/>
-            <a:ext cx="5577840" cy="10972"/>
+            <a:off x="411480" y="2467051"/>
+            <a:ext cx="5394960" cy="9144"/>
           </a:xfrm>
           <a:prstGeom prst="rect">
             <a:avLst/>
           </a:prstGeom>
           <a:solidFill>
-            <a:srgbClr val="101842"/>
+            <a:srgbClr val="0E163C"/>
           </a:solidFill>
           <a:ln>
             <a:noFill/>
@@ -9652,8 +9532,8 @@
         </p:nvSpPr>
         <p:spPr>
           <a:xfrm>
-            <a:off x="411480" y="2761488"/>
-            <a:ext cx="1920240" cy="274320"/>
+            <a:off x="411480" y="2558491"/>
+            <a:ext cx="1892807" cy="256032"/>
           </a:xfrm>
           <a:prstGeom prst="rect">
             <a:avLst/>
@@ -9668,11 +9548,11 @@
           <a:p>
             <a:pPr algn="l"/>
             <a:r>
-              <a:rPr sz="1000" b="1" i="0">
+              <a:rPr sz="950" b="1" i="0">
                 <a:solidFill>
                   <a:srgbClr val="C9A84C"/>
                 </a:solidFill>
-                <a:latin typeface="Barlow Condensed"/>
+                <a:latin typeface="Calibri"/>
               </a:rPr>
               <a:t>Microsoft Copilot</a:t>
             </a:r>
@@ -9687,8 +9567,8 @@
         </p:nvSpPr>
         <p:spPr>
           <a:xfrm>
-            <a:off x="2423160" y="2761488"/>
-            <a:ext cx="3657600" cy="274320"/>
+            <a:off x="2377440" y="2558491"/>
+            <a:ext cx="3520440" cy="256032"/>
           </a:xfrm>
           <a:prstGeom prst="rect">
             <a:avLst/>
@@ -9703,13 +9583,13 @@
           <a:p>
             <a:pPr algn="l"/>
             <a:r>
-              <a:rPr sz="1000" b="0" i="0">
-                <a:solidFill>
-                  <a:srgbClr val="B4BED6"/>
-                </a:solidFill>
-                <a:latin typeface="Barlow Condensed"/>
-              </a:rPr>
-              <a:t>Produces intelligence. We pre-stage the organizational response to that intelligence.</a:t>
+              <a:rPr sz="950" b="0" i="0">
+                <a:solidFill>
+                  <a:srgbClr val="AAB4CC"/>
+                </a:solidFill>
+                <a:latin typeface="Calibri"/>
+              </a:rPr>
+              <a:t>Produces intelligence. We pre-stage the org response to that intelligence.</a:t>
             </a:r>
           </a:p>
         </p:txBody>
@@ -9722,14 +9602,14 @@
         </p:nvSpPr>
         <p:spPr>
           <a:xfrm>
-            <a:off x="411480" y="3017520"/>
-            <a:ext cx="5577840" cy="10972"/>
+            <a:off x="411480" y="2814523"/>
+            <a:ext cx="5394960" cy="9144"/>
           </a:xfrm>
           <a:prstGeom prst="rect">
             <a:avLst/>
           </a:prstGeom>
           <a:solidFill>
-            <a:srgbClr val="101842"/>
+            <a:srgbClr val="0E163C"/>
           </a:solidFill>
           <a:ln>
             <a:noFill/>
@@ -9765,8 +9645,8 @@
         </p:nvSpPr>
         <p:spPr>
           <a:xfrm>
-            <a:off x="411480" y="3099816"/>
-            <a:ext cx="1920240" cy="274320"/>
+            <a:off x="411480" y="2905963"/>
+            <a:ext cx="1892807" cy="256032"/>
           </a:xfrm>
           <a:prstGeom prst="rect">
             <a:avLst/>
@@ -9781,11 +9661,11 @@
           <a:p>
             <a:pPr algn="l"/>
             <a:r>
-              <a:rPr sz="1000" b="1" i="0">
+              <a:rPr sz="950" b="1" i="0">
                 <a:solidFill>
                   <a:srgbClr val="C9A84C"/>
                 </a:solidFill>
-                <a:latin typeface="Barlow Condensed"/>
+                <a:latin typeface="Calibri"/>
               </a:rPr>
               <a:t>McKinsey</a:t>
             </a:r>
@@ -9800,8 +9680,8 @@
         </p:nvSpPr>
         <p:spPr>
           <a:xfrm>
-            <a:off x="2423160" y="3099816"/>
-            <a:ext cx="3657600" cy="274320"/>
+            <a:off x="2377440" y="2905963"/>
+            <a:ext cx="3520440" cy="256032"/>
           </a:xfrm>
           <a:prstGeom prst="rect">
             <a:avLst/>
@@ -9816,13 +9696,13 @@
           <a:p>
             <a:pPr algn="l"/>
             <a:r>
-              <a:rPr sz="1000" b="0" i="0">
-                <a:solidFill>
-                  <a:srgbClr val="B4BED6"/>
-                </a:solidFill>
-                <a:latin typeface="Barlow Condensed"/>
-              </a:rPr>
-              <a:t>Retainer-based. Arrives after the trigger fires. We were ready before the first call.</a:t>
+              <a:rPr sz="950" b="0" i="0">
+                <a:solidFill>
+                  <a:srgbClr val="AAB4CC"/>
+                </a:solidFill>
+                <a:latin typeface="Calibri"/>
+              </a:rPr>
+              <a:t>Arrives after the trigger. We were ready before the first call.</a:t>
             </a:r>
           </a:p>
         </p:txBody>
@@ -9835,14 +9715,14 @@
         </p:nvSpPr>
         <p:spPr>
           <a:xfrm>
-            <a:off x="411480" y="3355848"/>
-            <a:ext cx="5577840" cy="10972"/>
+            <a:off x="411480" y="3161995"/>
+            <a:ext cx="5394960" cy="9144"/>
           </a:xfrm>
           <a:prstGeom prst="rect">
             <a:avLst/>
           </a:prstGeom>
           <a:solidFill>
-            <a:srgbClr val="101842"/>
+            <a:srgbClr val="0E163C"/>
           </a:solidFill>
           <a:ln>
             <a:noFill/>
@@ -9878,14 +9758,14 @@
         </p:nvSpPr>
         <p:spPr>
           <a:xfrm>
-            <a:off x="411480" y="3621024"/>
-            <a:ext cx="5596128" cy="347472"/>
+            <a:off x="411480" y="3344875"/>
+            <a:ext cx="5486400" cy="329184"/>
           </a:xfrm>
           <a:prstGeom prst="rect">
             <a:avLst/>
           </a:prstGeom>
           <a:solidFill>
-            <a:srgbClr val="101842"/>
+            <a:srgbClr val="0E163C"/>
           </a:solidFill>
           <a:ln>
             <a:noFill/>
@@ -9921,8 +9801,8 @@
         </p:nvSpPr>
         <p:spPr>
           <a:xfrm>
-            <a:off x="548640" y="3648456"/>
-            <a:ext cx="5449824" cy="292608"/>
+            <a:off x="530352" y="3408883"/>
+            <a:ext cx="5321808" cy="219456"/>
           </a:xfrm>
           <a:prstGeom prst="rect">
             <a:avLst/>
@@ -9956,8 +9836,8 @@
         </p:nvSpPr>
         <p:spPr>
           <a:xfrm>
-            <a:off x="6400800" y="1883664"/>
-            <a:ext cx="5486400" cy="201168"/>
+            <a:off x="6419088" y="1644091"/>
+            <a:ext cx="5486400" cy="192024"/>
           </a:xfrm>
           <a:prstGeom prst="rect">
             <a:avLst/>
@@ -9976,7 +9856,7 @@
                 <a:solidFill>
                   <a:srgbClr val="C9A84C"/>
                 </a:solidFill>
-                <a:latin typeface="Barlow Condensed"/>
+                <a:latin typeface="Calibri"/>
               </a:rPr>
               <a:t>THE MOAT — WHAT MAKES US HARD TO CATCH</a:t>
             </a:r>
@@ -9991,14 +9871,14 @@
         </p:nvSpPr>
         <p:spPr>
           <a:xfrm>
-            <a:off x="6400800" y="2084831"/>
-            <a:ext cx="5486400" cy="274320"/>
+            <a:off x="6419088" y="1863547"/>
+            <a:ext cx="5449824" cy="246888"/>
           </a:xfrm>
           <a:prstGeom prst="rect">
             <a:avLst/>
           </a:prstGeom>
           <a:solidFill>
-            <a:srgbClr val="101842"/>
+            <a:srgbClr val="0E163C"/>
           </a:solidFill>
           <a:ln>
             <a:noFill/>
@@ -10034,8 +9914,8 @@
         </p:nvSpPr>
         <p:spPr>
           <a:xfrm>
-            <a:off x="6510528" y="2121408"/>
-            <a:ext cx="5349240" cy="219456"/>
+            <a:off x="6528816" y="1900123"/>
+            <a:ext cx="5230368" cy="192024"/>
           </a:xfrm>
           <a:prstGeom prst="rect">
             <a:avLst/>
@@ -10050,11 +9930,11 @@
           <a:p>
             <a:pPr algn="l"/>
             <a:r>
-              <a:rPr sz="1050" b="1" i="0">
+              <a:rPr sz="1000" b="1" i="0">
                 <a:solidFill>
                   <a:srgbClr val="C9A84C"/>
                 </a:solidFill>
-                <a:latin typeface="Barlow Condensed"/>
+                <a:latin typeface="Calibri"/>
               </a:rPr>
               <a:t>Compounding Loop</a:t>
             </a:r>
@@ -10069,8 +9949,8 @@
         </p:nvSpPr>
         <p:spPr>
           <a:xfrm>
-            <a:off x="6510528" y="2414015"/>
-            <a:ext cx="5349240" cy="548640"/>
+            <a:off x="6528816" y="2156155"/>
+            <a:ext cx="5230368" cy="512064"/>
           </a:xfrm>
           <a:prstGeom prst="rect">
             <a:avLst/>
@@ -10085,11 +9965,11 @@
           <a:p>
             <a:pPr algn="l"/>
             <a:r>
-              <a:rPr sz="1000" b="0" i="0">
-                <a:solidFill>
-                  <a:srgbClr val="B4BED6"/>
-                </a:solidFill>
-                <a:latin typeface="Barlow Condensed"/>
+              <a:rPr sz="950" b="0" i="0">
+                <a:solidFill>
+                  <a:srgbClr val="AAB4CC"/>
+                </a:solidFill>
+                <a:latin typeface="Calibri"/>
               </a:rPr>
               <a:t>Every activation encodes what held. Preparation compounds after each cycle — permanently.</a:t>
             </a:r>
@@ -10104,14 +9984,14 @@
         </p:nvSpPr>
         <p:spPr>
           <a:xfrm>
-            <a:off x="6400800" y="3044952"/>
-            <a:ext cx="5440680" cy="10972"/>
+            <a:off x="6419088" y="2723083"/>
+            <a:ext cx="5449824" cy="9144"/>
           </a:xfrm>
           <a:prstGeom prst="rect">
             <a:avLst/>
           </a:prstGeom>
           <a:solidFill>
-            <a:srgbClr val="101842"/>
+            <a:srgbClr val="0E163C"/>
           </a:solidFill>
           <a:ln>
             <a:noFill/>
@@ -10147,14 +10027,14 @@
         </p:nvSpPr>
         <p:spPr>
           <a:xfrm>
-            <a:off x="6400800" y="3291839"/>
-            <a:ext cx="5486400" cy="274320"/>
+            <a:off x="6419088" y="3033979"/>
+            <a:ext cx="5449824" cy="246888"/>
           </a:xfrm>
           <a:prstGeom prst="rect">
             <a:avLst/>
           </a:prstGeom>
           <a:solidFill>
-            <a:srgbClr val="101842"/>
+            <a:srgbClr val="0E163C"/>
           </a:solidFill>
           <a:ln>
             <a:noFill/>
@@ -10190,8 +10070,8 @@
         </p:nvSpPr>
         <p:spPr>
           <a:xfrm>
-            <a:off x="6510528" y="3328415"/>
-            <a:ext cx="5349240" cy="219456"/>
+            <a:off x="6528816" y="3070555"/>
+            <a:ext cx="5230368" cy="192024"/>
           </a:xfrm>
           <a:prstGeom prst="rect">
             <a:avLst/>
@@ -10206,11 +10086,11 @@
           <a:p>
             <a:pPr algn="l"/>
             <a:r>
-              <a:rPr sz="1050" b="1" i="0">
+              <a:rPr sz="1000" b="1" i="0">
                 <a:solidFill>
                   <a:srgbClr val="C9A84C"/>
                 </a:solidFill>
-                <a:latin typeface="Barlow Condensed"/>
+                <a:latin typeface="Calibri"/>
               </a:rPr>
               <a:t>Org Context Intelligence</a:t>
             </a:r>
@@ -10225,8 +10105,8 @@
         </p:nvSpPr>
         <p:spPr>
           <a:xfrm>
-            <a:off x="6510528" y="3621023"/>
-            <a:ext cx="5349240" cy="548640"/>
+            <a:off x="6528816" y="3326587"/>
+            <a:ext cx="5230368" cy="512064"/>
           </a:xfrm>
           <a:prstGeom prst="rect">
             <a:avLst/>
@@ -10241,11 +10121,11 @@
           <a:p>
             <a:pPr algn="l"/>
             <a:r>
-              <a:rPr sz="1000" b="0" i="0">
-                <a:solidFill>
-                  <a:srgbClr val="B4BED6"/>
-                </a:solidFill>
-                <a:latin typeface="Barlow Condensed"/>
+              <a:rPr sz="950" b="0" i="0">
+                <a:solidFill>
+                  <a:srgbClr val="AAB4CC"/>
+                </a:solidFill>
+                <a:latin typeface="Calibri"/>
               </a:rPr>
               <a:t>Signal confidence + preparedness score unique to each org. No generic platform replicates this.</a:t>
             </a:r>
@@ -10260,14 +10140,14 @@
         </p:nvSpPr>
         <p:spPr>
           <a:xfrm>
-            <a:off x="6400800" y="4251959"/>
-            <a:ext cx="5440680" cy="10972"/>
+            <a:off x="6419088" y="3893515"/>
+            <a:ext cx="5449824" cy="9144"/>
           </a:xfrm>
           <a:prstGeom prst="rect">
             <a:avLst/>
           </a:prstGeom>
           <a:solidFill>
-            <a:srgbClr val="101842"/>
+            <a:srgbClr val="0E163C"/>
           </a:solidFill>
           <a:ln>
             <a:noFill/>
@@ -10303,14 +10183,14 @@
         </p:nvSpPr>
         <p:spPr>
           <a:xfrm>
-            <a:off x="6400800" y="4498848"/>
-            <a:ext cx="5486400" cy="274320"/>
+            <a:off x="6419088" y="4204411"/>
+            <a:ext cx="5449824" cy="246888"/>
           </a:xfrm>
           <a:prstGeom prst="rect">
             <a:avLst/>
           </a:prstGeom>
           <a:solidFill>
-            <a:srgbClr val="101842"/>
+            <a:srgbClr val="0E163C"/>
           </a:solidFill>
           <a:ln>
             <a:noFill/>
@@ -10346,8 +10226,8 @@
         </p:nvSpPr>
         <p:spPr>
           <a:xfrm>
-            <a:off x="6510528" y="4535424"/>
-            <a:ext cx="5349240" cy="219456"/>
+            <a:off x="6528816" y="4240987"/>
+            <a:ext cx="5230368" cy="192024"/>
           </a:xfrm>
           <a:prstGeom prst="rect">
             <a:avLst/>
@@ -10362,11 +10242,11 @@
           <a:p>
             <a:pPr algn="l"/>
             <a:r>
-              <a:rPr sz="1050" b="1" i="0">
+              <a:rPr sz="1000" b="1" i="0">
                 <a:solidFill>
                   <a:srgbClr val="C9A84C"/>
                 </a:solidFill>
-                <a:latin typeface="Barlow Condensed"/>
+                <a:latin typeface="Calibri"/>
               </a:rPr>
               <a:t>Encoding Permanence</a:t>
             </a:r>
@@ -10381,8 +10261,8 @@
         </p:nvSpPr>
         <p:spPr>
           <a:xfrm>
-            <a:off x="6510528" y="4828032"/>
-            <a:ext cx="5349240" cy="548640"/>
+            <a:off x="6528816" y="4497019"/>
+            <a:ext cx="5230368" cy="512064"/>
           </a:xfrm>
           <a:prstGeom prst="rect">
             <a:avLst/>
@@ -10397,11 +10277,11 @@
           <a:p>
             <a:pPr algn="l"/>
             <a:r>
-              <a:rPr sz="1000" b="0" i="0">
-                <a:solidFill>
-                  <a:srgbClr val="B4BED6"/>
-                </a:solidFill>
-                <a:latin typeface="Barlow Condensed"/>
+              <a:rPr sz="950" b="0" i="0">
+                <a:solidFill>
+                  <a:srgbClr val="AAB4CC"/>
+                </a:solidFill>
+                <a:latin typeface="Calibri"/>
               </a:rPr>
               <a:t>18 months of activations creates an intelligence layer competitors cannot offer on day one.</a:t>
             </a:r>
@@ -10416,14 +10296,14 @@
         </p:nvSpPr>
         <p:spPr>
           <a:xfrm>
-            <a:off x="411480" y="5449824"/>
-            <a:ext cx="10881359" cy="10972"/>
+            <a:off x="411480" y="5521147"/>
+            <a:ext cx="11064240" cy="9144"/>
           </a:xfrm>
           <a:prstGeom prst="rect">
             <a:avLst/>
           </a:prstGeom>
           <a:solidFill>
-            <a:srgbClr val="A08230"/>
+            <a:srgbClr val="9A7E2C"/>
           </a:solidFill>
           <a:ln>
             <a:noFill/>
@@ -10459,8 +10339,8 @@
         </p:nvSpPr>
         <p:spPr>
           <a:xfrm>
-            <a:off x="411480" y="5513832"/>
-            <a:ext cx="11155680" cy="768096"/>
+            <a:off x="411480" y="5594299"/>
+            <a:ext cx="11064240" cy="768096"/>
           </a:xfrm>
           <a:prstGeom prst="rect">
             <a:avLst/>
@@ -10477,11 +10357,11 @@
             <a:r>
               <a:rPr sz="900" b="0" i="1">
                 <a:solidFill>
-                  <a:srgbClr val="B4BED6"/>
+                  <a:srgbClr val="AAB4CC"/>
                 </a:solidFill>
                 <a:latin typeface="Georgia"/>
               </a:rPr>
-              <a:t>"Signal Labs routes the signal. ServiceNow runs the workflow. McKinsey arrives after the trigger. We had the response pre-staged before any of them were called."</a:t>
+              <a:t>"Signal Labs routes the signal. ServiceNow runs the workflow. McKinsey arrives after the trigger. We had the response pre-staged before any of them were called — and the data moat becomes completely unassailable over time."</a:t>
             </a:r>
           </a:p>
         </p:txBody>
@@ -10563,8 +10443,8 @@
         </p:nvSpPr>
         <p:spPr>
           <a:xfrm>
-            <a:off x="10698480" y="82296"/>
-            <a:ext cx="1371600" cy="219456"/>
+            <a:off x="10789920" y="73152"/>
+            <a:ext cx="1280160" cy="173736"/>
           </a:xfrm>
           <a:prstGeom prst="rect">
             <a:avLst/>
@@ -10581,11 +10461,11 @@
             <a:r>
               <a:rPr sz="750" b="1" i="0">
                 <a:solidFill>
-                  <a:srgbClr val="C9A84C"/>
-                </a:solidFill>
-                <a:latin typeface="Barlow Condensed"/>
-              </a:rPr>
-              <a:t>SLIDE 05  ·  08</a:t>
+                  <a:srgbClr val="0A0F2E"/>
+                </a:solidFill>
+                <a:latin typeface="Calibri"/>
+              </a:rPr>
+              <a:t>05  /  08</a:t>
             </a:r>
           </a:p>
         </p:txBody>
@@ -10605,7 +10485,7 @@
             <a:avLst/>
           </a:prstGeom>
           <a:solidFill>
-            <a:srgbClr val="080D28"/>
+            <a:srgbClr val="070B24"/>
           </a:solidFill>
           <a:ln>
             <a:noFill/>
@@ -10641,8 +10521,8 @@
         </p:nvSpPr>
         <p:spPr>
           <a:xfrm>
-            <a:off x="411480" y="6748272"/>
-            <a:ext cx="4572000" cy="182880"/>
+            <a:off x="411480" y="6744614"/>
+            <a:ext cx="5029200" cy="155448"/>
           </a:xfrm>
           <a:prstGeom prst="rect">
             <a:avLst/>
@@ -10661,7 +10541,7 @@
                 <a:solidFill>
                   <a:srgbClr val="C9A84C"/>
                 </a:solidFill>
-                <a:latin typeface="Barlow Condensed"/>
+                <a:latin typeface="Calibri"/>
               </a:rPr>
               <a:t>VaughnMartin  ·  READINESS OS</a:t>
             </a:r>
@@ -10676,8 +10556,8 @@
         </p:nvSpPr>
         <p:spPr>
           <a:xfrm>
-            <a:off x="7315200" y="6748272"/>
-            <a:ext cx="4663440" cy="182880"/>
+            <a:off x="7132320" y="6744614"/>
+            <a:ext cx="4937760" cy="155448"/>
           </a:xfrm>
           <a:prstGeom prst="rect">
             <a:avLst/>
@@ -10694,9 +10574,9 @@
             <a:r>
               <a:rPr sz="750" b="0" i="0">
                 <a:solidFill>
-                  <a:srgbClr val="B4BED6"/>
-                </a:solidFill>
-                <a:latin typeface="Barlow Condensed"/>
+                  <a:srgbClr val="AAB4CC"/>
+                </a:solidFill>
+                <a:latin typeface="Calibri"/>
               </a:rPr>
               <a:t>vaughnmartin.com/how-it-executes</a:t>
             </a:r>
@@ -10712,7 +10592,7 @@
         <p:spPr>
           <a:xfrm>
             <a:off x="411480" y="237744"/>
-            <a:ext cx="5669280" cy="201168"/>
+            <a:ext cx="5577840" cy="192024"/>
           </a:xfrm>
           <a:prstGeom prst="rect">
             <a:avLst/>
@@ -10731,7 +10611,7 @@
                 <a:solidFill>
                   <a:srgbClr val="C9A84C"/>
                 </a:solidFill>
-                <a:latin typeface="Barlow Condensed"/>
+                <a:latin typeface="Calibri"/>
               </a:rPr>
               <a:t>HOW IT WORKS</a:t>
             </a:r>
@@ -10747,7 +10627,7 @@
         <p:spPr>
           <a:xfrm>
             <a:off x="411480" y="475488"/>
-            <a:ext cx="5669280" cy="517144"/>
+            <a:ext cx="5577840" cy="455168"/>
           </a:xfrm>
           <a:prstGeom prst="rect">
             <a:avLst/>
@@ -10762,11 +10642,11 @@
           <a:p>
             <a:pPr algn="l"/>
             <a:r>
-              <a:rPr sz="2900" b="1" i="0">
+              <a:rPr sz="2800" b="1" i="0">
                 <a:solidFill>
                   <a:srgbClr val="FFFFFF"/>
                 </a:solidFill>
-                <a:latin typeface="Barlow Condensed"/>
+                <a:latin typeface="Calibri"/>
               </a:rPr>
               <a:t>FROM TRIGGER TO</a:t>
             </a:r>
@@ -10781,8 +10661,8 @@
         </p:nvSpPr>
         <p:spPr>
           <a:xfrm>
-            <a:off x="411480" y="946912"/>
-            <a:ext cx="5669280" cy="517144"/>
+            <a:off x="411480" y="930656"/>
+            <a:ext cx="5577840" cy="455168"/>
           </a:xfrm>
           <a:prstGeom prst="rect">
             <a:avLst/>
@@ -10797,11 +10677,11 @@
           <a:p>
             <a:pPr algn="l"/>
             <a:r>
-              <a:rPr sz="2900" b="1" i="0">
+              <a:rPr sz="2800" b="1" i="0">
                 <a:solidFill>
                   <a:srgbClr val="C9A84C"/>
                 </a:solidFill>
-                <a:latin typeface="Barlow Condensed"/>
+                <a:latin typeface="Calibri"/>
               </a:rPr>
               <a:t>EXECUTION IN 12 MINUTES.</a:t>
             </a:r>
@@ -10816,8 +10696,8 @@
         </p:nvSpPr>
         <p:spPr>
           <a:xfrm>
-            <a:off x="411480" y="1883664"/>
-            <a:ext cx="5577840" cy="10972"/>
+            <a:off x="411480" y="1513840"/>
+            <a:ext cx="5486400" cy="9144"/>
           </a:xfrm>
           <a:prstGeom prst="rect">
             <a:avLst/>
@@ -10859,8 +10739,8 @@
         </p:nvSpPr>
         <p:spPr>
           <a:xfrm>
-            <a:off x="411480" y="2011680"/>
-            <a:ext cx="457200" cy="420624"/>
+            <a:off x="411480" y="1660550"/>
+            <a:ext cx="457200" cy="438912"/>
           </a:xfrm>
           <a:prstGeom prst="rect">
             <a:avLst/>
@@ -10875,11 +10755,11 @@
           <a:p>
             <a:pPr algn="l"/>
             <a:r>
-              <a:rPr sz="1700" b="1" i="0">
+              <a:rPr sz="1600" b="1" i="0">
                 <a:solidFill>
                   <a:srgbClr val="C9A84C"/>
                 </a:solidFill>
-                <a:latin typeface="Barlow Condensed"/>
+                <a:latin typeface="Calibri"/>
               </a:rPr>
               <a:t>①</a:t>
             </a:r>
@@ -10894,8 +10774,8 @@
         </p:nvSpPr>
         <p:spPr>
           <a:xfrm>
-            <a:off x="932688" y="2048256"/>
-            <a:ext cx="5065776" cy="402336"/>
+            <a:off x="914400" y="1697126"/>
+            <a:ext cx="5084064" cy="365760"/>
           </a:xfrm>
           <a:prstGeom prst="rect">
             <a:avLst/>
@@ -10910,11 +10790,11 @@
           <a:p>
             <a:pPr algn="l"/>
             <a:r>
-              <a:rPr sz="1100" b="0" i="0">
+              <a:rPr sz="1050" b="0" i="0">
                 <a:solidFill>
                   <a:srgbClr val="FFFFFF"/>
                 </a:solidFill>
-                <a:latin typeface="Barlow Condensed"/>
+                <a:latin typeface="Calibri"/>
               </a:rPr>
               <a:t>Signal detected — confidence scored against 221 strategic trigger patterns</a:t>
             </a:r>
@@ -10929,8 +10809,8 @@
         </p:nvSpPr>
         <p:spPr>
           <a:xfrm>
-            <a:off x="411480" y="2505456"/>
-            <a:ext cx="457200" cy="420624"/>
+            <a:off x="411480" y="2172614"/>
+            <a:ext cx="457200" cy="438912"/>
           </a:xfrm>
           <a:prstGeom prst="rect">
             <a:avLst/>
@@ -10945,11 +10825,11 @@
           <a:p>
             <a:pPr algn="l"/>
             <a:r>
-              <a:rPr sz="1700" b="1" i="0">
+              <a:rPr sz="1600" b="1" i="0">
                 <a:solidFill>
                   <a:srgbClr val="C9A84C"/>
                 </a:solidFill>
-                <a:latin typeface="Barlow Condensed"/>
+                <a:latin typeface="Calibri"/>
               </a:rPr>
               <a:t>②</a:t>
             </a:r>
@@ -10964,8 +10844,8 @@
         </p:nvSpPr>
         <p:spPr>
           <a:xfrm>
-            <a:off x="932688" y="2542032"/>
-            <a:ext cx="5065776" cy="402336"/>
+            <a:off x="914400" y="2209190"/>
+            <a:ext cx="5084064" cy="365760"/>
           </a:xfrm>
           <a:prstGeom prst="rect">
             <a:avLst/>
@@ -10980,11 +10860,11 @@
           <a:p>
             <a:pPr algn="l"/>
             <a:r>
-              <a:rPr sz="1100" b="0" i="0">
+              <a:rPr sz="1050" b="0" i="0">
                 <a:solidFill>
                   <a:srgbClr val="FFFFFF"/>
                 </a:solidFill>
-                <a:latin typeface="Barlow Condensed"/>
+                <a:latin typeface="Calibri"/>
               </a:rPr>
               <a:t>Matching Readiness Protocol staged — tasks assigned, stakeholders mapped</a:t>
             </a:r>
@@ -10999,8 +10879,8 @@
         </p:nvSpPr>
         <p:spPr>
           <a:xfrm>
-            <a:off x="411480" y="2999232"/>
-            <a:ext cx="457200" cy="420624"/>
+            <a:off x="411480" y="2684678"/>
+            <a:ext cx="457200" cy="438912"/>
           </a:xfrm>
           <a:prstGeom prst="rect">
             <a:avLst/>
@@ -11015,11 +10895,11 @@
           <a:p>
             <a:pPr algn="l"/>
             <a:r>
-              <a:rPr sz="1700" b="1" i="0">
+              <a:rPr sz="1600" b="1" i="0">
                 <a:solidFill>
                   <a:srgbClr val="C9A84C"/>
                 </a:solidFill>
-                <a:latin typeface="Barlow Condensed"/>
+                <a:latin typeface="Calibri"/>
               </a:rPr>
               <a:t>③</a:t>
             </a:r>
@@ -11034,8 +10914,8 @@
         </p:nvSpPr>
         <p:spPr>
           <a:xfrm>
-            <a:off x="932688" y="3035808"/>
-            <a:ext cx="5065776" cy="402336"/>
+            <a:off x="914400" y="2721254"/>
+            <a:ext cx="5084064" cy="365760"/>
           </a:xfrm>
           <a:prstGeom prst="rect">
             <a:avLst/>
@@ -11050,13 +10930,13 @@
           <a:p>
             <a:pPr algn="l"/>
             <a:r>
-              <a:rPr sz="1100" b="0" i="0">
+              <a:rPr sz="1050" b="0" i="0">
                 <a:solidFill>
                   <a:srgbClr val="FFFFFF"/>
                 </a:solidFill>
-                <a:latin typeface="Barlow Condensed"/>
-              </a:rPr>
-              <a:t>Board-ready execution brief delivered — pre-approved communication streams, authority chain</a:t>
+                <a:latin typeface="Calibri"/>
+              </a:rPr>
+              <a:t>Board-ready execution brief delivered in &lt; 120 seconds — authority chain mapped</a:t>
             </a:r>
           </a:p>
         </p:txBody>
@@ -11069,8 +10949,8 @@
         </p:nvSpPr>
         <p:spPr>
           <a:xfrm>
-            <a:off x="411480" y="3493008"/>
-            <a:ext cx="457200" cy="420624"/>
+            <a:off x="411480" y="3196742"/>
+            <a:ext cx="457200" cy="438912"/>
           </a:xfrm>
           <a:prstGeom prst="rect">
             <a:avLst/>
@@ -11085,11 +10965,11 @@
           <a:p>
             <a:pPr algn="l"/>
             <a:r>
-              <a:rPr sz="1700" b="1" i="0">
+              <a:rPr sz="1600" b="1" i="0">
                 <a:solidFill>
                   <a:srgbClr val="C9A84C"/>
                 </a:solidFill>
-                <a:latin typeface="Barlow Condensed"/>
+                <a:latin typeface="Calibri"/>
               </a:rPr>
               <a:t>④</a:t>
             </a:r>
@@ -11104,8 +10984,8 @@
         </p:nvSpPr>
         <p:spPr>
           <a:xfrm>
-            <a:off x="932688" y="3529584"/>
-            <a:ext cx="5065776" cy="402336"/>
+            <a:off x="914400" y="3233318"/>
+            <a:ext cx="5084064" cy="365760"/>
           </a:xfrm>
           <a:prstGeom prst="rect">
             <a:avLst/>
@@ -11120,13 +11000,13 @@
           <a:p>
             <a:pPr algn="l"/>
             <a:r>
-              <a:rPr sz="1100" b="0" i="0">
+              <a:rPr sz="1050" b="0" i="0">
                 <a:solidFill>
                   <a:srgbClr val="FFFFFF"/>
                 </a:solidFill>
-                <a:latin typeface="Barlow Condensed"/>
-              </a:rPr>
-              <a:t>Executive authorizes — four real choices including Stand Down. No action without sign-off.</a:t>
+                <a:latin typeface="Calibri"/>
+              </a:rPr>
+              <a:t>Executive authorizes — four real choices including Stand Down. No autonomous action.</a:t>
             </a:r>
           </a:p>
         </p:txBody>
@@ -11139,8 +11019,8 @@
         </p:nvSpPr>
         <p:spPr>
           <a:xfrm>
-            <a:off x="411480" y="3986784"/>
-            <a:ext cx="457200" cy="420624"/>
+            <a:off x="411480" y="3708806"/>
+            <a:ext cx="457200" cy="438912"/>
           </a:xfrm>
           <a:prstGeom prst="rect">
             <a:avLst/>
@@ -11155,11 +11035,11 @@
           <a:p>
             <a:pPr algn="l"/>
             <a:r>
-              <a:rPr sz="1700" b="1" i="0">
+              <a:rPr sz="1600" b="1" i="0">
                 <a:solidFill>
                   <a:srgbClr val="C9A84C"/>
                 </a:solidFill>
-                <a:latin typeface="Barlow Condensed"/>
+                <a:latin typeface="Calibri"/>
               </a:rPr>
               <a:t>⑤</a:t>
             </a:r>
@@ -11174,8 +11054,8 @@
         </p:nvSpPr>
         <p:spPr>
           <a:xfrm>
-            <a:off x="932688" y="4023360"/>
-            <a:ext cx="5065776" cy="402336"/>
+            <a:off x="914400" y="3745382"/>
+            <a:ext cx="5084064" cy="365760"/>
           </a:xfrm>
           <a:prstGeom prst="rect">
             <a:avLst/>
@@ -11190,11 +11070,11 @@
           <a:p>
             <a:pPr algn="l"/>
             <a:r>
-              <a:rPr sz="1100" b="0" i="0">
+              <a:rPr sz="1050" b="0" i="0">
                 <a:solidFill>
                   <a:srgbClr val="FFFFFF"/>
                 </a:solidFill>
-                <a:latin typeface="Barlow Condensed"/>
+                <a:latin typeface="Calibri"/>
               </a:rPr>
               <a:t>Response live — 12 minutes from signal to coordinated organizational execution</a:t>
             </a:r>
@@ -11209,14 +11089,14 @@
         </p:nvSpPr>
         <p:spPr>
           <a:xfrm>
-            <a:off x="411480" y="4535424"/>
-            <a:ext cx="5596128" cy="621792"/>
+            <a:off x="411480" y="4367174"/>
+            <a:ext cx="5577840" cy="658368"/>
           </a:xfrm>
           <a:prstGeom prst="rect">
             <a:avLst/>
           </a:prstGeom>
           <a:solidFill>
-            <a:srgbClr val="101842"/>
+            <a:srgbClr val="0E163C"/>
           </a:solidFill>
           <a:ln>
             <a:noFill/>
@@ -11252,8 +11132,8 @@
         </p:nvSpPr>
         <p:spPr>
           <a:xfrm>
-            <a:off x="411480" y="4535424"/>
-            <a:ext cx="5596128" cy="23774"/>
+            <a:off x="411480" y="4367174"/>
+            <a:ext cx="5577840" cy="20116"/>
           </a:xfrm>
           <a:prstGeom prst="rect">
             <a:avLst/>
@@ -11295,8 +11175,8 @@
         </p:nvSpPr>
         <p:spPr>
           <a:xfrm>
-            <a:off x="548640" y="4572000"/>
-            <a:ext cx="5449824" cy="310896"/>
+            <a:off x="539496" y="4412894"/>
+            <a:ext cx="5376672" cy="256032"/>
           </a:xfrm>
           <a:prstGeom prst="rect">
             <a:avLst/>
@@ -11311,11 +11191,11 @@
           <a:p>
             <a:pPr algn="l"/>
             <a:r>
-              <a:rPr sz="1400" b="1" i="0">
+              <a:rPr sz="1000" b="1" i="0">
                 <a:solidFill>
                   <a:srgbClr val="C9A84C"/>
                 </a:solidFill>
-                <a:latin typeface="Barlow Condensed"/>
+                <a:latin typeface="Calibri"/>
               </a:rPr>
               <a:t>3,600×  EXECUTION HEAD START</a:t>
             </a:r>
@@ -11330,8 +11210,8 @@
         </p:nvSpPr>
         <p:spPr>
           <a:xfrm>
-            <a:off x="548640" y="4864608"/>
-            <a:ext cx="5449824" cy="237744"/>
+            <a:off x="539496" y="4696358"/>
+            <a:ext cx="5376672" cy="274320"/>
           </a:xfrm>
           <a:prstGeom prst="rect">
             <a:avLst/>
@@ -11346,11 +11226,11 @@
           <a:p>
             <a:pPr algn="l"/>
             <a:r>
-              <a:rPr sz="900" b="0" i="0">
-                <a:solidFill>
-                  <a:srgbClr val="B4BED6"/>
-                </a:solidFill>
-                <a:latin typeface="Barlow Condensed"/>
+              <a:rPr sz="850" b="0" i="0">
+                <a:solidFill>
+                  <a:srgbClr val="AAB4CC"/>
+                </a:solidFill>
+                <a:latin typeface="Calibri"/>
               </a:rPr>
               <a:t>30 days of mobilization compressed to 12 minutes  ·  startup to Fortune 500</a:t>
             </a:r>
@@ -11365,14 +11245,14 @@
         </p:nvSpPr>
         <p:spPr>
           <a:xfrm>
-            <a:off x="411480" y="5449824"/>
-            <a:ext cx="5394960" cy="10972"/>
+            <a:off x="411480" y="5190134"/>
+            <a:ext cx="5303520" cy="9144"/>
           </a:xfrm>
           <a:prstGeom prst="rect">
             <a:avLst/>
           </a:prstGeom>
           <a:solidFill>
-            <a:srgbClr val="A08230"/>
+            <a:srgbClr val="9A7E2C"/>
           </a:solidFill>
           <a:ln>
             <a:noFill/>
@@ -11408,8 +11288,8 @@
         </p:nvSpPr>
         <p:spPr>
           <a:xfrm>
-            <a:off x="411480" y="5513832"/>
-            <a:ext cx="5669280" cy="768096"/>
+            <a:off x="411480" y="5254142"/>
+            <a:ext cx="5577840" cy="768096"/>
           </a:xfrm>
           <a:prstGeom prst="rect">
             <a:avLst/>
@@ -11424,13 +11304,13 @@
           <a:p>
             <a:pPr algn="l"/>
             <a:r>
-              <a:rPr sz="900" b="0" i="1">
-                <a:solidFill>
-                  <a:srgbClr val="B4BED6"/>
+              <a:rPr sz="850" b="0" i="1">
+                <a:solidFill>
+                  <a:srgbClr val="AAB4CC"/>
                 </a:solidFill>
                 <a:latin typeface="Georgia"/>
               </a:rPr>
-              <a:t>"The AI monitors, but humans decide. We turn 30 days of unmanaged chaos and a potential $47M penalty into a controlled, 12-minute executive sign-off."</a:t>
+              <a:t>"The AI monitors, but humans decide. We turn 30 days of chaos and a potential $47M penalty into a controlled, 12-minute executive sign-off."</a:t>
             </a:r>
           </a:p>
         </p:txBody>
@@ -11443,14 +11323,14 @@
         </p:nvSpPr>
         <p:spPr>
           <a:xfrm>
-            <a:off x="6455664" y="557784"/>
-            <a:ext cx="5468112" cy="5888736"/>
+            <a:off x="6483096" y="566928"/>
+            <a:ext cx="5394960" cy="6035040"/>
           </a:xfrm>
           <a:prstGeom prst="rect">
             <a:avLst/>
           </a:prstGeom>
           <a:solidFill>
-            <a:srgbClr val="040718"/>
+            <a:srgbClr val="030514"/>
           </a:solidFill>
           <a:ln>
             <a:noFill/>
@@ -11486,8 +11366,8 @@
         </p:nvSpPr>
         <p:spPr>
           <a:xfrm>
-            <a:off x="6364224" y="502920"/>
-            <a:ext cx="36576" cy="5888736"/>
+            <a:off x="6382512" y="502920"/>
+            <a:ext cx="36576" cy="6035040"/>
           </a:xfrm>
           <a:prstGeom prst="rect">
             <a:avLst/>
@@ -11523,7 +11403,7 @@
       </p:sp>
       <p:pic>
         <p:nvPicPr>
-          <p:cNvPr id="29" name="Picture 28" descr="wow_12min_scenarios.jpg"/>
+          <p:cNvPr id="29" name="Picture 28" descr="hq_12min_scenarios.jpg"/>
           <p:cNvPicPr>
             <a:picLocks noChangeAspect="1"/>
           </p:cNvPicPr>
@@ -11537,8 +11417,8 @@
         </p:blipFill>
         <p:spPr>
           <a:xfrm>
-            <a:off x="6400800" y="502920"/>
-            <a:ext cx="5468112" cy="5888736"/>
+            <a:off x="6419088" y="502920"/>
+            <a:ext cx="5394960" cy="6035040"/>
           </a:xfrm>
           <a:prstGeom prst="rect">
             <a:avLst/>
@@ -11553,8 +11433,8 @@
         </p:nvSpPr>
         <p:spPr>
           <a:xfrm>
-            <a:off x="6400800" y="6190488"/>
-            <a:ext cx="5468112" cy="201168"/>
+            <a:off x="6419088" y="6355079"/>
+            <a:ext cx="5394960" cy="182880"/>
           </a:xfrm>
           <a:prstGeom prst="rect">
             <a:avLst/>
@@ -11665,8 +11545,8 @@
         </p:nvSpPr>
         <p:spPr>
           <a:xfrm>
-            <a:off x="10698480" y="82296"/>
-            <a:ext cx="1371600" cy="219456"/>
+            <a:off x="10789920" y="73152"/>
+            <a:ext cx="1280160" cy="173736"/>
           </a:xfrm>
           <a:prstGeom prst="rect">
             <a:avLst/>
@@ -11683,11 +11563,11 @@
             <a:r>
               <a:rPr sz="750" b="1" i="0">
                 <a:solidFill>
-                  <a:srgbClr val="C9A84C"/>
-                </a:solidFill>
-                <a:latin typeface="Barlow Condensed"/>
-              </a:rPr>
-              <a:t>SLIDE 06  ·  08</a:t>
+                  <a:srgbClr val="0A0F2E"/>
+                </a:solidFill>
+                <a:latin typeface="Calibri"/>
+              </a:rPr>
+              <a:t>06  /  08</a:t>
             </a:r>
           </a:p>
         </p:txBody>
@@ -11707,7 +11587,7 @@
             <a:avLst/>
           </a:prstGeom>
           <a:solidFill>
-            <a:srgbClr val="080D28"/>
+            <a:srgbClr val="070B24"/>
           </a:solidFill>
           <a:ln>
             <a:noFill/>
@@ -11743,8 +11623,8 @@
         </p:nvSpPr>
         <p:spPr>
           <a:xfrm>
-            <a:off x="411480" y="6748272"/>
-            <a:ext cx="4572000" cy="182880"/>
+            <a:off x="411480" y="6744614"/>
+            <a:ext cx="5029200" cy="155448"/>
           </a:xfrm>
           <a:prstGeom prst="rect">
             <a:avLst/>
@@ -11763,7 +11643,7 @@
                 <a:solidFill>
                   <a:srgbClr val="C9A84C"/>
                 </a:solidFill>
-                <a:latin typeface="Barlow Condensed"/>
+                <a:latin typeface="Calibri"/>
               </a:rPr>
               <a:t>VaughnMartin  ·  READINESS OS</a:t>
             </a:r>
@@ -11778,8 +11658,8 @@
         </p:nvSpPr>
         <p:spPr>
           <a:xfrm>
-            <a:off x="7315200" y="6748272"/>
-            <a:ext cx="4663440" cy="182880"/>
+            <a:off x="7132320" y="6744614"/>
+            <a:ext cx="4937760" cy="155448"/>
           </a:xfrm>
           <a:prstGeom prst="rect">
             <a:avLst/>
@@ -11796,9 +11676,9 @@
             <a:r>
               <a:rPr sz="750" b="0" i="0">
                 <a:solidFill>
-                  <a:srgbClr val="B4BED6"/>
-                </a:solidFill>
-                <a:latin typeface="Barlow Condensed"/>
+                  <a:srgbClr val="AAB4CC"/>
+                </a:solidFill>
+                <a:latin typeface="Calibri"/>
               </a:rPr>
               <a:t>vaughnmartin.com/proof-story</a:t>
             </a:r>
@@ -11814,7 +11694,7 @@
         <p:spPr>
           <a:xfrm>
             <a:off x="411480" y="237744"/>
-            <a:ext cx="5669280" cy="201168"/>
+            <a:ext cx="5577840" cy="192024"/>
           </a:xfrm>
           <a:prstGeom prst="rect">
             <a:avLst/>
@@ -11833,7 +11713,7 @@
                 <a:solidFill>
                   <a:srgbClr val="C9A84C"/>
                 </a:solidFill>
-                <a:latin typeface="Barlow Condensed"/>
+                <a:latin typeface="Calibri"/>
               </a:rPr>
               <a:t>PROOF — NOW, NOT ROADMAP</a:t>
             </a:r>
@@ -11849,7 +11729,7 @@
         <p:spPr>
           <a:xfrm>
             <a:off x="411480" y="475488"/>
-            <a:ext cx="5669280" cy="663448"/>
+            <a:ext cx="5577840" cy="617728"/>
           </a:xfrm>
           <a:prstGeom prst="rect">
             <a:avLst/>
@@ -11868,7 +11748,7 @@
                 <a:solidFill>
                   <a:srgbClr val="FFFFFF"/>
                 </a:solidFill>
-                <a:latin typeface="Barlow Condensed"/>
+                <a:latin typeface="Calibri"/>
               </a:rPr>
               <a:t>BUILT.</a:t>
             </a:r>
@@ -11884,7 +11764,7 @@
         <p:spPr>
           <a:xfrm>
             <a:off x="411480" y="1093216"/>
-            <a:ext cx="5669280" cy="663448"/>
+            <a:ext cx="5577840" cy="617728"/>
           </a:xfrm>
           <a:prstGeom prst="rect">
             <a:avLst/>
@@ -11903,7 +11783,7 @@
                 <a:solidFill>
                   <a:srgbClr val="C9A84C"/>
                 </a:solidFill>
-                <a:latin typeface="Barlow Condensed"/>
+                <a:latin typeface="Calibri"/>
               </a:rPr>
               <a:t>LIVE.</a:t>
             </a:r>
@@ -11919,7 +11799,7 @@
         <p:spPr>
           <a:xfrm>
             <a:off x="411480" y="1710943"/>
-            <a:ext cx="5669280" cy="435863"/>
+            <a:ext cx="5577840" cy="357632"/>
           </a:xfrm>
           <a:prstGeom prst="rect">
             <a:avLst/>
@@ -11934,11 +11814,11 @@
           <a:p>
             <a:pPr algn="l"/>
             <a:r>
-              <a:rPr sz="2400" b="1" i="0">
-                <a:solidFill>
-                  <a:srgbClr val="B4BED6"/>
-                </a:solidFill>
-                <a:latin typeface="Barlow Condensed"/>
+              <a:rPr sz="2200" b="1" i="0">
+                <a:solidFill>
+                  <a:srgbClr val="AAB4CC"/>
+                </a:solidFill>
+                <a:latin typeface="Calibri"/>
               </a:rPr>
               <a:t>IN PRODUCTION NOW.</a:t>
             </a:r>
@@ -11953,8 +11833,8 @@
         </p:nvSpPr>
         <p:spPr>
           <a:xfrm>
-            <a:off x="411480" y="2423160"/>
-            <a:ext cx="5577840" cy="10972"/>
+            <a:off x="411480" y="2196592"/>
+            <a:ext cx="5486400" cy="9144"/>
           </a:xfrm>
           <a:prstGeom prst="rect">
             <a:avLst/>
@@ -11996,28 +11876,29 @@
         </p:nvSpPr>
         <p:spPr>
           <a:xfrm>
-            <a:off x="411480" y="2560320"/>
-            <a:ext cx="5669280" cy="365760"/>
-          </a:xfrm>
-          <a:prstGeom prst="rect">
-            <a:avLst/>
-          </a:prstGeom>
-          <a:noFill/>
-        </p:spPr>
-        <p:txBody>
-          <a:bodyPr wrap="square">
-            <a:spAutoFit/>
-          </a:bodyPr>
-          <a:lstStyle/>
-          <a:p>
-            <a:r>
-              <a:rPr sz="1100">
+            <a:off x="411480" y="2342692"/>
+            <a:ext cx="5577840" cy="365760"/>
+          </a:xfrm>
+          <a:prstGeom prst="rect">
+            <a:avLst/>
+          </a:prstGeom>
+          <a:noFill/>
+        </p:spPr>
+        <p:txBody>
+          <a:bodyPr wrap="square">
+            <a:spAutoFit/>
+          </a:bodyPr>
+          <a:lstStyle/>
+          <a:p>
+            <a:pPr algn="l"/>
+            <a:r>
+              <a:rPr sz="1050" b="0" i="0">
                 <a:solidFill>
                   <a:srgbClr val="FFFFFF"/>
                 </a:solidFill>
-                <a:latin typeface="Barlow Condensed"/>
-              </a:rPr>
-              <a:t>▶  Production platform live — vaughnmartin.com</a:t>
+                <a:latin typeface="Calibri"/>
+              </a:rPr>
+              <a:t>▸  Production platform live — vaughnmartin.com</a:t>
             </a:r>
           </a:p>
         </p:txBody>
@@ -12030,28 +11911,29 @@
         </p:nvSpPr>
         <p:spPr>
           <a:xfrm>
-            <a:off x="411480" y="2912363"/>
-            <a:ext cx="5669280" cy="365760"/>
-          </a:xfrm>
-          <a:prstGeom prst="rect">
-            <a:avLst/>
-          </a:prstGeom>
-          <a:noFill/>
-        </p:spPr>
-        <p:txBody>
-          <a:bodyPr wrap="square">
-            <a:spAutoFit/>
-          </a:bodyPr>
-          <a:lstStyle/>
-          <a:p>
-            <a:r>
-              <a:rPr sz="1100">
+            <a:off x="411480" y="2745028"/>
+            <a:ext cx="5577840" cy="365760"/>
+          </a:xfrm>
+          <a:prstGeom prst="rect">
+            <a:avLst/>
+          </a:prstGeom>
+          <a:noFill/>
+        </p:spPr>
+        <p:txBody>
+          <a:bodyPr wrap="square">
+            <a:spAutoFit/>
+          </a:bodyPr>
+          <a:lstStyle/>
+          <a:p>
+            <a:pPr algn="l"/>
+            <a:r>
+              <a:rPr sz="1050" b="0" i="0">
                 <a:solidFill>
                   <a:srgbClr val="FFFFFF"/>
                 </a:solidFill>
-                <a:latin typeface="Barlow Condensed"/>
-              </a:rPr>
-              <a:t>▶  170 protocols active · 221 triggers monitored · 248+ data points</a:t>
+                <a:latin typeface="Calibri"/>
+              </a:rPr>
+              <a:t>▸  170 protocols active  ·  221 triggers monitored  ·  248+ data points</a:t>
             </a:r>
           </a:p>
         </p:txBody>
@@ -12064,28 +11946,29 @@
         </p:nvSpPr>
         <p:spPr>
           <a:xfrm>
-            <a:off x="411480" y="3264407"/>
-            <a:ext cx="5669280" cy="365760"/>
-          </a:xfrm>
-          <a:prstGeom prst="rect">
-            <a:avLst/>
-          </a:prstGeom>
-          <a:noFill/>
-        </p:spPr>
-        <p:txBody>
-          <a:bodyPr wrap="square">
-            <a:spAutoFit/>
-          </a:bodyPr>
-          <a:lstStyle/>
-          <a:p>
-            <a:r>
-              <a:rPr sz="1100">
+            <a:off x="411480" y="3147364"/>
+            <a:ext cx="5577840" cy="365760"/>
+          </a:xfrm>
+          <a:prstGeom prst="rect">
+            <a:avLst/>
+          </a:prstGeom>
+          <a:noFill/>
+        </p:spPr>
+        <p:txBody>
+          <a:bodyPr wrap="square">
+            <a:spAutoFit/>
+          </a:bodyPr>
+          <a:lstStyle/>
+          <a:p>
+            <a:pPr algn="l"/>
+            <a:r>
+              <a:rPr sz="1050" b="0" i="0">
                 <a:solidFill>
                   <a:srgbClr val="FFFFFF"/>
                 </a:solidFill>
-                <a:latin typeface="Barlow Condensed"/>
-              </a:rPr>
-              <a:t>▶  Full public execution walkthrough at vaughnmartin.com/how-it-executes</a:t>
+                <a:latin typeface="Calibri"/>
+              </a:rPr>
+              <a:t>▸  Full execution walkthrough live at vaughnmartin.com/how-it-executes</a:t>
             </a:r>
           </a:p>
         </p:txBody>
@@ -12098,28 +11981,29 @@
         </p:nvSpPr>
         <p:spPr>
           <a:xfrm>
-            <a:off x="411480" y="3616451"/>
-            <a:ext cx="5669280" cy="365760"/>
-          </a:xfrm>
-          <a:prstGeom prst="rect">
-            <a:avLst/>
-          </a:prstGeom>
-          <a:noFill/>
-        </p:spPr>
-        <p:txBody>
-          <a:bodyPr wrap="square">
-            <a:spAutoFit/>
-          </a:bodyPr>
-          <a:lstStyle/>
-          <a:p>
-            <a:r>
-              <a:rPr sz="1100">
+            <a:off x="411480" y="3549700"/>
+            <a:ext cx="5577840" cy="365760"/>
+          </a:xfrm>
+          <a:prstGeom prst="rect">
+            <a:avLst/>
+          </a:prstGeom>
+          <a:noFill/>
+        </p:spPr>
+        <p:txBody>
+          <a:bodyPr wrap="square">
+            <a:spAutoFit/>
+          </a:bodyPr>
+          <a:lstStyle/>
+          <a:p>
+            <a:pPr algn="l"/>
+            <a:r>
+              <a:rPr sz="1050" b="0" i="0">
                 <a:solidFill>
                   <a:srgbClr val="FFFFFF"/>
                 </a:solidFill>
-                <a:latin typeface="Barlow Condensed"/>
-              </a:rPr>
-              <a:t>▶  12-Minute Test Drive — run any of 7 real scenarios now, live</a:t>
+                <a:latin typeface="Calibri"/>
+              </a:rPr>
+              <a:t>▸  12-Minute Test Drive — run any of 7 real scenarios, live now</a:t>
             </a:r>
           </a:p>
         </p:txBody>
@@ -12132,28 +12016,29 @@
         </p:nvSpPr>
         <p:spPr>
           <a:xfrm>
-            <a:off x="411480" y="3968495"/>
-            <a:ext cx="5669280" cy="365760"/>
-          </a:xfrm>
-          <a:prstGeom prst="rect">
-            <a:avLst/>
-          </a:prstGeom>
-          <a:noFill/>
-        </p:spPr>
-        <p:txBody>
-          <a:bodyPr wrap="square">
-            <a:spAutoFit/>
-          </a:bodyPr>
-          <a:lstStyle/>
-          <a:p>
-            <a:r>
-              <a:rPr sz="1100">
+            <a:off x="411480" y="3952036"/>
+            <a:ext cx="5577840" cy="365760"/>
+          </a:xfrm>
+          <a:prstGeom prst="rect">
+            <a:avLst/>
+          </a:prstGeom>
+          <a:noFill/>
+        </p:spPr>
+        <p:txBody>
+          <a:bodyPr wrap="square">
+            <a:spAutoFit/>
+          </a:bodyPr>
+          <a:lstStyle/>
+          <a:p>
+            <a:pPr algn="l"/>
+            <a:r>
+              <a:rPr sz="1050" b="0" i="0">
                 <a:solidFill>
                   <a:srgbClr val="FFFFFF"/>
                 </a:solidFill>
-                <a:latin typeface="Barlow Condensed"/>
-              </a:rPr>
-              <a:t>▶  Founding Partner cohort open for 90-day validation partnership</a:t>
+                <a:latin typeface="Calibri"/>
+              </a:rPr>
+              <a:t>▸  Founding Partner cohort open for 90-day validation partnership</a:t>
             </a:r>
           </a:p>
         </p:txBody>
@@ -12166,14 +12051,14 @@
         </p:nvSpPr>
         <p:spPr>
           <a:xfrm>
-            <a:off x="411480" y="5449824"/>
-            <a:ext cx="5394960" cy="10972"/>
+            <a:off x="411480" y="4537252"/>
+            <a:ext cx="5303520" cy="9144"/>
           </a:xfrm>
           <a:prstGeom prst="rect">
             <a:avLst/>
           </a:prstGeom>
           <a:solidFill>
-            <a:srgbClr val="A08230"/>
+            <a:srgbClr val="9A7E2C"/>
           </a:solidFill>
           <a:ln>
             <a:noFill/>
@@ -12209,8 +12094,8 @@
         </p:nvSpPr>
         <p:spPr>
           <a:xfrm>
-            <a:off x="411480" y="5513832"/>
-            <a:ext cx="5669280" cy="768096"/>
+            <a:off x="411480" y="4601260"/>
+            <a:ext cx="5577840" cy="768096"/>
           </a:xfrm>
           <a:prstGeom prst="rect">
             <a:avLst/>
@@ -12225,9 +12110,9 @@
           <a:p>
             <a:pPr algn="l"/>
             <a:r>
-              <a:rPr sz="900" b="0" i="1">
-                <a:solidFill>
-                  <a:srgbClr val="B4BED6"/>
+              <a:rPr sz="850" b="0" i="1">
+                <a:solidFill>
+                  <a:srgbClr val="AAB4CC"/>
                 </a:solidFill>
                 <a:latin typeface="Georgia"/>
               </a:rPr>
@@ -12244,14 +12129,14 @@
         </p:nvSpPr>
         <p:spPr>
           <a:xfrm>
-            <a:off x="6455664" y="557784"/>
-            <a:ext cx="5468112" cy="5888736"/>
+            <a:off x="6483096" y="566928"/>
+            <a:ext cx="5394960" cy="6035040"/>
           </a:xfrm>
           <a:prstGeom prst="rect">
             <a:avLst/>
           </a:prstGeom>
           <a:solidFill>
-            <a:srgbClr val="040718"/>
+            <a:srgbClr val="030514"/>
           </a:solidFill>
           <a:ln>
             <a:noFill/>
@@ -12287,8 +12172,8 @@
         </p:nvSpPr>
         <p:spPr>
           <a:xfrm>
-            <a:off x="6364224" y="502920"/>
-            <a:ext cx="36576" cy="5888736"/>
+            <a:off x="6382512" y="502920"/>
+            <a:ext cx="36576" cy="6035040"/>
           </a:xfrm>
           <a:prstGeom prst="rect">
             <a:avLst/>
@@ -12324,7 +12209,7 @@
       </p:sp>
       <p:pic>
         <p:nvPicPr>
-          <p:cNvPr id="21" name="Picture 20" descr="wow_proof_timelines.jpg"/>
+          <p:cNvPr id="21" name="Picture 20" descr="hq_proof_timelines.jpg"/>
           <p:cNvPicPr>
             <a:picLocks noChangeAspect="1"/>
           </p:cNvPicPr>
@@ -12338,8 +12223,8 @@
         </p:blipFill>
         <p:spPr>
           <a:xfrm>
-            <a:off x="6400800" y="502920"/>
-            <a:ext cx="5468112" cy="5888736"/>
+            <a:off x="6419088" y="502920"/>
+            <a:ext cx="5394960" cy="6035040"/>
           </a:xfrm>
           <a:prstGeom prst="rect">
             <a:avLst/>
@@ -12354,8 +12239,8 @@
         </p:nvSpPr>
         <p:spPr>
           <a:xfrm>
-            <a:off x="6400800" y="6190488"/>
-            <a:ext cx="5468112" cy="201168"/>
+            <a:off x="6419088" y="6355079"/>
+            <a:ext cx="5394960" cy="182880"/>
           </a:xfrm>
           <a:prstGeom prst="rect">
             <a:avLst/>
@@ -12466,8 +12351,8 @@
         </p:nvSpPr>
         <p:spPr>
           <a:xfrm>
-            <a:off x="10698480" y="82296"/>
-            <a:ext cx="1371600" cy="219456"/>
+            <a:off x="10789920" y="73152"/>
+            <a:ext cx="1280160" cy="173736"/>
           </a:xfrm>
           <a:prstGeom prst="rect">
             <a:avLst/>
@@ -12484,11 +12369,11 @@
             <a:r>
               <a:rPr sz="750" b="1" i="0">
                 <a:solidFill>
-                  <a:srgbClr val="C9A84C"/>
-                </a:solidFill>
-                <a:latin typeface="Barlow Condensed"/>
-              </a:rPr>
-              <a:t>SLIDE 07  ·  08</a:t>
+                  <a:srgbClr val="0A0F2E"/>
+                </a:solidFill>
+                <a:latin typeface="Calibri"/>
+              </a:rPr>
+              <a:t>07  /  08</a:t>
             </a:r>
           </a:p>
         </p:txBody>
@@ -12508,7 +12393,7 @@
             <a:avLst/>
           </a:prstGeom>
           <a:solidFill>
-            <a:srgbClr val="080D28"/>
+            <a:srgbClr val="070B24"/>
           </a:solidFill>
           <a:ln>
             <a:noFill/>
@@ -12544,8 +12429,8 @@
         </p:nvSpPr>
         <p:spPr>
           <a:xfrm>
-            <a:off x="411480" y="6748272"/>
-            <a:ext cx="4572000" cy="182880"/>
+            <a:off x="411480" y="6744614"/>
+            <a:ext cx="5029200" cy="155448"/>
           </a:xfrm>
           <a:prstGeom prst="rect">
             <a:avLst/>
@@ -12564,7 +12449,7 @@
                 <a:solidFill>
                   <a:srgbClr val="C9A84C"/>
                 </a:solidFill>
-                <a:latin typeface="Barlow Condensed"/>
+                <a:latin typeface="Calibri"/>
               </a:rPr>
               <a:t>VaughnMartin  ·  READINESS OS</a:t>
             </a:r>
@@ -12579,8 +12464,8 @@
         </p:nvSpPr>
         <p:spPr>
           <a:xfrm>
-            <a:off x="7315200" y="6748272"/>
-            <a:ext cx="4663440" cy="182880"/>
+            <a:off x="7132320" y="6744614"/>
+            <a:ext cx="4937760" cy="155448"/>
           </a:xfrm>
           <a:prstGeom prst="rect">
             <a:avLst/>
@@ -12597,9 +12482,9 @@
             <a:r>
               <a:rPr sz="750" b="0" i="0">
                 <a:solidFill>
-                  <a:srgbClr val="B4BED6"/>
-                </a:solidFill>
-                <a:latin typeface="Barlow Condensed"/>
+                  <a:srgbClr val="AAB4CC"/>
+                </a:solidFill>
+                <a:latin typeface="Calibri"/>
               </a:rPr>
               <a:t>vaughnmartin.com/roi-calculator</a:t>
             </a:r>
@@ -12615,7 +12500,7 @@
         <p:spPr>
           <a:xfrm>
             <a:off x="411480" y="237744"/>
-            <a:ext cx="5669280" cy="201168"/>
+            <a:ext cx="5577840" cy="192024"/>
           </a:xfrm>
           <a:prstGeom prst="rect">
             <a:avLst/>
@@ -12634,7 +12519,7 @@
                 <a:solidFill>
                   <a:srgbClr val="C9A84C"/>
                 </a:solidFill>
-                <a:latin typeface="Barlow Condensed"/>
+                <a:latin typeface="Calibri"/>
               </a:rPr>
               <a:t>BUSINESS CASE</a:t>
             </a:r>
@@ -12650,7 +12535,7 @@
         <p:spPr>
           <a:xfrm>
             <a:off x="411480" y="475488"/>
-            <a:ext cx="5669280" cy="549656"/>
+            <a:ext cx="5577840" cy="487680"/>
           </a:xfrm>
           <a:prstGeom prst="rect">
             <a:avLst/>
@@ -12665,11 +12550,11 @@
           <a:p>
             <a:pPr algn="l"/>
             <a:r>
-              <a:rPr sz="3100" b="1" i="0">
+              <a:rPr sz="3000" b="1" i="0">
                 <a:solidFill>
                   <a:srgbClr val="FFFFFF"/>
                 </a:solidFill>
-                <a:latin typeface="Barlow Condensed"/>
+                <a:latin typeface="Calibri"/>
               </a:rPr>
               <a:t>A TRIVIAL REALLOCATION</a:t>
             </a:r>
@@ -12684,8 +12569,8 @@
         </p:nvSpPr>
         <p:spPr>
           <a:xfrm>
-            <a:off x="411480" y="979424"/>
-            <a:ext cx="5669280" cy="549656"/>
+            <a:off x="411480" y="963167"/>
+            <a:ext cx="5577840" cy="487680"/>
           </a:xfrm>
           <a:prstGeom prst="rect">
             <a:avLst/>
@@ -12700,11 +12585,11 @@
           <a:p>
             <a:pPr algn="l"/>
             <a:r>
-              <a:rPr sz="3100" b="1" i="0">
+              <a:rPr sz="3000" b="1" i="0">
                 <a:solidFill>
                   <a:srgbClr val="C9A84C"/>
                 </a:solidFill>
-                <a:latin typeface="Barlow Condensed"/>
+                <a:latin typeface="Calibri"/>
               </a:rPr>
               <a:t>OF EXISTING WASTE.</a:t>
             </a:r>
@@ -12719,8 +12604,8 @@
         </p:nvSpPr>
         <p:spPr>
           <a:xfrm>
-            <a:off x="411480" y="1792224"/>
-            <a:ext cx="5577840" cy="10972"/>
+            <a:off x="411480" y="1578864"/>
+            <a:ext cx="5486400" cy="9144"/>
           </a:xfrm>
           <a:prstGeom prst="rect">
             <a:avLst/>
@@ -12762,28 +12647,29 @@
         </p:nvSpPr>
         <p:spPr>
           <a:xfrm>
-            <a:off x="411480" y="1920240"/>
-            <a:ext cx="5669280" cy="365760"/>
-          </a:xfrm>
-          <a:prstGeom prst="rect">
-            <a:avLst/>
-          </a:prstGeom>
-          <a:noFill/>
-        </p:spPr>
-        <p:txBody>
-          <a:bodyPr wrap="square">
-            <a:spAutoFit/>
-          </a:bodyPr>
-          <a:lstStyle/>
-          <a:p>
-            <a:r>
-              <a:rPr sz="1150">
+            <a:off x="411480" y="1725472"/>
+            <a:ext cx="5577840" cy="365760"/>
+          </a:xfrm>
+          <a:prstGeom prst="rect">
+            <a:avLst/>
+          </a:prstGeom>
+          <a:noFill/>
+        </p:spPr>
+        <p:txBody>
+          <a:bodyPr wrap="square">
+            <a:spAutoFit/>
+          </a:bodyPr>
+          <a:lstStyle/>
+          <a:p>
+            <a:pPr algn="l"/>
+            <a:r>
+              <a:rPr sz="1050" b="0" i="0">
                 <a:solidFill>
                   <a:srgbClr val="FFFFFF"/>
                 </a:solidFill>
-                <a:latin typeface="Barlow Condensed"/>
-              </a:rPr>
-              <a:t>▶  Enterprises already burn millions on reactive, post-trigger consulting retainers</a:t>
+                <a:latin typeface="Calibri"/>
+              </a:rPr>
+              <a:t>▸  Enterprises already burn millions on reactive, post-trigger consulting retainers</a:t>
             </a:r>
           </a:p>
         </p:txBody>
@@ -12796,28 +12682,29 @@
         </p:nvSpPr>
         <p:spPr>
           <a:xfrm>
-            <a:off x="411480" y="2272284"/>
-            <a:ext cx="5669280" cy="365760"/>
-          </a:xfrm>
-          <a:prstGeom prst="rect">
-            <a:avLst/>
-          </a:prstGeom>
-          <a:noFill/>
-        </p:spPr>
-        <p:txBody>
-          <a:bodyPr wrap="square">
-            <a:spAutoFit/>
-          </a:bodyPr>
-          <a:lstStyle/>
-          <a:p>
-            <a:r>
-              <a:rPr sz="1150">
+            <a:off x="411480" y="2127808"/>
+            <a:ext cx="5577840" cy="365760"/>
+          </a:xfrm>
+          <a:prstGeom prst="rect">
+            <a:avLst/>
+          </a:prstGeom>
+          <a:noFill/>
+        </p:spPr>
+        <p:txBody>
+          <a:bodyPr wrap="square">
+            <a:spAutoFit/>
+          </a:bodyPr>
+          <a:lstStyle/>
+          <a:p>
+            <a:pPr algn="l"/>
+            <a:r>
+              <a:rPr sz="1050" b="0" i="0">
                 <a:solidFill>
                   <a:srgbClr val="FFFFFF"/>
                 </a:solidFill>
-                <a:latin typeface="Barlow Condensed"/>
-              </a:rPr>
-              <a:t>▶  Readiness OS converts panic-driven spend into repeatable software infrastructure</a:t>
+                <a:latin typeface="Calibri"/>
+              </a:rPr>
+              <a:t>▸  Readiness OS converts panic-driven spend into repeatable software infrastructure</a:t>
             </a:r>
           </a:p>
         </p:txBody>
@@ -12830,28 +12717,29 @@
         </p:nvSpPr>
         <p:spPr>
           <a:xfrm>
-            <a:off x="411480" y="2624328"/>
-            <a:ext cx="5669280" cy="365760"/>
-          </a:xfrm>
-          <a:prstGeom prst="rect">
-            <a:avLst/>
-          </a:prstGeom>
-          <a:noFill/>
-        </p:spPr>
-        <p:txBody>
-          <a:bodyPr wrap="square">
-            <a:spAutoFit/>
-          </a:bodyPr>
-          <a:lstStyle/>
-          <a:p>
-            <a:r>
-              <a:rPr sz="1150">
+            <a:off x="411480" y="2530144"/>
+            <a:ext cx="5577840" cy="365760"/>
+          </a:xfrm>
+          <a:prstGeom prst="rect">
+            <a:avLst/>
+          </a:prstGeom>
+          <a:noFill/>
+        </p:spPr>
+        <p:txBody>
+          <a:bodyPr wrap="square">
+            <a:spAutoFit/>
+          </a:bodyPr>
+          <a:lstStyle/>
+          <a:p>
+            <a:pPr algn="l"/>
+            <a:r>
+              <a:rPr sz="1050" b="0" i="0">
                 <a:solidFill>
                   <a:srgbClr val="FFFFFF"/>
                 </a:solidFill>
-                <a:latin typeface="Barlow Condensed"/>
-              </a:rPr>
-              <a:t>▶  We are not asking for net-new budget — we are replacing existing waste</a:t>
+                <a:latin typeface="Calibri"/>
+              </a:rPr>
+              <a:t>▸  Not asking for net-new budget — replacing existing waste with compounding ROI</a:t>
             </a:r>
           </a:p>
         </p:txBody>
@@ -12864,28 +12752,29 @@
         </p:nvSpPr>
         <p:spPr>
           <a:xfrm>
-            <a:off x="411480" y="2976372"/>
-            <a:ext cx="5669280" cy="365760"/>
-          </a:xfrm>
-          <a:prstGeom prst="rect">
-            <a:avLst/>
-          </a:prstGeom>
-          <a:noFill/>
-        </p:spPr>
-        <p:txBody>
-          <a:bodyPr wrap="square">
-            <a:spAutoFit/>
-          </a:bodyPr>
-          <a:lstStyle/>
-          <a:p>
-            <a:r>
-              <a:rPr sz="1150">
+            <a:off x="411480" y="2932480"/>
+            <a:ext cx="5577840" cy="365760"/>
+          </a:xfrm>
+          <a:prstGeom prst="rect">
+            <a:avLst/>
+          </a:prstGeom>
+          <a:noFill/>
+        </p:spPr>
+        <p:txBody>
+          <a:bodyPr wrap="square">
+            <a:spAutoFit/>
+          </a:bodyPr>
+          <a:lstStyle/>
+          <a:p>
+            <a:pPr algn="l"/>
+            <a:r>
+              <a:rPr sz="1050" b="0" i="0">
                 <a:solidFill>
                   <a:srgbClr val="FFFFFF"/>
                 </a:solidFill>
-                <a:latin typeface="Barlow Condensed"/>
-              </a:rPr>
-              <a:t>▶  Estimated $61.3M annual value for enterprises facing 3+ strategic triggers</a:t>
+                <a:latin typeface="Calibri"/>
+              </a:rPr>
+              <a:t>▸  Estimated $61.3M annual value for enterprises facing 3+ strategic triggers</a:t>
             </a:r>
           </a:p>
         </p:txBody>
@@ -12898,8 +12787,8 @@
         </p:nvSpPr>
         <p:spPr>
           <a:xfrm>
-            <a:off x="411480" y="3657600"/>
-            <a:ext cx="5669280" cy="201168"/>
+            <a:off x="411480" y="3462832"/>
+            <a:ext cx="5577840" cy="192024"/>
           </a:xfrm>
           <a:prstGeom prst="rect">
             <a:avLst/>
@@ -12918,9 +12807,9 @@
                 <a:solidFill>
                   <a:srgbClr val="C9A84C"/>
                 </a:solidFill>
-                <a:latin typeface="Barlow Condensed"/>
-              </a:rPr>
-              <a:t>PRICING — FOUNDED ON REALLOCATION LOGIC</a:t>
+                <a:latin typeface="Calibri"/>
+              </a:rPr>
+              <a:t>PRICING — REALLOCATION LOGIC</a:t>
             </a:r>
           </a:p>
         </p:txBody>
@@ -12933,8 +12822,8 @@
         </p:nvSpPr>
         <p:spPr>
           <a:xfrm>
-            <a:off x="411480" y="3858768"/>
-            <a:ext cx="1920240" cy="274320"/>
+            <a:off x="411480" y="3682288"/>
+            <a:ext cx="1892807" cy="256032"/>
           </a:xfrm>
           <a:prstGeom prst="rect">
             <a:avLst/>
@@ -12949,11 +12838,11 @@
           <a:p>
             <a:pPr algn="l"/>
             <a:r>
-              <a:rPr sz="1000" b="1" i="0">
+              <a:rPr sz="950" b="1" i="0">
                 <a:solidFill>
                   <a:srgbClr val="C9A84C"/>
                 </a:solidFill>
-                <a:latin typeface="Barlow Condensed"/>
+                <a:latin typeface="Calibri"/>
               </a:rPr>
               <a:t>Founding Partner</a:t>
             </a:r>
@@ -12968,8 +12857,8 @@
         </p:nvSpPr>
         <p:spPr>
           <a:xfrm>
-            <a:off x="2423160" y="3858768"/>
-            <a:ext cx="3657600" cy="274320"/>
+            <a:off x="2377440" y="3682288"/>
+            <a:ext cx="3520440" cy="256032"/>
           </a:xfrm>
           <a:prstGeom prst="rect">
             <a:avLst/>
@@ -12984,11 +12873,11 @@
           <a:p>
             <a:pPr algn="l"/>
             <a:r>
-              <a:rPr sz="1000" b="0" i="0">
-                <a:solidFill>
-                  <a:srgbClr val="B4BED6"/>
-                </a:solidFill>
-                <a:latin typeface="Barlow Condensed"/>
+              <a:rPr sz="950" b="0" i="0">
+                <a:solidFill>
+                  <a:srgbClr val="AAB4CC"/>
+                </a:solidFill>
+                <a:latin typeface="Calibri"/>
               </a:rPr>
               <a:t>$75K / 90-day validation  ·  12 seats  ·  Cohort forming now</a:t>
             </a:r>
@@ -13003,14 +12892,14 @@
         </p:nvSpPr>
         <p:spPr>
           <a:xfrm>
-            <a:off x="411480" y="4114800"/>
-            <a:ext cx="5577840" cy="10972"/>
+            <a:off x="411480" y="3938320"/>
+            <a:ext cx="5394960" cy="9144"/>
           </a:xfrm>
           <a:prstGeom prst="rect">
             <a:avLst/>
           </a:prstGeom>
           <a:solidFill>
-            <a:srgbClr val="101842"/>
+            <a:srgbClr val="0E163C"/>
           </a:solidFill>
           <a:ln>
             <a:noFill/>
@@ -13046,8 +12935,8 @@
         </p:nvSpPr>
         <p:spPr>
           <a:xfrm>
-            <a:off x="411480" y="4197096"/>
-            <a:ext cx="1920240" cy="274320"/>
+            <a:off x="411480" y="4029760"/>
+            <a:ext cx="1892807" cy="256032"/>
           </a:xfrm>
           <a:prstGeom prst="rect">
             <a:avLst/>
@@ -13062,11 +12951,11 @@
           <a:p>
             <a:pPr algn="l"/>
             <a:r>
-              <a:rPr sz="1000" b="1" i="0">
+              <a:rPr sz="950" b="1" i="0">
                 <a:solidFill>
                   <a:srgbClr val="C9A84C"/>
                 </a:solidFill>
-                <a:latin typeface="Barlow Condensed"/>
+                <a:latin typeface="Calibri"/>
               </a:rPr>
               <a:t>Growth</a:t>
             </a:r>
@@ -13081,8 +12970,8 @@
         </p:nvSpPr>
         <p:spPr>
           <a:xfrm>
-            <a:off x="2423160" y="4197096"/>
-            <a:ext cx="3657600" cy="274320"/>
+            <a:off x="2377440" y="4029760"/>
+            <a:ext cx="3520440" cy="256032"/>
           </a:xfrm>
           <a:prstGeom prst="rect">
             <a:avLst/>
@@ -13097,11 +12986,11 @@
           <a:p>
             <a:pPr algn="l"/>
             <a:r>
-              <a:rPr sz="1000" b="0" i="0">
-                <a:solidFill>
-                  <a:srgbClr val="B4BED6"/>
-                </a:solidFill>
-                <a:latin typeface="Barlow Condensed"/>
+              <a:rPr sz="950" b="0" i="0">
+                <a:solidFill>
+                  <a:srgbClr val="AAB4CC"/>
+                </a:solidFill>
+                <a:latin typeface="Calibri"/>
               </a:rPr>
               <a:t>$75K–$250K annually  ·  Replaces $400K–$800K consulting retainer</a:t>
             </a:r>
@@ -13116,14 +13005,14 @@
         </p:nvSpPr>
         <p:spPr>
           <a:xfrm>
-            <a:off x="411480" y="4453128"/>
-            <a:ext cx="5577840" cy="10972"/>
+            <a:off x="411480" y="4285792"/>
+            <a:ext cx="5394960" cy="9144"/>
           </a:xfrm>
           <a:prstGeom prst="rect">
             <a:avLst/>
           </a:prstGeom>
           <a:solidFill>
-            <a:srgbClr val="101842"/>
+            <a:srgbClr val="0E163C"/>
           </a:solidFill>
           <a:ln>
             <a:noFill/>
@@ -13159,8 +13048,8 @@
         </p:nvSpPr>
         <p:spPr>
           <a:xfrm>
-            <a:off x="411480" y="4535424"/>
-            <a:ext cx="1920240" cy="274320"/>
+            <a:off x="411480" y="4377232"/>
+            <a:ext cx="1892807" cy="256032"/>
           </a:xfrm>
           <a:prstGeom prst="rect">
             <a:avLst/>
@@ -13175,11 +13064,11 @@
           <a:p>
             <a:pPr algn="l"/>
             <a:r>
-              <a:rPr sz="1000" b="1" i="0">
+              <a:rPr sz="950" b="1" i="0">
                 <a:solidFill>
                   <a:srgbClr val="C9A84C"/>
                 </a:solidFill>
-                <a:latin typeface="Barlow Condensed"/>
+                <a:latin typeface="Calibri"/>
               </a:rPr>
               <a:t>Enterprise</a:t>
             </a:r>
@@ -13194,8 +13083,8 @@
         </p:nvSpPr>
         <p:spPr>
           <a:xfrm>
-            <a:off x="2423160" y="4535424"/>
-            <a:ext cx="3657600" cy="274320"/>
+            <a:off x="2377440" y="4377232"/>
+            <a:ext cx="3520440" cy="256032"/>
           </a:xfrm>
           <a:prstGeom prst="rect">
             <a:avLst/>
@@ -13210,13 +13099,13 @@
           <a:p>
             <a:pPr algn="l"/>
             <a:r>
-              <a:rPr sz="1000" b="0" i="0">
-                <a:solidFill>
-                  <a:srgbClr val="B4BED6"/>
-                </a:solidFill>
-                <a:latin typeface="Barlow Condensed"/>
-              </a:rPr>
-              <a:t>$250K+  ·  Microsoft stack integration  ·  Custom SLA</a:t>
+              <a:rPr sz="950" b="0" i="0">
+                <a:solidFill>
+                  <a:srgbClr val="AAB4CC"/>
+                </a:solidFill>
+                <a:latin typeface="Calibri"/>
+              </a:rPr>
+              <a:t>$250K+  ·  Microsoft integration  ·  Custom SLA</a:t>
             </a:r>
           </a:p>
         </p:txBody>
@@ -13229,14 +13118,14 @@
         </p:nvSpPr>
         <p:spPr>
           <a:xfrm>
-            <a:off x="411480" y="4791456"/>
-            <a:ext cx="5577840" cy="10972"/>
+            <a:off x="411480" y="4633264"/>
+            <a:ext cx="5394960" cy="9144"/>
           </a:xfrm>
           <a:prstGeom prst="rect">
             <a:avLst/>
           </a:prstGeom>
           <a:solidFill>
-            <a:srgbClr val="101842"/>
+            <a:srgbClr val="0E163C"/>
           </a:solidFill>
           <a:ln>
             <a:noFill/>
@@ -13272,14 +13161,14 @@
         </p:nvSpPr>
         <p:spPr>
           <a:xfrm>
-            <a:off x="411480" y="5449824"/>
-            <a:ext cx="5394960" cy="10972"/>
+            <a:off x="411480" y="4889296"/>
+            <a:ext cx="5303520" cy="9144"/>
           </a:xfrm>
           <a:prstGeom prst="rect">
             <a:avLst/>
           </a:prstGeom>
           <a:solidFill>
-            <a:srgbClr val="A08230"/>
+            <a:srgbClr val="9A7E2C"/>
           </a:solidFill>
           <a:ln>
             <a:noFill/>
@@ -13315,8 +13204,8 @@
         </p:nvSpPr>
         <p:spPr>
           <a:xfrm>
-            <a:off x="411480" y="5513832"/>
-            <a:ext cx="5669280" cy="768096"/>
+            <a:off x="411480" y="4953304"/>
+            <a:ext cx="5577840" cy="768096"/>
           </a:xfrm>
           <a:prstGeom prst="rect">
             <a:avLst/>
@@ -13331,13 +13220,13 @@
           <a:p>
             <a:pPr algn="l"/>
             <a:r>
-              <a:rPr sz="900" b="0" i="1">
-                <a:solidFill>
-                  <a:srgbClr val="B4BED6"/>
+              <a:rPr sz="850" b="0" i="1">
+                <a:solidFill>
+                  <a:srgbClr val="AAB4CC"/>
                 </a:solidFill>
                 <a:latin typeface="Georgia"/>
               </a:rPr>
-              <a:t>"We are not asking CFOs to find net-new budget in a tight economy. We are converting that wasteful, panic-driven spend into repeatable software infrastructure that generates immediate, compounding ROI."</a:t>
+              <a:t>"We are not asking CFOs to find net-new budget. We are converting panic-driven spend into repeatable software infrastructure that generates immediate, compounding ROI."</a:t>
             </a:r>
           </a:p>
         </p:txBody>
@@ -13350,14 +13239,14 @@
         </p:nvSpPr>
         <p:spPr>
           <a:xfrm>
-            <a:off x="6455664" y="557784"/>
-            <a:ext cx="5468112" cy="5888736"/>
+            <a:off x="6483096" y="566928"/>
+            <a:ext cx="5394960" cy="6035040"/>
           </a:xfrm>
           <a:prstGeom prst="rect">
             <a:avLst/>
           </a:prstGeom>
           <a:solidFill>
-            <a:srgbClr val="040718"/>
+            <a:srgbClr val="030514"/>
           </a:solidFill>
           <a:ln>
             <a:noFill/>
@@ -13393,8 +13282,8 @@
         </p:nvSpPr>
         <p:spPr>
           <a:xfrm>
-            <a:off x="6364224" y="502920"/>
-            <a:ext cx="36576" cy="5888736"/>
+            <a:off x="6382512" y="502920"/>
+            <a:ext cx="36576" cy="6035040"/>
           </a:xfrm>
           <a:prstGeom prst="rect">
             <a:avLst/>
@@ -13430,7 +13319,7 @@
       </p:sp>
       <p:pic>
         <p:nvPicPr>
-          <p:cNvPr id="29" name="Picture 28" descr="wow_roi_results.jpg"/>
+          <p:cNvPr id="29" name="Picture 28" descr="hq_roi_results.jpg"/>
           <p:cNvPicPr>
             <a:picLocks noChangeAspect="1"/>
           </p:cNvPicPr>
@@ -13444,8 +13333,8 @@
         </p:blipFill>
         <p:spPr>
           <a:xfrm>
-            <a:off x="6400800" y="502920"/>
-            <a:ext cx="5468112" cy="5888736"/>
+            <a:off x="6419088" y="502920"/>
+            <a:ext cx="5394960" cy="6035040"/>
           </a:xfrm>
           <a:prstGeom prst="rect">
             <a:avLst/>
@@ -13460,8 +13349,8 @@
         </p:nvSpPr>
         <p:spPr>
           <a:xfrm>
-            <a:off x="6400800" y="6190488"/>
-            <a:ext cx="5468112" cy="201168"/>
+            <a:off x="6419088" y="6355079"/>
+            <a:ext cx="5394960" cy="182880"/>
           </a:xfrm>
           <a:prstGeom prst="rect">
             <a:avLst/>
@@ -13572,8 +13461,8 @@
         </p:nvSpPr>
         <p:spPr>
           <a:xfrm>
-            <a:off x="10698480" y="82296"/>
-            <a:ext cx="1371600" cy="219456"/>
+            <a:off x="10789920" y="73152"/>
+            <a:ext cx="1280160" cy="173736"/>
           </a:xfrm>
           <a:prstGeom prst="rect">
             <a:avLst/>
@@ -13590,11 +13479,11 @@
             <a:r>
               <a:rPr sz="750" b="1" i="0">
                 <a:solidFill>
-                  <a:srgbClr val="C9A84C"/>
-                </a:solidFill>
-                <a:latin typeface="Barlow Condensed"/>
-              </a:rPr>
-              <a:t>SLIDE 08  ·  08</a:t>
+                  <a:srgbClr val="0A0F2E"/>
+                </a:solidFill>
+                <a:latin typeface="Calibri"/>
+              </a:rPr>
+              <a:t>08  /  08</a:t>
             </a:r>
           </a:p>
         </p:txBody>
@@ -13614,7 +13503,7 @@
             <a:avLst/>
           </a:prstGeom>
           <a:solidFill>
-            <a:srgbClr val="080D28"/>
+            <a:srgbClr val="070B24"/>
           </a:solidFill>
           <a:ln>
             <a:noFill/>
@@ -13650,8 +13539,8 @@
         </p:nvSpPr>
         <p:spPr>
           <a:xfrm>
-            <a:off x="411480" y="6748272"/>
-            <a:ext cx="4572000" cy="182880"/>
+            <a:off x="411480" y="6744614"/>
+            <a:ext cx="5029200" cy="155448"/>
           </a:xfrm>
           <a:prstGeom prst="rect">
             <a:avLst/>
@@ -13670,7 +13559,7 @@
                 <a:solidFill>
                   <a:srgbClr val="C9A84C"/>
                 </a:solidFill>
-                <a:latin typeface="Barlow Condensed"/>
+                <a:latin typeface="Calibri"/>
               </a:rPr>
               <a:t>VaughnMartin  ·  READINESS OS</a:t>
             </a:r>
@@ -13685,8 +13574,8 @@
         </p:nvSpPr>
         <p:spPr>
           <a:xfrm>
-            <a:off x="7315200" y="6748272"/>
-            <a:ext cx="4663440" cy="182880"/>
+            <a:off x="7132320" y="6744614"/>
+            <a:ext cx="4937760" cy="155448"/>
           </a:xfrm>
           <a:prstGeom prst="rect">
             <a:avLst/>
@@ -13703,9 +13592,9 @@
             <a:r>
               <a:rPr sz="750" b="0" i="0">
                 <a:solidFill>
-                  <a:srgbClr val="B4BED6"/>
-                </a:solidFill>
-                <a:latin typeface="Barlow Condensed"/>
+                  <a:srgbClr val="AAB4CC"/>
+                </a:solidFill>
+                <a:latin typeface="Calibri"/>
               </a:rPr>
               <a:t>vaughnmartin.com/founding-partner-program</a:t>
             </a:r>
@@ -13721,7 +13610,7 @@
         <p:spPr>
           <a:xfrm>
             <a:off x="411480" y="237744"/>
-            <a:ext cx="5669280" cy="201168"/>
+            <a:ext cx="5577840" cy="192024"/>
           </a:xfrm>
           <a:prstGeom prst="rect">
             <a:avLst/>
@@ -13740,7 +13629,7 @@
                 <a:solidFill>
                   <a:srgbClr val="C9A84C"/>
                 </a:solidFill>
-                <a:latin typeface="Barlow Condensed"/>
+                <a:latin typeface="Calibri"/>
               </a:rPr>
               <a:t>THE ASK</a:t>
             </a:r>
@@ -13756,7 +13645,7 @@
         <p:spPr>
           <a:xfrm>
             <a:off x="411480" y="475488"/>
-            <a:ext cx="5669280" cy="387096"/>
+            <a:ext cx="5577840" cy="325120"/>
           </a:xfrm>
           <a:prstGeom prst="rect">
             <a:avLst/>
@@ -13771,11 +13660,11 @@
           <a:p>
             <a:pPr algn="l"/>
             <a:r>
-              <a:rPr sz="2100" b="1" i="0">
+              <a:rPr sz="2000" b="1" i="0">
                 <a:solidFill>
                   <a:srgbClr val="C9A84C"/>
                 </a:solidFill>
-                <a:latin typeface="Barlow Condensed"/>
+                <a:latin typeface="Calibri"/>
               </a:rPr>
               <a:t>CATEGORY CREATION:</a:t>
             </a:r>
@@ -13790,8 +13679,8 @@
         </p:nvSpPr>
         <p:spPr>
           <a:xfrm>
-            <a:off x="411480" y="816864"/>
-            <a:ext cx="5669280" cy="549656"/>
+            <a:off x="411480" y="800608"/>
+            <a:ext cx="5577840" cy="487680"/>
           </a:xfrm>
           <a:prstGeom prst="rect">
             <a:avLst/>
@@ -13806,11 +13695,11 @@
           <a:p>
             <a:pPr algn="l"/>
             <a:r>
-              <a:rPr sz="3100" b="1" i="0">
+              <a:rPr sz="3000" b="1" i="0">
                 <a:solidFill>
                   <a:srgbClr val="FFFFFF"/>
                 </a:solidFill>
-                <a:latin typeface="Barlow Condensed"/>
+                <a:latin typeface="Calibri"/>
               </a:rPr>
               <a:t>PREPARATION INFRASTRUCTURE</a:t>
             </a:r>
@@ -13825,8 +13714,8 @@
         </p:nvSpPr>
         <p:spPr>
           <a:xfrm>
-            <a:off x="411480" y="1810512"/>
-            <a:ext cx="5577840" cy="10972"/>
+            <a:off x="411480" y="1416304"/>
+            <a:ext cx="5486400" cy="9144"/>
           </a:xfrm>
           <a:prstGeom prst="rect">
             <a:avLst/>
@@ -13868,28 +13757,29 @@
         </p:nvSpPr>
         <p:spPr>
           <a:xfrm>
-            <a:off x="411480" y="1956816"/>
-            <a:ext cx="5669280" cy="365760"/>
-          </a:xfrm>
-          <a:prstGeom prst="rect">
-            <a:avLst/>
-          </a:prstGeom>
-          <a:noFill/>
-        </p:spPr>
-        <p:txBody>
-          <a:bodyPr wrap="square">
-            <a:spAutoFit/>
-          </a:bodyPr>
-          <a:lstStyle/>
-          <a:p>
-            <a:r>
-              <a:rPr sz="1200">
+            <a:off x="411480" y="1562709"/>
+            <a:ext cx="5577840" cy="365760"/>
+          </a:xfrm>
+          <a:prstGeom prst="rect">
+            <a:avLst/>
+          </a:prstGeom>
+          <a:noFill/>
+        </p:spPr>
+        <p:txBody>
+          <a:bodyPr wrap="square">
+            <a:spAutoFit/>
+          </a:bodyPr>
+          <a:lstStyle/>
+          <a:p>
+            <a:pPr algn="l"/>
+            <a:r>
+              <a:rPr sz="1050" b="0" i="0">
                 <a:solidFill>
                   <a:srgbClr val="FFFFFF"/>
                 </a:solidFill>
-                <a:latin typeface="Barlow Condensed"/>
-              </a:rPr>
-              <a:t>▶  Raising: Up to $1,000,000</a:t>
+                <a:latin typeface="Calibri"/>
+              </a:rPr>
+              <a:t>▸  Raising: Up to $1,000,000</a:t>
             </a:r>
           </a:p>
         </p:txBody>
@@ -13902,28 +13792,29 @@
         </p:nvSpPr>
         <p:spPr>
           <a:xfrm>
-            <a:off x="411480" y="2308860"/>
-            <a:ext cx="5669280" cy="365760"/>
-          </a:xfrm>
-          <a:prstGeom prst="rect">
-            <a:avLst/>
-          </a:prstGeom>
-          <a:noFill/>
-        </p:spPr>
-        <p:txBody>
-          <a:bodyPr wrap="square">
-            <a:spAutoFit/>
-          </a:bodyPr>
-          <a:lstStyle/>
-          <a:p>
-            <a:r>
-              <a:rPr sz="1200">
+            <a:off x="411480" y="1965045"/>
+            <a:ext cx="5577840" cy="365760"/>
+          </a:xfrm>
+          <a:prstGeom prst="rect">
+            <a:avLst/>
+          </a:prstGeom>
+          <a:noFill/>
+        </p:spPr>
+        <p:txBody>
+          <a:bodyPr wrap="square">
+            <a:spAutoFit/>
+          </a:bodyPr>
+          <a:lstStyle/>
+          <a:p>
+            <a:pPr algn="l"/>
+            <a:r>
+              <a:rPr sz="1050" b="0" i="0">
                 <a:solidFill>
                   <a:srgbClr val="FFFFFF"/>
                 </a:solidFill>
-                <a:latin typeface="Barlow Condensed"/>
-              </a:rPr>
-              <a:t>▶  Product hardening + enterprise-grade access controls</a:t>
+                <a:latin typeface="Calibri"/>
+              </a:rPr>
+              <a:t>▸  Product hardening + enterprise-grade access controls</a:t>
             </a:r>
           </a:p>
         </p:txBody>
@@ -13936,28 +13827,29 @@
         </p:nvSpPr>
         <p:spPr>
           <a:xfrm>
-            <a:off x="411480" y="2660904"/>
-            <a:ext cx="5669280" cy="365760"/>
-          </a:xfrm>
-          <a:prstGeom prst="rect">
-            <a:avLst/>
-          </a:prstGeom>
-          <a:noFill/>
-        </p:spPr>
-        <p:txBody>
-          <a:bodyPr wrap="square">
-            <a:spAutoFit/>
-          </a:bodyPr>
-          <a:lstStyle/>
-          <a:p>
-            <a:r>
-              <a:rPr sz="1200">
+            <a:off x="411480" y="2367381"/>
+            <a:ext cx="5577840" cy="365760"/>
+          </a:xfrm>
+          <a:prstGeom prst="rect">
+            <a:avLst/>
+          </a:prstGeom>
+          <a:noFill/>
+        </p:spPr>
+        <p:txBody>
+          <a:bodyPr wrap="square">
+            <a:spAutoFit/>
+          </a:bodyPr>
+          <a:lstStyle/>
+          <a:p>
+            <a:pPr algn="l"/>
+            <a:r>
+              <a:rPr sz="1050" b="0" i="0">
                 <a:solidFill>
                   <a:srgbClr val="FFFFFF"/>
                 </a:solidFill>
-                <a:latin typeface="Barlow Condensed"/>
-              </a:rPr>
-              <a:t>▶  Founding Partner conversions + repeatable GTM motion</a:t>
+                <a:latin typeface="Calibri"/>
+              </a:rPr>
+              <a:t>▸  Founding Partner conversions + repeatable GTM motion</a:t>
             </a:r>
           </a:p>
         </p:txBody>
@@ -13970,28 +13862,29 @@
         </p:nvSpPr>
         <p:spPr>
           <a:xfrm>
-            <a:off x="411480" y="3012948"/>
-            <a:ext cx="5669280" cy="365760"/>
-          </a:xfrm>
-          <a:prstGeom prst="rect">
-            <a:avLst/>
-          </a:prstGeom>
-          <a:noFill/>
-        </p:spPr>
-        <p:txBody>
-          <a:bodyPr wrap="square">
-            <a:spAutoFit/>
-          </a:bodyPr>
-          <a:lstStyle/>
-          <a:p>
-            <a:r>
-              <a:rPr sz="1200">
+            <a:off x="411480" y="2769717"/>
+            <a:ext cx="5577840" cy="365760"/>
+          </a:xfrm>
+          <a:prstGeom prst="rect">
+            <a:avLst/>
+          </a:prstGeom>
+          <a:noFill/>
+        </p:spPr>
+        <p:txBody>
+          <a:bodyPr wrap="square">
+            <a:spAutoFit/>
+          </a:bodyPr>
+          <a:lstStyle/>
+          <a:p>
+            <a:pPr algn="l"/>
+            <a:r>
+              <a:rPr sz="1050" b="0" i="0">
                 <a:solidFill>
                   <a:srgbClr val="FFFFFF"/>
                 </a:solidFill>
-                <a:latin typeface="Barlow Condensed"/>
-              </a:rPr>
-              <a:t>▶  Microsoft integration certification</a:t>
+                <a:latin typeface="Calibri"/>
+              </a:rPr>
+              <a:t>▸  Microsoft integration certification</a:t>
             </a:r>
           </a:p>
         </p:txBody>
@@ -14004,14 +13897,14 @@
         </p:nvSpPr>
         <p:spPr>
           <a:xfrm>
-            <a:off x="411480" y="3127248"/>
-            <a:ext cx="5596128" cy="420624"/>
+            <a:off x="411480" y="3300069"/>
+            <a:ext cx="5577840" cy="384048"/>
           </a:xfrm>
           <a:prstGeom prst="rect">
             <a:avLst/>
           </a:prstGeom>
           <a:solidFill>
-            <a:srgbClr val="1A2452"/>
+            <a:srgbClr val="182250"/>
           </a:solidFill>
           <a:ln>
             <a:noFill/>
@@ -14047,8 +13940,8 @@
         </p:nvSpPr>
         <p:spPr>
           <a:xfrm>
-            <a:off x="411480" y="3127248"/>
-            <a:ext cx="5596128" cy="23774"/>
+            <a:off x="411480" y="3300069"/>
+            <a:ext cx="5577840" cy="20116"/>
           </a:xfrm>
           <a:prstGeom prst="rect">
             <a:avLst/>
@@ -14090,8 +13983,8 @@
         </p:nvSpPr>
         <p:spPr>
           <a:xfrm>
-            <a:off x="548640" y="3163824"/>
-            <a:ext cx="5449824" cy="329184"/>
+            <a:off x="530352" y="3382365"/>
+            <a:ext cx="5431536" cy="237744"/>
           </a:xfrm>
           <a:prstGeom prst="rect">
             <a:avLst/>
@@ -14106,27 +13999,97 @@
           <a:p>
             <a:pPr algn="l"/>
             <a:r>
+              <a:rPr sz="900" b="1" i="0">
+                <a:solidFill>
+                  <a:srgbClr val="C9A84C"/>
+                </a:solidFill>
+                <a:latin typeface="Calibri"/>
+              </a:rPr>
+              <a:t>FOUNDING PARTNER COHORT  ·  12 SEATS  ·  FORMING NOW  ·  LIMITED AVAILABILITY</a:t>
+            </a:r>
+          </a:p>
+        </p:txBody>
+      </p:sp>
+      <p:sp>
+        <p:nvSpPr>
+          <p:cNvPr id="18" name="TextBox 17"/>
+          <p:cNvSpPr txBox="1"/>
+          <p:nvPr/>
+        </p:nvSpPr>
+        <p:spPr>
+          <a:xfrm>
+            <a:off x="411480" y="3812133"/>
+            <a:ext cx="5577840" cy="192024"/>
+          </a:xfrm>
+          <a:prstGeom prst="rect">
+            <a:avLst/>
+          </a:prstGeom>
+          <a:noFill/>
+        </p:spPr>
+        <p:txBody>
+          <a:bodyPr wrap="square">
+            <a:spAutoFit/>
+          </a:bodyPr>
+          <a:lstStyle/>
+          <a:p>
+            <a:pPr algn="l"/>
+            <a:r>
+              <a:rPr sz="800" b="1" i="0">
+                <a:solidFill>
+                  <a:srgbClr val="C9A84C"/>
+                </a:solidFill>
+                <a:latin typeface="Calibri"/>
+              </a:rPr>
+              <a:t>18-MONTH RUNWAY TO SERIES A</a:t>
+            </a:r>
+          </a:p>
+        </p:txBody>
+      </p:sp>
+      <p:sp>
+        <p:nvSpPr>
+          <p:cNvPr id="19" name="TextBox 18"/>
+          <p:cNvSpPr txBox="1"/>
+          <p:nvPr/>
+        </p:nvSpPr>
+        <p:spPr>
+          <a:xfrm>
+            <a:off x="411480" y="4031589"/>
+            <a:ext cx="749808" cy="256032"/>
+          </a:xfrm>
+          <a:prstGeom prst="rect">
+            <a:avLst/>
+          </a:prstGeom>
+          <a:noFill/>
+        </p:spPr>
+        <p:txBody>
+          <a:bodyPr wrap="square">
+            <a:spAutoFit/>
+          </a:bodyPr>
+          <a:lstStyle/>
+          <a:p>
+            <a:pPr algn="l"/>
+            <a:r>
               <a:rPr sz="950" b="1" i="0">
                 <a:solidFill>
                   <a:srgbClr val="C9A84C"/>
                 </a:solidFill>
-                <a:latin typeface="Barlow Condensed"/>
-              </a:rPr>
-              <a:t>FOUNDING PARTNER COHORT  ·  12 SEATS  ·  FORMING NOW  ·  LIMITED AVAILABILITY</a:t>
-            </a:r>
-          </a:p>
-        </p:txBody>
-      </p:sp>
-      <p:sp>
-        <p:nvSpPr>
-          <p:cNvPr id="18" name="TextBox 17"/>
-          <p:cNvSpPr txBox="1"/>
-          <p:nvPr/>
-        </p:nvSpPr>
-        <p:spPr>
-          <a:xfrm>
-            <a:off x="411480" y="3675887"/>
-            <a:ext cx="5669280" cy="201168"/>
+                <a:latin typeface="Calibri"/>
+              </a:rPr>
+              <a:t>Mo. 6</a:t>
+            </a:r>
+          </a:p>
+        </p:txBody>
+      </p:sp>
+      <p:sp>
+        <p:nvSpPr>
+          <p:cNvPr id="20" name="TextBox 19"/>
+          <p:cNvSpPr txBox="1"/>
+          <p:nvPr/>
+        </p:nvSpPr>
+        <p:spPr>
+          <a:xfrm>
+            <a:off x="1234440" y="4031589"/>
+            <a:ext cx="4663440" cy="256032"/>
           </a:xfrm>
           <a:prstGeom prst="rect">
             <a:avLst/>
@@ -14141,81 +14104,11 @@
           <a:p>
             <a:pPr algn="l"/>
             <a:r>
-              <a:rPr sz="800" b="1" i="0">
-                <a:solidFill>
-                  <a:srgbClr val="C9A84C"/>
-                </a:solidFill>
-                <a:latin typeface="Barlow Condensed"/>
-              </a:rPr>
-              <a:t>18-MONTH RUNWAY TO SERIES A</a:t>
-            </a:r>
-          </a:p>
-        </p:txBody>
-      </p:sp>
-      <p:sp>
-        <p:nvSpPr>
-          <p:cNvPr id="19" name="TextBox 18"/>
-          <p:cNvSpPr txBox="1"/>
-          <p:nvPr/>
-        </p:nvSpPr>
-        <p:spPr>
-          <a:xfrm>
-            <a:off x="411480" y="3877056"/>
-            <a:ext cx="914400" cy="274320"/>
-          </a:xfrm>
-          <a:prstGeom prst="rect">
-            <a:avLst/>
-          </a:prstGeom>
-          <a:noFill/>
-        </p:spPr>
-        <p:txBody>
-          <a:bodyPr wrap="square">
-            <a:spAutoFit/>
-          </a:bodyPr>
-          <a:lstStyle/>
-          <a:p>
-            <a:pPr algn="l"/>
-            <a:r>
-              <a:rPr sz="1000" b="1" i="0">
-                <a:solidFill>
-                  <a:srgbClr val="C9A84C"/>
-                </a:solidFill>
-                <a:latin typeface="Barlow Condensed"/>
-              </a:rPr>
-              <a:t>Mo. 6</a:t>
-            </a:r>
-          </a:p>
-        </p:txBody>
-      </p:sp>
-      <p:sp>
-        <p:nvSpPr>
-          <p:cNvPr id="20" name="TextBox 19"/>
-          <p:cNvSpPr txBox="1"/>
-          <p:nvPr/>
-        </p:nvSpPr>
-        <p:spPr>
-          <a:xfrm>
-            <a:off x="1417320" y="3877056"/>
-            <a:ext cx="4663440" cy="274320"/>
-          </a:xfrm>
-          <a:prstGeom prst="rect">
-            <a:avLst/>
-          </a:prstGeom>
-          <a:noFill/>
-        </p:spPr>
-        <p:txBody>
-          <a:bodyPr wrap="square">
-            <a:spAutoFit/>
-          </a:bodyPr>
-          <a:lstStyle/>
-          <a:p>
-            <a:pPr algn="l"/>
-            <a:r>
-              <a:rPr sz="1000" b="0" i="0">
-                <a:solidFill>
-                  <a:srgbClr val="B4BED6"/>
-                </a:solidFill>
-                <a:latin typeface="Barlow Condensed"/>
+              <a:rPr sz="950" b="0" i="0">
+                <a:solidFill>
+                  <a:srgbClr val="AAB4CC"/>
+                </a:solidFill>
+                <a:latin typeface="Calibri"/>
               </a:rPr>
               <a:t>3 Founding Partners on recurring contracts</a:t>
             </a:r>
@@ -14230,14 +14123,14 @@
         </p:nvSpPr>
         <p:spPr>
           <a:xfrm>
-            <a:off x="411480" y="4133088"/>
-            <a:ext cx="5577840" cy="10972"/>
+            <a:off x="411480" y="4287621"/>
+            <a:ext cx="5394960" cy="9144"/>
           </a:xfrm>
           <a:prstGeom prst="rect">
             <a:avLst/>
           </a:prstGeom>
           <a:solidFill>
-            <a:srgbClr val="101842"/>
+            <a:srgbClr val="0E163C"/>
           </a:solidFill>
           <a:ln>
             <a:noFill/>
@@ -14273,8 +14166,8 @@
         </p:nvSpPr>
         <p:spPr>
           <a:xfrm>
-            <a:off x="411480" y="4215384"/>
-            <a:ext cx="914400" cy="274320"/>
+            <a:off x="411480" y="4379061"/>
+            <a:ext cx="749808" cy="256032"/>
           </a:xfrm>
           <a:prstGeom prst="rect">
             <a:avLst/>
@@ -14289,11 +14182,11 @@
           <a:p>
             <a:pPr algn="l"/>
             <a:r>
-              <a:rPr sz="1000" b="1" i="0">
+              <a:rPr sz="950" b="1" i="0">
                 <a:solidFill>
                   <a:srgbClr val="C9A84C"/>
                 </a:solidFill>
-                <a:latin typeface="Barlow Condensed"/>
+                <a:latin typeface="Calibri"/>
               </a:rPr>
               <a:t>Mo. 9</a:t>
             </a:r>
@@ -14308,8 +14201,8 @@
         </p:nvSpPr>
         <p:spPr>
           <a:xfrm>
-            <a:off x="1417320" y="4215384"/>
-            <a:ext cx="4663440" cy="274320"/>
+            <a:off x="1234440" y="4379061"/>
+            <a:ext cx="4663440" cy="256032"/>
           </a:xfrm>
           <a:prstGeom prst="rect">
             <a:avLst/>
@@ -14324,11 +14217,11 @@
           <a:p>
             <a:pPr algn="l"/>
             <a:r>
-              <a:rPr sz="1000" b="0" i="0">
-                <a:solidFill>
-                  <a:srgbClr val="B4BED6"/>
-                </a:solidFill>
-                <a:latin typeface="Barlow Condensed"/>
+              <a:rPr sz="950" b="0" i="0">
+                <a:solidFill>
+                  <a:srgbClr val="AAB4CC"/>
+                </a:solidFill>
+                <a:latin typeface="Calibri"/>
               </a:rPr>
               <a:t>Enterprise controls complete  ·  Microsoft integration certified</a:t>
             </a:r>
@@ -14343,14 +14236,14 @@
         </p:nvSpPr>
         <p:spPr>
           <a:xfrm>
-            <a:off x="411480" y="4471416"/>
-            <a:ext cx="5577840" cy="10972"/>
+            <a:off x="411480" y="4635093"/>
+            <a:ext cx="5394960" cy="9144"/>
           </a:xfrm>
           <a:prstGeom prst="rect">
             <a:avLst/>
           </a:prstGeom>
           <a:solidFill>
-            <a:srgbClr val="101842"/>
+            <a:srgbClr val="0E163C"/>
           </a:solidFill>
           <a:ln>
             <a:noFill/>
@@ -14386,8 +14279,8 @@
         </p:nvSpPr>
         <p:spPr>
           <a:xfrm>
-            <a:off x="411480" y="4553712"/>
-            <a:ext cx="914400" cy="274320"/>
+            <a:off x="411480" y="4726533"/>
+            <a:ext cx="749808" cy="256032"/>
           </a:xfrm>
           <a:prstGeom prst="rect">
             <a:avLst/>
@@ -14402,11 +14295,11 @@
           <a:p>
             <a:pPr algn="l"/>
             <a:r>
-              <a:rPr sz="1000" b="1" i="0">
+              <a:rPr sz="950" b="1" i="0">
                 <a:solidFill>
                   <a:srgbClr val="C9A84C"/>
                 </a:solidFill>
-                <a:latin typeface="Barlow Condensed"/>
+                <a:latin typeface="Calibri"/>
               </a:rPr>
               <a:t>Mo. 12</a:t>
             </a:r>
@@ -14421,8 +14314,8 @@
         </p:nvSpPr>
         <p:spPr>
           <a:xfrm>
-            <a:off x="1417320" y="4553712"/>
-            <a:ext cx="4663440" cy="274320"/>
+            <a:off x="1234440" y="4726533"/>
+            <a:ext cx="4663440" cy="256032"/>
           </a:xfrm>
           <a:prstGeom prst="rect">
             <a:avLst/>
@@ -14437,11 +14330,11 @@
           <a:p>
             <a:pPr algn="l"/>
             <a:r>
-              <a:rPr sz="1000" b="0" i="0">
-                <a:solidFill>
-                  <a:srgbClr val="B4BED6"/>
-                </a:solidFill>
-                <a:latin typeface="Barlow Condensed"/>
+              <a:rPr sz="950" b="0" i="0">
+                <a:solidFill>
+                  <a:srgbClr val="AAB4CC"/>
+                </a:solidFill>
+                <a:latin typeface="Calibri"/>
               </a:rPr>
               <a:t>Repeatable GTM with documented proof stories</a:t>
             </a:r>
@@ -14456,14 +14349,14 @@
         </p:nvSpPr>
         <p:spPr>
           <a:xfrm>
-            <a:off x="411480" y="4809744"/>
-            <a:ext cx="5577840" cy="10972"/>
+            <a:off x="411480" y="4982565"/>
+            <a:ext cx="5394960" cy="9144"/>
           </a:xfrm>
           <a:prstGeom prst="rect">
             <a:avLst/>
           </a:prstGeom>
           <a:solidFill>
-            <a:srgbClr val="101842"/>
+            <a:srgbClr val="0E163C"/>
           </a:solidFill>
           <a:ln>
             <a:noFill/>
@@ -14499,8 +14392,8 @@
         </p:nvSpPr>
         <p:spPr>
           <a:xfrm>
-            <a:off x="411480" y="4892040"/>
-            <a:ext cx="914400" cy="274320"/>
+            <a:off x="411480" y="5074005"/>
+            <a:ext cx="749808" cy="256032"/>
           </a:xfrm>
           <a:prstGeom prst="rect">
             <a:avLst/>
@@ -14515,11 +14408,11 @@
           <a:p>
             <a:pPr algn="l"/>
             <a:r>
-              <a:rPr sz="1000" b="1" i="0">
+              <a:rPr sz="950" b="1" i="0">
                 <a:solidFill>
                   <a:srgbClr val="C9A84C"/>
                 </a:solidFill>
-                <a:latin typeface="Barlow Condensed"/>
+                <a:latin typeface="Calibri"/>
               </a:rPr>
               <a:t>Mo. 18</a:t>
             </a:r>
@@ -14534,8 +14427,8 @@
         </p:nvSpPr>
         <p:spPr>
           <a:xfrm>
-            <a:off x="1417320" y="4892040"/>
-            <a:ext cx="4663440" cy="274320"/>
+            <a:off x="1234440" y="5074005"/>
+            <a:ext cx="4663440" cy="256032"/>
           </a:xfrm>
           <a:prstGeom prst="rect">
             <a:avLst/>
@@ -14550,11 +14443,11 @@
           <a:p>
             <a:pPr algn="l"/>
             <a:r>
-              <a:rPr sz="1000" b="0" i="0">
-                <a:solidFill>
-                  <a:srgbClr val="B4BED6"/>
-                </a:solidFill>
-                <a:latin typeface="Barlow Condensed"/>
+              <a:rPr sz="950" b="0" i="0">
+                <a:solidFill>
+                  <a:srgbClr val="AAB4CC"/>
+                </a:solidFill>
+                <a:latin typeface="Calibri"/>
               </a:rPr>
               <a:t>Category established  ·  Series A ready</a:t>
             </a:r>
@@ -14569,14 +14462,14 @@
         </p:nvSpPr>
         <p:spPr>
           <a:xfrm>
-            <a:off x="411480" y="5148072"/>
-            <a:ext cx="5577840" cy="10972"/>
+            <a:off x="411480" y="5330037"/>
+            <a:ext cx="5394960" cy="9144"/>
           </a:xfrm>
           <a:prstGeom prst="rect">
             <a:avLst/>
           </a:prstGeom>
           <a:solidFill>
-            <a:srgbClr val="101842"/>
+            <a:srgbClr val="0E163C"/>
           </a:solidFill>
           <a:ln>
             <a:noFill/>
@@ -14612,14 +14505,14 @@
         </p:nvSpPr>
         <p:spPr>
           <a:xfrm>
-            <a:off x="411480" y="5193792"/>
-            <a:ext cx="5596128" cy="658368"/>
+            <a:off x="411480" y="5549493"/>
+            <a:ext cx="5577840" cy="822960"/>
           </a:xfrm>
           <a:prstGeom prst="rect">
             <a:avLst/>
           </a:prstGeom>
           <a:solidFill>
-            <a:srgbClr val="101842"/>
+            <a:srgbClr val="0E163C"/>
           </a:solidFill>
           <a:ln>
             <a:noFill/>
@@ -14655,8 +14548,8 @@
         </p:nvSpPr>
         <p:spPr>
           <a:xfrm>
-            <a:off x="411480" y="5193792"/>
-            <a:ext cx="5596128" cy="23774"/>
+            <a:off x="411480" y="5549493"/>
+            <a:ext cx="5577840" cy="20116"/>
           </a:xfrm>
           <a:prstGeom prst="rect">
             <a:avLst/>
@@ -14698,8 +14591,8 @@
         </p:nvSpPr>
         <p:spPr>
           <a:xfrm>
-            <a:off x="548640" y="5230368"/>
-            <a:ext cx="5449824" cy="256032"/>
+            <a:off x="530352" y="5604357"/>
+            <a:ext cx="5431536" cy="237744"/>
           </a:xfrm>
           <a:prstGeom prst="rect">
             <a:avLst/>
@@ -14718,7 +14611,7 @@
                 <a:solidFill>
                   <a:srgbClr val="C9A84C"/>
                 </a:solidFill>
-                <a:latin typeface="Barlow Condensed"/>
+                <a:latin typeface="Calibri"/>
               </a:rPr>
               <a:t>PREPARATION  →  READINESS  →  FEARLESS</a:t>
             </a:r>
@@ -14733,8 +14626,8 @@
         </p:nvSpPr>
         <p:spPr>
           <a:xfrm>
-            <a:off x="548640" y="5486400"/>
-            <a:ext cx="5449824" cy="310896"/>
+            <a:off x="530352" y="5860389"/>
+            <a:ext cx="5431536" cy="274320"/>
           </a:xfrm>
           <a:prstGeom prst="rect">
             <a:avLst/>
@@ -14751,31 +14644,66 @@
             <a:r>
               <a:rPr sz="900" b="0" i="0">
                 <a:solidFill>
-                  <a:srgbClr val="B4BED6"/>
-                </a:solidFill>
-                <a:latin typeface="Barlow Condensed"/>
-              </a:rPr>
-              <a:t>Any organization prepared for every situation it expects to face is no longer afraid of strategic triggers — it is fearless.</a:t>
-            </a:r>
-          </a:p>
-        </p:txBody>
-      </p:sp>
-      <p:sp>
-        <p:nvSpPr>
-          <p:cNvPr id="35" name="Rectangle 34"/>
+                  <a:srgbClr val="AAB4CC"/>
+                </a:solidFill>
+                <a:latin typeface="Calibri"/>
+              </a:rPr>
+              <a:t>Any organization prepared for every situation it expects to face is no longer afraid — it is fearless.</a:t>
+            </a:r>
+          </a:p>
+        </p:txBody>
+      </p:sp>
+      <p:sp>
+        <p:nvSpPr>
+          <p:cNvPr id="35" name="TextBox 34"/>
+          <p:cNvSpPr txBox="1"/>
+          <p:nvPr/>
+        </p:nvSpPr>
+        <p:spPr>
+          <a:xfrm>
+            <a:off x="530352" y="6152997"/>
+            <a:ext cx="5431536" cy="182880"/>
+          </a:xfrm>
+          <a:prstGeom prst="rect">
+            <a:avLst/>
+          </a:prstGeom>
+          <a:noFill/>
+        </p:spPr>
+        <p:txBody>
+          <a:bodyPr wrap="square">
+            <a:spAutoFit/>
+          </a:bodyPr>
+          <a:lstStyle/>
+          <a:p>
+            <a:pPr algn="l"/>
+            <a:r>
+              <a:rPr sz="900" b="0" i="1">
+                <a:solidFill>
+                  <a:srgbClr val="C9A84C"/>
+                </a:solidFill>
+                <a:latin typeface="Georgia"/>
+              </a:rPr>
+              <a:t>Let's build the future of fearless execution together.</a:t>
+            </a:r>
+          </a:p>
+        </p:txBody>
+      </p:sp>
+      <p:sp>
+        <p:nvSpPr>
+          <p:cNvPr id="36" name="Rectangle 35"/>
           <p:cNvSpPr/>
           <p:nvPr/>
         </p:nvSpPr>
         <p:spPr>
           <a:xfrm>
-            <a:off x="411480" y="5449824"/>
-            <a:ext cx="5394960" cy="10972"/>
+            <a:off x="6483096" y="566928"/>
+            <a:ext cx="5394960" cy="6035040"/>
           </a:xfrm>
           <a:prstGeom prst="rect">
             <a:avLst/>
           </a:prstGeom>
           <a:solidFill>
-            <a:srgbClr val="A08230"/>
+            <a:srgbClr val="030514"/>
           </a:solidFill>
           <a:ln>
             <a:noFill/>
@@ -14805,92 +14733,14 @@
       </p:sp>
       <p:sp>
         <p:nvSpPr>
-          <p:cNvPr id="36" name="TextBox 35"/>
-          <p:cNvSpPr txBox="1"/>
-          <p:nvPr/>
-        </p:nvSpPr>
-        <p:spPr>
-          <a:xfrm>
-            <a:off x="411480" y="5513832"/>
-            <a:ext cx="5669280" cy="768096"/>
-          </a:xfrm>
-          <a:prstGeom prst="rect">
-            <a:avLst/>
-          </a:prstGeom>
-          <a:noFill/>
-        </p:spPr>
-        <p:txBody>
-          <a:bodyPr wrap="square">
-            <a:spAutoFit/>
-          </a:bodyPr>
-          <a:lstStyle/>
-          <a:p>
-            <a:pPr algn="l"/>
-            <a:r>
-              <a:rPr sz="900" b="0" i="1">
-                <a:solidFill>
-                  <a:srgbClr val="B4BED6"/>
-                </a:solidFill>
-                <a:latin typeface="Georgia"/>
-              </a:rPr>
-              <a:t>"The platform is live. The metrics are undeniable. We are 18 months from Series A ready. Let's build the future of fearless execution together."</a:t>
-            </a:r>
-          </a:p>
-        </p:txBody>
-      </p:sp>
-      <p:sp>
-        <p:nvSpPr>
           <p:cNvPr id="37" name="Rectangle 36"/>
           <p:cNvSpPr/>
           <p:nvPr/>
         </p:nvSpPr>
         <p:spPr>
           <a:xfrm>
-            <a:off x="6455664" y="557784"/>
-            <a:ext cx="5468112" cy="5888736"/>
-          </a:xfrm>
-          <a:prstGeom prst="rect">
-            <a:avLst/>
-          </a:prstGeom>
-          <a:solidFill>
-            <a:srgbClr val="040718"/>
-          </a:solidFill>
-          <a:ln>
-            <a:noFill/>
-          </a:ln>
-        </p:spPr>
-        <p:style>
-          <a:lnRef idx="1">
-            <a:schemeClr val="accent1"/>
-          </a:lnRef>
-          <a:fillRef idx="3">
-            <a:schemeClr val="accent1"/>
-          </a:fillRef>
-          <a:effectRef idx="2">
-            <a:schemeClr val="accent1"/>
-          </a:effectRef>
-          <a:fontRef idx="minor">
-            <a:schemeClr val="lt1"/>
-          </a:fontRef>
-        </p:style>
-        <p:txBody>
-          <a:bodyPr rtlCol="0" anchor="ctr"/>
-          <a:lstStyle/>
-          <a:p>
-            <a:pPr algn="ctr"/>
-          </a:p>
-        </p:txBody>
-      </p:sp>
-      <p:sp>
-        <p:nvSpPr>
-          <p:cNvPr id="38" name="Rectangle 37"/>
-          <p:cNvSpPr/>
-          <p:nvPr/>
-        </p:nvSpPr>
-        <p:spPr>
-          <a:xfrm>
-            <a:off x="6364224" y="502920"/>
-            <a:ext cx="36576" cy="5888736"/>
+            <a:off x="6382512" y="502920"/>
+            <a:ext cx="36576" cy="6035040"/>
           </a:xfrm>
           <a:prstGeom prst="rect">
             <a:avLst/>
@@ -14926,7 +14776,7 @@
       </p:sp>
       <p:pic>
         <p:nvPicPr>
-          <p:cNvPr id="39" name="Picture 38" descr="wow_exec_brief.jpg"/>
+          <p:cNvPr id="38" name="Picture 37" descr="hq_exec_brief.jpg"/>
           <p:cNvPicPr>
             <a:picLocks noChangeAspect="1"/>
           </p:cNvPicPr>
@@ -14940,8 +14790,8 @@
         </p:blipFill>
         <p:spPr>
           <a:xfrm>
-            <a:off x="6400800" y="502920"/>
-            <a:ext cx="5468112" cy="5888736"/>
+            <a:off x="6419088" y="502920"/>
+            <a:ext cx="5394960" cy="6035040"/>
           </a:xfrm>
           <a:prstGeom prst="rect">
             <a:avLst/>
@@ -14950,14 +14800,14 @@
       </p:pic>
       <p:sp>
         <p:nvSpPr>
-          <p:cNvPr id="40" name="Rectangle 39"/>
+          <p:cNvPr id="39" name="Rectangle 38"/>
           <p:cNvSpPr/>
           <p:nvPr/>
         </p:nvSpPr>
         <p:spPr>
           <a:xfrm>
-            <a:off x="6400800" y="6190488"/>
-            <a:ext cx="5468112" cy="201168"/>
+            <a:off x="6419088" y="6355079"/>
+            <a:ext cx="5394960" cy="182880"/>
           </a:xfrm>
           <a:prstGeom prst="rect">
             <a:avLst/>

--- a/attached_assets/VaughnMartin-Investor-Deck-v13-final.pptx
+++ b/attached_assets/VaughnMartin-Investor-Deck-v13-final.pptx
@@ -511,7 +511,7 @@
           <a:lstStyle/>
           <a:p>
             <a:r>
-              <a:t>HOOK:</a:t>
+              <a:t>THE HOOK:</a:t>
             </a:r>
           </a:p>
           <a:p>
@@ -522,7 +522,7 @@
           <a:p/>
           <a:p>
             <a:r>
-              <a:t>We engineered the operating model that closes that gap permanently. 3,600× execution head start — the response is fully pre-staged, mapped, and ready before the crisis or opportunity even hits.</a:t>
+              <a:t>We engineered the operating model that closes that gap permanently. A 3,600× execution head start — the response is fully pre-staged before the crisis hits.</a:t>
             </a:r>
           </a:p>
           <a:p/>
@@ -603,13 +603,7 @@
           </a:p>
           <a:p>
             <a:r>
-              <a:t>"The market thinks companies have a strategy problem. They don't. They have an architecture problem. When a competitor launches a surprise product, or a cyber breach happens, leadership spends the first two to three weeks just figuring out who has the authority to make the first move.</a:t>
-            </a:r>
-          </a:p>
-          <a:p/>
-          <a:p>
-            <a:r>
-              <a:t>That 30-day delay is an existential window that activists, regulators, or competitors completely own."</a:t>
+              <a:t>"The market thinks companies have a strategy problem. They don't. They have an architecture problem. Leadership spends the first two or three weeks just figuring out who has the authority to make the first move. That 30-day delay is an existential window that activists, regulators, or competitors completely own."</a:t>
             </a:r>
           </a:p>
         </p:txBody>
@@ -684,13 +678,13 @@
           </a:p>
           <a:p>
             <a:r>
-              <a:t>"I spent 20 years leading enterprise transformation at Ford and Lockheed Martin, watching the exact same 30-day mobilization failure repeat across every vertical. But I also spent 5 years on the coaching staff at Stanford. In major college football, you have a 40-second play clock to orchestrate a multi-million dollar operation under extreme pressure. You don't huddle after the snap — the response is pre-staged. I took that exact architecture and built it into software for the enterprise.</a:t>
+              <a:t>"I am the only person in enterprise software at this intersection of depth. At Stanford the response is pre-staged before the snap. VaughnMartin closes that gap permanently for the enterprise."</a:t>
             </a:r>
           </a:p>
           <a:p/>
           <a:p>
             <a:r>
-              <a:t>I am the only person in enterprise software at this intersection. That is the moat you cannot replicate from a job description."</a:t>
+              <a:t>KEY LINE: "This is the moat you cannot replicate from a job description."</a:t>
             </a:r>
           </a:p>
         </p:txBody>
@@ -765,29 +759,13 @@
           </a:p>
           <a:p>
             <a:r>
-              <a:t>"This is live in production today — not a roadmap concept. When a ransomware signal hits, the system doesn't autonomously rogue-execute. Instead, in less than 120 seconds, it delivers a board-ready execution brief to the executive suite with pre-approved communication streams and a mapped authority chain.</a:t>
+              <a:t>"When a ransomware signal hits, in less than 120 seconds it delivers a board-ready execution brief with pre-approved communication streams and a mapped authority chain. The AI monitors, but humans decide. 30 days of chaos becomes a 12-minute executive sign-off."</a:t>
             </a:r>
           </a:p>
           <a:p/>
           <a:p>
             <a:r>
-              <a:t>The AI monitors, but humans decide. We turn 30 days of unmanaged chaos and a potential $47M penalty into a controlled, 12-minute executive sign-off."</a:t>
-            </a:r>
-          </a:p>
-          <a:p/>
-          <a:p>
-            <a:r>
-              <a:t>KEY LINES:</a:t>
-            </a:r>
-          </a:p>
-          <a:p>
-            <a:r>
-              <a:t>"The system stages the choice in seconds. The executive must click authorize."</a:t>
-            </a:r>
-          </a:p>
-          <a:p>
-            <a:r>
-              <a:t>"Every enterprise has Microsoft's AI stack. None have the operating model to use it."</a:t>
+              <a:t>KEY: "The system stages the choice in seconds. The executive must click authorize."</a:t>
             </a:r>
           </a:p>
         </p:txBody>
@@ -862,24 +840,13 @@
           </a:p>
           <a:p>
             <a:r>
-              <a:t>"Look at the current landscape. Signal Labs routes the telemetry. ServiceNow automates the workflow AFTER you spend weeks getting aligned. Microsoft Copilot generates the text. McKinsey charges a massive retainer to show up days after the damage is done.</a:t>
+              <a:t>"VaughnMartin is the orchestration layer that pre-stages the alignment before any competitor is even called. And because our system encodes the results of every activation, the data moat becomes completely uncatchable by month 18."</a:t>
             </a:r>
           </a:p>
           <a:p/>
           <a:p>
             <a:r>
-              <a:t>VaughnMartin is the orchestration layer that pre-stages the alignment before any of them are even called. And because our system encodes the results of every activation, the data moat becomes completely uncatchable by month 18."</a:t>
-            </a:r>
-          </a:p>
-          <a:p/>
-          <a:p>
-            <a:r>
-              <a:t>FATAL TRAP: "Can't ServiceNow add this?"</a:t>
-            </a:r>
-          </a:p>
-          <a:p>
-            <a:r>
-              <a:t>ANSWER: "ServiceNow is an async ticketing router for post-alignment execution. VaughnMartin pre-stages the organizational alignment itself. They track the work. We engineer the capability to do it."</a:t>
+              <a:t>FATAL TRAP: "Can't ServiceNow add this?" → "No. They track the work. We engineer the capability to do it."</a:t>
             </a:r>
           </a:p>
         </p:txBody>
@@ -954,19 +921,13 @@
           </a:p>
           <a:p>
             <a:r>
-              <a:t>"In less than 120 seconds, it delivers a board-ready execution brief to the executive suite with pre-approved communication streams and a mapped authority chain.</a:t>
+              <a:t>"The system doesn't autonomously rogue-execute. In less than 120 seconds, it delivers a board-ready brief. The AI monitors, but humans decide."</a:t>
             </a:r>
           </a:p>
           <a:p/>
           <a:p>
             <a:r>
-              <a:t>The AI monitors, but humans decide. We turn 30 days of unmanaged chaos into a controlled, 12-minute executive sign-off."</a:t>
-            </a:r>
-          </a:p>
-          <a:p/>
-          <a:p>
-            <a:r>
-              <a:t>SAY EXPLICITLY AT STEP 4: "No action deploys without explicit executive authorization. Four choices — including Stand Down. Human authority is preserved at every trigger point."</a:t>
+              <a:t>SAY AT STEP 4: "Four real choices — including Stand Down. No action deploys without explicit executive authorization. Human authority is preserved at every point."</a:t>
             </a:r>
           </a:p>
         </p:txBody>
@@ -1041,7 +1002,7 @@
           </a:p>
           <a:p>
             <a:r>
-              <a:t>"Pull out your phone right now. Go to vaughnmartin.com/how-it-executes. Watch the complete 12-minute execution chain run live. This is not a roadmap — it is live and testable today."</a:t>
+              <a:t>"Pull out your phone right now. Go to vaughnmartin.com/how-it-executes. Watch the 12-minute execution chain run live. This is not a roadmap — it is live and testable today."</a:t>
             </a:r>
           </a:p>
           <a:p/>
@@ -1122,13 +1083,7 @@
           </a:p>
           <a:p>
             <a:r>
-              <a:t>"We aren't asking CFOs to dig up net-new budget in a tight economy. Enterprises are already burning millions on reactive, post-trigger consulting retainers and fire-drills.</a:t>
-            </a:r>
-          </a:p>
-          <a:p/>
-          <a:p>
-            <a:r>
-              <a:t>We are simply converting that wasteful, panic-driven spend into repeatable software infrastructure that generates immediate, compounding ROI. The $75K Founding Partner fee is a trivial reallocation of waste that already exists in the budget — and it pays for itself the first time a trigger fires."</a:t>
+              <a:t>"Enterprises are already burning millions on reactive, post-trigger consulting retainers and fire-drills. We are simply converting that wasteful, panic-driven spend into repeatable software infrastructure. The $75K Founding Partner fee is a trivial reallocation of waste that already exists in the budget — and it pays for itself the first time a trigger fires."</a:t>
             </a:r>
           </a:p>
         </p:txBody>
@@ -1203,25 +1158,19 @@
           </a:p>
           <a:p>
             <a:r>
-              <a:t>"The platform is live. The metrics are undeniable. The category is forming right now.</a:t>
+              <a:t>"The platform is live. 12 Founding Partner seats. Cohort forming now. This is a limited ticket onto a fast-moving train.</a:t>
             </a:r>
           </a:p>
           <a:p/>
           <a:p>
             <a:r>
-              <a:t>We have 12 Founding Partner seats for organizations that want to be in the first cohort. This is a limited ticket onto a fast-moving train.</a:t>
+              <a:t>PREPARATION → READINESS → FEARLESS.</a:t>
             </a:r>
           </a:p>
           <a:p/>
           <a:p>
             <a:r>
-              <a:t>PREPARATION → READINESS → FEARLESS.</a:t>
-            </a:r>
-          </a:p>
-          <a:p/>
-          <a:p>
-            <a:r>
-              <a:t>Any organization that is prepared for every situation it expects to face is no longer afraid — it is fearless. That is the endpoint. Not speed. Fearless.</a:t>
+              <a:t>Any organization prepared for every situation it expects to face is no longer afraid — it is fearless. That is the endpoint. Not speed. Fearless.</a:t>
             </a:r>
           </a:p>
           <a:p/>
@@ -4229,7 +4178,7 @@
     <p:bg>
       <p:bgPr>
         <a:solidFill>
-          <a:srgbClr val="05081E"/>
+          <a:srgbClr val="04071E"/>
         </a:solidFill>
         <a:effectLst/>
       </p:bgPr>
@@ -4243,7 +4192,7 @@
       <p:grpSpPr/>
       <p:pic>
         <p:nvPicPr>
-          <p:cNvPr id="2" name="Picture 1" descr="bg_cover.jpg"/>
+          <p:cNvPr id="2" name="Picture 1" descr="bg_cover_clean.jpg"/>
           <p:cNvPicPr>
             <a:picLocks noChangeAspect="1"/>
           </p:cNvPicPr>
@@ -4274,13 +4223,13 @@
         <p:spPr>
           <a:xfrm>
             <a:off x="0" y="0"/>
-            <a:ext cx="6949440" cy="6858000"/>
+            <a:ext cx="6912864" cy="6858000"/>
           </a:xfrm>
           <a:prstGeom prst="rect">
             <a:avLst/>
           </a:prstGeom>
           <a:solidFill>
-            <a:srgbClr val="05081E"/>
+            <a:srgbClr val="04071E"/>
           </a:solidFill>
           <a:ln>
             <a:noFill/>
@@ -4316,14 +4265,14 @@
         </p:nvSpPr>
         <p:spPr>
           <a:xfrm>
-            <a:off x="0" y="0"/>
-            <a:ext cx="12188952" cy="329184"/>
+            <a:off x="6894576" y="0"/>
+            <a:ext cx="5486" cy="6858000"/>
           </a:xfrm>
           <a:prstGeom prst="rect">
             <a:avLst/>
           </a:prstGeom>
           <a:solidFill>
-            <a:srgbClr val="04071C"/>
+            <a:srgbClr val="9A7E2C"/>
           </a:solidFill>
           <a:ln>
             <a:noFill/>
@@ -4351,114 +4300,9 @@
           </a:p>
         </p:txBody>
       </p:sp>
-      <p:sp>
-        <p:nvSpPr>
-          <p:cNvPr id="5" name="TextBox 4"/>
-          <p:cNvSpPr txBox="1"/>
-          <p:nvPr/>
-        </p:nvSpPr>
-        <p:spPr>
-          <a:xfrm>
-            <a:off x="256032" y="64008"/>
-            <a:ext cx="2560320" cy="201168"/>
-          </a:xfrm>
-          <a:prstGeom prst="rect">
-            <a:avLst/>
-          </a:prstGeom>
-          <a:noFill/>
-        </p:spPr>
-        <p:txBody>
-          <a:bodyPr wrap="square">
-            <a:spAutoFit/>
-          </a:bodyPr>
-          <a:lstStyle/>
-          <a:p>
-            <a:pPr algn="l"/>
-            <a:r>
-              <a:rPr sz="800" b="1" i="0">
-                <a:solidFill>
-                  <a:srgbClr val="2B8A6E"/>
-                </a:solidFill>
-                <a:latin typeface="Calibri"/>
-              </a:rPr>
-              <a:t>●  MONITORING ACTIVE</a:t>
-            </a:r>
-          </a:p>
-        </p:txBody>
-      </p:sp>
-      <p:sp>
-        <p:nvSpPr>
-          <p:cNvPr id="6" name="TextBox 5"/>
-          <p:cNvSpPr txBox="1"/>
-          <p:nvPr/>
-        </p:nvSpPr>
-        <p:spPr>
-          <a:xfrm>
-            <a:off x="2871216" y="64008"/>
-            <a:ext cx="5120640" cy="201168"/>
-          </a:xfrm>
-          <a:prstGeom prst="rect">
-            <a:avLst/>
-          </a:prstGeom>
-          <a:noFill/>
-        </p:spPr>
-        <p:txBody>
-          <a:bodyPr wrap="square">
-            <a:spAutoFit/>
-          </a:bodyPr>
-          <a:lstStyle/>
-          <a:p>
-            <a:pPr algn="l"/>
-            <a:r>
-              <a:rPr sz="750" b="0" i="0">
-                <a:solidFill>
-                  <a:srgbClr val="AAB4CC"/>
-                </a:solidFill>
-                <a:latin typeface="Calibri"/>
-              </a:rPr>
-              <a:t>1 signal detected  ·  System active  ·  Readiness Protocols armed</a:t>
-            </a:r>
-          </a:p>
-        </p:txBody>
-      </p:sp>
-      <p:sp>
-        <p:nvSpPr>
-          <p:cNvPr id="7" name="TextBox 6"/>
-          <p:cNvSpPr txBox="1"/>
-          <p:nvPr/>
-        </p:nvSpPr>
-        <p:spPr>
-          <a:xfrm>
-            <a:off x="8686800" y="64008"/>
-            <a:ext cx="3291840" cy="201168"/>
-          </a:xfrm>
-          <a:prstGeom prst="rect">
-            <a:avLst/>
-          </a:prstGeom>
-          <a:noFill/>
-        </p:spPr>
-        <p:txBody>
-          <a:bodyPr wrap="square">
-            <a:spAutoFit/>
-          </a:bodyPr>
-          <a:lstStyle/>
-          <a:p>
-            <a:pPr algn="r"/>
-            <a:r>
-              <a:rPr sz="750" b="1" i="0">
-                <a:solidFill>
-                  <a:srgbClr val="C9A84C"/>
-                </a:solidFill>
-                <a:latin typeface="Calibri"/>
-              </a:rPr>
-              <a:t>SEE IT EXECUTE IN 12 MINUTES  →</a:t>
-            </a:r>
-          </a:p>
-        </p:txBody>
-      </p:sp>
       <p:pic>
         <p:nvPicPr>
-          <p:cNvPr id="8" name="Picture 7" descr="vm_logo_footer.png"/>
+          <p:cNvPr id="5" name="Picture 4" descr="vm_logo_footer.png"/>
           <p:cNvPicPr>
             <a:picLocks noChangeAspect="1"/>
           </p:cNvPicPr>
@@ -4472,8 +4316,8 @@
         </p:blipFill>
         <p:spPr>
           <a:xfrm>
-            <a:off x="457200" y="457200"/>
-            <a:ext cx="2977286" cy="749808"/>
+            <a:off x="438912" y="402336"/>
+            <a:ext cx="2323490" cy="585216"/>
           </a:xfrm>
           <a:prstGeom prst="rect">
             <a:avLst/>
@@ -4482,14 +4326,232 @@
       </p:pic>
       <p:sp>
         <p:nvSpPr>
-          <p:cNvPr id="9" name="Rectangle 8"/>
+          <p:cNvPr id="6" name="Rectangle 5"/>
           <p:cNvSpPr/>
           <p:nvPr/>
         </p:nvSpPr>
         <p:spPr>
           <a:xfrm>
-            <a:off x="457200" y="1261872"/>
-            <a:ext cx="3525926" cy="12801"/>
+            <a:off x="438912" y="1042415"/>
+            <a:ext cx="6217920" cy="9144"/>
+          </a:xfrm>
+          <a:prstGeom prst="rect">
+            <a:avLst/>
+          </a:prstGeom>
+          <a:solidFill>
+            <a:srgbClr val="9A7E2C"/>
+          </a:solidFill>
+          <a:ln>
+            <a:noFill/>
+          </a:ln>
+        </p:spPr>
+        <p:style>
+          <a:lnRef idx="1">
+            <a:schemeClr val="accent1"/>
+          </a:lnRef>
+          <a:fillRef idx="3">
+            <a:schemeClr val="accent1"/>
+          </a:fillRef>
+          <a:effectRef idx="2">
+            <a:schemeClr val="accent1"/>
+          </a:effectRef>
+          <a:fontRef idx="minor">
+            <a:schemeClr val="lt1"/>
+          </a:fontRef>
+        </p:style>
+        <p:txBody>
+          <a:bodyPr rtlCol="0" anchor="ctr"/>
+          <a:lstStyle/>
+          <a:p>
+            <a:pPr algn="ctr"/>
+          </a:p>
+        </p:txBody>
+      </p:sp>
+      <p:sp>
+        <p:nvSpPr>
+          <p:cNvPr id="7" name="TextBox 6"/>
+          <p:cNvSpPr txBox="1"/>
+          <p:nvPr/>
+        </p:nvSpPr>
+        <p:spPr>
+          <a:xfrm>
+            <a:off x="438912" y="475488"/>
+            <a:ext cx="6217920" cy="201168"/>
+          </a:xfrm>
+          <a:prstGeom prst="rect">
+            <a:avLst/>
+          </a:prstGeom>
+          <a:noFill/>
+        </p:spPr>
+        <p:txBody>
+          <a:bodyPr wrap="square">
+            <a:spAutoFit/>
+          </a:bodyPr>
+          <a:lstStyle/>
+          <a:p>
+            <a:pPr algn="l"/>
+            <a:r>
+              <a:rPr sz="750" b="1" i="0">
+                <a:solidFill>
+                  <a:srgbClr val="2B8A6E"/>
+                </a:solidFill>
+                <a:latin typeface="Calibri"/>
+              </a:rPr>
+              <a:t>●  MONITORING ACTIVE  ·  1 SIGNAL DETECTED  ·  SYSTEM ARMED</a:t>
+            </a:r>
+          </a:p>
+        </p:txBody>
+      </p:sp>
+      <p:sp>
+        <p:nvSpPr>
+          <p:cNvPr id="8" name="TextBox 7"/>
+          <p:cNvSpPr txBox="1"/>
+          <p:nvPr/>
+        </p:nvSpPr>
+        <p:spPr>
+          <a:xfrm>
+            <a:off x="438912" y="1152144"/>
+            <a:ext cx="6400800" cy="969264"/>
+          </a:xfrm>
+          <a:prstGeom prst="rect">
+            <a:avLst/>
+          </a:prstGeom>
+          <a:noFill/>
+        </p:spPr>
+        <p:txBody>
+          <a:bodyPr wrap="square">
+            <a:spAutoFit/>
+          </a:bodyPr>
+          <a:lstStyle/>
+          <a:p>
+            <a:pPr algn="l"/>
+            <a:r>
+              <a:rPr sz="4600" b="0" i="0">
+                <a:solidFill>
+                  <a:srgbClr val="FFFFFF"/>
+                </a:solidFill>
+                <a:latin typeface="Georgia"/>
+              </a:rPr>
+              <a:t>The Response Is Ready</a:t>
+            </a:r>
+          </a:p>
+        </p:txBody>
+      </p:sp>
+      <p:sp>
+        <p:nvSpPr>
+          <p:cNvPr id="9" name="TextBox 8"/>
+          <p:cNvSpPr txBox="1"/>
+          <p:nvPr/>
+        </p:nvSpPr>
+        <p:spPr>
+          <a:xfrm>
+            <a:off x="438912" y="2121408"/>
+            <a:ext cx="6400800" cy="969264"/>
+          </a:xfrm>
+          <a:prstGeom prst="rect">
+            <a:avLst/>
+          </a:prstGeom>
+          <a:noFill/>
+        </p:spPr>
+        <p:txBody>
+          <a:bodyPr wrap="square">
+            <a:spAutoFit/>
+          </a:bodyPr>
+          <a:lstStyle/>
+          <a:p>
+            <a:pPr algn="l"/>
+            <a:r>
+              <a:rPr sz="4600" b="0" i="1">
+                <a:solidFill>
+                  <a:srgbClr val="C9A84C"/>
+                </a:solidFill>
+                <a:latin typeface="Georgia"/>
+              </a:rPr>
+              <a:t>before the trigger fires.</a:t>
+            </a:r>
+          </a:p>
+        </p:txBody>
+      </p:sp>
+      <p:sp>
+        <p:nvSpPr>
+          <p:cNvPr id="10" name="TextBox 9"/>
+          <p:cNvSpPr txBox="1"/>
+          <p:nvPr/>
+        </p:nvSpPr>
+        <p:spPr>
+          <a:xfrm>
+            <a:off x="438912" y="3163824"/>
+            <a:ext cx="6217920" cy="237744"/>
+          </a:xfrm>
+          <a:prstGeom prst="rect">
+            <a:avLst/>
+          </a:prstGeom>
+          <a:noFill/>
+        </p:spPr>
+        <p:txBody>
+          <a:bodyPr wrap="square">
+            <a:spAutoFit/>
+          </a:bodyPr>
+          <a:lstStyle/>
+          <a:p>
+            <a:pPr algn="l"/>
+            <a:r>
+              <a:rPr sz="950" b="1" i="0">
+                <a:solidFill>
+                  <a:srgbClr val="AAB4CC"/>
+                </a:solidFill>
+                <a:latin typeface="Calibri"/>
+              </a:rPr>
+              <a:t>Defense + Offense System  ·  Startup to Fortune 500</a:t>
+            </a:r>
+          </a:p>
+        </p:txBody>
+      </p:sp>
+      <p:sp>
+        <p:nvSpPr>
+          <p:cNvPr id="11" name="TextBox 10"/>
+          <p:cNvSpPr txBox="1"/>
+          <p:nvPr/>
+        </p:nvSpPr>
+        <p:spPr>
+          <a:xfrm>
+            <a:off x="438912" y="3419856"/>
+            <a:ext cx="6217920" cy="219456"/>
+          </a:xfrm>
+          <a:prstGeom prst="rect">
+            <a:avLst/>
+          </a:prstGeom>
+          <a:noFill/>
+        </p:spPr>
+        <p:txBody>
+          <a:bodyPr wrap="square">
+            <a:spAutoFit/>
+          </a:bodyPr>
+          <a:lstStyle/>
+          <a:p>
+            <a:pPr algn="l"/>
+            <a:r>
+              <a:rPr sz="900" b="0" i="0">
+                <a:solidFill>
+                  <a:srgbClr val="AAB4CC"/>
+                </a:solidFill>
+                <a:latin typeface="Calibri"/>
+              </a:rPr>
+              <a:t>Preparation Infrastructure for a Volatile World</a:t>
+            </a:r>
+          </a:p>
+        </p:txBody>
+      </p:sp>
+      <p:sp>
+        <p:nvSpPr>
+          <p:cNvPr id="12" name="Rectangle 11"/>
+          <p:cNvSpPr/>
+          <p:nvPr/>
+        </p:nvSpPr>
+        <p:spPr>
+          <a:xfrm>
+            <a:off x="438912" y="3730752"/>
+            <a:ext cx="6217920" cy="16459"/>
           </a:xfrm>
           <a:prstGeom prst="rect">
             <a:avLst/>
@@ -4525,14 +4587,14 @@
       </p:sp>
       <p:sp>
         <p:nvSpPr>
-          <p:cNvPr id="10" name="TextBox 9"/>
+          <p:cNvPr id="13" name="TextBox 12"/>
           <p:cNvSpPr txBox="1"/>
           <p:nvPr/>
         </p:nvSpPr>
         <p:spPr>
           <a:xfrm>
-            <a:off x="457200" y="1463040"/>
-            <a:ext cx="6400800" cy="960120"/>
+            <a:off x="438912" y="3895344"/>
+            <a:ext cx="1444752" cy="475488"/>
           </a:xfrm>
           <a:prstGeom prst="rect">
             <a:avLst/>
@@ -4547,155 +4609,7 @@
           <a:p>
             <a:pPr algn="l"/>
             <a:r>
-              <a:rPr sz="5000" b="0" i="0">
-                <a:solidFill>
-                  <a:srgbClr val="FFFFFF"/>
-                </a:solidFill>
-                <a:latin typeface="Georgia"/>
-              </a:rPr>
-              <a:t>The Response Is Ready</a:t>
-            </a:r>
-          </a:p>
-        </p:txBody>
-      </p:sp>
-      <p:sp>
-        <p:nvSpPr>
-          <p:cNvPr id="11" name="TextBox 10"/>
-          <p:cNvSpPr txBox="1"/>
-          <p:nvPr/>
-        </p:nvSpPr>
-        <p:spPr>
-          <a:xfrm>
-            <a:off x="457200" y="2423160"/>
-            <a:ext cx="6400800" cy="960120"/>
-          </a:xfrm>
-          <a:prstGeom prst="rect">
-            <a:avLst/>
-          </a:prstGeom>
-          <a:noFill/>
-        </p:spPr>
-        <p:txBody>
-          <a:bodyPr wrap="square">
-            <a:spAutoFit/>
-          </a:bodyPr>
-          <a:lstStyle/>
-          <a:p>
-            <a:pPr algn="l"/>
-            <a:r>
-              <a:rPr sz="5000" b="0" i="1">
-                <a:solidFill>
-                  <a:srgbClr val="C9A84C"/>
-                </a:solidFill>
-                <a:latin typeface="Georgia"/>
-              </a:rPr>
-              <a:t>before the trigger fires.</a:t>
-            </a:r>
-          </a:p>
-        </p:txBody>
-      </p:sp>
-      <p:sp>
-        <p:nvSpPr>
-          <p:cNvPr id="12" name="TextBox 11"/>
-          <p:cNvSpPr txBox="1"/>
-          <p:nvPr/>
-        </p:nvSpPr>
-        <p:spPr>
-          <a:xfrm>
-            <a:off x="457200" y="3493008"/>
-            <a:ext cx="6309360" cy="237744"/>
-          </a:xfrm>
-          <a:prstGeom prst="rect">
-            <a:avLst/>
-          </a:prstGeom>
-          <a:noFill/>
-        </p:spPr>
-        <p:txBody>
-          <a:bodyPr wrap="square">
-            <a:spAutoFit/>
-          </a:bodyPr>
-          <a:lstStyle/>
-          <a:p>
-            <a:pPr algn="l"/>
-            <a:r>
-              <a:rPr sz="900" b="1" i="0">
-                <a:solidFill>
-                  <a:srgbClr val="AAB4CC"/>
-                </a:solidFill>
-                <a:latin typeface="Calibri"/>
-              </a:rPr>
-              <a:t>Defense + Offense System  ·  Startup to Fortune 500  ·  Preparation Infrastructure</a:t>
-            </a:r>
-          </a:p>
-        </p:txBody>
-      </p:sp>
-      <p:sp>
-        <p:nvSpPr>
-          <p:cNvPr id="13" name="Rectangle 12"/>
-          <p:cNvSpPr/>
-          <p:nvPr/>
-        </p:nvSpPr>
-        <p:spPr>
-          <a:xfrm>
-            <a:off x="457200" y="3785615"/>
-            <a:ext cx="6309360" cy="14630"/>
-          </a:xfrm>
-          <a:prstGeom prst="rect">
-            <a:avLst/>
-          </a:prstGeom>
-          <a:solidFill>
-            <a:srgbClr val="C9A84C"/>
-          </a:solidFill>
-          <a:ln>
-            <a:noFill/>
-          </a:ln>
-        </p:spPr>
-        <p:style>
-          <a:lnRef idx="1">
-            <a:schemeClr val="accent1"/>
-          </a:lnRef>
-          <a:fillRef idx="3">
-            <a:schemeClr val="accent1"/>
-          </a:fillRef>
-          <a:effectRef idx="2">
-            <a:schemeClr val="accent1"/>
-          </a:effectRef>
-          <a:fontRef idx="minor">
-            <a:schemeClr val="lt1"/>
-          </a:fontRef>
-        </p:style>
-        <p:txBody>
-          <a:bodyPr rtlCol="0" anchor="ctr"/>
-          <a:lstStyle/>
-          <a:p>
-            <a:pPr algn="ctr"/>
-          </a:p>
-        </p:txBody>
-      </p:sp>
-      <p:sp>
-        <p:nvSpPr>
-          <p:cNvPr id="14" name="TextBox 13"/>
-          <p:cNvSpPr txBox="1"/>
-          <p:nvPr/>
-        </p:nvSpPr>
-        <p:spPr>
-          <a:xfrm>
-            <a:off x="457200" y="3913632"/>
-            <a:ext cx="1444752" cy="457200"/>
-          </a:xfrm>
-          <a:prstGeom prst="rect">
-            <a:avLst/>
-          </a:prstGeom>
-          <a:noFill/>
-        </p:spPr>
-        <p:txBody>
-          <a:bodyPr wrap="square">
-            <a:spAutoFit/>
-          </a:bodyPr>
-          <a:lstStyle/>
-          <a:p>
-            <a:pPr algn="l"/>
-            <a:r>
-              <a:rPr sz="2600" b="1" i="0">
+              <a:rPr sz="2800" b="1" i="0">
                 <a:solidFill>
                   <a:srgbClr val="C9A84C"/>
                 </a:solidFill>
@@ -4708,13 +4622,13 @@
       </p:sp>
       <p:sp>
         <p:nvSpPr>
-          <p:cNvPr id="15" name="TextBox 14"/>
+          <p:cNvPr id="14" name="TextBox 13"/>
           <p:cNvSpPr txBox="1"/>
           <p:nvPr/>
         </p:nvSpPr>
         <p:spPr>
           <a:xfrm>
-            <a:off x="457200" y="4389120"/>
+            <a:off x="438912" y="4389120"/>
             <a:ext cx="1444752" cy="201168"/>
           </a:xfrm>
           <a:prstGeom prst="rect">
@@ -4730,7 +4644,7 @@
           <a:p>
             <a:pPr algn="l"/>
             <a:r>
-              <a:rPr sz="800" b="0" i="0">
+              <a:rPr sz="750" b="0" i="0">
                 <a:solidFill>
                   <a:srgbClr val="AAB4CC"/>
                 </a:solidFill>
@@ -4743,14 +4657,14 @@
       </p:sp>
       <p:sp>
         <p:nvSpPr>
-          <p:cNvPr id="16" name="Rectangle 15"/>
+          <p:cNvPr id="15" name="Rectangle 14"/>
           <p:cNvSpPr/>
           <p:nvPr/>
         </p:nvSpPr>
         <p:spPr>
           <a:xfrm>
-            <a:off x="1920240" y="3913632"/>
-            <a:ext cx="14630" cy="658368"/>
+            <a:off x="1901952" y="3895344"/>
+            <a:ext cx="12801" cy="640080"/>
           </a:xfrm>
           <a:prstGeom prst="rect">
             <a:avLst/>
@@ -4786,14 +4700,14 @@
       </p:sp>
       <p:sp>
         <p:nvSpPr>
-          <p:cNvPr id="17" name="TextBox 16"/>
+          <p:cNvPr id="16" name="TextBox 15"/>
           <p:cNvSpPr txBox="1"/>
           <p:nvPr/>
         </p:nvSpPr>
         <p:spPr>
           <a:xfrm>
-            <a:off x="1993391" y="3913632"/>
-            <a:ext cx="1444752" cy="457200"/>
+            <a:off x="1975104" y="3895344"/>
+            <a:ext cx="1444752" cy="475488"/>
           </a:xfrm>
           <a:prstGeom prst="rect">
             <a:avLst/>
@@ -4808,7 +4722,7 @@
           <a:p>
             <a:pPr algn="l"/>
             <a:r>
-              <a:rPr sz="2600" b="1" i="0">
+              <a:rPr sz="2800" b="1" i="0">
                 <a:solidFill>
                   <a:srgbClr val="C9A84C"/>
                 </a:solidFill>
@@ -4821,13 +4735,13 @@
       </p:sp>
       <p:sp>
         <p:nvSpPr>
-          <p:cNvPr id="18" name="TextBox 17"/>
+          <p:cNvPr id="17" name="TextBox 16"/>
           <p:cNvSpPr txBox="1"/>
           <p:nvPr/>
         </p:nvSpPr>
         <p:spPr>
           <a:xfrm>
-            <a:off x="1993391" y="4389120"/>
+            <a:off x="1975104" y="4389120"/>
             <a:ext cx="1444752" cy="201168"/>
           </a:xfrm>
           <a:prstGeom prst="rect">
@@ -4843,7 +4757,7 @@
           <a:p>
             <a:pPr algn="l"/>
             <a:r>
-              <a:rPr sz="800" b="0" i="0">
+              <a:rPr sz="750" b="0" i="0">
                 <a:solidFill>
                   <a:srgbClr val="AAB4CC"/>
                 </a:solidFill>
@@ -4856,14 +4770,14 @@
       </p:sp>
       <p:sp>
         <p:nvSpPr>
-          <p:cNvPr id="19" name="Rectangle 18"/>
+          <p:cNvPr id="18" name="Rectangle 17"/>
           <p:cNvSpPr/>
           <p:nvPr/>
         </p:nvSpPr>
         <p:spPr>
           <a:xfrm>
-            <a:off x="3456432" y="3913632"/>
-            <a:ext cx="14630" cy="658368"/>
+            <a:off x="3438144" y="3895344"/>
+            <a:ext cx="12801" cy="640080"/>
           </a:xfrm>
           <a:prstGeom prst="rect">
             <a:avLst/>
@@ -4899,14 +4813,14 @@
       </p:sp>
       <p:sp>
         <p:nvSpPr>
-          <p:cNvPr id="20" name="TextBox 19"/>
+          <p:cNvPr id="19" name="TextBox 18"/>
           <p:cNvSpPr txBox="1"/>
           <p:nvPr/>
         </p:nvSpPr>
         <p:spPr>
           <a:xfrm>
-            <a:off x="3529584" y="3913632"/>
-            <a:ext cx="1444752" cy="457200"/>
+            <a:off x="3511296" y="3895344"/>
+            <a:ext cx="1444752" cy="475488"/>
           </a:xfrm>
           <a:prstGeom prst="rect">
             <a:avLst/>
@@ -4921,7 +4835,7 @@
           <a:p>
             <a:pPr algn="l"/>
             <a:r>
-              <a:rPr sz="2600" b="1" i="0">
+              <a:rPr sz="2800" b="1" i="0">
                 <a:solidFill>
                   <a:srgbClr val="C9A84C"/>
                 </a:solidFill>
@@ -4934,13 +4848,13 @@
       </p:sp>
       <p:sp>
         <p:nvSpPr>
-          <p:cNvPr id="21" name="TextBox 20"/>
+          <p:cNvPr id="20" name="TextBox 19"/>
           <p:cNvSpPr txBox="1"/>
           <p:nvPr/>
         </p:nvSpPr>
         <p:spPr>
           <a:xfrm>
-            <a:off x="3529584" y="4389120"/>
+            <a:off x="3511296" y="4389120"/>
             <a:ext cx="1444752" cy="201168"/>
           </a:xfrm>
           <a:prstGeom prst="rect">
@@ -4956,7 +4870,7 @@
           <a:p>
             <a:pPr algn="l"/>
             <a:r>
-              <a:rPr sz="800" b="0" i="0">
+              <a:rPr sz="750" b="0" i="0">
                 <a:solidFill>
                   <a:srgbClr val="AAB4CC"/>
                 </a:solidFill>
@@ -4969,14 +4883,14 @@
       </p:sp>
       <p:sp>
         <p:nvSpPr>
-          <p:cNvPr id="22" name="Rectangle 21"/>
+          <p:cNvPr id="21" name="Rectangle 20"/>
           <p:cNvSpPr/>
           <p:nvPr/>
         </p:nvSpPr>
         <p:spPr>
           <a:xfrm>
-            <a:off x="4992624" y="3913632"/>
-            <a:ext cx="14630" cy="658368"/>
+            <a:off x="4974336" y="3895344"/>
+            <a:ext cx="12801" cy="640080"/>
           </a:xfrm>
           <a:prstGeom prst="rect">
             <a:avLst/>
@@ -5012,14 +4926,14 @@
       </p:sp>
       <p:sp>
         <p:nvSpPr>
-          <p:cNvPr id="23" name="TextBox 22"/>
+          <p:cNvPr id="22" name="TextBox 21"/>
           <p:cNvSpPr txBox="1"/>
           <p:nvPr/>
         </p:nvSpPr>
         <p:spPr>
           <a:xfrm>
-            <a:off x="5065776" y="3913632"/>
-            <a:ext cx="1444752" cy="457200"/>
+            <a:off x="5047488" y="3895344"/>
+            <a:ext cx="1444752" cy="475488"/>
           </a:xfrm>
           <a:prstGeom prst="rect">
             <a:avLst/>
@@ -5034,7 +4948,7 @@
           <a:p>
             <a:pPr algn="l"/>
             <a:r>
-              <a:rPr sz="2600" b="1" i="0">
+              <a:rPr sz="2800" b="1" i="0">
                 <a:solidFill>
                   <a:srgbClr val="C9A84C"/>
                 </a:solidFill>
@@ -5047,13 +4961,13 @@
       </p:sp>
       <p:sp>
         <p:nvSpPr>
-          <p:cNvPr id="24" name="TextBox 23"/>
+          <p:cNvPr id="23" name="TextBox 22"/>
           <p:cNvSpPr txBox="1"/>
           <p:nvPr/>
         </p:nvSpPr>
         <p:spPr>
           <a:xfrm>
-            <a:off x="5065776" y="4389120"/>
+            <a:off x="5047488" y="4389120"/>
             <a:ext cx="1444752" cy="201168"/>
           </a:xfrm>
           <a:prstGeom prst="rect">
@@ -5069,7 +4983,7 @@
           <a:p>
             <a:pPr algn="l"/>
             <a:r>
-              <a:rPr sz="800" b="0" i="0">
+              <a:rPr sz="750" b="0" i="0">
                 <a:solidFill>
                   <a:srgbClr val="AAB4CC"/>
                 </a:solidFill>
@@ -5080,9 +4994,87 @@
           </a:p>
         </p:txBody>
       </p:sp>
+      <p:sp>
+        <p:nvSpPr>
+          <p:cNvPr id="24" name="Rectangle 23"/>
+          <p:cNvSpPr/>
+          <p:nvPr/>
+        </p:nvSpPr>
+        <p:spPr>
+          <a:xfrm>
+            <a:off x="438912" y="4645152"/>
+            <a:ext cx="6217920" cy="9144"/>
+          </a:xfrm>
+          <a:prstGeom prst="rect">
+            <a:avLst/>
+          </a:prstGeom>
+          <a:solidFill>
+            <a:srgbClr val="9A7E2C"/>
+          </a:solidFill>
+          <a:ln>
+            <a:noFill/>
+          </a:ln>
+        </p:spPr>
+        <p:style>
+          <a:lnRef idx="1">
+            <a:schemeClr val="accent1"/>
+          </a:lnRef>
+          <a:fillRef idx="3">
+            <a:schemeClr val="accent1"/>
+          </a:fillRef>
+          <a:effectRef idx="2">
+            <a:schemeClr val="accent1"/>
+          </a:effectRef>
+          <a:fontRef idx="minor">
+            <a:schemeClr val="lt1"/>
+          </a:fontRef>
+        </p:style>
+        <p:txBody>
+          <a:bodyPr rtlCol="0" anchor="ctr"/>
+          <a:lstStyle/>
+          <a:p>
+            <a:pPr algn="ctr"/>
+          </a:p>
+        </p:txBody>
+      </p:sp>
+      <p:sp>
+        <p:nvSpPr>
+          <p:cNvPr id="25" name="TextBox 24"/>
+          <p:cNvSpPr txBox="1"/>
+          <p:nvPr/>
+        </p:nvSpPr>
+        <p:spPr>
+          <a:xfrm>
+            <a:off x="438912" y="4718304"/>
+            <a:ext cx="6217920" cy="219456"/>
+          </a:xfrm>
+          <a:prstGeom prst="rect">
+            <a:avLst/>
+          </a:prstGeom>
+          <a:noFill/>
+        </p:spPr>
+        <p:txBody>
+          <a:bodyPr wrap="square">
+            <a:spAutoFit/>
+          </a:bodyPr>
+          <a:lstStyle/>
+          <a:p>
+            <a:pPr algn="l"/>
+            <a:r>
+              <a:rPr sz="800" b="1" i="0">
+                <a:solidFill>
+                  <a:srgbClr val="AAB4CC"/>
+                </a:solidFill>
+                <a:latin typeface="Calibri"/>
+              </a:rPr>
+              <a:t>INVESTOR BRIEF  ·  MAY 2026  ·  CONFIDENTIAL</a:t>
+            </a:r>
+          </a:p>
+        </p:txBody>
+      </p:sp>
       <p:pic>
         <p:nvPicPr>
-          <p:cNvPr id="25" name="Picture 24" descr="vm_seal_clean.png"/>
+          <p:cNvPr id="26" name="Picture 25" descr="vm_seal_clean.png"/>
           <p:cNvPicPr>
             <a:picLocks noChangeAspect="1"/>
           </p:cNvPicPr>
@@ -5096,8 +5088,8 @@
         </p:blipFill>
         <p:spPr>
           <a:xfrm>
-            <a:off x="7552944" y="420624"/>
-            <a:ext cx="4114800" cy="4114800"/>
+            <a:off x="7022592" y="256032"/>
+            <a:ext cx="4956048" cy="4956048"/>
           </a:xfrm>
           <a:prstGeom prst="rect">
             <a:avLst/>
@@ -5106,14 +5098,14 @@
       </p:pic>
       <p:sp>
         <p:nvSpPr>
-          <p:cNvPr id="26" name="TextBox 25"/>
+          <p:cNvPr id="27" name="TextBox 26"/>
           <p:cNvSpPr txBox="1"/>
           <p:nvPr/>
         </p:nvSpPr>
         <p:spPr>
           <a:xfrm>
-            <a:off x="7863840" y="4608576"/>
-            <a:ext cx="3657600" cy="237744"/>
+            <a:off x="7022592" y="5285232"/>
+            <a:ext cx="4956048" cy="256032"/>
           </a:xfrm>
           <a:prstGeom prst="rect">
             <a:avLst/>
@@ -5128,7 +5120,7 @@
           <a:p>
             <a:pPr algn="ctr"/>
             <a:r>
-              <a:rPr sz="900" b="1" i="0">
+              <a:rPr sz="1000" b="1" i="0">
                 <a:solidFill>
                   <a:srgbClr val="C9A84C"/>
                 </a:solidFill>
@@ -5141,14 +5133,14 @@
       </p:sp>
       <p:sp>
         <p:nvSpPr>
-          <p:cNvPr id="27" name="TextBox 26"/>
+          <p:cNvPr id="28" name="TextBox 27"/>
           <p:cNvSpPr txBox="1"/>
           <p:nvPr/>
         </p:nvSpPr>
         <p:spPr>
           <a:xfrm>
-            <a:off x="7863840" y="4882896"/>
-            <a:ext cx="3657600" cy="219456"/>
+            <a:off x="7022592" y="5559552"/>
+            <a:ext cx="4956048" cy="201168"/>
           </a:xfrm>
           <a:prstGeom prst="rect">
             <a:avLst/>
@@ -5176,14 +5168,135 @@
       </p:sp>
       <p:sp>
         <p:nvSpPr>
-          <p:cNvPr id="28" name="Rectangle 27"/>
+          <p:cNvPr id="29" name="Rectangle 28"/>
           <p:cNvSpPr/>
           <p:nvPr/>
         </p:nvSpPr>
         <p:spPr>
           <a:xfrm>
-            <a:off x="7955279" y="5138928"/>
-            <a:ext cx="3474720" cy="9144"/>
+            <a:off x="7406640" y="5833872"/>
+            <a:ext cx="4169663" cy="438912"/>
+          </a:xfrm>
+          <a:prstGeom prst="rect">
+            <a:avLst/>
+          </a:prstGeom>
+          <a:solidFill>
+            <a:srgbClr val="C9A84C"/>
+          </a:solidFill>
+          <a:ln>
+            <a:noFill/>
+          </a:ln>
+        </p:spPr>
+        <p:style>
+          <a:lnRef idx="1">
+            <a:schemeClr val="accent1"/>
+          </a:lnRef>
+          <a:fillRef idx="3">
+            <a:schemeClr val="accent1"/>
+          </a:fillRef>
+          <a:effectRef idx="2">
+            <a:schemeClr val="accent1"/>
+          </a:effectRef>
+          <a:fontRef idx="minor">
+            <a:schemeClr val="lt1"/>
+          </a:fontRef>
+        </p:style>
+        <p:txBody>
+          <a:bodyPr rtlCol="0" anchor="ctr"/>
+          <a:lstStyle/>
+          <a:p>
+            <a:pPr algn="ctr"/>
+          </a:p>
+        </p:txBody>
+      </p:sp>
+      <p:sp>
+        <p:nvSpPr>
+          <p:cNvPr id="30" name="TextBox 29"/>
+          <p:cNvSpPr txBox="1"/>
+          <p:nvPr/>
+        </p:nvSpPr>
+        <p:spPr>
+          <a:xfrm>
+            <a:off x="7406640" y="5888736"/>
+            <a:ext cx="4169663" cy="329184"/>
+          </a:xfrm>
+          <a:prstGeom prst="rect">
+            <a:avLst/>
+          </a:prstGeom>
+          <a:noFill/>
+        </p:spPr>
+        <p:txBody>
+          <a:bodyPr wrap="square">
+            <a:spAutoFit/>
+          </a:bodyPr>
+          <a:lstStyle/>
+          <a:p>
+            <a:pPr algn="ctr"/>
+            <a:r>
+              <a:rPr sz="950" b="1" i="0">
+                <a:solidFill>
+                  <a:srgbClr val="04071E"/>
+                </a:solidFill>
+                <a:latin typeface="Calibri"/>
+              </a:rPr>
+              <a:t>REQUEST FOUNDING PARTNER ACCESS  →</a:t>
+            </a:r>
+          </a:p>
+        </p:txBody>
+      </p:sp>
+      <p:sp>
+        <p:nvSpPr>
+          <p:cNvPr id="31" name="Rectangle 30"/>
+          <p:cNvSpPr/>
+          <p:nvPr/>
+        </p:nvSpPr>
+        <p:spPr>
+          <a:xfrm>
+            <a:off x="0" y="6492240"/>
+            <a:ext cx="12188952" cy="365760"/>
+          </a:xfrm>
+          <a:prstGeom prst="rect">
+            <a:avLst/>
+          </a:prstGeom>
+          <a:solidFill>
+            <a:srgbClr val="070B24"/>
+          </a:solidFill>
+          <a:ln>
+            <a:noFill/>
+          </a:ln>
+        </p:spPr>
+        <p:style>
+          <a:lnRef idx="1">
+            <a:schemeClr val="accent1"/>
+          </a:lnRef>
+          <a:fillRef idx="3">
+            <a:schemeClr val="accent1"/>
+          </a:fillRef>
+          <a:effectRef idx="2">
+            <a:schemeClr val="accent1"/>
+          </a:effectRef>
+          <a:fontRef idx="minor">
+            <a:schemeClr val="lt1"/>
+          </a:fontRef>
+        </p:style>
+        <p:txBody>
+          <a:bodyPr rtlCol="0" anchor="ctr"/>
+          <a:lstStyle/>
+          <a:p>
+            <a:pPr algn="ctr"/>
+          </a:p>
+        </p:txBody>
+      </p:sp>
+      <p:sp>
+        <p:nvSpPr>
+          <p:cNvPr id="32" name="Rectangle 31"/>
+          <p:cNvSpPr/>
+          <p:nvPr/>
+        </p:nvSpPr>
+        <p:spPr>
+          <a:xfrm>
+            <a:off x="0" y="6492240"/>
+            <a:ext cx="12188952" cy="9144"/>
           </a:xfrm>
           <a:prstGeom prst="rect">
             <a:avLst/>
@@ -5217,208 +5330,9 @@
           </a:p>
         </p:txBody>
       </p:sp>
-      <p:sp>
-        <p:nvSpPr>
-          <p:cNvPr id="29" name="TextBox 28"/>
-          <p:cNvSpPr txBox="1"/>
-          <p:nvPr/>
-        </p:nvSpPr>
-        <p:spPr>
-          <a:xfrm>
-            <a:off x="7863840" y="5230368"/>
-            <a:ext cx="3657600" cy="219456"/>
-          </a:xfrm>
-          <a:prstGeom prst="rect">
-            <a:avLst/>
-          </a:prstGeom>
-          <a:noFill/>
-        </p:spPr>
-        <p:txBody>
-          <a:bodyPr wrap="square">
-            <a:spAutoFit/>
-          </a:bodyPr>
-          <a:lstStyle/>
-          <a:p>
-            <a:pPr algn="ctr"/>
-            <a:r>
-              <a:rPr sz="800" b="1" i="0">
-                <a:solidFill>
-                  <a:srgbClr val="AAB4CC"/>
-                </a:solidFill>
-                <a:latin typeface="Calibri"/>
-              </a:rPr>
-              <a:t>INVESTOR BRIEF  ·  MAY 2026</a:t>
-            </a:r>
-          </a:p>
-        </p:txBody>
-      </p:sp>
-      <p:sp>
-        <p:nvSpPr>
-          <p:cNvPr id="30" name="Rectangle 29"/>
-          <p:cNvSpPr/>
-          <p:nvPr/>
-        </p:nvSpPr>
-        <p:spPr>
-          <a:xfrm>
-            <a:off x="7955279" y="5559552"/>
-            <a:ext cx="3474720" cy="420624"/>
-          </a:xfrm>
-          <a:prstGeom prst="rect">
-            <a:avLst/>
-          </a:prstGeom>
-          <a:solidFill>
-            <a:srgbClr val="C9A84C"/>
-          </a:solidFill>
-          <a:ln>
-            <a:noFill/>
-          </a:ln>
-        </p:spPr>
-        <p:style>
-          <a:lnRef idx="1">
-            <a:schemeClr val="accent1"/>
-          </a:lnRef>
-          <a:fillRef idx="3">
-            <a:schemeClr val="accent1"/>
-          </a:fillRef>
-          <a:effectRef idx="2">
-            <a:schemeClr val="accent1"/>
-          </a:effectRef>
-          <a:fontRef idx="minor">
-            <a:schemeClr val="lt1"/>
-          </a:fontRef>
-        </p:style>
-        <p:txBody>
-          <a:bodyPr rtlCol="0" anchor="ctr"/>
-          <a:lstStyle/>
-          <a:p>
-            <a:pPr algn="ctr"/>
-          </a:p>
-        </p:txBody>
-      </p:sp>
-      <p:sp>
-        <p:nvSpPr>
-          <p:cNvPr id="31" name="TextBox 30"/>
-          <p:cNvSpPr txBox="1"/>
-          <p:nvPr/>
-        </p:nvSpPr>
-        <p:spPr>
-          <a:xfrm>
-            <a:off x="7955279" y="5614416"/>
-            <a:ext cx="3474720" cy="310896"/>
-          </a:xfrm>
-          <a:prstGeom prst="rect">
-            <a:avLst/>
-          </a:prstGeom>
-          <a:noFill/>
-        </p:spPr>
-        <p:txBody>
-          <a:bodyPr wrap="square">
-            <a:spAutoFit/>
-          </a:bodyPr>
-          <a:lstStyle/>
-          <a:p>
-            <a:pPr algn="ctr"/>
-            <a:r>
-              <a:rPr sz="950" b="1" i="0">
-                <a:solidFill>
-                  <a:srgbClr val="05081E"/>
-                </a:solidFill>
-                <a:latin typeface="Calibri"/>
-              </a:rPr>
-              <a:t>REQUEST FOUNDING PARTNER ACCESS  →</a:t>
-            </a:r>
-          </a:p>
-        </p:txBody>
-      </p:sp>
-      <p:sp>
-        <p:nvSpPr>
-          <p:cNvPr id="32" name="Rectangle 31"/>
-          <p:cNvSpPr/>
-          <p:nvPr/>
-        </p:nvSpPr>
-        <p:spPr>
-          <a:xfrm>
-            <a:off x="0" y="6492240"/>
-            <a:ext cx="12188952" cy="365760"/>
-          </a:xfrm>
-          <a:prstGeom prst="rect">
-            <a:avLst/>
-          </a:prstGeom>
-          <a:solidFill>
-            <a:srgbClr val="070B24"/>
-          </a:solidFill>
-          <a:ln>
-            <a:noFill/>
-          </a:ln>
-        </p:spPr>
-        <p:style>
-          <a:lnRef idx="1">
-            <a:schemeClr val="accent1"/>
-          </a:lnRef>
-          <a:fillRef idx="3">
-            <a:schemeClr val="accent1"/>
-          </a:fillRef>
-          <a:effectRef idx="2">
-            <a:schemeClr val="accent1"/>
-          </a:effectRef>
-          <a:fontRef idx="minor">
-            <a:schemeClr val="lt1"/>
-          </a:fontRef>
-        </p:style>
-        <p:txBody>
-          <a:bodyPr rtlCol="0" anchor="ctr"/>
-          <a:lstStyle/>
-          <a:p>
-            <a:pPr algn="ctr"/>
-          </a:p>
-        </p:txBody>
-      </p:sp>
-      <p:sp>
-        <p:nvSpPr>
-          <p:cNvPr id="33" name="Rectangle 32"/>
-          <p:cNvSpPr/>
-          <p:nvPr/>
-        </p:nvSpPr>
-        <p:spPr>
-          <a:xfrm>
-            <a:off x="0" y="6492240"/>
-            <a:ext cx="12188952" cy="9144"/>
-          </a:xfrm>
-          <a:prstGeom prst="rect">
-            <a:avLst/>
-          </a:prstGeom>
-          <a:solidFill>
-            <a:srgbClr val="9A7E2C"/>
-          </a:solidFill>
-          <a:ln>
-            <a:noFill/>
-          </a:ln>
-        </p:spPr>
-        <p:style>
-          <a:lnRef idx="1">
-            <a:schemeClr val="accent1"/>
-          </a:lnRef>
-          <a:fillRef idx="3">
-            <a:schemeClr val="accent1"/>
-          </a:fillRef>
-          <a:effectRef idx="2">
-            <a:schemeClr val="accent1"/>
-          </a:effectRef>
-          <a:fontRef idx="minor">
-            <a:schemeClr val="lt1"/>
-          </a:fontRef>
-        </p:style>
-        <p:txBody>
-          <a:bodyPr rtlCol="0" anchor="ctr"/>
-          <a:lstStyle/>
-          <a:p>
-            <a:pPr algn="ctr"/>
-          </a:p>
-        </p:txBody>
-      </p:sp>
       <p:pic>
         <p:nvPicPr>
-          <p:cNvPr id="34" name="Picture 33" descr="vm_logo_footer.png"/>
+          <p:cNvPr id="33" name="Picture 32" descr="vm_logo_footer.png"/>
           <p:cNvPicPr>
             <a:picLocks noChangeAspect="1"/>
           </p:cNvPicPr>
@@ -5442,14 +5356,14 @@
       </p:pic>
       <p:sp>
         <p:nvSpPr>
-          <p:cNvPr id="35" name="TextBox 34"/>
+          <p:cNvPr id="34" name="TextBox 33"/>
           <p:cNvSpPr txBox="1"/>
           <p:nvPr/>
         </p:nvSpPr>
         <p:spPr>
           <a:xfrm>
             <a:off x="2194560" y="6592824"/>
-            <a:ext cx="9692640" cy="182880"/>
+            <a:ext cx="9628632" cy="182880"/>
           </a:xfrm>
           <a:prstGeom prst="rect">
             <a:avLst/>
@@ -5489,7 +5403,7 @@
     <p:bg>
       <p:bgPr>
         <a:solidFill>
-          <a:srgbClr val="05081E"/>
+          <a:srgbClr val="04071E"/>
         </a:solidFill>
         <a:effectLst/>
       </p:bgPr>
@@ -5503,7 +5417,7 @@
       <p:grpSpPr/>
       <p:pic>
         <p:nvPicPr>
-          <p:cNvPr id="2" name="Picture 1" descr="bg_content.jpg"/>
+          <p:cNvPr id="2" name="Picture 1" descr="bg_cover_clean.jpg"/>
           <p:cNvPicPr>
             <a:picLocks noChangeAspect="1"/>
           </p:cNvPicPr>
@@ -5540,7 +5454,7 @@
             <a:avLst/>
           </a:prstGeom>
           <a:solidFill>
-            <a:srgbClr val="05081E"/>
+            <a:srgbClr val="04071E"/>
           </a:solidFill>
           <a:ln>
             <a:noFill/>
@@ -5577,13 +5491,13 @@
         <p:spPr>
           <a:xfrm>
             <a:off x="0" y="0"/>
-            <a:ext cx="12188952" cy="329184"/>
+            <a:ext cx="12188952" cy="47548"/>
           </a:xfrm>
           <a:prstGeom prst="rect">
             <a:avLst/>
           </a:prstGeom>
           <a:solidFill>
-            <a:srgbClr val="04071C"/>
+            <a:srgbClr val="0E163C"/>
           </a:solidFill>
           <a:ln>
             <a:noFill/>
@@ -5613,112 +5527,7 @@
       </p:sp>
       <p:sp>
         <p:nvSpPr>
-          <p:cNvPr id="5" name="TextBox 4"/>
-          <p:cNvSpPr txBox="1"/>
-          <p:nvPr/>
-        </p:nvSpPr>
-        <p:spPr>
-          <a:xfrm>
-            <a:off x="256032" y="64008"/>
-            <a:ext cx="2560320" cy="201168"/>
-          </a:xfrm>
-          <a:prstGeom prst="rect">
-            <a:avLst/>
-          </a:prstGeom>
-          <a:noFill/>
-        </p:spPr>
-        <p:txBody>
-          <a:bodyPr wrap="square">
-            <a:spAutoFit/>
-          </a:bodyPr>
-          <a:lstStyle/>
-          <a:p>
-            <a:pPr algn="l"/>
-            <a:r>
-              <a:rPr sz="800" b="1" i="0">
-                <a:solidFill>
-                  <a:srgbClr val="2B8A6E"/>
-                </a:solidFill>
-                <a:latin typeface="Calibri"/>
-              </a:rPr>
-              <a:t>●  MONITORING ACTIVE</a:t>
-            </a:r>
-          </a:p>
-        </p:txBody>
-      </p:sp>
-      <p:sp>
-        <p:nvSpPr>
-          <p:cNvPr id="6" name="TextBox 5"/>
-          <p:cNvSpPr txBox="1"/>
-          <p:nvPr/>
-        </p:nvSpPr>
-        <p:spPr>
-          <a:xfrm>
-            <a:off x="2871216" y="64008"/>
-            <a:ext cx="5120640" cy="201168"/>
-          </a:xfrm>
-          <a:prstGeom prst="rect">
-            <a:avLst/>
-          </a:prstGeom>
-          <a:noFill/>
-        </p:spPr>
-        <p:txBody>
-          <a:bodyPr wrap="square">
-            <a:spAutoFit/>
-          </a:bodyPr>
-          <a:lstStyle/>
-          <a:p>
-            <a:pPr algn="l"/>
-            <a:r>
-              <a:rPr sz="750" b="0" i="0">
-                <a:solidFill>
-                  <a:srgbClr val="AAB4CC"/>
-                </a:solidFill>
-                <a:latin typeface="Calibri"/>
-              </a:rPr>
-              <a:t>1 signal detected  ·  System active  ·  Readiness Protocols armed</a:t>
-            </a:r>
-          </a:p>
-        </p:txBody>
-      </p:sp>
-      <p:sp>
-        <p:nvSpPr>
-          <p:cNvPr id="7" name="TextBox 6"/>
-          <p:cNvSpPr txBox="1"/>
-          <p:nvPr/>
-        </p:nvSpPr>
-        <p:spPr>
-          <a:xfrm>
-            <a:off x="8686800" y="64008"/>
-            <a:ext cx="3291840" cy="201168"/>
-          </a:xfrm>
-          <a:prstGeom prst="rect">
-            <a:avLst/>
-          </a:prstGeom>
-          <a:noFill/>
-        </p:spPr>
-        <p:txBody>
-          <a:bodyPr wrap="square">
-            <a:spAutoFit/>
-          </a:bodyPr>
-          <a:lstStyle/>
-          <a:p>
-            <a:pPr algn="r"/>
-            <a:r>
-              <a:rPr sz="750" b="1" i="0">
-                <a:solidFill>
-                  <a:srgbClr val="C9A84C"/>
-                </a:solidFill>
-                <a:latin typeface="Calibri"/>
-              </a:rPr>
-              <a:t>SEE IT EXECUTE IN 12 MINUTES  →</a:t>
-            </a:r>
-          </a:p>
-        </p:txBody>
-      </p:sp>
-      <p:sp>
-        <p:nvSpPr>
-          <p:cNvPr id="8" name="Rectangle 7"/>
+          <p:cNvPr id="5" name="Rectangle 4"/>
           <p:cNvSpPr/>
           <p:nvPr/>
         </p:nvSpPr>
@@ -5761,7 +5570,7 @@
       </p:sp>
       <p:sp>
         <p:nvSpPr>
-          <p:cNvPr id="9" name="Rectangle 8"/>
+          <p:cNvPr id="6" name="Rectangle 5"/>
           <p:cNvSpPr/>
           <p:nvPr/>
         </p:nvSpPr>
@@ -5804,7 +5613,7 @@
       </p:sp>
       <p:pic>
         <p:nvPicPr>
-          <p:cNvPr id="10" name="Picture 9" descr="vm_logo_footer.png"/>
+          <p:cNvPr id="7" name="Picture 6" descr="vm_logo_footer.png"/>
           <p:cNvPicPr>
             <a:picLocks noChangeAspect="1"/>
           </p:cNvPicPr>
@@ -5828,14 +5637,14 @@
       </p:pic>
       <p:sp>
         <p:nvSpPr>
-          <p:cNvPr id="11" name="TextBox 10"/>
+          <p:cNvPr id="8" name="TextBox 7"/>
           <p:cNvSpPr txBox="1"/>
           <p:nvPr/>
         </p:nvSpPr>
         <p:spPr>
           <a:xfrm>
             <a:off x="2194560" y="6592824"/>
-            <a:ext cx="9692640" cy="182880"/>
+            <a:ext cx="9628632" cy="182880"/>
           </a:xfrm>
           <a:prstGeom prst="rect">
             <a:avLst/>
@@ -5863,14 +5672,14 @@
       </p:sp>
       <p:sp>
         <p:nvSpPr>
-          <p:cNvPr id="12" name="Rectangle 11"/>
+          <p:cNvPr id="9" name="Rectangle 8"/>
           <p:cNvSpPr/>
           <p:nvPr/>
         </p:nvSpPr>
         <p:spPr>
           <a:xfrm>
-            <a:off x="365760" y="448056"/>
-            <a:ext cx="310896" cy="7315"/>
+            <a:off x="365760" y="269748"/>
+            <a:ext cx="256032" cy="7315"/>
           </a:xfrm>
           <a:prstGeom prst="rect">
             <a:avLst/>
@@ -5906,14 +5715,14 @@
       </p:sp>
       <p:sp>
         <p:nvSpPr>
-          <p:cNvPr id="13" name="TextBox 12"/>
+          <p:cNvPr id="10" name="TextBox 9"/>
           <p:cNvSpPr txBox="1"/>
           <p:nvPr/>
         </p:nvSpPr>
         <p:spPr>
           <a:xfrm>
-            <a:off x="713232" y="384048"/>
-            <a:ext cx="11137392" cy="201168"/>
+            <a:off x="658368" y="201168"/>
+            <a:ext cx="11521440" cy="164592"/>
           </a:xfrm>
           <a:prstGeom prst="rect">
             <a:avLst/>
@@ -5934,21 +5743,21 @@
                 </a:solidFill>
                 <a:latin typeface="Calibri"/>
               </a:rPr>
-              <a:t>  PITCH DEFENSE  ·  3 OBJECTIONS, 3 ANSWERS</a:t>
-            </a:r>
-          </a:p>
-        </p:txBody>
-      </p:sp>
-      <p:sp>
-        <p:nvSpPr>
-          <p:cNvPr id="14" name="Rectangle 13"/>
+              <a:t>   PITCH DEFENSE  ·  3 OBJECTIONS, 3 ANSWERS</a:t>
+            </a:r>
+          </a:p>
+        </p:txBody>
+      </p:sp>
+      <p:sp>
+        <p:nvSpPr>
+          <p:cNvPr id="11" name="Rectangle 10"/>
           <p:cNvSpPr/>
           <p:nvPr/>
         </p:nvSpPr>
         <p:spPr>
           <a:xfrm>
-            <a:off x="384048" y="621792"/>
-            <a:ext cx="11393424" cy="9144"/>
+            <a:off x="384048" y="457200"/>
+            <a:ext cx="11411712" cy="9144"/>
           </a:xfrm>
           <a:prstGeom prst="rect">
             <a:avLst/>
@@ -5984,14 +5793,14 @@
       </p:sp>
       <p:sp>
         <p:nvSpPr>
-          <p:cNvPr id="15" name="Rectangle 14"/>
+          <p:cNvPr id="12" name="Rectangle 11"/>
           <p:cNvSpPr/>
           <p:nvPr/>
         </p:nvSpPr>
         <p:spPr>
           <a:xfrm>
-            <a:off x="384048" y="731520"/>
-            <a:ext cx="11375136" cy="1737360"/>
+            <a:off x="384048" y="585216"/>
+            <a:ext cx="11411712" cy="1773936"/>
           </a:xfrm>
           <a:prstGeom prst="rect">
             <a:avLst/>
@@ -6027,14 +5836,14 @@
       </p:sp>
       <p:sp>
         <p:nvSpPr>
-          <p:cNvPr id="16" name="Rectangle 15"/>
+          <p:cNvPr id="13" name="Rectangle 12"/>
           <p:cNvSpPr/>
           <p:nvPr/>
         </p:nvSpPr>
         <p:spPr>
           <a:xfrm>
-            <a:off x="384048" y="731520"/>
-            <a:ext cx="11375136" cy="21945"/>
+            <a:off x="384048" y="585216"/>
+            <a:ext cx="11411712" cy="21945"/>
           </a:xfrm>
           <a:prstGeom prst="rect">
             <a:avLst/>
@@ -6070,14 +5879,14 @@
       </p:sp>
       <p:sp>
         <p:nvSpPr>
-          <p:cNvPr id="17" name="TextBox 16"/>
+          <p:cNvPr id="14" name="TextBox 13"/>
           <p:cNvSpPr txBox="1"/>
           <p:nvPr/>
         </p:nvSpPr>
         <p:spPr>
           <a:xfrm>
-            <a:off x="530352" y="786384"/>
-            <a:ext cx="11173968" cy="237744"/>
+            <a:off x="530352" y="640080"/>
+            <a:ext cx="11228832" cy="237744"/>
           </a:xfrm>
           <a:prstGeom prst="rect">
             <a:avLst/>
@@ -6105,14 +5914,14 @@
       </p:sp>
       <p:sp>
         <p:nvSpPr>
-          <p:cNvPr id="18" name="TextBox 17"/>
+          <p:cNvPr id="15" name="TextBox 14"/>
           <p:cNvSpPr txBox="1"/>
           <p:nvPr/>
         </p:nvSpPr>
         <p:spPr>
           <a:xfrm>
-            <a:off x="530352" y="1060704"/>
-            <a:ext cx="11173968" cy="1280160"/>
+            <a:off x="530352" y="914400"/>
+            <a:ext cx="11228832" cy="1316736"/>
           </a:xfrm>
           <a:prstGeom prst="rect">
             <a:avLst/>
@@ -6140,14 +5949,14 @@
       </p:sp>
       <p:sp>
         <p:nvSpPr>
-          <p:cNvPr id="19" name="Rectangle 18"/>
+          <p:cNvPr id="16" name="Rectangle 15"/>
           <p:cNvSpPr/>
           <p:nvPr/>
         </p:nvSpPr>
         <p:spPr>
           <a:xfrm>
-            <a:off x="384048" y="2615184"/>
-            <a:ext cx="11375136" cy="1737360"/>
+            <a:off x="384048" y="2505456"/>
+            <a:ext cx="11411712" cy="1773936"/>
           </a:xfrm>
           <a:prstGeom prst="rect">
             <a:avLst/>
@@ -6183,14 +5992,14 @@
       </p:sp>
       <p:sp>
         <p:nvSpPr>
-          <p:cNvPr id="20" name="Rectangle 19"/>
+          <p:cNvPr id="17" name="Rectangle 16"/>
           <p:cNvSpPr/>
           <p:nvPr/>
         </p:nvSpPr>
         <p:spPr>
           <a:xfrm>
-            <a:off x="384048" y="2615184"/>
-            <a:ext cx="11375136" cy="21945"/>
+            <a:off x="384048" y="2505456"/>
+            <a:ext cx="11411712" cy="21945"/>
           </a:xfrm>
           <a:prstGeom prst="rect">
             <a:avLst/>
@@ -6226,14 +6035,14 @@
       </p:sp>
       <p:sp>
         <p:nvSpPr>
-          <p:cNvPr id="21" name="TextBox 20"/>
+          <p:cNvPr id="18" name="TextBox 17"/>
           <p:cNvSpPr txBox="1"/>
           <p:nvPr/>
         </p:nvSpPr>
         <p:spPr>
           <a:xfrm>
-            <a:off x="530352" y="2670048"/>
-            <a:ext cx="11173968" cy="237744"/>
+            <a:off x="530352" y="2560320"/>
+            <a:ext cx="11228832" cy="237744"/>
           </a:xfrm>
           <a:prstGeom prst="rect">
             <a:avLst/>
@@ -6261,14 +6070,14 @@
       </p:sp>
       <p:sp>
         <p:nvSpPr>
-          <p:cNvPr id="22" name="TextBox 21"/>
+          <p:cNvPr id="19" name="TextBox 18"/>
           <p:cNvSpPr txBox="1"/>
           <p:nvPr/>
         </p:nvSpPr>
         <p:spPr>
           <a:xfrm>
-            <a:off x="530352" y="2944368"/>
-            <a:ext cx="11173968" cy="1280160"/>
+            <a:off x="530352" y="2834640"/>
+            <a:ext cx="11228832" cy="1316736"/>
           </a:xfrm>
           <a:prstGeom prst="rect">
             <a:avLst/>
@@ -6289,21 +6098,21 @@
                 </a:solidFill>
                 <a:latin typeface="Georgia"/>
               </a:rPr>
-              <a:t>"The system stages the choice in seconds, but an executive must click authorize. No action deploys without explicit sign-off. Four real choices — including Stand Down. Human authority preserved."</a:t>
-            </a:r>
-          </a:p>
-        </p:txBody>
-      </p:sp>
-      <p:sp>
-        <p:nvSpPr>
-          <p:cNvPr id="23" name="Rectangle 22"/>
+              <a:t>"The system stages the choice in seconds, but an executive must click authorize. No action deploys without explicit sign-off. Four real choices — including Stand Down. Human authority preserved at every trigger."</a:t>
+            </a:r>
+          </a:p>
+        </p:txBody>
+      </p:sp>
+      <p:sp>
+        <p:nvSpPr>
+          <p:cNvPr id="20" name="Rectangle 19"/>
           <p:cNvSpPr/>
           <p:nvPr/>
         </p:nvSpPr>
         <p:spPr>
           <a:xfrm>
-            <a:off x="384048" y="4498848"/>
-            <a:ext cx="11375136" cy="1737360"/>
+            <a:off x="384048" y="4425696"/>
+            <a:ext cx="11411712" cy="1773936"/>
           </a:xfrm>
           <a:prstGeom prst="rect">
             <a:avLst/>
@@ -6339,14 +6148,14 @@
       </p:sp>
       <p:sp>
         <p:nvSpPr>
-          <p:cNvPr id="24" name="Rectangle 23"/>
+          <p:cNvPr id="21" name="Rectangle 20"/>
           <p:cNvSpPr/>
           <p:nvPr/>
         </p:nvSpPr>
         <p:spPr>
           <a:xfrm>
-            <a:off x="384048" y="4498848"/>
-            <a:ext cx="11375136" cy="21945"/>
+            <a:off x="384048" y="4425696"/>
+            <a:ext cx="11411712" cy="21945"/>
           </a:xfrm>
           <a:prstGeom prst="rect">
             <a:avLst/>
@@ -6382,14 +6191,14 @@
       </p:sp>
       <p:sp>
         <p:nvSpPr>
-          <p:cNvPr id="25" name="TextBox 24"/>
+          <p:cNvPr id="22" name="TextBox 21"/>
           <p:cNvSpPr txBox="1"/>
           <p:nvPr/>
         </p:nvSpPr>
         <p:spPr>
           <a:xfrm>
-            <a:off x="530352" y="4553712"/>
-            <a:ext cx="11173968" cy="237744"/>
+            <a:off x="530352" y="4480559"/>
+            <a:ext cx="11228832" cy="237744"/>
           </a:xfrm>
           <a:prstGeom prst="rect">
             <a:avLst/>
@@ -6417,14 +6226,14 @@
       </p:sp>
       <p:sp>
         <p:nvSpPr>
-          <p:cNvPr id="26" name="TextBox 25"/>
+          <p:cNvPr id="23" name="TextBox 22"/>
           <p:cNvSpPr txBox="1"/>
           <p:nvPr/>
         </p:nvSpPr>
         <p:spPr>
           <a:xfrm>
-            <a:off x="530352" y="4828032"/>
-            <a:ext cx="11173968" cy="1280160"/>
+            <a:off x="530352" y="4754880"/>
+            <a:ext cx="11228832" cy="1316736"/>
           </a:xfrm>
           <a:prstGeom prst="rect">
             <a:avLst/>
@@ -6445,7 +6254,7 @@
                 </a:solidFill>
                 <a:latin typeface="Georgia"/>
               </a:rPr>
-              <a:t>"They don't build from scratch. VaughnMartin ships with 170 out-of-the-box protocols. Onboarding is configuration — not a consulting project. 90 days to live."</a:t>
+              <a:t>"They don't build from scratch. VaughnMartin ships 170 out-of-the-box protocols for the most common enterprise threats. Onboarding is configuration — not a consulting project. 90 days to live."</a:t>
             </a:r>
           </a:p>
         </p:txBody>
@@ -6464,7 +6273,7 @@
     <p:bg>
       <p:bgPr>
         <a:solidFill>
-          <a:srgbClr val="05081E"/>
+          <a:srgbClr val="04071E"/>
         </a:solidFill>
         <a:effectLst/>
       </p:bgPr>
@@ -6478,7 +6287,7 @@
       <p:grpSpPr/>
       <p:pic>
         <p:nvPicPr>
-          <p:cNvPr id="2" name="Picture 1" descr="bg_content.jpg"/>
+          <p:cNvPr id="2" name="Picture 1" descr="bg_cover_clean.jpg"/>
           <p:cNvPicPr>
             <a:picLocks noChangeAspect="1"/>
           </p:cNvPicPr>
@@ -6509,13 +6318,13 @@
         <p:spPr>
           <a:xfrm>
             <a:off x="0" y="0"/>
-            <a:ext cx="6565392" cy="6858000"/>
+            <a:ext cx="6547104" cy="6858000"/>
           </a:xfrm>
           <a:prstGeom prst="rect">
             <a:avLst/>
           </a:prstGeom>
           <a:solidFill>
-            <a:srgbClr val="05081E"/>
+            <a:srgbClr val="04071E"/>
           </a:solidFill>
           <a:ln>
             <a:noFill/>
@@ -6551,8 +6360,8 @@
         </p:nvSpPr>
         <p:spPr>
           <a:xfrm>
-            <a:off x="6558076" y="0"/>
-            <a:ext cx="7315" cy="6858000"/>
+            <a:off x="6541617" y="0"/>
+            <a:ext cx="5486" cy="6858000"/>
           </a:xfrm>
           <a:prstGeom prst="rect">
             <a:avLst/>
@@ -6595,13 +6404,13 @@
         <p:spPr>
           <a:xfrm>
             <a:off x="0" y="0"/>
-            <a:ext cx="12188952" cy="329184"/>
+            <a:ext cx="12188952" cy="47548"/>
           </a:xfrm>
           <a:prstGeom prst="rect">
             <a:avLst/>
           </a:prstGeom>
           <a:solidFill>
-            <a:srgbClr val="04071C"/>
+            <a:srgbClr val="C9A84C"/>
           </a:solidFill>
           <a:ln>
             <a:noFill/>
@@ -6637,8 +6446,8 @@
         </p:nvSpPr>
         <p:spPr>
           <a:xfrm>
-            <a:off x="256032" y="64008"/>
-            <a:ext cx="2560320" cy="201168"/>
+            <a:off x="0" y="54864"/>
+            <a:ext cx="11914632" cy="164592"/>
           </a:xfrm>
           <a:prstGeom prst="rect">
             <a:avLst/>
@@ -6651,92 +6460,22 @@
           </a:bodyPr>
           <a:lstStyle/>
           <a:p>
-            <a:pPr algn="l"/>
-            <a:r>
-              <a:rPr sz="800" b="1" i="0">
-                <a:solidFill>
-                  <a:srgbClr val="2B8A6E"/>
+            <a:pPr algn="r"/>
+            <a:r>
+              <a:rPr sz="750" b="1" i="0">
+                <a:solidFill>
+                  <a:srgbClr val="0A0F2E"/>
                 </a:solidFill>
                 <a:latin typeface="Calibri"/>
               </a:rPr>
-              <a:t>●  MONITORING ACTIVE</a:t>
-            </a:r>
-          </a:p>
-        </p:txBody>
-      </p:sp>
-      <p:sp>
-        <p:nvSpPr>
-          <p:cNvPr id="7" name="TextBox 6"/>
-          <p:cNvSpPr txBox="1"/>
-          <p:nvPr/>
-        </p:nvSpPr>
-        <p:spPr>
-          <a:xfrm>
-            <a:off x="2871216" y="64008"/>
-            <a:ext cx="5120640" cy="201168"/>
-          </a:xfrm>
-          <a:prstGeom prst="rect">
-            <a:avLst/>
-          </a:prstGeom>
-          <a:noFill/>
-        </p:spPr>
-        <p:txBody>
-          <a:bodyPr wrap="square">
-            <a:spAutoFit/>
-          </a:bodyPr>
-          <a:lstStyle/>
-          <a:p>
-            <a:pPr algn="l"/>
-            <a:r>
-              <a:rPr sz="750" b="0" i="0">
-                <a:solidFill>
-                  <a:srgbClr val="AAB4CC"/>
-                </a:solidFill>
-                <a:latin typeface="Calibri"/>
-              </a:rPr>
-              <a:t>1 signal detected  ·  System active  ·  Readiness Protocols armed</a:t>
-            </a:r>
-          </a:p>
-        </p:txBody>
-      </p:sp>
-      <p:sp>
-        <p:nvSpPr>
-          <p:cNvPr id="8" name="TextBox 7"/>
-          <p:cNvSpPr txBox="1"/>
-          <p:nvPr/>
-        </p:nvSpPr>
-        <p:spPr>
-          <a:xfrm>
-            <a:off x="8686800" y="64008"/>
-            <a:ext cx="3291840" cy="201168"/>
-          </a:xfrm>
-          <a:prstGeom prst="rect">
-            <a:avLst/>
-          </a:prstGeom>
-          <a:noFill/>
-        </p:spPr>
-        <p:txBody>
-          <a:bodyPr wrap="square">
-            <a:spAutoFit/>
-          </a:bodyPr>
-          <a:lstStyle/>
-          <a:p>
-            <a:pPr algn="r"/>
-            <a:r>
-              <a:rPr sz="750" b="1" i="0">
-                <a:solidFill>
-                  <a:srgbClr val="C9A84C"/>
-                </a:solidFill>
-                <a:latin typeface="Calibri"/>
-              </a:rPr>
-              <a:t>SEE IT EXECUTE IN 12 MINUTES  →</a:t>
-            </a:r>
-          </a:p>
-        </p:txBody>
-      </p:sp>
-      <p:sp>
-        <p:nvSpPr>
-          <p:cNvPr id="9" name="Rectangle 8"/>
+              <a:t>  01  /  08</a:t>
+            </a:r>
+          </a:p>
+        </p:txBody>
+      </p:sp>
+      <p:sp>
+        <p:nvSpPr>
+          <p:cNvPr id="7" name="Rectangle 6"/>
           <p:cNvSpPr/>
           <p:nvPr/>
         </p:nvSpPr>
@@ -6779,7 +6518,7 @@
       </p:sp>
       <p:sp>
         <p:nvSpPr>
-          <p:cNvPr id="10" name="Rectangle 9"/>
+          <p:cNvPr id="8" name="Rectangle 7"/>
           <p:cNvSpPr/>
           <p:nvPr/>
         </p:nvSpPr>
@@ -6822,7 +6561,7 @@
       </p:sp>
       <p:pic>
         <p:nvPicPr>
-          <p:cNvPr id="11" name="Picture 10" descr="vm_logo_footer.png"/>
+          <p:cNvPr id="9" name="Picture 8" descr="vm_logo_footer.png"/>
           <p:cNvPicPr>
             <a:picLocks noChangeAspect="1"/>
           </p:cNvPicPr>
@@ -6846,7 +6585,7 @@
       </p:pic>
       <p:sp>
         <p:nvSpPr>
-          <p:cNvPr id="12" name="TextBox 11"/>
+          <p:cNvPr id="10" name="TextBox 9"/>
           <p:cNvSpPr txBox="1"/>
           <p:nvPr/>
         </p:nvSpPr>
@@ -6874,21 +6613,21 @@
                 </a:solidFill>
                 <a:latin typeface="Calibri"/>
               </a:rPr>
-              <a:t>  01  /  08</a:t>
-            </a:r>
-          </a:p>
-        </p:txBody>
-      </p:sp>
-      <p:sp>
-        <p:nvSpPr>
-          <p:cNvPr id="13" name="TextBox 12"/>
+              <a:t>01  /  08</a:t>
+            </a:r>
+          </a:p>
+        </p:txBody>
+      </p:sp>
+      <p:sp>
+        <p:nvSpPr>
+          <p:cNvPr id="11" name="TextBox 10"/>
           <p:cNvSpPr txBox="1"/>
           <p:nvPr/>
         </p:nvSpPr>
         <p:spPr>
           <a:xfrm>
             <a:off x="2194560" y="6592824"/>
-            <a:ext cx="7955279" cy="182880"/>
+            <a:ext cx="8165592" cy="182880"/>
           </a:xfrm>
           <a:prstGeom prst="rect">
             <a:avLst/>
@@ -6916,14 +6655,14 @@
       </p:sp>
       <p:sp>
         <p:nvSpPr>
-          <p:cNvPr id="14" name="Rectangle 13"/>
+          <p:cNvPr id="12" name="Rectangle 11"/>
           <p:cNvSpPr/>
           <p:nvPr/>
         </p:nvSpPr>
         <p:spPr>
           <a:xfrm>
-            <a:off x="365760" y="448056"/>
-            <a:ext cx="310896" cy="7315"/>
+            <a:off x="365760" y="269748"/>
+            <a:ext cx="256032" cy="7315"/>
           </a:xfrm>
           <a:prstGeom prst="rect">
             <a:avLst/>
@@ -6959,14 +6698,14 @@
       </p:sp>
       <p:sp>
         <p:nvSpPr>
-          <p:cNvPr id="15" name="TextBox 14"/>
+          <p:cNvPr id="13" name="TextBox 12"/>
           <p:cNvSpPr txBox="1"/>
           <p:nvPr/>
         </p:nvSpPr>
         <p:spPr>
           <a:xfrm>
-            <a:off x="713232" y="384048"/>
-            <a:ext cx="5376672" cy="201168"/>
+            <a:off x="658368" y="201168"/>
+            <a:ext cx="5760720" cy="164592"/>
           </a:xfrm>
           <a:prstGeom prst="rect">
             <a:avLst/>
@@ -6987,21 +6726,21 @@
                 </a:solidFill>
                 <a:latin typeface="Calibri"/>
               </a:rPr>
-              <a:t>  THE PROBLEM</a:t>
-            </a:r>
-          </a:p>
-        </p:txBody>
-      </p:sp>
-      <p:sp>
-        <p:nvSpPr>
-          <p:cNvPr id="16" name="TextBox 15"/>
+              <a:t>   THE PROBLEM</a:t>
+            </a:r>
+          </a:p>
+        </p:txBody>
+      </p:sp>
+      <p:sp>
+        <p:nvSpPr>
+          <p:cNvPr id="14" name="TextBox 13"/>
           <p:cNvSpPr txBox="1"/>
           <p:nvPr/>
         </p:nvSpPr>
         <p:spPr>
           <a:xfrm>
-            <a:off x="384048" y="566928"/>
-            <a:ext cx="5943600" cy="462280"/>
+            <a:off x="384048" y="365760"/>
+            <a:ext cx="5943600" cy="435864"/>
           </a:xfrm>
           <a:prstGeom prst="rect">
             <a:avLst/>
@@ -7016,7 +6755,7 @@
           <a:p>
             <a:pPr algn="l"/>
             <a:r>
-              <a:rPr sz="2800" b="1" i="0">
+              <a:rPr sz="2600" b="1" i="0">
                 <a:solidFill>
                   <a:srgbClr val="FFFFFF"/>
                 </a:solidFill>
@@ -7029,14 +6768,14 @@
       </p:sp>
       <p:sp>
         <p:nvSpPr>
-          <p:cNvPr id="17" name="TextBox 16"/>
+          <p:cNvPr id="15" name="TextBox 14"/>
           <p:cNvSpPr txBox="1"/>
           <p:nvPr/>
         </p:nvSpPr>
         <p:spPr>
           <a:xfrm>
-            <a:off x="384048" y="1029208"/>
-            <a:ext cx="5943600" cy="462280"/>
+            <a:off x="384048" y="801624"/>
+            <a:ext cx="5943600" cy="435864"/>
           </a:xfrm>
           <a:prstGeom prst="rect">
             <a:avLst/>
@@ -7051,7 +6790,7 @@
           <a:p>
             <a:pPr algn="l"/>
             <a:r>
-              <a:rPr sz="2800" b="1" i="0">
+              <a:rPr sz="2600" b="1" i="0">
                 <a:solidFill>
                   <a:srgbClr val="C9A84C"/>
                 </a:solidFill>
@@ -7064,14 +6803,14 @@
       </p:sp>
       <p:sp>
         <p:nvSpPr>
-          <p:cNvPr id="18" name="Rectangle 17"/>
+          <p:cNvPr id="16" name="Rectangle 15"/>
           <p:cNvSpPr/>
           <p:nvPr/>
         </p:nvSpPr>
         <p:spPr>
           <a:xfrm>
-            <a:off x="384048" y="1601216"/>
-            <a:ext cx="5943600" cy="9144"/>
+            <a:off x="384048" y="1328928"/>
+            <a:ext cx="6126480" cy="9144"/>
           </a:xfrm>
           <a:prstGeom prst="rect">
             <a:avLst/>
@@ -7107,14 +6846,14 @@
       </p:sp>
       <p:sp>
         <p:nvSpPr>
-          <p:cNvPr id="19" name="Rectangle 18"/>
+          <p:cNvPr id="17" name="Rectangle 16"/>
           <p:cNvSpPr/>
           <p:nvPr/>
         </p:nvSpPr>
         <p:spPr>
           <a:xfrm>
-            <a:off x="384048" y="1747418"/>
-            <a:ext cx="2596896" cy="1554480"/>
+            <a:off x="384048" y="1474927"/>
+            <a:ext cx="2596896" cy="1536192"/>
           </a:xfrm>
           <a:prstGeom prst="rect">
             <a:avLst/>
@@ -7150,13 +6889,13 @@
       </p:sp>
       <p:sp>
         <p:nvSpPr>
-          <p:cNvPr id="20" name="Rectangle 19"/>
+          <p:cNvPr id="18" name="Rectangle 17"/>
           <p:cNvSpPr/>
           <p:nvPr/>
         </p:nvSpPr>
         <p:spPr>
           <a:xfrm>
-            <a:off x="384048" y="1747418"/>
+            <a:off x="384048" y="1474927"/>
             <a:ext cx="2596896" cy="23774"/>
           </a:xfrm>
           <a:prstGeom prst="rect">
@@ -7193,13 +6932,13 @@
       </p:sp>
       <p:sp>
         <p:nvSpPr>
-          <p:cNvPr id="21" name="TextBox 20"/>
+          <p:cNvPr id="19" name="TextBox 18"/>
           <p:cNvSpPr txBox="1"/>
           <p:nvPr/>
         </p:nvSpPr>
         <p:spPr>
           <a:xfrm>
-            <a:off x="512064" y="1802282"/>
+            <a:off x="512064" y="1529791"/>
             <a:ext cx="2377440" cy="201168"/>
           </a:xfrm>
           <a:prstGeom prst="rect">
@@ -7228,14 +6967,14 @@
       </p:sp>
       <p:sp>
         <p:nvSpPr>
-          <p:cNvPr id="22" name="TextBox 21"/>
+          <p:cNvPr id="20" name="TextBox 19"/>
           <p:cNvSpPr txBox="1"/>
           <p:nvPr/>
         </p:nvSpPr>
         <p:spPr>
           <a:xfrm>
-            <a:off x="512064" y="2021738"/>
-            <a:ext cx="2377440" cy="640080"/>
+            <a:off x="512064" y="1749247"/>
+            <a:ext cx="2377440" cy="621792"/>
           </a:xfrm>
           <a:prstGeom prst="rect">
             <a:avLst/>
@@ -7250,7 +6989,7 @@
           <a:p>
             <a:pPr algn="l"/>
             <a:r>
-              <a:rPr sz="3600" b="1" i="0">
+              <a:rPr sz="3400" b="1" i="0">
                 <a:solidFill>
                   <a:srgbClr val="FFFFFF"/>
                 </a:solidFill>
@@ -7263,13 +7002,13 @@
       </p:sp>
       <p:sp>
         <p:nvSpPr>
-          <p:cNvPr id="23" name="TextBox 22"/>
+          <p:cNvPr id="21" name="TextBox 20"/>
           <p:cNvSpPr txBox="1"/>
           <p:nvPr/>
         </p:nvSpPr>
         <p:spPr>
           <a:xfrm>
-            <a:off x="512064" y="2680106"/>
+            <a:off x="512064" y="2389327"/>
             <a:ext cx="2377440" cy="548640"/>
           </a:xfrm>
           <a:prstGeom prst="rect">
@@ -7293,7 +7032,7 @@
               </a:rPr>
               <a:t>Signal identified.
 Pattern matched.
-Protocol matched.
+Protocol staged.
 Score computed.</a:t>
             </a:r>
           </a:p>
@@ -7301,13 +7040,13 @@
       </p:sp>
       <p:sp>
         <p:nvSpPr>
-          <p:cNvPr id="24" name="TextBox 23"/>
+          <p:cNvPr id="22" name="TextBox 21"/>
           <p:cNvSpPr txBox="1"/>
           <p:nvPr/>
         </p:nvSpPr>
         <p:spPr>
           <a:xfrm>
-            <a:off x="3035808" y="2186330"/>
+            <a:off x="3035808" y="1895551"/>
             <a:ext cx="457200" cy="548640"/>
           </a:xfrm>
           <a:prstGeom prst="rect">
@@ -7336,14 +7075,14 @@
       </p:sp>
       <p:sp>
         <p:nvSpPr>
-          <p:cNvPr id="25" name="Rectangle 24"/>
+          <p:cNvPr id="23" name="Rectangle 22"/>
           <p:cNvSpPr/>
           <p:nvPr/>
         </p:nvSpPr>
         <p:spPr>
           <a:xfrm>
-            <a:off x="3529584" y="1747418"/>
-            <a:ext cx="2487168" cy="1554480"/>
+            <a:off x="3529584" y="1474927"/>
+            <a:ext cx="2487168" cy="1536192"/>
           </a:xfrm>
           <a:prstGeom prst="rect">
             <a:avLst/>
@@ -7379,20 +7118,20 @@
       </p:sp>
       <p:sp>
         <p:nvSpPr>
-          <p:cNvPr id="26" name="Rectangle 25"/>
+          <p:cNvPr id="24" name="Rectangle 23"/>
           <p:cNvSpPr/>
           <p:nvPr/>
         </p:nvSpPr>
         <p:spPr>
           <a:xfrm>
-            <a:off x="3529584" y="1747418"/>
+            <a:off x="3529584" y="1474927"/>
             <a:ext cx="2487168" cy="23774"/>
           </a:xfrm>
           <a:prstGeom prst="rect">
             <a:avLst/>
           </a:prstGeom>
           <a:solidFill>
-            <a:srgbClr val="992222"/>
+            <a:srgbClr val="FF6666"/>
           </a:solidFill>
           <a:ln>
             <a:noFill/>
@@ -7422,13 +7161,13 @@
       </p:sp>
       <p:sp>
         <p:nvSpPr>
-          <p:cNvPr id="27" name="TextBox 26"/>
+          <p:cNvPr id="25" name="TextBox 24"/>
           <p:cNvSpPr txBox="1"/>
           <p:nvPr/>
         </p:nvSpPr>
         <p:spPr>
           <a:xfrm>
-            <a:off x="3657600" y="1802282"/>
+            <a:off x="3657600" y="1529791"/>
             <a:ext cx="2286000" cy="201168"/>
           </a:xfrm>
           <a:prstGeom prst="rect">
@@ -7457,14 +7196,14 @@
       </p:sp>
       <p:sp>
         <p:nvSpPr>
-          <p:cNvPr id="28" name="TextBox 27"/>
+          <p:cNvPr id="26" name="TextBox 25"/>
           <p:cNvSpPr txBox="1"/>
           <p:nvPr/>
         </p:nvSpPr>
         <p:spPr>
           <a:xfrm>
-            <a:off x="3657600" y="2021738"/>
-            <a:ext cx="2286000" cy="640080"/>
+            <a:off x="3657600" y="1749247"/>
+            <a:ext cx="2286000" cy="621792"/>
           </a:xfrm>
           <a:prstGeom prst="rect">
             <a:avLst/>
@@ -7479,7 +7218,7 @@
           <a:p>
             <a:pPr algn="l"/>
             <a:r>
-              <a:rPr sz="3600" b="1" i="0">
+              <a:rPr sz="3400" b="1" i="0">
                 <a:solidFill>
                   <a:srgbClr val="FF8888"/>
                 </a:solidFill>
@@ -7492,13 +7231,13 @@
       </p:sp>
       <p:sp>
         <p:nvSpPr>
-          <p:cNvPr id="29" name="TextBox 28"/>
+          <p:cNvPr id="27" name="TextBox 26"/>
           <p:cNvSpPr txBox="1"/>
           <p:nvPr/>
         </p:nvSpPr>
         <p:spPr>
           <a:xfrm>
-            <a:off x="3657600" y="2680106"/>
+            <a:off x="3657600" y="2389327"/>
             <a:ext cx="2286000" cy="548640"/>
           </a:xfrm>
           <a:prstGeom prst="rect">
@@ -7530,13 +7269,13 @@
       </p:sp>
       <p:sp>
         <p:nvSpPr>
-          <p:cNvPr id="30" name="TextBox 29"/>
+          <p:cNvPr id="28" name="TextBox 27"/>
           <p:cNvSpPr txBox="1"/>
           <p:nvPr/>
         </p:nvSpPr>
         <p:spPr>
           <a:xfrm>
-            <a:off x="384048" y="3466490"/>
+            <a:off x="384048" y="3157423"/>
             <a:ext cx="5852160" cy="365760"/>
           </a:xfrm>
           <a:prstGeom prst="rect">
@@ -7565,13 +7304,13 @@
       </p:sp>
       <p:sp>
         <p:nvSpPr>
-          <p:cNvPr id="31" name="TextBox 30"/>
+          <p:cNvPr id="29" name="TextBox 28"/>
           <p:cNvSpPr txBox="1"/>
           <p:nvPr/>
         </p:nvSpPr>
         <p:spPr>
           <a:xfrm>
-            <a:off x="384048" y="3868826"/>
+            <a:off x="384048" y="3559759"/>
             <a:ext cx="5852160" cy="365760"/>
           </a:xfrm>
           <a:prstGeom prst="rect">
@@ -7600,13 +7339,13 @@
       </p:sp>
       <p:sp>
         <p:nvSpPr>
-          <p:cNvPr id="32" name="TextBox 31"/>
+          <p:cNvPr id="30" name="TextBox 29"/>
           <p:cNvSpPr txBox="1"/>
           <p:nvPr/>
         </p:nvSpPr>
         <p:spPr>
           <a:xfrm>
-            <a:off x="384048" y="4271162"/>
+            <a:off x="384048" y="3962095"/>
             <a:ext cx="5852160" cy="365760"/>
           </a:xfrm>
           <a:prstGeom prst="rect">
@@ -7635,14 +7374,14 @@
       </p:sp>
       <p:sp>
         <p:nvSpPr>
-          <p:cNvPr id="33" name="Rectangle 32"/>
+          <p:cNvPr id="31" name="Rectangle 30"/>
           <p:cNvSpPr/>
           <p:nvPr/>
         </p:nvSpPr>
         <p:spPr>
           <a:xfrm>
-            <a:off x="384048" y="4783226"/>
-            <a:ext cx="5760720" cy="713232"/>
+            <a:off x="384048" y="4455871"/>
+            <a:ext cx="5760720" cy="694944"/>
           </a:xfrm>
           <a:prstGeom prst="rect">
             <a:avLst/>
@@ -7678,13 +7417,13 @@
       </p:sp>
       <p:sp>
         <p:nvSpPr>
-          <p:cNvPr id="34" name="Rectangle 33"/>
+          <p:cNvPr id="32" name="Rectangle 31"/>
           <p:cNvSpPr/>
           <p:nvPr/>
         </p:nvSpPr>
         <p:spPr>
           <a:xfrm>
-            <a:off x="384048" y="4783226"/>
+            <a:off x="384048" y="4455871"/>
             <a:ext cx="5760720" cy="21945"/>
           </a:xfrm>
           <a:prstGeom prst="rect">
@@ -7721,13 +7460,13 @@
       </p:sp>
       <p:sp>
         <p:nvSpPr>
-          <p:cNvPr id="35" name="TextBox 34"/>
+          <p:cNvPr id="33" name="TextBox 32"/>
           <p:cNvSpPr txBox="1"/>
           <p:nvPr/>
         </p:nvSpPr>
         <p:spPr>
           <a:xfrm>
-            <a:off x="512064" y="4828946"/>
+            <a:off x="512064" y="4501591"/>
             <a:ext cx="5559552" cy="256032"/>
           </a:xfrm>
           <a:prstGeom prst="rect">
@@ -7756,13 +7495,13 @@
       </p:sp>
       <p:sp>
         <p:nvSpPr>
-          <p:cNvPr id="36" name="TextBox 35"/>
+          <p:cNvPr id="34" name="TextBox 33"/>
           <p:cNvSpPr txBox="1"/>
           <p:nvPr/>
         </p:nvSpPr>
         <p:spPr>
           <a:xfrm>
-            <a:off x="512064" y="5112410"/>
+            <a:off x="512064" y="4785055"/>
             <a:ext cx="5559552" cy="274320"/>
           </a:xfrm>
           <a:prstGeom prst="rect">
@@ -7784,14 +7523,14 @@
                 </a:solidFill>
                 <a:latin typeface="Calibri"/>
               </a:rPr>
-              <a:t>The 30-day mobilization gap is not a strategy problem. It is an architecture problem. We eliminate it permanently.</a:t>
-            </a:r>
-          </a:p>
-        </p:txBody>
-      </p:sp>
-      <p:sp>
-        <p:nvSpPr>
-          <p:cNvPr id="37" name="Rectangle 36"/>
+              <a:t>The 30-day mobilization gap is an architecture problem. We eliminate it permanently.</a:t>
+            </a:r>
+          </a:p>
+        </p:txBody>
+      </p:sp>
+      <p:sp>
+        <p:nvSpPr>
+          <p:cNvPr id="35" name="Rectangle 34"/>
           <p:cNvSpPr/>
           <p:nvPr/>
         </p:nvSpPr>
@@ -7834,7 +7573,7 @@
       </p:sp>
       <p:sp>
         <p:nvSpPr>
-          <p:cNvPr id="38" name="Rectangle 37"/>
+          <p:cNvPr id="36" name="Rectangle 35"/>
           <p:cNvSpPr/>
           <p:nvPr/>
         </p:nvSpPr>
@@ -7877,7 +7616,7 @@
       </p:sp>
       <p:pic>
         <p:nvPicPr>
-          <p:cNvPr id="39" name="Picture 38" descr="hq_command_tower.jpg"/>
+          <p:cNvPr id="37" name="Picture 36" descr="hq_command_tower.jpg"/>
           <p:cNvPicPr>
             <a:picLocks noChangeAspect="1"/>
           </p:cNvPicPr>
@@ -7913,7 +7652,7 @@
     <p:bg>
       <p:bgPr>
         <a:solidFill>
-          <a:srgbClr val="05081E"/>
+          <a:srgbClr val="04071E"/>
         </a:solidFill>
         <a:effectLst/>
       </p:bgPr>
@@ -7927,7 +7666,7 @@
       <p:grpSpPr/>
       <p:pic>
         <p:nvPicPr>
-          <p:cNvPr id="2" name="Picture 1" descr="bg_stats.jpg"/>
+          <p:cNvPr id="2" name="Picture 1" descr="bg_cover_clean.jpg"/>
           <p:cNvPicPr>
             <a:picLocks noChangeAspect="1"/>
           </p:cNvPicPr>
@@ -7964,7 +7703,7 @@
             <a:avLst/>
           </a:prstGeom>
           <a:solidFill>
-            <a:srgbClr val="05081E"/>
+            <a:srgbClr val="04071E"/>
           </a:solidFill>
           <a:ln>
             <a:noFill/>
@@ -8001,13 +7740,13 @@
         <p:spPr>
           <a:xfrm>
             <a:off x="0" y="0"/>
-            <a:ext cx="12188952" cy="329184"/>
+            <a:ext cx="12188952" cy="47548"/>
           </a:xfrm>
           <a:prstGeom prst="rect">
             <a:avLst/>
           </a:prstGeom>
           <a:solidFill>
-            <a:srgbClr val="04071C"/>
+            <a:srgbClr val="C9A84C"/>
           </a:solidFill>
           <a:ln>
             <a:noFill/>
@@ -8043,8 +7782,8 @@
         </p:nvSpPr>
         <p:spPr>
           <a:xfrm>
-            <a:off x="256032" y="64008"/>
-            <a:ext cx="2560320" cy="201168"/>
+            <a:off x="0" y="54864"/>
+            <a:ext cx="11914632" cy="164592"/>
           </a:xfrm>
           <a:prstGeom prst="rect">
             <a:avLst/>
@@ -8057,92 +7796,22 @@
           </a:bodyPr>
           <a:lstStyle/>
           <a:p>
-            <a:pPr algn="l"/>
-            <a:r>
-              <a:rPr sz="800" b="1" i="0">
-                <a:solidFill>
-                  <a:srgbClr val="2B8A6E"/>
+            <a:pPr algn="r"/>
+            <a:r>
+              <a:rPr sz="750" b="1" i="0">
+                <a:solidFill>
+                  <a:srgbClr val="0A0F2E"/>
                 </a:solidFill>
                 <a:latin typeface="Calibri"/>
               </a:rPr>
-              <a:t>●  MONITORING ACTIVE</a:t>
-            </a:r>
-          </a:p>
-        </p:txBody>
-      </p:sp>
-      <p:sp>
-        <p:nvSpPr>
-          <p:cNvPr id="6" name="TextBox 5"/>
-          <p:cNvSpPr txBox="1"/>
-          <p:nvPr/>
-        </p:nvSpPr>
-        <p:spPr>
-          <a:xfrm>
-            <a:off x="2871216" y="64008"/>
-            <a:ext cx="5120640" cy="201168"/>
-          </a:xfrm>
-          <a:prstGeom prst="rect">
-            <a:avLst/>
-          </a:prstGeom>
-          <a:noFill/>
-        </p:spPr>
-        <p:txBody>
-          <a:bodyPr wrap="square">
-            <a:spAutoFit/>
-          </a:bodyPr>
-          <a:lstStyle/>
-          <a:p>
-            <a:pPr algn="l"/>
-            <a:r>
-              <a:rPr sz="750" b="0" i="0">
-                <a:solidFill>
-                  <a:srgbClr val="AAB4CC"/>
-                </a:solidFill>
-                <a:latin typeface="Calibri"/>
-              </a:rPr>
-              <a:t>1 signal detected  ·  System active  ·  Readiness Protocols armed</a:t>
-            </a:r>
-          </a:p>
-        </p:txBody>
-      </p:sp>
-      <p:sp>
-        <p:nvSpPr>
-          <p:cNvPr id="7" name="TextBox 6"/>
-          <p:cNvSpPr txBox="1"/>
-          <p:nvPr/>
-        </p:nvSpPr>
-        <p:spPr>
-          <a:xfrm>
-            <a:off x="8686800" y="64008"/>
-            <a:ext cx="3291840" cy="201168"/>
-          </a:xfrm>
-          <a:prstGeom prst="rect">
-            <a:avLst/>
-          </a:prstGeom>
-          <a:noFill/>
-        </p:spPr>
-        <p:txBody>
-          <a:bodyPr wrap="square">
-            <a:spAutoFit/>
-          </a:bodyPr>
-          <a:lstStyle/>
-          <a:p>
-            <a:pPr algn="r"/>
-            <a:r>
-              <a:rPr sz="750" b="1" i="0">
-                <a:solidFill>
-                  <a:srgbClr val="C9A84C"/>
-                </a:solidFill>
-                <a:latin typeface="Calibri"/>
-              </a:rPr>
-              <a:t>SEE IT EXECUTE IN 12 MINUTES  →</a:t>
-            </a:r>
-          </a:p>
-        </p:txBody>
-      </p:sp>
-      <p:sp>
-        <p:nvSpPr>
-          <p:cNvPr id="8" name="Rectangle 7"/>
+              <a:t>  02  /  08</a:t>
+            </a:r>
+          </a:p>
+        </p:txBody>
+      </p:sp>
+      <p:sp>
+        <p:nvSpPr>
+          <p:cNvPr id="6" name="Rectangle 5"/>
           <p:cNvSpPr/>
           <p:nvPr/>
         </p:nvSpPr>
@@ -8185,7 +7854,7 @@
       </p:sp>
       <p:sp>
         <p:nvSpPr>
-          <p:cNvPr id="9" name="Rectangle 8"/>
+          <p:cNvPr id="7" name="Rectangle 6"/>
           <p:cNvSpPr/>
           <p:nvPr/>
         </p:nvSpPr>
@@ -8228,7 +7897,7 @@
       </p:sp>
       <p:pic>
         <p:nvPicPr>
-          <p:cNvPr id="10" name="Picture 9" descr="vm_logo_footer.png"/>
+          <p:cNvPr id="8" name="Picture 7" descr="vm_logo_footer.png"/>
           <p:cNvPicPr>
             <a:picLocks noChangeAspect="1"/>
           </p:cNvPicPr>
@@ -8252,7 +7921,7 @@
       </p:pic>
       <p:sp>
         <p:nvSpPr>
-          <p:cNvPr id="11" name="TextBox 10"/>
+          <p:cNvPr id="9" name="TextBox 8"/>
           <p:cNvSpPr txBox="1"/>
           <p:nvPr/>
         </p:nvSpPr>
@@ -8280,21 +7949,21 @@
                 </a:solidFill>
                 <a:latin typeface="Calibri"/>
               </a:rPr>
-              <a:t>  02  /  08</a:t>
-            </a:r>
-          </a:p>
-        </p:txBody>
-      </p:sp>
-      <p:sp>
-        <p:nvSpPr>
-          <p:cNvPr id="12" name="TextBox 11"/>
+              <a:t>02  /  08</a:t>
+            </a:r>
+          </a:p>
+        </p:txBody>
+      </p:sp>
+      <p:sp>
+        <p:nvSpPr>
+          <p:cNvPr id="10" name="TextBox 9"/>
           <p:cNvSpPr txBox="1"/>
           <p:nvPr/>
         </p:nvSpPr>
         <p:spPr>
           <a:xfrm>
             <a:off x="2194560" y="6592824"/>
-            <a:ext cx="7955279" cy="182880"/>
+            <a:ext cx="8165592" cy="182880"/>
           </a:xfrm>
           <a:prstGeom prst="rect">
             <a:avLst/>
@@ -8322,14 +7991,14 @@
       </p:sp>
       <p:sp>
         <p:nvSpPr>
-          <p:cNvPr id="13" name="Rectangle 12"/>
+          <p:cNvPr id="11" name="Rectangle 10"/>
           <p:cNvSpPr/>
           <p:nvPr/>
         </p:nvSpPr>
         <p:spPr>
           <a:xfrm>
-            <a:off x="365760" y="448056"/>
-            <a:ext cx="310896" cy="7315"/>
+            <a:off x="365760" y="269748"/>
+            <a:ext cx="256032" cy="7315"/>
           </a:xfrm>
           <a:prstGeom prst="rect">
             <a:avLst/>
@@ -8365,14 +8034,14 @@
       </p:sp>
       <p:sp>
         <p:nvSpPr>
-          <p:cNvPr id="14" name="TextBox 13"/>
+          <p:cNvPr id="12" name="TextBox 11"/>
           <p:cNvSpPr txBox="1"/>
           <p:nvPr/>
         </p:nvSpPr>
         <p:spPr>
           <a:xfrm>
-            <a:off x="713232" y="384048"/>
-            <a:ext cx="11137392" cy="201168"/>
+            <a:off x="658368" y="201168"/>
+            <a:ext cx="11521440" cy="164592"/>
           </a:xfrm>
           <a:prstGeom prst="rect">
             <a:avLst/>
@@ -8393,21 +8062,21 @@
                 </a:solidFill>
                 <a:latin typeface="Calibri"/>
               </a:rPr>
-              <a:t>  THE FOUNDER</a:t>
-            </a:r>
-          </a:p>
-        </p:txBody>
-      </p:sp>
-      <p:sp>
-        <p:nvSpPr>
-          <p:cNvPr id="15" name="TextBox 14"/>
+              <a:t>   THE FOUNDER</a:t>
+            </a:r>
+          </a:p>
+        </p:txBody>
+      </p:sp>
+      <p:sp>
+        <p:nvSpPr>
+          <p:cNvPr id="13" name="TextBox 12"/>
           <p:cNvSpPr txBox="1"/>
           <p:nvPr/>
         </p:nvSpPr>
         <p:spPr>
           <a:xfrm>
-            <a:off x="384048" y="566928"/>
-            <a:ext cx="11521440" cy="495300"/>
+            <a:off x="384048" y="365760"/>
+            <a:ext cx="11521440" cy="469392"/>
           </a:xfrm>
           <a:prstGeom prst="rect">
             <a:avLst/>
@@ -8422,7 +8091,7 @@
           <a:p>
             <a:pPr algn="l"/>
             <a:r>
-              <a:rPr sz="3000" b="1" i="0">
+              <a:rPr sz="2800" b="1" i="0">
                 <a:solidFill>
                   <a:srgbClr val="C9A84C"/>
                 </a:solidFill>
@@ -8435,14 +8104,14 @@
       </p:sp>
       <p:sp>
         <p:nvSpPr>
-          <p:cNvPr id="16" name="TextBox 15"/>
+          <p:cNvPr id="14" name="TextBox 13"/>
           <p:cNvSpPr txBox="1"/>
           <p:nvPr/>
         </p:nvSpPr>
         <p:spPr>
           <a:xfrm>
-            <a:off x="384048" y="1062228"/>
-            <a:ext cx="11521440" cy="495300"/>
+            <a:off x="384048" y="835152"/>
+            <a:ext cx="11521440" cy="469392"/>
           </a:xfrm>
           <a:prstGeom prst="rect">
             <a:avLst/>
@@ -8457,7 +8126,7 @@
           <a:p>
             <a:pPr algn="l"/>
             <a:r>
-              <a:rPr sz="3000" b="1" i="0">
+              <a:rPr sz="2800" b="1" i="0">
                 <a:solidFill>
                   <a:srgbClr val="FFFFFF"/>
                 </a:solidFill>
@@ -8470,14 +8139,14 @@
       </p:sp>
       <p:sp>
         <p:nvSpPr>
-          <p:cNvPr id="17" name="Rectangle 16"/>
+          <p:cNvPr id="15" name="Rectangle 14"/>
           <p:cNvSpPr/>
           <p:nvPr/>
         </p:nvSpPr>
         <p:spPr>
           <a:xfrm>
-            <a:off x="384048" y="1667256"/>
-            <a:ext cx="11393424" cy="9144"/>
+            <a:off x="384048" y="1395984"/>
+            <a:ext cx="11411712" cy="9144"/>
           </a:xfrm>
           <a:prstGeom prst="rect">
             <a:avLst/>
@@ -8513,13 +8182,13 @@
       </p:sp>
       <p:sp>
         <p:nvSpPr>
-          <p:cNvPr id="18" name="Rectangle 17"/>
+          <p:cNvPr id="16" name="Rectangle 15"/>
           <p:cNvSpPr/>
           <p:nvPr/>
         </p:nvSpPr>
         <p:spPr>
           <a:xfrm>
-            <a:off x="384048" y="1813255"/>
+            <a:off x="384048" y="1542592"/>
             <a:ext cx="5394960" cy="256032"/>
           </a:xfrm>
           <a:prstGeom prst="rect">
@@ -8556,13 +8225,13 @@
       </p:sp>
       <p:sp>
         <p:nvSpPr>
-          <p:cNvPr id="19" name="TextBox 18"/>
+          <p:cNvPr id="17" name="TextBox 16"/>
           <p:cNvSpPr txBox="1"/>
           <p:nvPr/>
         </p:nvSpPr>
         <p:spPr>
           <a:xfrm>
-            <a:off x="493776" y="1849831"/>
+            <a:off x="493776" y="1579168"/>
             <a:ext cx="5248656" cy="201168"/>
           </a:xfrm>
           <a:prstGeom prst="rect">
@@ -8591,13 +8260,13 @@
       </p:sp>
       <p:sp>
         <p:nvSpPr>
-          <p:cNvPr id="20" name="TextBox 19"/>
+          <p:cNvPr id="18" name="TextBox 17"/>
           <p:cNvSpPr txBox="1"/>
           <p:nvPr/>
         </p:nvSpPr>
         <p:spPr>
           <a:xfrm>
-            <a:off x="493776" y="2142439"/>
+            <a:off x="493776" y="1871776"/>
             <a:ext cx="5248656" cy="347472"/>
           </a:xfrm>
           <a:prstGeom prst="rect">
@@ -8626,13 +8295,13 @@
       </p:sp>
       <p:sp>
         <p:nvSpPr>
-          <p:cNvPr id="21" name="TextBox 20"/>
+          <p:cNvPr id="19" name="TextBox 18"/>
           <p:cNvSpPr txBox="1"/>
           <p:nvPr/>
         </p:nvSpPr>
         <p:spPr>
           <a:xfrm>
-            <a:off x="493776" y="2544775"/>
+            <a:off x="493776" y="2274112"/>
             <a:ext cx="5248656" cy="347472"/>
           </a:xfrm>
           <a:prstGeom prst="rect">
@@ -8661,13 +8330,13 @@
       </p:sp>
       <p:sp>
         <p:nvSpPr>
-          <p:cNvPr id="22" name="TextBox 21"/>
+          <p:cNvPr id="20" name="TextBox 19"/>
           <p:cNvSpPr txBox="1"/>
           <p:nvPr/>
         </p:nvSpPr>
         <p:spPr>
           <a:xfrm>
-            <a:off x="493776" y="2947111"/>
+            <a:off x="493776" y="2676448"/>
             <a:ext cx="5248656" cy="347472"/>
           </a:xfrm>
           <a:prstGeom prst="rect">
@@ -8696,13 +8365,13 @@
       </p:sp>
       <p:sp>
         <p:nvSpPr>
-          <p:cNvPr id="23" name="TextBox 22"/>
+          <p:cNvPr id="21" name="TextBox 20"/>
           <p:cNvSpPr txBox="1"/>
           <p:nvPr/>
         </p:nvSpPr>
         <p:spPr>
           <a:xfrm>
-            <a:off x="493776" y="3349447"/>
+            <a:off x="493776" y="3078784"/>
             <a:ext cx="5248656" cy="347472"/>
           </a:xfrm>
           <a:prstGeom prst="rect">
@@ -8724,20 +8393,20 @@
                 </a:solidFill>
                 <a:latin typeface="Calibri"/>
               </a:rPr>
-              <a:t>·  Built Readiness OS in 2023 to end that pattern permanently</a:t>
-            </a:r>
-          </a:p>
-        </p:txBody>
-      </p:sp>
-      <p:sp>
-        <p:nvSpPr>
-          <p:cNvPr id="24" name="Rectangle 23"/>
+              <a:t>·  Built Readiness OS in 2023 to eliminate this pattern permanently</a:t>
+            </a:r>
+          </a:p>
+        </p:txBody>
+      </p:sp>
+      <p:sp>
+        <p:nvSpPr>
+          <p:cNvPr id="22" name="Rectangle 21"/>
           <p:cNvSpPr/>
           <p:nvPr/>
         </p:nvSpPr>
         <p:spPr>
           <a:xfrm>
-            <a:off x="6492240" y="1813255"/>
+            <a:off x="6492240" y="1542592"/>
             <a:ext cx="5394960" cy="256032"/>
           </a:xfrm>
           <a:prstGeom prst="rect">
@@ -8774,13 +8443,13 @@
       </p:sp>
       <p:sp>
         <p:nvSpPr>
-          <p:cNvPr id="25" name="TextBox 24"/>
+          <p:cNvPr id="23" name="TextBox 22"/>
           <p:cNvSpPr txBox="1"/>
           <p:nvPr/>
         </p:nvSpPr>
         <p:spPr>
           <a:xfrm>
-            <a:off x="6601968" y="1849831"/>
+            <a:off x="6601968" y="1579168"/>
             <a:ext cx="5248656" cy="201168"/>
           </a:xfrm>
           <a:prstGeom prst="rect">
@@ -8809,13 +8478,13 @@
       </p:sp>
       <p:sp>
         <p:nvSpPr>
-          <p:cNvPr id="26" name="TextBox 25"/>
+          <p:cNvPr id="24" name="TextBox 23"/>
           <p:cNvSpPr txBox="1"/>
           <p:nvPr/>
         </p:nvSpPr>
         <p:spPr>
           <a:xfrm>
-            <a:off x="6601968" y="2142439"/>
+            <a:off x="6601968" y="1871776"/>
             <a:ext cx="5248656" cy="347472"/>
           </a:xfrm>
           <a:prstGeom prst="rect">
@@ -8844,13 +8513,13 @@
       </p:sp>
       <p:sp>
         <p:nvSpPr>
-          <p:cNvPr id="27" name="TextBox 26"/>
+          <p:cNvPr id="25" name="TextBox 24"/>
           <p:cNvSpPr txBox="1"/>
           <p:nvPr/>
         </p:nvSpPr>
         <p:spPr>
           <a:xfrm>
-            <a:off x="6601968" y="2544775"/>
+            <a:off x="6601968" y="2274112"/>
             <a:ext cx="5248656" cy="347472"/>
           </a:xfrm>
           <a:prstGeom prst="rect">
@@ -8872,20 +8541,20 @@
                 </a:solidFill>
                 <a:latin typeface="Calibri"/>
               </a:rPr>
-              <a:t>·  40-second play clock — full response, zero committee meetings</a:t>
-            </a:r>
-          </a:p>
-        </p:txBody>
-      </p:sp>
-      <p:sp>
-        <p:nvSpPr>
-          <p:cNvPr id="28" name="TextBox 27"/>
+              <a:t>·  40-second play clock — full team response, zero committee meetings</a:t>
+            </a:r>
+          </a:p>
+        </p:txBody>
+      </p:sp>
+      <p:sp>
+        <p:nvSpPr>
+          <p:cNvPr id="26" name="TextBox 25"/>
           <p:cNvSpPr txBox="1"/>
           <p:nvPr/>
         </p:nvSpPr>
         <p:spPr>
           <a:xfrm>
-            <a:off x="6601968" y="2947111"/>
+            <a:off x="6601968" y="2676448"/>
             <a:ext cx="5248656" cy="347472"/>
           </a:xfrm>
           <a:prstGeom prst="rect">
@@ -8914,13 +8583,13 @@
       </p:sp>
       <p:sp>
         <p:nvSpPr>
-          <p:cNvPr id="29" name="TextBox 28"/>
+          <p:cNvPr id="27" name="TextBox 26"/>
           <p:cNvSpPr txBox="1"/>
           <p:nvPr/>
         </p:nvSpPr>
         <p:spPr>
           <a:xfrm>
-            <a:off x="6601968" y="3349447"/>
+            <a:off x="6601968" y="3078784"/>
             <a:ext cx="5248656" cy="347472"/>
           </a:xfrm>
           <a:prstGeom prst="rect">
@@ -8949,14 +8618,14 @@
       </p:sp>
       <p:sp>
         <p:nvSpPr>
-          <p:cNvPr id="30" name="Rectangle 29"/>
+          <p:cNvPr id="28" name="Rectangle 27"/>
           <p:cNvSpPr/>
           <p:nvPr/>
         </p:nvSpPr>
         <p:spPr>
           <a:xfrm>
-            <a:off x="384048" y="3879799"/>
-            <a:ext cx="11393424" cy="274320"/>
+            <a:off x="384048" y="3590848"/>
+            <a:ext cx="11411712" cy="274320"/>
           </a:xfrm>
           <a:prstGeom prst="rect">
             <a:avLst/>
@@ -8992,14 +8661,14 @@
       </p:sp>
       <p:sp>
         <p:nvSpPr>
-          <p:cNvPr id="31" name="TextBox 30"/>
+          <p:cNvPr id="29" name="TextBox 28"/>
           <p:cNvSpPr txBox="1"/>
           <p:nvPr/>
         </p:nvSpPr>
         <p:spPr>
           <a:xfrm>
-            <a:off x="512064" y="3925519"/>
-            <a:ext cx="11210544" cy="201168"/>
+            <a:off x="512064" y="3636568"/>
+            <a:ext cx="11228832" cy="201168"/>
           </a:xfrm>
           <a:prstGeom prst="rect">
             <a:avLst/>
@@ -9027,14 +8696,14 @@
       </p:sp>
       <p:sp>
         <p:nvSpPr>
-          <p:cNvPr id="32" name="Rectangle 31"/>
+          <p:cNvPr id="30" name="Rectangle 29"/>
           <p:cNvSpPr/>
           <p:nvPr/>
         </p:nvSpPr>
         <p:spPr>
           <a:xfrm>
-            <a:off x="384048" y="4282135"/>
-            <a:ext cx="11393424" cy="9144"/>
+            <a:off x="384048" y="3974896"/>
+            <a:ext cx="11411712" cy="9144"/>
           </a:xfrm>
           <a:prstGeom prst="rect">
             <a:avLst/>
@@ -9070,14 +8739,14 @@
       </p:sp>
       <p:sp>
         <p:nvSpPr>
-          <p:cNvPr id="33" name="TextBox 32"/>
+          <p:cNvPr id="31" name="TextBox 30"/>
           <p:cNvSpPr txBox="1"/>
           <p:nvPr/>
         </p:nvSpPr>
         <p:spPr>
           <a:xfrm>
-            <a:off x="384048" y="4364431"/>
-            <a:ext cx="11393424" cy="804672"/>
+            <a:off x="384048" y="4057192"/>
+            <a:ext cx="11411712" cy="804672"/>
           </a:xfrm>
           <a:prstGeom prst="rect">
             <a:avLst/>
@@ -9098,7 +8767,7 @@
                 </a:solidFill>
                 <a:latin typeface="Georgia"/>
               </a:rPr>
-              <a:t>"I spent 20 years leading enterprise transformation at Ford and Lockheed Martin, watching the exact same 30-day mobilization failure repeat across every vertical. And 5 years on the coaching staff at Stanford — 40 seconds to orchestrate a multi-million dollar operation under extreme pressure. You don't huddle after the snap. The response is pre-staged. I built that architecture into software for the enterprise."</a:t>
+              <a:t>"I spent 20 years at Ford and Lockheed Martin watching the same 30-day mobilization failure repeat across every vertical. And 5 years at Stanford — 40 seconds to orchestrate a multi-million dollar operation under extreme pressure. You don't huddle after the snap. The response is pre-staged. I built that architecture into software for the enterprise."</a:t>
             </a:r>
           </a:p>
         </p:txBody>
@@ -9117,7 +8786,7 @@
     <p:bg>
       <p:bgPr>
         <a:solidFill>
-          <a:srgbClr val="05081E"/>
+          <a:srgbClr val="04071E"/>
         </a:solidFill>
         <a:effectLst/>
       </p:bgPr>
@@ -9131,7 +8800,7 @@
       <p:grpSpPr/>
       <p:pic>
         <p:nvPicPr>
-          <p:cNvPr id="2" name="Picture 1" descr="bg_content.jpg"/>
+          <p:cNvPr id="2" name="Picture 1" descr="bg_cover_clean.jpg"/>
           <p:cNvPicPr>
             <a:picLocks noChangeAspect="1"/>
           </p:cNvPicPr>
@@ -9162,13 +8831,13 @@
         <p:spPr>
           <a:xfrm>
             <a:off x="0" y="0"/>
-            <a:ext cx="6565392" cy="6858000"/>
+            <a:ext cx="6547104" cy="6858000"/>
           </a:xfrm>
           <a:prstGeom prst="rect">
             <a:avLst/>
           </a:prstGeom>
           <a:solidFill>
-            <a:srgbClr val="05081E"/>
+            <a:srgbClr val="04071E"/>
           </a:solidFill>
           <a:ln>
             <a:noFill/>
@@ -9204,8 +8873,8 @@
         </p:nvSpPr>
         <p:spPr>
           <a:xfrm>
-            <a:off x="6558076" y="0"/>
-            <a:ext cx="7315" cy="6858000"/>
+            <a:off x="6541617" y="0"/>
+            <a:ext cx="5486" cy="6858000"/>
           </a:xfrm>
           <a:prstGeom prst="rect">
             <a:avLst/>
@@ -9248,13 +8917,13 @@
         <p:spPr>
           <a:xfrm>
             <a:off x="0" y="0"/>
-            <a:ext cx="12188952" cy="329184"/>
+            <a:ext cx="12188952" cy="47548"/>
           </a:xfrm>
           <a:prstGeom prst="rect">
             <a:avLst/>
           </a:prstGeom>
           <a:solidFill>
-            <a:srgbClr val="04071C"/>
+            <a:srgbClr val="C9A84C"/>
           </a:solidFill>
           <a:ln>
             <a:noFill/>
@@ -9290,8 +8959,8 @@
         </p:nvSpPr>
         <p:spPr>
           <a:xfrm>
-            <a:off x="256032" y="64008"/>
-            <a:ext cx="2560320" cy="201168"/>
+            <a:off x="0" y="54864"/>
+            <a:ext cx="11914632" cy="164592"/>
           </a:xfrm>
           <a:prstGeom prst="rect">
             <a:avLst/>
@@ -9304,92 +8973,22 @@
           </a:bodyPr>
           <a:lstStyle/>
           <a:p>
-            <a:pPr algn="l"/>
-            <a:r>
-              <a:rPr sz="800" b="1" i="0">
-                <a:solidFill>
-                  <a:srgbClr val="2B8A6E"/>
+            <a:pPr algn="r"/>
+            <a:r>
+              <a:rPr sz="750" b="1" i="0">
+                <a:solidFill>
+                  <a:srgbClr val="0A0F2E"/>
                 </a:solidFill>
                 <a:latin typeface="Calibri"/>
               </a:rPr>
-              <a:t>●  MONITORING ACTIVE</a:t>
-            </a:r>
-          </a:p>
-        </p:txBody>
-      </p:sp>
-      <p:sp>
-        <p:nvSpPr>
-          <p:cNvPr id="7" name="TextBox 6"/>
-          <p:cNvSpPr txBox="1"/>
-          <p:nvPr/>
-        </p:nvSpPr>
-        <p:spPr>
-          <a:xfrm>
-            <a:off x="2871216" y="64008"/>
-            <a:ext cx="5120640" cy="201168"/>
-          </a:xfrm>
-          <a:prstGeom prst="rect">
-            <a:avLst/>
-          </a:prstGeom>
-          <a:noFill/>
-        </p:spPr>
-        <p:txBody>
-          <a:bodyPr wrap="square">
-            <a:spAutoFit/>
-          </a:bodyPr>
-          <a:lstStyle/>
-          <a:p>
-            <a:pPr algn="l"/>
-            <a:r>
-              <a:rPr sz="750" b="0" i="0">
-                <a:solidFill>
-                  <a:srgbClr val="AAB4CC"/>
-                </a:solidFill>
-                <a:latin typeface="Calibri"/>
-              </a:rPr>
-              <a:t>1 signal detected  ·  System active  ·  Readiness Protocols armed</a:t>
-            </a:r>
-          </a:p>
-        </p:txBody>
-      </p:sp>
-      <p:sp>
-        <p:nvSpPr>
-          <p:cNvPr id="8" name="TextBox 7"/>
-          <p:cNvSpPr txBox="1"/>
-          <p:nvPr/>
-        </p:nvSpPr>
-        <p:spPr>
-          <a:xfrm>
-            <a:off x="8686800" y="64008"/>
-            <a:ext cx="3291840" cy="201168"/>
-          </a:xfrm>
-          <a:prstGeom prst="rect">
-            <a:avLst/>
-          </a:prstGeom>
-          <a:noFill/>
-        </p:spPr>
-        <p:txBody>
-          <a:bodyPr wrap="square">
-            <a:spAutoFit/>
-          </a:bodyPr>
-          <a:lstStyle/>
-          <a:p>
-            <a:pPr algn="r"/>
-            <a:r>
-              <a:rPr sz="750" b="1" i="0">
-                <a:solidFill>
-                  <a:srgbClr val="C9A84C"/>
-                </a:solidFill>
-                <a:latin typeface="Calibri"/>
-              </a:rPr>
-              <a:t>SEE IT EXECUTE IN 12 MINUTES  →</a:t>
-            </a:r>
-          </a:p>
-        </p:txBody>
-      </p:sp>
-      <p:sp>
-        <p:nvSpPr>
-          <p:cNvPr id="9" name="Rectangle 8"/>
+              <a:t>  03  /  08</a:t>
+            </a:r>
+          </a:p>
+        </p:txBody>
+      </p:sp>
+      <p:sp>
+        <p:nvSpPr>
+          <p:cNvPr id="7" name="Rectangle 6"/>
           <p:cNvSpPr/>
           <p:nvPr/>
         </p:nvSpPr>
@@ -9432,7 +9031,7 @@
       </p:sp>
       <p:sp>
         <p:nvSpPr>
-          <p:cNvPr id="10" name="Rectangle 9"/>
+          <p:cNvPr id="8" name="Rectangle 7"/>
           <p:cNvSpPr/>
           <p:nvPr/>
         </p:nvSpPr>
@@ -9475,7 +9074,7 @@
       </p:sp>
       <p:pic>
         <p:nvPicPr>
-          <p:cNvPr id="11" name="Picture 10" descr="vm_logo_footer.png"/>
+          <p:cNvPr id="9" name="Picture 8" descr="vm_logo_footer.png"/>
           <p:cNvPicPr>
             <a:picLocks noChangeAspect="1"/>
           </p:cNvPicPr>
@@ -9499,7 +9098,7 @@
       </p:pic>
       <p:sp>
         <p:nvSpPr>
-          <p:cNvPr id="12" name="TextBox 11"/>
+          <p:cNvPr id="10" name="TextBox 9"/>
           <p:cNvSpPr txBox="1"/>
           <p:nvPr/>
         </p:nvSpPr>
@@ -9527,21 +9126,21 @@
                 </a:solidFill>
                 <a:latin typeface="Calibri"/>
               </a:rPr>
-              <a:t>  03  /  08</a:t>
-            </a:r>
-          </a:p>
-        </p:txBody>
-      </p:sp>
-      <p:sp>
-        <p:nvSpPr>
-          <p:cNvPr id="13" name="TextBox 12"/>
+              <a:t>03  /  08</a:t>
+            </a:r>
+          </a:p>
+        </p:txBody>
+      </p:sp>
+      <p:sp>
+        <p:nvSpPr>
+          <p:cNvPr id="11" name="TextBox 10"/>
           <p:cNvSpPr txBox="1"/>
           <p:nvPr/>
         </p:nvSpPr>
         <p:spPr>
           <a:xfrm>
             <a:off x="2194560" y="6592824"/>
-            <a:ext cx="7955279" cy="182880"/>
+            <a:ext cx="8165592" cy="182880"/>
           </a:xfrm>
           <a:prstGeom prst="rect">
             <a:avLst/>
@@ -9569,14 +9168,14 @@
       </p:sp>
       <p:sp>
         <p:nvSpPr>
-          <p:cNvPr id="14" name="Rectangle 13"/>
+          <p:cNvPr id="12" name="Rectangle 11"/>
           <p:cNvSpPr/>
           <p:nvPr/>
         </p:nvSpPr>
         <p:spPr>
           <a:xfrm>
-            <a:off x="365760" y="448056"/>
-            <a:ext cx="310896" cy="7315"/>
+            <a:off x="365760" y="269748"/>
+            <a:ext cx="256032" cy="7315"/>
           </a:xfrm>
           <a:prstGeom prst="rect">
             <a:avLst/>
@@ -9612,14 +9211,14 @@
       </p:sp>
       <p:sp>
         <p:nvSpPr>
-          <p:cNvPr id="15" name="TextBox 14"/>
+          <p:cNvPr id="13" name="TextBox 12"/>
           <p:cNvSpPr txBox="1"/>
           <p:nvPr/>
         </p:nvSpPr>
         <p:spPr>
           <a:xfrm>
-            <a:off x="713232" y="384048"/>
-            <a:ext cx="5376672" cy="201168"/>
+            <a:off x="658368" y="201168"/>
+            <a:ext cx="5760720" cy="164592"/>
           </a:xfrm>
           <a:prstGeom prst="rect">
             <a:avLst/>
@@ -9640,21 +9239,21 @@
                 </a:solidFill>
                 <a:latin typeface="Calibri"/>
               </a:rPr>
-              <a:t>  THE PRODUCT</a:t>
-            </a:r>
-          </a:p>
-        </p:txBody>
-      </p:sp>
-      <p:sp>
-        <p:nvSpPr>
-          <p:cNvPr id="16" name="TextBox 15"/>
+              <a:t>   THE PRODUCT</a:t>
+            </a:r>
+          </a:p>
+        </p:txBody>
+      </p:sp>
+      <p:sp>
+        <p:nvSpPr>
+          <p:cNvPr id="14" name="TextBox 13"/>
           <p:cNvSpPr txBox="1"/>
           <p:nvPr/>
         </p:nvSpPr>
         <p:spPr>
           <a:xfrm>
-            <a:off x="384048" y="566928"/>
-            <a:ext cx="5943600" cy="264160"/>
+            <a:off x="384048" y="365760"/>
+            <a:ext cx="5943600" cy="251460"/>
           </a:xfrm>
           <a:prstGeom prst="rect">
             <a:avLst/>
@@ -9669,7 +9268,7 @@
           <a:p>
             <a:pPr algn="l"/>
             <a:r>
-              <a:rPr sz="1600" b="1" i="0">
+              <a:rPr sz="1500" b="1" i="0">
                 <a:solidFill>
                   <a:srgbClr val="C9A84C"/>
                 </a:solidFill>
@@ -9682,14 +9281,14 @@
       </p:sp>
       <p:sp>
         <p:nvSpPr>
-          <p:cNvPr id="17" name="TextBox 16"/>
+          <p:cNvPr id="15" name="TextBox 14"/>
           <p:cNvSpPr txBox="1"/>
           <p:nvPr/>
         </p:nvSpPr>
         <p:spPr>
           <a:xfrm>
-            <a:off x="384048" y="831088"/>
-            <a:ext cx="5943600" cy="429260"/>
+            <a:off x="384048" y="617220"/>
+            <a:ext cx="5943600" cy="402336"/>
           </a:xfrm>
           <a:prstGeom prst="rect">
             <a:avLst/>
@@ -9704,7 +9303,7 @@
           <a:p>
             <a:pPr algn="l"/>
             <a:r>
-              <a:rPr sz="2600" b="1" i="0">
+              <a:rPr sz="2400" b="1" i="0">
                 <a:solidFill>
                   <a:srgbClr val="FFFFFF"/>
                 </a:solidFill>
@@ -9717,14 +9316,14 @@
       </p:sp>
       <p:sp>
         <p:nvSpPr>
-          <p:cNvPr id="18" name="TextBox 17"/>
+          <p:cNvPr id="16" name="TextBox 15"/>
           <p:cNvSpPr txBox="1"/>
           <p:nvPr/>
         </p:nvSpPr>
         <p:spPr>
           <a:xfrm>
-            <a:off x="384048" y="1260348"/>
-            <a:ext cx="5943600" cy="429260"/>
+            <a:off x="384048" y="1019556"/>
+            <a:ext cx="5943600" cy="402336"/>
           </a:xfrm>
           <a:prstGeom prst="rect">
             <a:avLst/>
@@ -9739,7 +9338,7 @@
           <a:p>
             <a:pPr algn="l"/>
             <a:r>
-              <a:rPr sz="2600" b="1" i="0">
+              <a:rPr sz="2400" b="1" i="0">
                 <a:solidFill>
                   <a:srgbClr val="C9A84C"/>
                 </a:solidFill>
@@ -9752,14 +9351,14 @@
       </p:sp>
       <p:sp>
         <p:nvSpPr>
-          <p:cNvPr id="19" name="Rectangle 18"/>
+          <p:cNvPr id="17" name="Rectangle 16"/>
           <p:cNvSpPr/>
           <p:nvPr/>
         </p:nvSpPr>
         <p:spPr>
           <a:xfrm>
-            <a:off x="384048" y="1799336"/>
-            <a:ext cx="5943600" cy="9144"/>
+            <a:off x="384048" y="1513332"/>
+            <a:ext cx="6126480" cy="9144"/>
           </a:xfrm>
           <a:prstGeom prst="rect">
             <a:avLst/>
@@ -9795,13 +9394,13 @@
       </p:sp>
       <p:sp>
         <p:nvSpPr>
-          <p:cNvPr id="20" name="TextBox 19"/>
+          <p:cNvPr id="18" name="TextBox 17"/>
           <p:cNvSpPr txBox="1"/>
           <p:nvPr/>
         </p:nvSpPr>
         <p:spPr>
           <a:xfrm>
-            <a:off x="384048" y="1945843"/>
+            <a:off x="384048" y="1659636"/>
             <a:ext cx="5852160" cy="365760"/>
           </a:xfrm>
           <a:prstGeom prst="rect">
@@ -9830,13 +9429,83 @@
       </p:sp>
       <p:sp>
         <p:nvSpPr>
+          <p:cNvPr id="19" name="TextBox 18"/>
+          <p:cNvSpPr txBox="1"/>
+          <p:nvPr/>
+        </p:nvSpPr>
+        <p:spPr>
+          <a:xfrm>
+            <a:off x="384048" y="2061972"/>
+            <a:ext cx="5852160" cy="365760"/>
+          </a:xfrm>
+          <a:prstGeom prst="rect">
+            <a:avLst/>
+          </a:prstGeom>
+          <a:noFill/>
+        </p:spPr>
+        <p:txBody>
+          <a:bodyPr wrap="square">
+            <a:spAutoFit/>
+          </a:bodyPr>
+          <a:lstStyle/>
+          <a:p>
+            <a:pPr algn="l"/>
+            <a:r>
+              <a:rPr sz="1050" b="0" i="0">
+                <a:solidFill>
+                  <a:srgbClr val="FFFFFF"/>
+                </a:solidFill>
+                <a:latin typeface="Calibri"/>
+              </a:rPr>
+              <a:t>▸  221 trigger patterns monitored across 8 live data sources continuously</a:t>
+            </a:r>
+          </a:p>
+        </p:txBody>
+      </p:sp>
+      <p:sp>
+        <p:nvSpPr>
+          <p:cNvPr id="20" name="TextBox 19"/>
+          <p:cNvSpPr txBox="1"/>
+          <p:nvPr/>
+        </p:nvSpPr>
+        <p:spPr>
+          <a:xfrm>
+            <a:off x="384048" y="2464308"/>
+            <a:ext cx="5852160" cy="365760"/>
+          </a:xfrm>
+          <a:prstGeom prst="rect">
+            <a:avLst/>
+          </a:prstGeom>
+          <a:noFill/>
+        </p:spPr>
+        <p:txBody>
+          <a:bodyPr wrap="square">
+            <a:spAutoFit/>
+          </a:bodyPr>
+          <a:lstStyle/>
+          <a:p>
+            <a:pPr algn="l"/>
+            <a:r>
+              <a:rPr sz="1050" b="0" i="0">
+                <a:solidFill>
+                  <a:srgbClr val="FFFFFF"/>
+                </a:solidFill>
+                <a:latin typeface="Calibri"/>
+              </a:rPr>
+              <a:t>▸  248+ data points confidence-scored every 15 minutes</a:t>
+            </a:r>
+          </a:p>
+        </p:txBody>
+      </p:sp>
+      <p:sp>
+        <p:nvSpPr>
           <p:cNvPr id="21" name="TextBox 20"/>
           <p:cNvSpPr txBox="1"/>
           <p:nvPr/>
         </p:nvSpPr>
         <p:spPr>
           <a:xfrm>
-            <a:off x="384048" y="2348179"/>
+            <a:off x="384048" y="2866644"/>
             <a:ext cx="5852160" cy="365760"/>
           </a:xfrm>
           <a:prstGeom prst="rect">
@@ -9858,7 +9527,7 @@
                 </a:solidFill>
                 <a:latin typeface="Calibri"/>
               </a:rPr>
-              <a:t>▸  221 strategic trigger patterns monitored across 8 live data sources</a:t>
+              <a:t>▸  AI monitors. Executives authorize. No protocol fires without sign-off.</a:t>
             </a:r>
           </a:p>
         </p:txBody>
@@ -9871,77 +9540,7 @@
         </p:nvSpPr>
         <p:spPr>
           <a:xfrm>
-            <a:off x="384048" y="2750515"/>
-            <a:ext cx="5852160" cy="365760"/>
-          </a:xfrm>
-          <a:prstGeom prst="rect">
-            <a:avLst/>
-          </a:prstGeom>
-          <a:noFill/>
-        </p:spPr>
-        <p:txBody>
-          <a:bodyPr wrap="square">
-            <a:spAutoFit/>
-          </a:bodyPr>
-          <a:lstStyle/>
-          <a:p>
-            <a:pPr algn="l"/>
-            <a:r>
-              <a:rPr sz="1050" b="0" i="0">
-                <a:solidFill>
-                  <a:srgbClr val="FFFFFF"/>
-                </a:solidFill>
-                <a:latin typeface="Calibri"/>
-              </a:rPr>
-              <a:t>▸  248+ data points confidence-scored every 15 minutes continuously</a:t>
-            </a:r>
-          </a:p>
-        </p:txBody>
-      </p:sp>
-      <p:sp>
-        <p:nvSpPr>
-          <p:cNvPr id="23" name="TextBox 22"/>
-          <p:cNvSpPr txBox="1"/>
-          <p:nvPr/>
-        </p:nvSpPr>
-        <p:spPr>
-          <a:xfrm>
-            <a:off x="384048" y="3152851"/>
-            <a:ext cx="5852160" cy="365760"/>
-          </a:xfrm>
-          <a:prstGeom prst="rect">
-            <a:avLst/>
-          </a:prstGeom>
-          <a:noFill/>
-        </p:spPr>
-        <p:txBody>
-          <a:bodyPr wrap="square">
-            <a:spAutoFit/>
-          </a:bodyPr>
-          <a:lstStyle/>
-          <a:p>
-            <a:pPr algn="l"/>
-            <a:r>
-              <a:rPr sz="1050" b="0" i="0">
-                <a:solidFill>
-                  <a:srgbClr val="FFFFFF"/>
-                </a:solidFill>
-                <a:latin typeface="Calibri"/>
-              </a:rPr>
-              <a:t>▸  AI monitors. Executives authorize. No protocol activates without sign-off.</a:t>
-            </a:r>
-          </a:p>
-        </p:txBody>
-      </p:sp>
-      <p:sp>
-        <p:nvSpPr>
-          <p:cNvPr id="24" name="TextBox 23"/>
-          <p:cNvSpPr txBox="1"/>
-          <p:nvPr/>
-        </p:nvSpPr>
-        <p:spPr>
-          <a:xfrm>
-            <a:off x="384048" y="3555187"/>
+            <a:off x="384048" y="3268979"/>
             <a:ext cx="5852160" cy="365760"/>
           </a:xfrm>
           <a:prstGeom prst="rect">
@@ -9970,14 +9569,14 @@
       </p:sp>
       <p:sp>
         <p:nvSpPr>
-          <p:cNvPr id="25" name="Rectangle 24"/>
+          <p:cNvPr id="23" name="Rectangle 22"/>
           <p:cNvSpPr/>
           <p:nvPr/>
         </p:nvSpPr>
         <p:spPr>
           <a:xfrm>
-            <a:off x="384048" y="4085539"/>
-            <a:ext cx="5943600" cy="603504"/>
+            <a:off x="384048" y="3781044"/>
+            <a:ext cx="6126480" cy="603504"/>
           </a:xfrm>
           <a:prstGeom prst="rect">
             <a:avLst/>
@@ -10013,14 +9612,14 @@
       </p:sp>
       <p:sp>
         <p:nvSpPr>
-          <p:cNvPr id="26" name="Rectangle 25"/>
+          <p:cNvPr id="24" name="Rectangle 23"/>
           <p:cNvSpPr/>
           <p:nvPr/>
         </p:nvSpPr>
         <p:spPr>
           <a:xfrm>
-            <a:off x="384048" y="4085539"/>
-            <a:ext cx="5943600" cy="21945"/>
+            <a:off x="384048" y="3781044"/>
+            <a:ext cx="6126480" cy="21945"/>
           </a:xfrm>
           <a:prstGeom prst="rect">
             <a:avLst/>
@@ -10056,14 +9655,14 @@
       </p:sp>
       <p:sp>
         <p:nvSpPr>
-          <p:cNvPr id="27" name="TextBox 26"/>
+          <p:cNvPr id="25" name="TextBox 24"/>
           <p:cNvSpPr txBox="1"/>
           <p:nvPr/>
         </p:nvSpPr>
         <p:spPr>
           <a:xfrm>
-            <a:off x="512064" y="4140403"/>
-            <a:ext cx="5760720" cy="219456"/>
+            <a:off x="512064" y="3835907"/>
+            <a:ext cx="5943600" cy="219456"/>
           </a:xfrm>
           <a:prstGeom prst="rect">
             <a:avLst/>
@@ -10091,14 +9690,14 @@
       </p:sp>
       <p:sp>
         <p:nvSpPr>
-          <p:cNvPr id="28" name="TextBox 27"/>
+          <p:cNvPr id="26" name="TextBox 25"/>
           <p:cNvSpPr txBox="1"/>
           <p:nvPr/>
         </p:nvSpPr>
         <p:spPr>
           <a:xfrm>
-            <a:off x="512064" y="4396435"/>
-            <a:ext cx="5760720" cy="219456"/>
+            <a:off x="512064" y="4091939"/>
+            <a:ext cx="5943600" cy="219456"/>
           </a:xfrm>
           <a:prstGeom prst="rect">
             <a:avLst/>
@@ -10126,13 +9725,13 @@
       </p:sp>
       <p:sp>
         <p:nvSpPr>
-          <p:cNvPr id="29" name="Rectangle 28"/>
+          <p:cNvPr id="27" name="Rectangle 26"/>
           <p:cNvSpPr/>
           <p:nvPr/>
         </p:nvSpPr>
         <p:spPr>
           <a:xfrm>
-            <a:off x="384048" y="4835347"/>
+            <a:off x="384048" y="4512564"/>
             <a:ext cx="5577840" cy="9144"/>
           </a:xfrm>
           <a:prstGeom prst="rect">
@@ -10169,13 +9768,13 @@
       </p:sp>
       <p:sp>
         <p:nvSpPr>
-          <p:cNvPr id="30" name="TextBox 29"/>
+          <p:cNvPr id="28" name="TextBox 27"/>
           <p:cNvSpPr txBox="1"/>
           <p:nvPr/>
         </p:nvSpPr>
         <p:spPr>
           <a:xfrm>
-            <a:off x="384048" y="4899355"/>
+            <a:off x="384048" y="4576572"/>
             <a:ext cx="5760720" cy="713232"/>
           </a:xfrm>
           <a:prstGeom prst="rect">
@@ -10197,14 +9796,14 @@
                 </a:solidFill>
                 <a:latin typeface="Georgia"/>
               </a:rPr>
-              <a:t>"Every enterprise has Microsoft's AI stack. None have the operating model to use it. Readiness OS is that operating model layer — not a replacement, the orchestrator above it."</a:t>
-            </a:r>
-          </a:p>
-        </p:txBody>
-      </p:sp>
-      <p:sp>
-        <p:nvSpPr>
-          <p:cNvPr id="31" name="Rectangle 30"/>
+              <a:t>"Every enterprise has Microsoft's AI stack. None have the operating model to use it. Readiness OS is that operating model — not a replacement, the orchestrator above it."</a:t>
+            </a:r>
+          </a:p>
+        </p:txBody>
+      </p:sp>
+      <p:sp>
+        <p:nvSpPr>
+          <p:cNvPr id="29" name="Rectangle 28"/>
           <p:cNvSpPr/>
           <p:nvPr/>
         </p:nvSpPr>
@@ -10247,7 +9846,7 @@
       </p:sp>
       <p:sp>
         <p:nvSpPr>
-          <p:cNvPr id="32" name="Rectangle 31"/>
+          <p:cNvPr id="30" name="Rectangle 29"/>
           <p:cNvSpPr/>
           <p:nvPr/>
         </p:nvSpPr>
@@ -10290,7 +9889,7 @@
       </p:sp>
       <p:pic>
         <p:nvPicPr>
-          <p:cNvPr id="33" name="Picture 32" descr="hq_executes_chain.jpg"/>
+          <p:cNvPr id="31" name="Picture 30" descr="hq_executes_chain.jpg"/>
           <p:cNvPicPr>
             <a:picLocks noChangeAspect="1"/>
           </p:cNvPicPr>
@@ -10326,7 +9925,7 @@
     <p:bg>
       <p:bgPr>
         <a:solidFill>
-          <a:srgbClr val="05081E"/>
+          <a:srgbClr val="04071E"/>
         </a:solidFill>
         <a:effectLst/>
       </p:bgPr>
@@ -10340,7 +9939,7 @@
       <p:grpSpPr/>
       <p:pic>
         <p:nvPicPr>
-          <p:cNvPr id="2" name="Picture 1" descr="bg_proof.jpg"/>
+          <p:cNvPr id="2" name="Picture 1" descr="bg_cover_clean.jpg"/>
           <p:cNvPicPr>
             <a:picLocks noChangeAspect="1"/>
           </p:cNvPicPr>
@@ -10377,7 +9976,7 @@
             <a:avLst/>
           </a:prstGeom>
           <a:solidFill>
-            <a:srgbClr val="05081E"/>
+            <a:srgbClr val="04071E"/>
           </a:solidFill>
           <a:ln>
             <a:noFill/>
@@ -10414,13 +10013,13 @@
         <p:spPr>
           <a:xfrm>
             <a:off x="0" y="0"/>
-            <a:ext cx="12188952" cy="329184"/>
+            <a:ext cx="12188952" cy="47548"/>
           </a:xfrm>
           <a:prstGeom prst="rect">
             <a:avLst/>
           </a:prstGeom>
           <a:solidFill>
-            <a:srgbClr val="04071C"/>
+            <a:srgbClr val="C9A84C"/>
           </a:solidFill>
           <a:ln>
             <a:noFill/>
@@ -10456,8 +10055,8 @@
         </p:nvSpPr>
         <p:spPr>
           <a:xfrm>
-            <a:off x="256032" y="64008"/>
-            <a:ext cx="2560320" cy="201168"/>
+            <a:off x="0" y="54864"/>
+            <a:ext cx="11914632" cy="164592"/>
           </a:xfrm>
           <a:prstGeom prst="rect">
             <a:avLst/>
@@ -10470,92 +10069,22 @@
           </a:bodyPr>
           <a:lstStyle/>
           <a:p>
-            <a:pPr algn="l"/>
-            <a:r>
-              <a:rPr sz="800" b="1" i="0">
-                <a:solidFill>
-                  <a:srgbClr val="2B8A6E"/>
+            <a:pPr algn="r"/>
+            <a:r>
+              <a:rPr sz="750" b="1" i="0">
+                <a:solidFill>
+                  <a:srgbClr val="0A0F2E"/>
                 </a:solidFill>
                 <a:latin typeface="Calibri"/>
               </a:rPr>
-              <a:t>●  MONITORING ACTIVE</a:t>
-            </a:r>
-          </a:p>
-        </p:txBody>
-      </p:sp>
-      <p:sp>
-        <p:nvSpPr>
-          <p:cNvPr id="6" name="TextBox 5"/>
-          <p:cNvSpPr txBox="1"/>
-          <p:nvPr/>
-        </p:nvSpPr>
-        <p:spPr>
-          <a:xfrm>
-            <a:off x="2871216" y="64008"/>
-            <a:ext cx="5120640" cy="201168"/>
-          </a:xfrm>
-          <a:prstGeom prst="rect">
-            <a:avLst/>
-          </a:prstGeom>
-          <a:noFill/>
-        </p:spPr>
-        <p:txBody>
-          <a:bodyPr wrap="square">
-            <a:spAutoFit/>
-          </a:bodyPr>
-          <a:lstStyle/>
-          <a:p>
-            <a:pPr algn="l"/>
-            <a:r>
-              <a:rPr sz="750" b="0" i="0">
-                <a:solidFill>
-                  <a:srgbClr val="AAB4CC"/>
-                </a:solidFill>
-                <a:latin typeface="Calibri"/>
-              </a:rPr>
-              <a:t>1 signal detected  ·  System active  ·  Readiness Protocols armed</a:t>
-            </a:r>
-          </a:p>
-        </p:txBody>
-      </p:sp>
-      <p:sp>
-        <p:nvSpPr>
-          <p:cNvPr id="7" name="TextBox 6"/>
-          <p:cNvSpPr txBox="1"/>
-          <p:nvPr/>
-        </p:nvSpPr>
-        <p:spPr>
-          <a:xfrm>
-            <a:off x="8686800" y="64008"/>
-            <a:ext cx="3291840" cy="201168"/>
-          </a:xfrm>
-          <a:prstGeom prst="rect">
-            <a:avLst/>
-          </a:prstGeom>
-          <a:noFill/>
-        </p:spPr>
-        <p:txBody>
-          <a:bodyPr wrap="square">
-            <a:spAutoFit/>
-          </a:bodyPr>
-          <a:lstStyle/>
-          <a:p>
-            <a:pPr algn="r"/>
-            <a:r>
-              <a:rPr sz="750" b="1" i="0">
-                <a:solidFill>
-                  <a:srgbClr val="C9A84C"/>
-                </a:solidFill>
-                <a:latin typeface="Calibri"/>
-              </a:rPr>
-              <a:t>SEE IT EXECUTE IN 12 MINUTES  →</a:t>
-            </a:r>
-          </a:p>
-        </p:txBody>
-      </p:sp>
-      <p:sp>
-        <p:nvSpPr>
-          <p:cNvPr id="8" name="Rectangle 7"/>
+              <a:t>  04  /  08</a:t>
+            </a:r>
+          </a:p>
+        </p:txBody>
+      </p:sp>
+      <p:sp>
+        <p:nvSpPr>
+          <p:cNvPr id="6" name="Rectangle 5"/>
           <p:cNvSpPr/>
           <p:nvPr/>
         </p:nvSpPr>
@@ -10598,7 +10127,7 @@
       </p:sp>
       <p:sp>
         <p:nvSpPr>
-          <p:cNvPr id="9" name="Rectangle 8"/>
+          <p:cNvPr id="7" name="Rectangle 6"/>
           <p:cNvSpPr/>
           <p:nvPr/>
         </p:nvSpPr>
@@ -10641,7 +10170,7 @@
       </p:sp>
       <p:pic>
         <p:nvPicPr>
-          <p:cNvPr id="10" name="Picture 9" descr="vm_logo_footer.png"/>
+          <p:cNvPr id="8" name="Picture 7" descr="vm_logo_footer.png"/>
           <p:cNvPicPr>
             <a:picLocks noChangeAspect="1"/>
           </p:cNvPicPr>
@@ -10665,7 +10194,7 @@
       </p:pic>
       <p:sp>
         <p:nvSpPr>
-          <p:cNvPr id="11" name="TextBox 10"/>
+          <p:cNvPr id="9" name="TextBox 8"/>
           <p:cNvSpPr txBox="1"/>
           <p:nvPr/>
         </p:nvSpPr>
@@ -10693,21 +10222,21 @@
                 </a:solidFill>
                 <a:latin typeface="Calibri"/>
               </a:rPr>
-              <a:t>  04  /  08</a:t>
-            </a:r>
-          </a:p>
-        </p:txBody>
-      </p:sp>
-      <p:sp>
-        <p:nvSpPr>
-          <p:cNvPr id="12" name="TextBox 11"/>
+              <a:t>04  /  08</a:t>
+            </a:r>
+          </a:p>
+        </p:txBody>
+      </p:sp>
+      <p:sp>
+        <p:nvSpPr>
+          <p:cNvPr id="10" name="TextBox 9"/>
           <p:cNvSpPr txBox="1"/>
           <p:nvPr/>
         </p:nvSpPr>
         <p:spPr>
           <a:xfrm>
             <a:off x="2194560" y="6592824"/>
-            <a:ext cx="7955279" cy="182880"/>
+            <a:ext cx="8165592" cy="182880"/>
           </a:xfrm>
           <a:prstGeom prst="rect">
             <a:avLst/>
@@ -10735,14 +10264,14 @@
       </p:sp>
       <p:sp>
         <p:nvSpPr>
-          <p:cNvPr id="13" name="Rectangle 12"/>
+          <p:cNvPr id="11" name="Rectangle 10"/>
           <p:cNvSpPr/>
           <p:nvPr/>
         </p:nvSpPr>
         <p:spPr>
           <a:xfrm>
-            <a:off x="365760" y="448056"/>
-            <a:ext cx="310896" cy="7315"/>
+            <a:off x="365760" y="269748"/>
+            <a:ext cx="256032" cy="7315"/>
           </a:xfrm>
           <a:prstGeom prst="rect">
             <a:avLst/>
@@ -10778,14 +10307,14 @@
       </p:sp>
       <p:sp>
         <p:nvSpPr>
-          <p:cNvPr id="14" name="TextBox 13"/>
+          <p:cNvPr id="12" name="TextBox 11"/>
           <p:cNvSpPr txBox="1"/>
           <p:nvPr/>
         </p:nvSpPr>
         <p:spPr>
           <a:xfrm>
-            <a:off x="713232" y="384048"/>
-            <a:ext cx="11137392" cy="201168"/>
+            <a:off x="658368" y="201168"/>
+            <a:ext cx="11521440" cy="164592"/>
           </a:xfrm>
           <a:prstGeom prst="rect">
             <a:avLst/>
@@ -10806,21 +10335,21 @@
                 </a:solidFill>
                 <a:latin typeface="Calibri"/>
               </a:rPr>
-              <a:t>  WHY WE WIN</a:t>
-            </a:r>
-          </a:p>
-        </p:txBody>
-      </p:sp>
-      <p:sp>
-        <p:nvSpPr>
-          <p:cNvPr id="15" name="TextBox 14"/>
+              <a:t>   WHY WE WIN</a:t>
+            </a:r>
+          </a:p>
+        </p:txBody>
+      </p:sp>
+      <p:sp>
+        <p:nvSpPr>
+          <p:cNvPr id="13" name="TextBox 12"/>
           <p:cNvSpPr txBox="1"/>
           <p:nvPr/>
         </p:nvSpPr>
         <p:spPr>
           <a:xfrm>
-            <a:off x="384048" y="566928"/>
-            <a:ext cx="11521440" cy="528320"/>
+            <a:off x="384048" y="365760"/>
+            <a:ext cx="11521440" cy="502920"/>
           </a:xfrm>
           <a:prstGeom prst="rect">
             <a:avLst/>
@@ -10835,7 +10364,7 @@
           <a:p>
             <a:pPr algn="l"/>
             <a:r>
-              <a:rPr sz="3200" b="1" i="0">
+              <a:rPr sz="3000" b="1" i="0">
                 <a:solidFill>
                   <a:srgbClr val="FFFFFF"/>
                 </a:solidFill>
@@ -10848,14 +10377,14 @@
       </p:sp>
       <p:sp>
         <p:nvSpPr>
-          <p:cNvPr id="16" name="TextBox 15"/>
+          <p:cNvPr id="14" name="TextBox 13"/>
           <p:cNvSpPr txBox="1"/>
           <p:nvPr/>
         </p:nvSpPr>
         <p:spPr>
           <a:xfrm>
-            <a:off x="384048" y="1095247"/>
-            <a:ext cx="11521440" cy="363220"/>
+            <a:off x="384048" y="868680"/>
+            <a:ext cx="11521440" cy="335280"/>
           </a:xfrm>
           <a:prstGeom prst="rect">
             <a:avLst/>
@@ -10870,7 +10399,7 @@
           <a:p>
             <a:pPr algn="l"/>
             <a:r>
-              <a:rPr sz="2200" b="1" i="0">
+              <a:rPr sz="2000" b="1" i="0">
                 <a:solidFill>
                   <a:srgbClr val="AAB4CC"/>
                 </a:solidFill>
@@ -10883,14 +10412,14 @@
       </p:sp>
       <p:sp>
         <p:nvSpPr>
-          <p:cNvPr id="17" name="Rectangle 16"/>
+          <p:cNvPr id="15" name="Rectangle 14"/>
           <p:cNvSpPr/>
           <p:nvPr/>
         </p:nvSpPr>
         <p:spPr>
           <a:xfrm>
-            <a:off x="384048" y="1568195"/>
-            <a:ext cx="11393424" cy="9144"/>
+            <a:off x="384048" y="1295400"/>
+            <a:ext cx="11411712" cy="9144"/>
           </a:xfrm>
           <a:prstGeom prst="rect">
             <a:avLst/>
@@ -10926,14 +10455,14 @@
       </p:sp>
       <p:sp>
         <p:nvSpPr>
-          <p:cNvPr id="18" name="TextBox 17"/>
+          <p:cNvPr id="16" name="TextBox 15"/>
           <p:cNvSpPr txBox="1"/>
           <p:nvPr/>
         </p:nvSpPr>
         <p:spPr>
           <a:xfrm>
-            <a:off x="384048" y="1714500"/>
-            <a:ext cx="5486400" cy="201168"/>
+            <a:off x="384048" y="1442008"/>
+            <a:ext cx="5394960" cy="201168"/>
           </a:xfrm>
           <a:prstGeom prst="rect">
             <a:avLst/>
@@ -10961,13 +10490,13 @@
       </p:sp>
       <p:sp>
         <p:nvSpPr>
-          <p:cNvPr id="19" name="TextBox 18"/>
+          <p:cNvPr id="17" name="TextBox 16"/>
           <p:cNvSpPr txBox="1"/>
           <p:nvPr/>
         </p:nvSpPr>
         <p:spPr>
           <a:xfrm>
-            <a:off x="384048" y="1952243"/>
+            <a:off x="384048" y="1679752"/>
             <a:ext cx="1847088" cy="256032"/>
           </a:xfrm>
           <a:prstGeom prst="rect">
@@ -10996,14 +10525,14 @@
       </p:sp>
       <p:sp>
         <p:nvSpPr>
-          <p:cNvPr id="20" name="TextBox 19"/>
+          <p:cNvPr id="18" name="TextBox 17"/>
           <p:cNvSpPr txBox="1"/>
           <p:nvPr/>
         </p:nvSpPr>
         <p:spPr>
           <a:xfrm>
-            <a:off x="2304288" y="1952243"/>
-            <a:ext cx="3657599" cy="256032"/>
+            <a:off x="2304288" y="1679752"/>
+            <a:ext cx="3566160" cy="256032"/>
           </a:xfrm>
           <a:prstGeom prst="rect">
             <a:avLst/>
@@ -11031,14 +10560,14 @@
       </p:sp>
       <p:sp>
         <p:nvSpPr>
-          <p:cNvPr id="21" name="Rectangle 20"/>
+          <p:cNvPr id="19" name="Rectangle 18"/>
           <p:cNvSpPr/>
           <p:nvPr/>
         </p:nvSpPr>
         <p:spPr>
           <a:xfrm>
-            <a:off x="384048" y="2226563"/>
-            <a:ext cx="5486400" cy="9144"/>
+            <a:off x="384048" y="1954072"/>
+            <a:ext cx="5394960" cy="9144"/>
           </a:xfrm>
           <a:prstGeom prst="rect">
             <a:avLst/>
@@ -11074,13 +10603,13 @@
       </p:sp>
       <p:sp>
         <p:nvSpPr>
-          <p:cNvPr id="22" name="TextBox 21"/>
+          <p:cNvPr id="20" name="TextBox 19"/>
           <p:cNvSpPr txBox="1"/>
           <p:nvPr/>
         </p:nvSpPr>
         <p:spPr>
           <a:xfrm>
-            <a:off x="384048" y="2318003"/>
+            <a:off x="384048" y="2045512"/>
             <a:ext cx="1847088" cy="256032"/>
           </a:xfrm>
           <a:prstGeom prst="rect">
@@ -11109,14 +10638,14 @@
       </p:sp>
       <p:sp>
         <p:nvSpPr>
-          <p:cNvPr id="23" name="TextBox 22"/>
+          <p:cNvPr id="21" name="TextBox 20"/>
           <p:cNvSpPr txBox="1"/>
           <p:nvPr/>
         </p:nvSpPr>
         <p:spPr>
           <a:xfrm>
-            <a:off x="2304288" y="2318003"/>
-            <a:ext cx="3657599" cy="256032"/>
+            <a:off x="2304288" y="2045512"/>
+            <a:ext cx="3566160" cy="256032"/>
           </a:xfrm>
           <a:prstGeom prst="rect">
             <a:avLst/>
@@ -11144,14 +10673,14 @@
       </p:sp>
       <p:sp>
         <p:nvSpPr>
-          <p:cNvPr id="24" name="Rectangle 23"/>
+          <p:cNvPr id="22" name="Rectangle 21"/>
           <p:cNvSpPr/>
           <p:nvPr/>
         </p:nvSpPr>
         <p:spPr>
           <a:xfrm>
-            <a:off x="384048" y="2592323"/>
-            <a:ext cx="5486400" cy="9144"/>
+            <a:off x="384048" y="2319832"/>
+            <a:ext cx="5394960" cy="9144"/>
           </a:xfrm>
           <a:prstGeom prst="rect">
             <a:avLst/>
@@ -11187,13 +10716,13 @@
       </p:sp>
       <p:sp>
         <p:nvSpPr>
-          <p:cNvPr id="25" name="TextBox 24"/>
+          <p:cNvPr id="23" name="TextBox 22"/>
           <p:cNvSpPr txBox="1"/>
           <p:nvPr/>
         </p:nvSpPr>
         <p:spPr>
           <a:xfrm>
-            <a:off x="384048" y="2683763"/>
+            <a:off x="384048" y="2411272"/>
             <a:ext cx="1847088" cy="256032"/>
           </a:xfrm>
           <a:prstGeom prst="rect">
@@ -11222,14 +10751,14 @@
       </p:sp>
       <p:sp>
         <p:nvSpPr>
-          <p:cNvPr id="26" name="TextBox 25"/>
+          <p:cNvPr id="24" name="TextBox 23"/>
           <p:cNvSpPr txBox="1"/>
           <p:nvPr/>
         </p:nvSpPr>
         <p:spPr>
           <a:xfrm>
-            <a:off x="2304288" y="2683763"/>
-            <a:ext cx="3657599" cy="256032"/>
+            <a:off x="2304288" y="2411272"/>
+            <a:ext cx="3566160" cy="256032"/>
           </a:xfrm>
           <a:prstGeom prst="rect">
             <a:avLst/>
@@ -11257,14 +10786,14 @@
       </p:sp>
       <p:sp>
         <p:nvSpPr>
-          <p:cNvPr id="27" name="Rectangle 26"/>
+          <p:cNvPr id="25" name="Rectangle 24"/>
           <p:cNvSpPr/>
           <p:nvPr/>
         </p:nvSpPr>
         <p:spPr>
           <a:xfrm>
-            <a:off x="384048" y="2958083"/>
-            <a:ext cx="5486400" cy="9144"/>
+            <a:off x="384048" y="2685592"/>
+            <a:ext cx="5394960" cy="9144"/>
           </a:xfrm>
           <a:prstGeom prst="rect">
             <a:avLst/>
@@ -11300,13 +10829,13 @@
       </p:sp>
       <p:sp>
         <p:nvSpPr>
-          <p:cNvPr id="28" name="TextBox 27"/>
+          <p:cNvPr id="26" name="TextBox 25"/>
           <p:cNvSpPr txBox="1"/>
           <p:nvPr/>
         </p:nvSpPr>
         <p:spPr>
           <a:xfrm>
-            <a:off x="384048" y="3049523"/>
+            <a:off x="384048" y="2777032"/>
             <a:ext cx="1847088" cy="256032"/>
           </a:xfrm>
           <a:prstGeom prst="rect">
@@ -11335,14 +10864,14 @@
       </p:sp>
       <p:sp>
         <p:nvSpPr>
-          <p:cNvPr id="29" name="TextBox 28"/>
+          <p:cNvPr id="27" name="TextBox 26"/>
           <p:cNvSpPr txBox="1"/>
           <p:nvPr/>
         </p:nvSpPr>
         <p:spPr>
           <a:xfrm>
-            <a:off x="2304288" y="3049523"/>
-            <a:ext cx="3657599" cy="256032"/>
+            <a:off x="2304288" y="2777032"/>
+            <a:ext cx="3566160" cy="256032"/>
           </a:xfrm>
           <a:prstGeom prst="rect">
             <a:avLst/>
@@ -11370,14 +10899,14 @@
       </p:sp>
       <p:sp>
         <p:nvSpPr>
-          <p:cNvPr id="30" name="Rectangle 29"/>
+          <p:cNvPr id="28" name="Rectangle 27"/>
           <p:cNvSpPr/>
           <p:nvPr/>
         </p:nvSpPr>
         <p:spPr>
           <a:xfrm>
-            <a:off x="384048" y="3323843"/>
-            <a:ext cx="5486400" cy="9144"/>
+            <a:off x="384048" y="3051352"/>
+            <a:ext cx="5394960" cy="9144"/>
           </a:xfrm>
           <a:prstGeom prst="rect">
             <a:avLst/>
@@ -11413,14 +10942,14 @@
       </p:sp>
       <p:sp>
         <p:nvSpPr>
-          <p:cNvPr id="31" name="Rectangle 30"/>
+          <p:cNvPr id="29" name="Rectangle 28"/>
           <p:cNvSpPr/>
           <p:nvPr/>
         </p:nvSpPr>
         <p:spPr>
           <a:xfrm>
-            <a:off x="384048" y="3506724"/>
-            <a:ext cx="5577840" cy="310896"/>
+            <a:off x="384048" y="3215944"/>
+            <a:ext cx="5486400" cy="310896"/>
           </a:xfrm>
           <a:prstGeom prst="rect">
             <a:avLst/>
@@ -11456,14 +10985,14 @@
       </p:sp>
       <p:sp>
         <p:nvSpPr>
-          <p:cNvPr id="32" name="TextBox 31"/>
+          <p:cNvPr id="30" name="TextBox 29"/>
           <p:cNvSpPr txBox="1"/>
           <p:nvPr/>
         </p:nvSpPr>
         <p:spPr>
           <a:xfrm>
-            <a:off x="512064" y="3570732"/>
-            <a:ext cx="5413248" cy="201168"/>
+            <a:off x="512064" y="3279952"/>
+            <a:ext cx="5321808" cy="201168"/>
           </a:xfrm>
           <a:prstGeom prst="rect">
             <a:avLst/>
@@ -11491,13 +11020,13 @@
       </p:sp>
       <p:sp>
         <p:nvSpPr>
-          <p:cNvPr id="33" name="TextBox 32"/>
+          <p:cNvPr id="31" name="TextBox 30"/>
           <p:cNvSpPr txBox="1"/>
           <p:nvPr/>
         </p:nvSpPr>
         <p:spPr>
           <a:xfrm>
-            <a:off x="6492240" y="1714500"/>
+            <a:off x="6492240" y="1442008"/>
             <a:ext cx="5394960" cy="201168"/>
           </a:xfrm>
           <a:prstGeom prst="rect">
@@ -11526,13 +11055,13 @@
       </p:sp>
       <p:sp>
         <p:nvSpPr>
-          <p:cNvPr id="34" name="Rectangle 33"/>
+          <p:cNvPr id="32" name="Rectangle 31"/>
           <p:cNvSpPr/>
           <p:nvPr/>
         </p:nvSpPr>
         <p:spPr>
           <a:xfrm>
-            <a:off x="6492240" y="1952243"/>
+            <a:off x="6492240" y="1679752"/>
             <a:ext cx="5449824" cy="256032"/>
           </a:xfrm>
           <a:prstGeom prst="rect">
@@ -11569,13 +11098,13 @@
       </p:sp>
       <p:sp>
         <p:nvSpPr>
-          <p:cNvPr id="35" name="TextBox 34"/>
+          <p:cNvPr id="33" name="TextBox 32"/>
           <p:cNvSpPr txBox="1"/>
           <p:nvPr/>
         </p:nvSpPr>
         <p:spPr>
           <a:xfrm>
-            <a:off x="6601968" y="1988819"/>
+            <a:off x="6601968" y="1716328"/>
             <a:ext cx="5230368" cy="201168"/>
           </a:xfrm>
           <a:prstGeom prst="rect">
@@ -11604,14 +11133,14 @@
       </p:sp>
       <p:sp>
         <p:nvSpPr>
-          <p:cNvPr id="36" name="TextBox 35"/>
+          <p:cNvPr id="34" name="TextBox 33"/>
           <p:cNvSpPr txBox="1"/>
           <p:nvPr/>
         </p:nvSpPr>
         <p:spPr>
           <a:xfrm>
-            <a:off x="6601968" y="2244851"/>
-            <a:ext cx="5230368" cy="548640"/>
+            <a:off x="6601968" y="1972360"/>
+            <a:ext cx="5230368" cy="530352"/>
           </a:xfrm>
           <a:prstGeom prst="rect">
             <a:avLst/>
@@ -11639,13 +11168,13 @@
       </p:sp>
       <p:sp>
         <p:nvSpPr>
-          <p:cNvPr id="37" name="Rectangle 36"/>
+          <p:cNvPr id="35" name="Rectangle 34"/>
           <p:cNvSpPr/>
           <p:nvPr/>
         </p:nvSpPr>
         <p:spPr>
           <a:xfrm>
-            <a:off x="6492240" y="2848356"/>
+            <a:off x="6492240" y="2557576"/>
             <a:ext cx="5449824" cy="9144"/>
           </a:xfrm>
           <a:prstGeom prst="rect">
@@ -11682,13 +11211,13 @@
       </p:sp>
       <p:sp>
         <p:nvSpPr>
-          <p:cNvPr id="38" name="Rectangle 37"/>
+          <p:cNvPr id="36" name="Rectangle 35"/>
           <p:cNvSpPr/>
           <p:nvPr/>
         </p:nvSpPr>
         <p:spPr>
           <a:xfrm>
-            <a:off x="6492240" y="3177539"/>
+            <a:off x="6492240" y="2886760"/>
             <a:ext cx="5449824" cy="256032"/>
           </a:xfrm>
           <a:prstGeom prst="rect">
@@ -11725,13 +11254,13 @@
       </p:sp>
       <p:sp>
         <p:nvSpPr>
-          <p:cNvPr id="39" name="TextBox 38"/>
+          <p:cNvPr id="37" name="TextBox 36"/>
           <p:cNvSpPr txBox="1"/>
           <p:nvPr/>
         </p:nvSpPr>
         <p:spPr>
           <a:xfrm>
-            <a:off x="6601968" y="3214115"/>
+            <a:off x="6601968" y="2923336"/>
             <a:ext cx="5230368" cy="201168"/>
           </a:xfrm>
           <a:prstGeom prst="rect">
@@ -11760,14 +11289,14 @@
       </p:sp>
       <p:sp>
         <p:nvSpPr>
-          <p:cNvPr id="40" name="TextBox 39"/>
+          <p:cNvPr id="38" name="TextBox 37"/>
           <p:cNvSpPr txBox="1"/>
           <p:nvPr/>
         </p:nvSpPr>
         <p:spPr>
           <a:xfrm>
-            <a:off x="6601968" y="3470147"/>
-            <a:ext cx="5230368" cy="548640"/>
+            <a:off x="6601968" y="3179368"/>
+            <a:ext cx="5230368" cy="530352"/>
           </a:xfrm>
           <a:prstGeom prst="rect">
             <a:avLst/>
@@ -11795,13 +11324,13 @@
       </p:sp>
       <p:sp>
         <p:nvSpPr>
-          <p:cNvPr id="41" name="Rectangle 40"/>
+          <p:cNvPr id="39" name="Rectangle 38"/>
           <p:cNvSpPr/>
           <p:nvPr/>
         </p:nvSpPr>
         <p:spPr>
           <a:xfrm>
-            <a:off x="6492240" y="4073652"/>
+            <a:off x="6492240" y="3764584"/>
             <a:ext cx="5449824" cy="9144"/>
           </a:xfrm>
           <a:prstGeom prst="rect">
@@ -11838,13 +11367,13 @@
       </p:sp>
       <p:sp>
         <p:nvSpPr>
-          <p:cNvPr id="42" name="Rectangle 41"/>
+          <p:cNvPr id="40" name="Rectangle 39"/>
           <p:cNvSpPr/>
           <p:nvPr/>
         </p:nvSpPr>
         <p:spPr>
           <a:xfrm>
-            <a:off x="6492240" y="4402836"/>
+            <a:off x="6492240" y="4093768"/>
             <a:ext cx="5449824" cy="256032"/>
           </a:xfrm>
           <a:prstGeom prst="rect">
@@ -11881,13 +11410,13 @@
       </p:sp>
       <p:sp>
         <p:nvSpPr>
-          <p:cNvPr id="43" name="TextBox 42"/>
+          <p:cNvPr id="41" name="TextBox 40"/>
           <p:cNvSpPr txBox="1"/>
           <p:nvPr/>
         </p:nvSpPr>
         <p:spPr>
           <a:xfrm>
-            <a:off x="6601968" y="4439412"/>
+            <a:off x="6601968" y="4130344"/>
             <a:ext cx="5230368" cy="201168"/>
           </a:xfrm>
           <a:prstGeom prst="rect">
@@ -11916,14 +11445,14 @@
       </p:sp>
       <p:sp>
         <p:nvSpPr>
-          <p:cNvPr id="44" name="TextBox 43"/>
+          <p:cNvPr id="42" name="TextBox 41"/>
           <p:cNvSpPr txBox="1"/>
           <p:nvPr/>
         </p:nvSpPr>
         <p:spPr>
           <a:xfrm>
-            <a:off x="6601968" y="4695444"/>
-            <a:ext cx="5230368" cy="548640"/>
+            <a:off x="6601968" y="4386376"/>
+            <a:ext cx="5230368" cy="530352"/>
           </a:xfrm>
           <a:prstGeom prst="rect">
             <a:avLst/>
@@ -11951,14 +11480,14 @@
       </p:sp>
       <p:sp>
         <p:nvSpPr>
-          <p:cNvPr id="45" name="Rectangle 44"/>
+          <p:cNvPr id="43" name="Rectangle 42"/>
           <p:cNvSpPr/>
           <p:nvPr/>
         </p:nvSpPr>
         <p:spPr>
           <a:xfrm>
-            <a:off x="384048" y="5756148"/>
-            <a:ext cx="11393424" cy="9144"/>
+            <a:off x="384048" y="5410504"/>
+            <a:ext cx="11411712" cy="9144"/>
           </a:xfrm>
           <a:prstGeom prst="rect">
             <a:avLst/>
@@ -11994,14 +11523,14 @@
       </p:sp>
       <p:sp>
         <p:nvSpPr>
-          <p:cNvPr id="46" name="TextBox 45"/>
+          <p:cNvPr id="44" name="TextBox 43"/>
           <p:cNvSpPr txBox="1"/>
           <p:nvPr/>
         </p:nvSpPr>
         <p:spPr>
           <a:xfrm>
-            <a:off x="384048" y="5838444"/>
-            <a:ext cx="11393424" cy="749808"/>
+            <a:off x="384048" y="5492800"/>
+            <a:ext cx="11411712" cy="749808"/>
           </a:xfrm>
           <a:prstGeom prst="rect">
             <a:avLst/>
@@ -12041,7 +11570,7 @@
     <p:bg>
       <p:bgPr>
         <a:solidFill>
-          <a:srgbClr val="05081E"/>
+          <a:srgbClr val="04071E"/>
         </a:solidFill>
         <a:effectLst/>
       </p:bgPr>
@@ -12055,7 +11584,7 @@
       <p:grpSpPr/>
       <p:pic>
         <p:nvPicPr>
-          <p:cNvPr id="2" name="Picture 1" descr="bg_command.jpg"/>
+          <p:cNvPr id="2" name="Picture 1" descr="bg_cover_clean.jpg"/>
           <p:cNvPicPr>
             <a:picLocks noChangeAspect="1"/>
           </p:cNvPicPr>
@@ -12086,13 +11615,13 @@
         <p:spPr>
           <a:xfrm>
             <a:off x="0" y="0"/>
-            <a:ext cx="6565392" cy="6858000"/>
+            <a:ext cx="6547104" cy="6858000"/>
           </a:xfrm>
           <a:prstGeom prst="rect">
             <a:avLst/>
           </a:prstGeom>
           <a:solidFill>
-            <a:srgbClr val="05081E"/>
+            <a:srgbClr val="04071E"/>
           </a:solidFill>
           <a:ln>
             <a:noFill/>
@@ -12128,8 +11657,8 @@
         </p:nvSpPr>
         <p:spPr>
           <a:xfrm>
-            <a:off x="6558076" y="0"/>
-            <a:ext cx="7315" cy="6858000"/>
+            <a:off x="6541617" y="0"/>
+            <a:ext cx="5486" cy="6858000"/>
           </a:xfrm>
           <a:prstGeom prst="rect">
             <a:avLst/>
@@ -12172,13 +11701,13 @@
         <p:spPr>
           <a:xfrm>
             <a:off x="0" y="0"/>
-            <a:ext cx="12188952" cy="329184"/>
+            <a:ext cx="12188952" cy="47548"/>
           </a:xfrm>
           <a:prstGeom prst="rect">
             <a:avLst/>
           </a:prstGeom>
           <a:solidFill>
-            <a:srgbClr val="04071C"/>
+            <a:srgbClr val="C9A84C"/>
           </a:solidFill>
           <a:ln>
             <a:noFill/>
@@ -12214,8 +11743,8 @@
         </p:nvSpPr>
         <p:spPr>
           <a:xfrm>
-            <a:off x="256032" y="64008"/>
-            <a:ext cx="2560320" cy="201168"/>
+            <a:off x="0" y="54864"/>
+            <a:ext cx="11914632" cy="164592"/>
           </a:xfrm>
           <a:prstGeom prst="rect">
             <a:avLst/>
@@ -12228,92 +11757,22 @@
           </a:bodyPr>
           <a:lstStyle/>
           <a:p>
-            <a:pPr algn="l"/>
-            <a:r>
-              <a:rPr sz="800" b="1" i="0">
-                <a:solidFill>
-                  <a:srgbClr val="2B8A6E"/>
+            <a:pPr algn="r"/>
+            <a:r>
+              <a:rPr sz="750" b="1" i="0">
+                <a:solidFill>
+                  <a:srgbClr val="0A0F2E"/>
                 </a:solidFill>
                 <a:latin typeface="Calibri"/>
               </a:rPr>
-              <a:t>●  MONITORING ACTIVE</a:t>
-            </a:r>
-          </a:p>
-        </p:txBody>
-      </p:sp>
-      <p:sp>
-        <p:nvSpPr>
-          <p:cNvPr id="7" name="TextBox 6"/>
-          <p:cNvSpPr txBox="1"/>
-          <p:nvPr/>
-        </p:nvSpPr>
-        <p:spPr>
-          <a:xfrm>
-            <a:off x="2871216" y="64008"/>
-            <a:ext cx="5120640" cy="201168"/>
-          </a:xfrm>
-          <a:prstGeom prst="rect">
-            <a:avLst/>
-          </a:prstGeom>
-          <a:noFill/>
-        </p:spPr>
-        <p:txBody>
-          <a:bodyPr wrap="square">
-            <a:spAutoFit/>
-          </a:bodyPr>
-          <a:lstStyle/>
-          <a:p>
-            <a:pPr algn="l"/>
-            <a:r>
-              <a:rPr sz="750" b="0" i="0">
-                <a:solidFill>
-                  <a:srgbClr val="AAB4CC"/>
-                </a:solidFill>
-                <a:latin typeface="Calibri"/>
-              </a:rPr>
-              <a:t>1 signal detected  ·  System active  ·  Readiness Protocols armed</a:t>
-            </a:r>
-          </a:p>
-        </p:txBody>
-      </p:sp>
-      <p:sp>
-        <p:nvSpPr>
-          <p:cNvPr id="8" name="TextBox 7"/>
-          <p:cNvSpPr txBox="1"/>
-          <p:nvPr/>
-        </p:nvSpPr>
-        <p:spPr>
-          <a:xfrm>
-            <a:off x="8686800" y="64008"/>
-            <a:ext cx="3291840" cy="201168"/>
-          </a:xfrm>
-          <a:prstGeom prst="rect">
-            <a:avLst/>
-          </a:prstGeom>
-          <a:noFill/>
-        </p:spPr>
-        <p:txBody>
-          <a:bodyPr wrap="square">
-            <a:spAutoFit/>
-          </a:bodyPr>
-          <a:lstStyle/>
-          <a:p>
-            <a:pPr algn="r"/>
-            <a:r>
-              <a:rPr sz="750" b="1" i="0">
-                <a:solidFill>
-                  <a:srgbClr val="C9A84C"/>
-                </a:solidFill>
-                <a:latin typeface="Calibri"/>
-              </a:rPr>
-              <a:t>SEE IT EXECUTE IN 12 MINUTES  →</a:t>
-            </a:r>
-          </a:p>
-        </p:txBody>
-      </p:sp>
-      <p:sp>
-        <p:nvSpPr>
-          <p:cNvPr id="9" name="Rectangle 8"/>
+              <a:t>  05  /  08</a:t>
+            </a:r>
+          </a:p>
+        </p:txBody>
+      </p:sp>
+      <p:sp>
+        <p:nvSpPr>
+          <p:cNvPr id="7" name="Rectangle 6"/>
           <p:cNvSpPr/>
           <p:nvPr/>
         </p:nvSpPr>
@@ -12356,7 +11815,7 @@
       </p:sp>
       <p:sp>
         <p:nvSpPr>
-          <p:cNvPr id="10" name="Rectangle 9"/>
+          <p:cNvPr id="8" name="Rectangle 7"/>
           <p:cNvSpPr/>
           <p:nvPr/>
         </p:nvSpPr>
@@ -12399,7 +11858,7 @@
       </p:sp>
       <p:pic>
         <p:nvPicPr>
-          <p:cNvPr id="11" name="Picture 10" descr="vm_logo_footer.png"/>
+          <p:cNvPr id="9" name="Picture 8" descr="vm_logo_footer.png"/>
           <p:cNvPicPr>
             <a:picLocks noChangeAspect="1"/>
           </p:cNvPicPr>
@@ -12423,7 +11882,7 @@
       </p:pic>
       <p:sp>
         <p:nvSpPr>
-          <p:cNvPr id="12" name="TextBox 11"/>
+          <p:cNvPr id="10" name="TextBox 9"/>
           <p:cNvSpPr txBox="1"/>
           <p:nvPr/>
         </p:nvSpPr>
@@ -12451,21 +11910,21 @@
                 </a:solidFill>
                 <a:latin typeface="Calibri"/>
               </a:rPr>
-              <a:t>  05  /  08</a:t>
-            </a:r>
-          </a:p>
-        </p:txBody>
-      </p:sp>
-      <p:sp>
-        <p:nvSpPr>
-          <p:cNvPr id="13" name="TextBox 12"/>
+              <a:t>05  /  08</a:t>
+            </a:r>
+          </a:p>
+        </p:txBody>
+      </p:sp>
+      <p:sp>
+        <p:nvSpPr>
+          <p:cNvPr id="11" name="TextBox 10"/>
           <p:cNvSpPr txBox="1"/>
           <p:nvPr/>
         </p:nvSpPr>
         <p:spPr>
           <a:xfrm>
             <a:off x="2194560" y="6592824"/>
-            <a:ext cx="7955279" cy="182880"/>
+            <a:ext cx="8165592" cy="182880"/>
           </a:xfrm>
           <a:prstGeom prst="rect">
             <a:avLst/>
@@ -12493,14 +11952,14 @@
       </p:sp>
       <p:sp>
         <p:nvSpPr>
-          <p:cNvPr id="14" name="Rectangle 13"/>
+          <p:cNvPr id="12" name="Rectangle 11"/>
           <p:cNvSpPr/>
           <p:nvPr/>
         </p:nvSpPr>
         <p:spPr>
           <a:xfrm>
-            <a:off x="365760" y="448056"/>
-            <a:ext cx="310896" cy="7315"/>
+            <a:off x="365760" y="269748"/>
+            <a:ext cx="256032" cy="7315"/>
           </a:xfrm>
           <a:prstGeom prst="rect">
             <a:avLst/>
@@ -12536,14 +11995,14 @@
       </p:sp>
       <p:sp>
         <p:nvSpPr>
-          <p:cNvPr id="15" name="TextBox 14"/>
+          <p:cNvPr id="13" name="TextBox 12"/>
           <p:cNvSpPr txBox="1"/>
           <p:nvPr/>
         </p:nvSpPr>
         <p:spPr>
           <a:xfrm>
-            <a:off x="713232" y="384048"/>
-            <a:ext cx="5376672" cy="201168"/>
+            <a:off x="658368" y="201168"/>
+            <a:ext cx="5760720" cy="164592"/>
           </a:xfrm>
           <a:prstGeom prst="rect">
             <a:avLst/>
@@ -12564,21 +12023,21 @@
                 </a:solidFill>
                 <a:latin typeface="Calibri"/>
               </a:rPr>
-              <a:t>  HOW IT WORKS</a:t>
-            </a:r>
-          </a:p>
-        </p:txBody>
-      </p:sp>
-      <p:sp>
-        <p:nvSpPr>
-          <p:cNvPr id="16" name="TextBox 15"/>
+              <a:t>   HOW IT WORKS</a:t>
+            </a:r>
+          </a:p>
+        </p:txBody>
+      </p:sp>
+      <p:sp>
+        <p:nvSpPr>
+          <p:cNvPr id="14" name="TextBox 13"/>
           <p:cNvSpPr txBox="1"/>
           <p:nvPr/>
         </p:nvSpPr>
         <p:spPr>
           <a:xfrm>
-            <a:off x="384048" y="566928"/>
-            <a:ext cx="5943600" cy="462280"/>
+            <a:off x="384048" y="365760"/>
+            <a:ext cx="5943600" cy="435864"/>
           </a:xfrm>
           <a:prstGeom prst="rect">
             <a:avLst/>
@@ -12593,7 +12052,7 @@
           <a:p>
             <a:pPr algn="l"/>
             <a:r>
-              <a:rPr sz="2800" b="1" i="0">
+              <a:rPr sz="2600" b="1" i="0">
                 <a:solidFill>
                   <a:srgbClr val="FFFFFF"/>
                 </a:solidFill>
@@ -12606,14 +12065,14 @@
       </p:sp>
       <p:sp>
         <p:nvSpPr>
-          <p:cNvPr id="17" name="TextBox 16"/>
+          <p:cNvPr id="15" name="TextBox 14"/>
           <p:cNvSpPr txBox="1"/>
           <p:nvPr/>
         </p:nvSpPr>
         <p:spPr>
           <a:xfrm>
-            <a:off x="384048" y="1029208"/>
-            <a:ext cx="5943600" cy="462280"/>
+            <a:off x="384048" y="801624"/>
+            <a:ext cx="5943600" cy="435864"/>
           </a:xfrm>
           <a:prstGeom prst="rect">
             <a:avLst/>
@@ -12628,7 +12087,7 @@
           <a:p>
             <a:pPr algn="l"/>
             <a:r>
-              <a:rPr sz="2800" b="1" i="0">
+              <a:rPr sz="2600" b="1" i="0">
                 <a:solidFill>
                   <a:srgbClr val="C9A84C"/>
                 </a:solidFill>
@@ -12641,14 +12100,14 @@
       </p:sp>
       <p:sp>
         <p:nvSpPr>
-          <p:cNvPr id="18" name="Rectangle 17"/>
+          <p:cNvPr id="16" name="Rectangle 15"/>
           <p:cNvSpPr/>
           <p:nvPr/>
         </p:nvSpPr>
         <p:spPr>
           <a:xfrm>
-            <a:off x="384048" y="1601216"/>
-            <a:ext cx="5943600" cy="9144"/>
+            <a:off x="384048" y="1328928"/>
+            <a:ext cx="6126480" cy="9144"/>
           </a:xfrm>
           <a:prstGeom prst="rect">
             <a:avLst/>
@@ -12684,13 +12143,13 @@
       </p:sp>
       <p:sp>
         <p:nvSpPr>
-          <p:cNvPr id="19" name="TextBox 18"/>
+          <p:cNvPr id="17" name="TextBox 16"/>
           <p:cNvSpPr txBox="1"/>
           <p:nvPr/>
         </p:nvSpPr>
         <p:spPr>
           <a:xfrm>
-            <a:off x="384048" y="1747418"/>
+            <a:off x="384048" y="1474927"/>
             <a:ext cx="457200" cy="457200"/>
           </a:xfrm>
           <a:prstGeom prst="rect">
@@ -12706,7 +12165,7 @@
           <a:p>
             <a:pPr algn="l"/>
             <a:r>
-              <a:rPr sz="1600" b="1" i="0">
+              <a:rPr sz="1500" b="1" i="0">
                 <a:solidFill>
                   <a:srgbClr val="C9A84C"/>
                 </a:solidFill>
@@ -12719,14 +12178,14 @@
       </p:sp>
       <p:sp>
         <p:nvSpPr>
-          <p:cNvPr id="20" name="TextBox 19"/>
+          <p:cNvPr id="18" name="TextBox 17"/>
           <p:cNvSpPr txBox="1"/>
           <p:nvPr/>
         </p:nvSpPr>
         <p:spPr>
           <a:xfrm>
-            <a:off x="877824" y="1793138"/>
-            <a:ext cx="5486400" cy="384048"/>
+            <a:off x="877824" y="1520647"/>
+            <a:ext cx="5577840" cy="384048"/>
           </a:xfrm>
           <a:prstGeom prst="rect">
             <a:avLst/>
@@ -12747,20 +12206,20 @@
                 </a:solidFill>
                 <a:latin typeface="Calibri"/>
               </a:rPr>
-              <a:t>Signal detected — scored against 221 live strategic trigger patterns</a:t>
-            </a:r>
-          </a:p>
-        </p:txBody>
-      </p:sp>
-      <p:sp>
-        <p:nvSpPr>
-          <p:cNvPr id="21" name="TextBox 20"/>
+              <a:t>Signal detected — confidence-scored against 221 live trigger patterns</a:t>
+            </a:r>
+          </a:p>
+        </p:txBody>
+      </p:sp>
+      <p:sp>
+        <p:nvSpPr>
+          <p:cNvPr id="19" name="TextBox 18"/>
           <p:cNvSpPr txBox="1"/>
           <p:nvPr/>
         </p:nvSpPr>
         <p:spPr>
           <a:xfrm>
-            <a:off x="384048" y="2277770"/>
+            <a:off x="384048" y="1996135"/>
             <a:ext cx="457200" cy="457200"/>
           </a:xfrm>
           <a:prstGeom prst="rect">
@@ -12776,7 +12235,7 @@
           <a:p>
             <a:pPr algn="l"/>
             <a:r>
-              <a:rPr sz="1600" b="1" i="0">
+              <a:rPr sz="1500" b="1" i="0">
                 <a:solidFill>
                   <a:srgbClr val="C9A84C"/>
                 </a:solidFill>
@@ -12789,14 +12248,14 @@
       </p:sp>
       <p:sp>
         <p:nvSpPr>
-          <p:cNvPr id="22" name="TextBox 21"/>
+          <p:cNvPr id="20" name="TextBox 19"/>
           <p:cNvSpPr txBox="1"/>
           <p:nvPr/>
         </p:nvSpPr>
         <p:spPr>
           <a:xfrm>
-            <a:off x="877824" y="2323490"/>
-            <a:ext cx="5486400" cy="384048"/>
+            <a:off x="877824" y="2041855"/>
+            <a:ext cx="5577840" cy="384048"/>
           </a:xfrm>
           <a:prstGeom prst="rect">
             <a:avLst/>
@@ -12824,13 +12283,13 @@
       </p:sp>
       <p:sp>
         <p:nvSpPr>
-          <p:cNvPr id="23" name="TextBox 22"/>
+          <p:cNvPr id="21" name="TextBox 20"/>
           <p:cNvSpPr txBox="1"/>
           <p:nvPr/>
         </p:nvSpPr>
         <p:spPr>
           <a:xfrm>
-            <a:off x="384048" y="2808122"/>
+            <a:off x="384048" y="2517343"/>
             <a:ext cx="457200" cy="457200"/>
           </a:xfrm>
           <a:prstGeom prst="rect">
@@ -12846,7 +12305,7 @@
           <a:p>
             <a:pPr algn="l"/>
             <a:r>
-              <a:rPr sz="1600" b="1" i="0">
+              <a:rPr sz="1500" b="1" i="0">
                 <a:solidFill>
                   <a:srgbClr val="C9A84C"/>
                 </a:solidFill>
@@ -12859,14 +12318,14 @@
       </p:sp>
       <p:sp>
         <p:nvSpPr>
-          <p:cNvPr id="24" name="TextBox 23"/>
+          <p:cNvPr id="22" name="TextBox 21"/>
           <p:cNvSpPr txBox="1"/>
           <p:nvPr/>
         </p:nvSpPr>
         <p:spPr>
           <a:xfrm>
-            <a:off x="877824" y="2853842"/>
-            <a:ext cx="5486400" cy="384048"/>
+            <a:off x="877824" y="2563063"/>
+            <a:ext cx="5577840" cy="384048"/>
           </a:xfrm>
           <a:prstGeom prst="rect">
             <a:avLst/>
@@ -12894,13 +12353,13 @@
       </p:sp>
       <p:sp>
         <p:nvSpPr>
-          <p:cNvPr id="25" name="TextBox 24"/>
+          <p:cNvPr id="23" name="TextBox 22"/>
           <p:cNvSpPr txBox="1"/>
           <p:nvPr/>
         </p:nvSpPr>
         <p:spPr>
           <a:xfrm>
-            <a:off x="384048" y="3338474"/>
+            <a:off x="384048" y="3038551"/>
             <a:ext cx="457200" cy="457200"/>
           </a:xfrm>
           <a:prstGeom prst="rect">
@@ -12916,7 +12375,7 @@
           <a:p>
             <a:pPr algn="l"/>
             <a:r>
-              <a:rPr sz="1600" b="1" i="0">
+              <a:rPr sz="1500" b="1" i="0">
                 <a:solidFill>
                   <a:srgbClr val="C9A84C"/>
                 </a:solidFill>
@@ -12929,14 +12388,14 @@
       </p:sp>
       <p:sp>
         <p:nvSpPr>
-          <p:cNvPr id="26" name="TextBox 25"/>
+          <p:cNvPr id="24" name="TextBox 23"/>
           <p:cNvSpPr txBox="1"/>
           <p:nvPr/>
         </p:nvSpPr>
         <p:spPr>
           <a:xfrm>
-            <a:off x="877824" y="3384194"/>
-            <a:ext cx="5486400" cy="384048"/>
+            <a:off x="877824" y="3084271"/>
+            <a:ext cx="5577840" cy="384048"/>
           </a:xfrm>
           <a:prstGeom prst="rect">
             <a:avLst/>
@@ -12964,13 +12423,13 @@
       </p:sp>
       <p:sp>
         <p:nvSpPr>
-          <p:cNvPr id="27" name="TextBox 26"/>
+          <p:cNvPr id="25" name="TextBox 24"/>
           <p:cNvSpPr txBox="1"/>
           <p:nvPr/>
         </p:nvSpPr>
         <p:spPr>
           <a:xfrm>
-            <a:off x="384048" y="3868826"/>
+            <a:off x="384048" y="3559759"/>
             <a:ext cx="457200" cy="457200"/>
           </a:xfrm>
           <a:prstGeom prst="rect">
@@ -12986,7 +12445,7 @@
           <a:p>
             <a:pPr algn="l"/>
             <a:r>
-              <a:rPr sz="1600" b="1" i="0">
+              <a:rPr sz="1500" b="1" i="0">
                 <a:solidFill>
                   <a:srgbClr val="C9A84C"/>
                 </a:solidFill>
@@ -12999,14 +12458,14 @@
       </p:sp>
       <p:sp>
         <p:nvSpPr>
-          <p:cNvPr id="28" name="TextBox 27"/>
+          <p:cNvPr id="26" name="TextBox 25"/>
           <p:cNvSpPr txBox="1"/>
           <p:nvPr/>
         </p:nvSpPr>
         <p:spPr>
           <a:xfrm>
-            <a:off x="877824" y="3914546"/>
-            <a:ext cx="5486400" cy="384048"/>
+            <a:off x="877824" y="3605479"/>
+            <a:ext cx="5577840" cy="384048"/>
           </a:xfrm>
           <a:prstGeom prst="rect">
             <a:avLst/>
@@ -13034,13 +12493,13 @@
       </p:sp>
       <p:sp>
         <p:nvSpPr>
-          <p:cNvPr id="29" name="Rectangle 28"/>
+          <p:cNvPr id="27" name="Rectangle 26"/>
           <p:cNvSpPr/>
           <p:nvPr/>
         </p:nvSpPr>
         <p:spPr>
           <a:xfrm>
-            <a:off x="384048" y="4545482"/>
+            <a:off x="384048" y="4208983"/>
             <a:ext cx="5760720" cy="658368"/>
           </a:xfrm>
           <a:prstGeom prst="rect">
@@ -13077,13 +12536,13 @@
       </p:sp>
       <p:sp>
         <p:nvSpPr>
-          <p:cNvPr id="30" name="Rectangle 29"/>
+          <p:cNvPr id="28" name="Rectangle 27"/>
           <p:cNvSpPr/>
           <p:nvPr/>
         </p:nvSpPr>
         <p:spPr>
           <a:xfrm>
-            <a:off x="384048" y="4545482"/>
+            <a:off x="384048" y="4208983"/>
             <a:ext cx="5760720" cy="21945"/>
           </a:xfrm>
           <a:prstGeom prst="rect">
@@ -13120,13 +12579,13 @@
       </p:sp>
       <p:sp>
         <p:nvSpPr>
-          <p:cNvPr id="31" name="TextBox 30"/>
+          <p:cNvPr id="29" name="TextBox 28"/>
           <p:cNvSpPr txBox="1"/>
           <p:nvPr/>
         </p:nvSpPr>
         <p:spPr>
           <a:xfrm>
-            <a:off x="512064" y="4591202"/>
+            <a:off x="512064" y="4254703"/>
             <a:ext cx="5559552" cy="256032"/>
           </a:xfrm>
           <a:prstGeom prst="rect">
@@ -13155,13 +12614,13 @@
       </p:sp>
       <p:sp>
         <p:nvSpPr>
-          <p:cNvPr id="32" name="TextBox 31"/>
+          <p:cNvPr id="30" name="TextBox 29"/>
           <p:cNvSpPr txBox="1"/>
           <p:nvPr/>
         </p:nvSpPr>
         <p:spPr>
           <a:xfrm>
-            <a:off x="512064" y="4874666"/>
+            <a:off x="512064" y="4538167"/>
             <a:ext cx="5559552" cy="274320"/>
           </a:xfrm>
           <a:prstGeom prst="rect">
@@ -13190,13 +12649,13 @@
       </p:sp>
       <p:sp>
         <p:nvSpPr>
-          <p:cNvPr id="33" name="Rectangle 32"/>
+          <p:cNvPr id="31" name="Rectangle 30"/>
           <p:cNvSpPr/>
           <p:nvPr/>
         </p:nvSpPr>
         <p:spPr>
           <a:xfrm>
-            <a:off x="384048" y="5350154"/>
+            <a:off x="384048" y="4995367"/>
             <a:ext cx="5577840" cy="9144"/>
           </a:xfrm>
           <a:prstGeom prst="rect">
@@ -13233,13 +12692,13 @@
       </p:sp>
       <p:sp>
         <p:nvSpPr>
-          <p:cNvPr id="34" name="TextBox 33"/>
+          <p:cNvPr id="32" name="TextBox 31"/>
           <p:cNvSpPr txBox="1"/>
           <p:nvPr/>
         </p:nvSpPr>
         <p:spPr>
           <a:xfrm>
-            <a:off x="384048" y="5414162"/>
+            <a:off x="384048" y="5059375"/>
             <a:ext cx="5760720" cy="713232"/>
           </a:xfrm>
           <a:prstGeom prst="rect">
@@ -13268,7 +12727,7 @@
       </p:sp>
       <p:sp>
         <p:nvSpPr>
-          <p:cNvPr id="35" name="Rectangle 34"/>
+          <p:cNvPr id="33" name="Rectangle 32"/>
           <p:cNvSpPr/>
           <p:nvPr/>
         </p:nvSpPr>
@@ -13311,7 +12770,7 @@
       </p:sp>
       <p:sp>
         <p:nvSpPr>
-          <p:cNvPr id="36" name="Rectangle 35"/>
+          <p:cNvPr id="34" name="Rectangle 33"/>
           <p:cNvSpPr/>
           <p:nvPr/>
         </p:nvSpPr>
@@ -13354,7 +12813,7 @@
       </p:sp>
       <p:pic>
         <p:nvPicPr>
-          <p:cNvPr id="37" name="Picture 36" descr="hq_12min_scenarios.jpg"/>
+          <p:cNvPr id="35" name="Picture 34" descr="hq_12min_scenarios.jpg"/>
           <p:cNvPicPr>
             <a:picLocks noChangeAspect="1"/>
           </p:cNvPicPr>
@@ -13390,7 +12849,7 @@
     <p:bg>
       <p:bgPr>
         <a:solidFill>
-          <a:srgbClr val="05081E"/>
+          <a:srgbClr val="04071E"/>
         </a:solidFill>
         <a:effectLst/>
       </p:bgPr>
@@ -13404,7 +12863,7 @@
       <p:grpSpPr/>
       <p:pic>
         <p:nvPicPr>
-          <p:cNvPr id="2" name="Picture 1" descr="bg_proof.jpg"/>
+          <p:cNvPr id="2" name="Picture 1" descr="bg_cover_clean.jpg"/>
           <p:cNvPicPr>
             <a:picLocks noChangeAspect="1"/>
           </p:cNvPicPr>
@@ -13435,13 +12894,13 @@
         <p:spPr>
           <a:xfrm>
             <a:off x="0" y="0"/>
-            <a:ext cx="6565392" cy="6858000"/>
+            <a:ext cx="6547104" cy="6858000"/>
           </a:xfrm>
           <a:prstGeom prst="rect">
             <a:avLst/>
           </a:prstGeom>
           <a:solidFill>
-            <a:srgbClr val="05081E"/>
+            <a:srgbClr val="04071E"/>
           </a:solidFill>
           <a:ln>
             <a:noFill/>
@@ -13477,8 +12936,8 @@
         </p:nvSpPr>
         <p:spPr>
           <a:xfrm>
-            <a:off x="6558076" y="0"/>
-            <a:ext cx="7315" cy="6858000"/>
+            <a:off x="6541617" y="0"/>
+            <a:ext cx="5486" cy="6858000"/>
           </a:xfrm>
           <a:prstGeom prst="rect">
             <a:avLst/>
@@ -13521,13 +12980,13 @@
         <p:spPr>
           <a:xfrm>
             <a:off x="0" y="0"/>
-            <a:ext cx="12188952" cy="329184"/>
+            <a:ext cx="12188952" cy="47548"/>
           </a:xfrm>
           <a:prstGeom prst="rect">
             <a:avLst/>
           </a:prstGeom>
           <a:solidFill>
-            <a:srgbClr val="04071C"/>
+            <a:srgbClr val="C9A84C"/>
           </a:solidFill>
           <a:ln>
             <a:noFill/>
@@ -13563,8 +13022,8 @@
         </p:nvSpPr>
         <p:spPr>
           <a:xfrm>
-            <a:off x="256032" y="64008"/>
-            <a:ext cx="2560320" cy="201168"/>
+            <a:off x="0" y="54864"/>
+            <a:ext cx="11914632" cy="164592"/>
           </a:xfrm>
           <a:prstGeom prst="rect">
             <a:avLst/>
@@ -13577,92 +13036,22 @@
           </a:bodyPr>
           <a:lstStyle/>
           <a:p>
-            <a:pPr algn="l"/>
-            <a:r>
-              <a:rPr sz="800" b="1" i="0">
-                <a:solidFill>
-                  <a:srgbClr val="2B8A6E"/>
+            <a:pPr algn="r"/>
+            <a:r>
+              <a:rPr sz="750" b="1" i="0">
+                <a:solidFill>
+                  <a:srgbClr val="0A0F2E"/>
                 </a:solidFill>
                 <a:latin typeface="Calibri"/>
               </a:rPr>
-              <a:t>●  MONITORING ACTIVE</a:t>
-            </a:r>
-          </a:p>
-        </p:txBody>
-      </p:sp>
-      <p:sp>
-        <p:nvSpPr>
-          <p:cNvPr id="7" name="TextBox 6"/>
-          <p:cNvSpPr txBox="1"/>
-          <p:nvPr/>
-        </p:nvSpPr>
-        <p:spPr>
-          <a:xfrm>
-            <a:off x="2871216" y="64008"/>
-            <a:ext cx="5120640" cy="201168"/>
-          </a:xfrm>
-          <a:prstGeom prst="rect">
-            <a:avLst/>
-          </a:prstGeom>
-          <a:noFill/>
-        </p:spPr>
-        <p:txBody>
-          <a:bodyPr wrap="square">
-            <a:spAutoFit/>
-          </a:bodyPr>
-          <a:lstStyle/>
-          <a:p>
-            <a:pPr algn="l"/>
-            <a:r>
-              <a:rPr sz="750" b="0" i="0">
-                <a:solidFill>
-                  <a:srgbClr val="AAB4CC"/>
-                </a:solidFill>
-                <a:latin typeface="Calibri"/>
-              </a:rPr>
-              <a:t>1 signal detected  ·  System active  ·  Readiness Protocols armed</a:t>
-            </a:r>
-          </a:p>
-        </p:txBody>
-      </p:sp>
-      <p:sp>
-        <p:nvSpPr>
-          <p:cNvPr id="8" name="TextBox 7"/>
-          <p:cNvSpPr txBox="1"/>
-          <p:nvPr/>
-        </p:nvSpPr>
-        <p:spPr>
-          <a:xfrm>
-            <a:off x="8686800" y="64008"/>
-            <a:ext cx="3291840" cy="201168"/>
-          </a:xfrm>
-          <a:prstGeom prst="rect">
-            <a:avLst/>
-          </a:prstGeom>
-          <a:noFill/>
-        </p:spPr>
-        <p:txBody>
-          <a:bodyPr wrap="square">
-            <a:spAutoFit/>
-          </a:bodyPr>
-          <a:lstStyle/>
-          <a:p>
-            <a:pPr algn="r"/>
-            <a:r>
-              <a:rPr sz="750" b="1" i="0">
-                <a:solidFill>
-                  <a:srgbClr val="C9A84C"/>
-                </a:solidFill>
-                <a:latin typeface="Calibri"/>
-              </a:rPr>
-              <a:t>SEE IT EXECUTE IN 12 MINUTES  →</a:t>
-            </a:r>
-          </a:p>
-        </p:txBody>
-      </p:sp>
-      <p:sp>
-        <p:nvSpPr>
-          <p:cNvPr id="9" name="Rectangle 8"/>
+              <a:t>  06  /  08</a:t>
+            </a:r>
+          </a:p>
+        </p:txBody>
+      </p:sp>
+      <p:sp>
+        <p:nvSpPr>
+          <p:cNvPr id="7" name="Rectangle 6"/>
           <p:cNvSpPr/>
           <p:nvPr/>
         </p:nvSpPr>
@@ -13705,7 +13094,7 @@
       </p:sp>
       <p:sp>
         <p:nvSpPr>
-          <p:cNvPr id="10" name="Rectangle 9"/>
+          <p:cNvPr id="8" name="Rectangle 7"/>
           <p:cNvSpPr/>
           <p:nvPr/>
         </p:nvSpPr>
@@ -13748,7 +13137,7 @@
       </p:sp>
       <p:pic>
         <p:nvPicPr>
-          <p:cNvPr id="11" name="Picture 10" descr="vm_logo_footer.png"/>
+          <p:cNvPr id="9" name="Picture 8" descr="vm_logo_footer.png"/>
           <p:cNvPicPr>
             <a:picLocks noChangeAspect="1"/>
           </p:cNvPicPr>
@@ -13772,7 +13161,7 @@
       </p:pic>
       <p:sp>
         <p:nvSpPr>
-          <p:cNvPr id="12" name="TextBox 11"/>
+          <p:cNvPr id="10" name="TextBox 9"/>
           <p:cNvSpPr txBox="1"/>
           <p:nvPr/>
         </p:nvSpPr>
@@ -13800,21 +13189,21 @@
                 </a:solidFill>
                 <a:latin typeface="Calibri"/>
               </a:rPr>
-              <a:t>  06  /  08</a:t>
-            </a:r>
-          </a:p>
-        </p:txBody>
-      </p:sp>
-      <p:sp>
-        <p:nvSpPr>
-          <p:cNvPr id="13" name="TextBox 12"/>
+              <a:t>06  /  08</a:t>
+            </a:r>
+          </a:p>
+        </p:txBody>
+      </p:sp>
+      <p:sp>
+        <p:nvSpPr>
+          <p:cNvPr id="11" name="TextBox 10"/>
           <p:cNvSpPr txBox="1"/>
           <p:nvPr/>
         </p:nvSpPr>
         <p:spPr>
           <a:xfrm>
             <a:off x="2194560" y="6592824"/>
-            <a:ext cx="7955279" cy="182880"/>
+            <a:ext cx="8165592" cy="182880"/>
           </a:xfrm>
           <a:prstGeom prst="rect">
             <a:avLst/>
@@ -13842,14 +13231,14 @@
       </p:sp>
       <p:sp>
         <p:nvSpPr>
-          <p:cNvPr id="14" name="Rectangle 13"/>
+          <p:cNvPr id="12" name="Rectangle 11"/>
           <p:cNvSpPr/>
           <p:nvPr/>
         </p:nvSpPr>
         <p:spPr>
           <a:xfrm>
-            <a:off x="365760" y="448056"/>
-            <a:ext cx="310896" cy="7315"/>
+            <a:off x="365760" y="269748"/>
+            <a:ext cx="256032" cy="7315"/>
           </a:xfrm>
           <a:prstGeom prst="rect">
             <a:avLst/>
@@ -13885,14 +13274,14 @@
       </p:sp>
       <p:sp>
         <p:nvSpPr>
-          <p:cNvPr id="15" name="TextBox 14"/>
+          <p:cNvPr id="13" name="TextBox 12"/>
           <p:cNvSpPr txBox="1"/>
           <p:nvPr/>
         </p:nvSpPr>
         <p:spPr>
           <a:xfrm>
-            <a:off x="713232" y="384048"/>
-            <a:ext cx="5376672" cy="201168"/>
+            <a:off x="658368" y="201168"/>
+            <a:ext cx="5760720" cy="164592"/>
           </a:xfrm>
           <a:prstGeom prst="rect">
             <a:avLst/>
@@ -13913,21 +13302,21 @@
                 </a:solidFill>
                 <a:latin typeface="Calibri"/>
               </a:rPr>
-              <a:t>  PROOF — NOW, NOT ROADMAP</a:t>
-            </a:r>
-          </a:p>
-        </p:txBody>
-      </p:sp>
-      <p:sp>
-        <p:nvSpPr>
-          <p:cNvPr id="16" name="TextBox 15"/>
+              <a:t>   PROOF — NOW, NOT ROADMAP</a:t>
+            </a:r>
+          </a:p>
+        </p:txBody>
+      </p:sp>
+      <p:sp>
+        <p:nvSpPr>
+          <p:cNvPr id="14" name="TextBox 13"/>
           <p:cNvSpPr txBox="1"/>
           <p:nvPr/>
         </p:nvSpPr>
         <p:spPr>
           <a:xfrm>
-            <a:off x="384048" y="566928"/>
-            <a:ext cx="5943600" cy="627380"/>
+            <a:off x="384048" y="365760"/>
+            <a:ext cx="5943600" cy="603504"/>
           </a:xfrm>
           <a:prstGeom prst="rect">
             <a:avLst/>
@@ -13942,7 +13331,7 @@
           <a:p>
             <a:pPr algn="l"/>
             <a:r>
-              <a:rPr sz="3800" b="1" i="0">
+              <a:rPr sz="3600" b="1" i="0">
                 <a:solidFill>
                   <a:srgbClr val="FFFFFF"/>
                 </a:solidFill>
@@ -13955,14 +13344,14 @@
       </p:sp>
       <p:sp>
         <p:nvSpPr>
-          <p:cNvPr id="17" name="TextBox 16"/>
+          <p:cNvPr id="15" name="TextBox 14"/>
           <p:cNvSpPr txBox="1"/>
           <p:nvPr/>
         </p:nvSpPr>
         <p:spPr>
           <a:xfrm>
-            <a:off x="384048" y="1194308"/>
-            <a:ext cx="5943600" cy="627380"/>
+            <a:off x="384048" y="969264"/>
+            <a:ext cx="5943600" cy="603504"/>
           </a:xfrm>
           <a:prstGeom prst="rect">
             <a:avLst/>
@@ -13977,7 +13366,7 @@
           <a:p>
             <a:pPr algn="l"/>
             <a:r>
-              <a:rPr sz="3800" b="1" i="0">
+              <a:rPr sz="3600" b="1" i="0">
                 <a:solidFill>
                   <a:srgbClr val="C9A84C"/>
                 </a:solidFill>
@@ -13990,14 +13379,14 @@
       </p:sp>
       <p:sp>
         <p:nvSpPr>
-          <p:cNvPr id="18" name="TextBox 17"/>
+          <p:cNvPr id="16" name="TextBox 15"/>
           <p:cNvSpPr txBox="1"/>
           <p:nvPr/>
         </p:nvSpPr>
         <p:spPr>
           <a:xfrm>
-            <a:off x="384048" y="1821688"/>
-            <a:ext cx="5943600" cy="363220"/>
+            <a:off x="384048" y="1572768"/>
+            <a:ext cx="5943600" cy="335280"/>
           </a:xfrm>
           <a:prstGeom prst="rect">
             <a:avLst/>
@@ -14012,7 +13401,7 @@
           <a:p>
             <a:pPr algn="l"/>
             <a:r>
-              <a:rPr sz="2200" b="1" i="0">
+              <a:rPr sz="2000" b="1" i="0">
                 <a:solidFill>
                   <a:srgbClr val="AAB4CC"/>
                 </a:solidFill>
@@ -14025,14 +13414,14 @@
       </p:sp>
       <p:sp>
         <p:nvSpPr>
-          <p:cNvPr id="19" name="Rectangle 18"/>
+          <p:cNvPr id="17" name="Rectangle 16"/>
           <p:cNvSpPr/>
           <p:nvPr/>
         </p:nvSpPr>
         <p:spPr>
           <a:xfrm>
-            <a:off x="384048" y="2294636"/>
-            <a:ext cx="5943600" cy="9144"/>
+            <a:off x="384048" y="1999488"/>
+            <a:ext cx="6126480" cy="9144"/>
           </a:xfrm>
           <a:prstGeom prst="rect">
             <a:avLst/>
@@ -14068,13 +13457,13 @@
       </p:sp>
       <p:sp>
         <p:nvSpPr>
-          <p:cNvPr id="20" name="TextBox 19"/>
+          <p:cNvPr id="18" name="TextBox 17"/>
           <p:cNvSpPr txBox="1"/>
           <p:nvPr/>
         </p:nvSpPr>
         <p:spPr>
           <a:xfrm>
-            <a:off x="384048" y="2440533"/>
+            <a:off x="384048" y="2146096"/>
             <a:ext cx="5852160" cy="365760"/>
           </a:xfrm>
           <a:prstGeom prst="rect">
@@ -14103,13 +13492,13 @@
       </p:sp>
       <p:sp>
         <p:nvSpPr>
-          <p:cNvPr id="21" name="TextBox 20"/>
+          <p:cNvPr id="19" name="TextBox 18"/>
           <p:cNvSpPr txBox="1"/>
           <p:nvPr/>
         </p:nvSpPr>
         <p:spPr>
           <a:xfrm>
-            <a:off x="384048" y="2842869"/>
+            <a:off x="384048" y="2548432"/>
             <a:ext cx="5852160" cy="365760"/>
           </a:xfrm>
           <a:prstGeom prst="rect">
@@ -14138,13 +13527,13 @@
       </p:sp>
       <p:sp>
         <p:nvSpPr>
-          <p:cNvPr id="22" name="TextBox 21"/>
+          <p:cNvPr id="20" name="TextBox 19"/>
           <p:cNvSpPr txBox="1"/>
           <p:nvPr/>
         </p:nvSpPr>
         <p:spPr>
           <a:xfrm>
-            <a:off x="384048" y="3245205"/>
+            <a:off x="384048" y="2950768"/>
             <a:ext cx="5852160" cy="365760"/>
           </a:xfrm>
           <a:prstGeom prst="rect">
@@ -14173,13 +13562,13 @@
       </p:sp>
       <p:sp>
         <p:nvSpPr>
-          <p:cNvPr id="23" name="TextBox 22"/>
+          <p:cNvPr id="21" name="TextBox 20"/>
           <p:cNvSpPr txBox="1"/>
           <p:nvPr/>
         </p:nvSpPr>
         <p:spPr>
           <a:xfrm>
-            <a:off x="384048" y="3647541"/>
+            <a:off x="384048" y="3353104"/>
             <a:ext cx="5852160" cy="365760"/>
           </a:xfrm>
           <a:prstGeom prst="rect">
@@ -14201,20 +13590,20 @@
                 </a:solidFill>
                 <a:latin typeface="Calibri"/>
               </a:rPr>
-              <a:t>▸  12-Minute Test Drive — run any of 7 real scenarios, live now</a:t>
-            </a:r>
-          </a:p>
-        </p:txBody>
-      </p:sp>
-      <p:sp>
-        <p:nvSpPr>
-          <p:cNvPr id="24" name="TextBox 23"/>
+              <a:t>▸  12-Minute Test Drive — 7 real scenarios, live and runnable right now</a:t>
+            </a:r>
+          </a:p>
+        </p:txBody>
+      </p:sp>
+      <p:sp>
+        <p:nvSpPr>
+          <p:cNvPr id="22" name="TextBox 21"/>
           <p:cNvSpPr txBox="1"/>
           <p:nvPr/>
         </p:nvSpPr>
         <p:spPr>
           <a:xfrm>
-            <a:off x="384048" y="4049877"/>
+            <a:off x="384048" y="3755440"/>
             <a:ext cx="5852160" cy="365760"/>
           </a:xfrm>
           <a:prstGeom prst="rect">
@@ -14243,13 +13632,13 @@
       </p:sp>
       <p:sp>
         <p:nvSpPr>
-          <p:cNvPr id="25" name="Rectangle 24"/>
+          <p:cNvPr id="23" name="Rectangle 22"/>
           <p:cNvSpPr/>
           <p:nvPr/>
         </p:nvSpPr>
         <p:spPr>
           <a:xfrm>
-            <a:off x="384048" y="4616805"/>
+            <a:off x="384048" y="4304080"/>
             <a:ext cx="5577840" cy="9144"/>
           </a:xfrm>
           <a:prstGeom prst="rect">
@@ -14286,13 +13675,13 @@
       </p:sp>
       <p:sp>
         <p:nvSpPr>
-          <p:cNvPr id="26" name="TextBox 25"/>
+          <p:cNvPr id="24" name="TextBox 23"/>
           <p:cNvSpPr txBox="1"/>
           <p:nvPr/>
         </p:nvSpPr>
         <p:spPr>
           <a:xfrm>
-            <a:off x="384048" y="4680813"/>
+            <a:off x="384048" y="4368088"/>
             <a:ext cx="5760720" cy="713232"/>
           </a:xfrm>
           <a:prstGeom prst="rect">
@@ -14321,13 +13710,13 @@
       </p:sp>
       <p:sp>
         <p:nvSpPr>
-          <p:cNvPr id="27" name="TextBox 26"/>
+          <p:cNvPr id="25" name="TextBox 24"/>
           <p:cNvSpPr txBox="1"/>
           <p:nvPr/>
         </p:nvSpPr>
         <p:spPr>
           <a:xfrm>
-            <a:off x="384048" y="5421477"/>
+            <a:off x="384048" y="5108752"/>
             <a:ext cx="5760720" cy="182880"/>
           </a:xfrm>
           <a:prstGeom prst="rect">
@@ -14356,7 +13745,7 @@
       </p:sp>
       <p:sp>
         <p:nvSpPr>
-          <p:cNvPr id="28" name="Rectangle 27"/>
+          <p:cNvPr id="26" name="Rectangle 25"/>
           <p:cNvSpPr/>
           <p:nvPr/>
         </p:nvSpPr>
@@ -14399,7 +13788,7 @@
       </p:sp>
       <p:sp>
         <p:nvSpPr>
-          <p:cNvPr id="29" name="Rectangle 28"/>
+          <p:cNvPr id="27" name="Rectangle 26"/>
           <p:cNvSpPr/>
           <p:nvPr/>
         </p:nvSpPr>
@@ -14442,7 +13831,7 @@
       </p:sp>
       <p:pic>
         <p:nvPicPr>
-          <p:cNvPr id="30" name="Picture 29" descr="hq_proof_timelines.jpg"/>
+          <p:cNvPr id="28" name="Picture 27" descr="hq_proof_timelines.jpg"/>
           <p:cNvPicPr>
             <a:picLocks noChangeAspect="1"/>
           </p:cNvPicPr>
@@ -14478,7 +13867,7 @@
     <p:bg>
       <p:bgPr>
         <a:solidFill>
-          <a:srgbClr val="05081E"/>
+          <a:srgbClr val="04071E"/>
         </a:solidFill>
         <a:effectLst/>
       </p:bgPr>
@@ -14492,7 +13881,7 @@
       <p:grpSpPr/>
       <p:pic>
         <p:nvPicPr>
-          <p:cNvPr id="2" name="Picture 1" descr="bg_stats.jpg"/>
+          <p:cNvPr id="2" name="Picture 1" descr="bg_cover_clean.jpg"/>
           <p:cNvPicPr>
             <a:picLocks noChangeAspect="1"/>
           </p:cNvPicPr>
@@ -14523,13 +13912,13 @@
         <p:spPr>
           <a:xfrm>
             <a:off x="0" y="0"/>
-            <a:ext cx="6565392" cy="6858000"/>
+            <a:ext cx="6547104" cy="6858000"/>
           </a:xfrm>
           <a:prstGeom prst="rect">
             <a:avLst/>
           </a:prstGeom>
           <a:solidFill>
-            <a:srgbClr val="05081E"/>
+            <a:srgbClr val="04071E"/>
           </a:solidFill>
           <a:ln>
             <a:noFill/>
@@ -14565,8 +13954,8 @@
         </p:nvSpPr>
         <p:spPr>
           <a:xfrm>
-            <a:off x="6558076" y="0"/>
-            <a:ext cx="7315" cy="6858000"/>
+            <a:off x="6541617" y="0"/>
+            <a:ext cx="5486" cy="6858000"/>
           </a:xfrm>
           <a:prstGeom prst="rect">
             <a:avLst/>
@@ -14609,13 +13998,13 @@
         <p:spPr>
           <a:xfrm>
             <a:off x="0" y="0"/>
-            <a:ext cx="12188952" cy="329184"/>
+            <a:ext cx="12188952" cy="47548"/>
           </a:xfrm>
           <a:prstGeom prst="rect">
             <a:avLst/>
           </a:prstGeom>
           <a:solidFill>
-            <a:srgbClr val="04071C"/>
+            <a:srgbClr val="C9A84C"/>
           </a:solidFill>
           <a:ln>
             <a:noFill/>
@@ -14651,8 +14040,8 @@
         </p:nvSpPr>
         <p:spPr>
           <a:xfrm>
-            <a:off x="256032" y="64008"/>
-            <a:ext cx="2560320" cy="201168"/>
+            <a:off x="0" y="54864"/>
+            <a:ext cx="11914632" cy="164592"/>
           </a:xfrm>
           <a:prstGeom prst="rect">
             <a:avLst/>
@@ -14665,92 +14054,22 @@
           </a:bodyPr>
           <a:lstStyle/>
           <a:p>
-            <a:pPr algn="l"/>
-            <a:r>
-              <a:rPr sz="800" b="1" i="0">
-                <a:solidFill>
-                  <a:srgbClr val="2B8A6E"/>
+            <a:pPr algn="r"/>
+            <a:r>
+              <a:rPr sz="750" b="1" i="0">
+                <a:solidFill>
+                  <a:srgbClr val="0A0F2E"/>
                 </a:solidFill>
                 <a:latin typeface="Calibri"/>
               </a:rPr>
-              <a:t>●  MONITORING ACTIVE</a:t>
-            </a:r>
-          </a:p>
-        </p:txBody>
-      </p:sp>
-      <p:sp>
-        <p:nvSpPr>
-          <p:cNvPr id="7" name="TextBox 6"/>
-          <p:cNvSpPr txBox="1"/>
-          <p:nvPr/>
-        </p:nvSpPr>
-        <p:spPr>
-          <a:xfrm>
-            <a:off x="2871216" y="64008"/>
-            <a:ext cx="5120640" cy="201168"/>
-          </a:xfrm>
-          <a:prstGeom prst="rect">
-            <a:avLst/>
-          </a:prstGeom>
-          <a:noFill/>
-        </p:spPr>
-        <p:txBody>
-          <a:bodyPr wrap="square">
-            <a:spAutoFit/>
-          </a:bodyPr>
-          <a:lstStyle/>
-          <a:p>
-            <a:pPr algn="l"/>
-            <a:r>
-              <a:rPr sz="750" b="0" i="0">
-                <a:solidFill>
-                  <a:srgbClr val="AAB4CC"/>
-                </a:solidFill>
-                <a:latin typeface="Calibri"/>
-              </a:rPr>
-              <a:t>1 signal detected  ·  System active  ·  Readiness Protocols armed</a:t>
-            </a:r>
-          </a:p>
-        </p:txBody>
-      </p:sp>
-      <p:sp>
-        <p:nvSpPr>
-          <p:cNvPr id="8" name="TextBox 7"/>
-          <p:cNvSpPr txBox="1"/>
-          <p:nvPr/>
-        </p:nvSpPr>
-        <p:spPr>
-          <a:xfrm>
-            <a:off x="8686800" y="64008"/>
-            <a:ext cx="3291840" cy="201168"/>
-          </a:xfrm>
-          <a:prstGeom prst="rect">
-            <a:avLst/>
-          </a:prstGeom>
-          <a:noFill/>
-        </p:spPr>
-        <p:txBody>
-          <a:bodyPr wrap="square">
-            <a:spAutoFit/>
-          </a:bodyPr>
-          <a:lstStyle/>
-          <a:p>
-            <a:pPr algn="r"/>
-            <a:r>
-              <a:rPr sz="750" b="1" i="0">
-                <a:solidFill>
-                  <a:srgbClr val="C9A84C"/>
-                </a:solidFill>
-                <a:latin typeface="Calibri"/>
-              </a:rPr>
-              <a:t>SEE IT EXECUTE IN 12 MINUTES  →</a:t>
-            </a:r>
-          </a:p>
-        </p:txBody>
-      </p:sp>
-      <p:sp>
-        <p:nvSpPr>
-          <p:cNvPr id="9" name="Rectangle 8"/>
+              <a:t>  07  /  08</a:t>
+            </a:r>
+          </a:p>
+        </p:txBody>
+      </p:sp>
+      <p:sp>
+        <p:nvSpPr>
+          <p:cNvPr id="7" name="Rectangle 6"/>
           <p:cNvSpPr/>
           <p:nvPr/>
         </p:nvSpPr>
@@ -14793,7 +14112,7 @@
       </p:sp>
       <p:sp>
         <p:nvSpPr>
-          <p:cNvPr id="10" name="Rectangle 9"/>
+          <p:cNvPr id="8" name="Rectangle 7"/>
           <p:cNvSpPr/>
           <p:nvPr/>
         </p:nvSpPr>
@@ -14836,7 +14155,7 @@
       </p:sp>
       <p:pic>
         <p:nvPicPr>
-          <p:cNvPr id="11" name="Picture 10" descr="vm_logo_footer.png"/>
+          <p:cNvPr id="9" name="Picture 8" descr="vm_logo_footer.png"/>
           <p:cNvPicPr>
             <a:picLocks noChangeAspect="1"/>
           </p:cNvPicPr>
@@ -14860,7 +14179,7 @@
       </p:pic>
       <p:sp>
         <p:nvSpPr>
-          <p:cNvPr id="12" name="TextBox 11"/>
+          <p:cNvPr id="10" name="TextBox 9"/>
           <p:cNvSpPr txBox="1"/>
           <p:nvPr/>
         </p:nvSpPr>
@@ -14888,21 +14207,21 @@
                 </a:solidFill>
                 <a:latin typeface="Calibri"/>
               </a:rPr>
-              <a:t>  07  /  08</a:t>
-            </a:r>
-          </a:p>
-        </p:txBody>
-      </p:sp>
-      <p:sp>
-        <p:nvSpPr>
-          <p:cNvPr id="13" name="TextBox 12"/>
+              <a:t>07  /  08</a:t>
+            </a:r>
+          </a:p>
+        </p:txBody>
+      </p:sp>
+      <p:sp>
+        <p:nvSpPr>
+          <p:cNvPr id="11" name="TextBox 10"/>
           <p:cNvSpPr txBox="1"/>
           <p:nvPr/>
         </p:nvSpPr>
         <p:spPr>
           <a:xfrm>
             <a:off x="2194560" y="6592824"/>
-            <a:ext cx="7955279" cy="182880"/>
+            <a:ext cx="8165592" cy="182880"/>
           </a:xfrm>
           <a:prstGeom prst="rect">
             <a:avLst/>
@@ -14930,14 +14249,14 @@
       </p:sp>
       <p:sp>
         <p:nvSpPr>
-          <p:cNvPr id="14" name="Rectangle 13"/>
+          <p:cNvPr id="12" name="Rectangle 11"/>
           <p:cNvSpPr/>
           <p:nvPr/>
         </p:nvSpPr>
         <p:spPr>
           <a:xfrm>
-            <a:off x="365760" y="448056"/>
-            <a:ext cx="310896" cy="7315"/>
+            <a:off x="365760" y="269748"/>
+            <a:ext cx="256032" cy="7315"/>
           </a:xfrm>
           <a:prstGeom prst="rect">
             <a:avLst/>
@@ -14973,14 +14292,14 @@
       </p:sp>
       <p:sp>
         <p:nvSpPr>
-          <p:cNvPr id="15" name="TextBox 14"/>
+          <p:cNvPr id="13" name="TextBox 12"/>
           <p:cNvSpPr txBox="1"/>
           <p:nvPr/>
         </p:nvSpPr>
         <p:spPr>
           <a:xfrm>
-            <a:off x="713232" y="384048"/>
-            <a:ext cx="5376672" cy="201168"/>
+            <a:off x="658368" y="201168"/>
+            <a:ext cx="5760720" cy="164592"/>
           </a:xfrm>
           <a:prstGeom prst="rect">
             <a:avLst/>
@@ -15001,21 +14320,21 @@
                 </a:solidFill>
                 <a:latin typeface="Calibri"/>
               </a:rPr>
-              <a:t>  BUSINESS CASE</a:t>
-            </a:r>
-          </a:p>
-        </p:txBody>
-      </p:sp>
-      <p:sp>
-        <p:nvSpPr>
-          <p:cNvPr id="16" name="TextBox 15"/>
+              <a:t>   BUSINESS CASE</a:t>
+            </a:r>
+          </a:p>
+        </p:txBody>
+      </p:sp>
+      <p:sp>
+        <p:nvSpPr>
+          <p:cNvPr id="14" name="TextBox 13"/>
           <p:cNvSpPr txBox="1"/>
           <p:nvPr/>
         </p:nvSpPr>
         <p:spPr>
           <a:xfrm>
-            <a:off x="384048" y="566928"/>
-            <a:ext cx="5943600" cy="462280"/>
+            <a:off x="384048" y="365760"/>
+            <a:ext cx="5943600" cy="435864"/>
           </a:xfrm>
           <a:prstGeom prst="rect">
             <a:avLst/>
@@ -15030,7 +14349,7 @@
           <a:p>
             <a:pPr algn="l"/>
             <a:r>
-              <a:rPr sz="2800" b="1" i="0">
+              <a:rPr sz="2600" b="1" i="0">
                 <a:solidFill>
                   <a:srgbClr val="FFFFFF"/>
                 </a:solidFill>
@@ -15043,14 +14362,14 @@
       </p:sp>
       <p:sp>
         <p:nvSpPr>
-          <p:cNvPr id="17" name="TextBox 16"/>
+          <p:cNvPr id="15" name="TextBox 14"/>
           <p:cNvSpPr txBox="1"/>
           <p:nvPr/>
         </p:nvSpPr>
         <p:spPr>
           <a:xfrm>
-            <a:off x="384048" y="1029208"/>
-            <a:ext cx="5943600" cy="462280"/>
+            <a:off x="384048" y="801624"/>
+            <a:ext cx="5943600" cy="435864"/>
           </a:xfrm>
           <a:prstGeom prst="rect">
             <a:avLst/>
@@ -15065,7 +14384,7 @@
           <a:p>
             <a:pPr algn="l"/>
             <a:r>
-              <a:rPr sz="2800" b="1" i="0">
+              <a:rPr sz="2600" b="1" i="0">
                 <a:solidFill>
                   <a:srgbClr val="C9A84C"/>
                 </a:solidFill>
@@ -15078,14 +14397,14 @@
       </p:sp>
       <p:sp>
         <p:nvSpPr>
-          <p:cNvPr id="18" name="Rectangle 17"/>
+          <p:cNvPr id="16" name="Rectangle 15"/>
           <p:cNvSpPr/>
           <p:nvPr/>
         </p:nvSpPr>
         <p:spPr>
           <a:xfrm>
-            <a:off x="384048" y="1601216"/>
-            <a:ext cx="5943600" cy="9144"/>
+            <a:off x="384048" y="1328928"/>
+            <a:ext cx="6126480" cy="9144"/>
           </a:xfrm>
           <a:prstGeom prst="rect">
             <a:avLst/>
@@ -15121,13 +14440,13 @@
       </p:sp>
       <p:sp>
         <p:nvSpPr>
-          <p:cNvPr id="19" name="TextBox 18"/>
+          <p:cNvPr id="17" name="TextBox 16"/>
           <p:cNvSpPr txBox="1"/>
           <p:nvPr/>
         </p:nvSpPr>
         <p:spPr>
           <a:xfrm>
-            <a:off x="384048" y="1747418"/>
+            <a:off x="384048" y="1474927"/>
             <a:ext cx="5852160" cy="365760"/>
           </a:xfrm>
           <a:prstGeom prst="rect">
@@ -15149,20 +14468,20 @@
                 </a:solidFill>
                 <a:latin typeface="Calibri"/>
               </a:rPr>
-              <a:t>▸  Enterprises already burn millions on reactive post-trigger consulting retainers</a:t>
-            </a:r>
-          </a:p>
-        </p:txBody>
-      </p:sp>
-      <p:sp>
-        <p:nvSpPr>
-          <p:cNvPr id="20" name="TextBox 19"/>
+              <a:t>▸  Enterprises burn millions on reactive post-trigger consulting retainers</a:t>
+            </a:r>
+          </a:p>
+        </p:txBody>
+      </p:sp>
+      <p:sp>
+        <p:nvSpPr>
+          <p:cNvPr id="18" name="TextBox 17"/>
           <p:cNvSpPr txBox="1"/>
           <p:nvPr/>
         </p:nvSpPr>
         <p:spPr>
           <a:xfrm>
-            <a:off x="384048" y="2149754"/>
+            <a:off x="384048" y="1877263"/>
             <a:ext cx="5852160" cy="365760"/>
           </a:xfrm>
           <a:prstGeom prst="rect">
@@ -15191,13 +14510,13 @@
       </p:sp>
       <p:sp>
         <p:nvSpPr>
-          <p:cNvPr id="21" name="TextBox 20"/>
+          <p:cNvPr id="19" name="TextBox 18"/>
           <p:cNvSpPr txBox="1"/>
           <p:nvPr/>
         </p:nvSpPr>
         <p:spPr>
           <a:xfrm>
-            <a:off x="384048" y="2552090"/>
+            <a:off x="384048" y="2279599"/>
             <a:ext cx="5852160" cy="365760"/>
           </a:xfrm>
           <a:prstGeom prst="rect">
@@ -15226,13 +14545,13 @@
       </p:sp>
       <p:sp>
         <p:nvSpPr>
-          <p:cNvPr id="22" name="TextBox 21"/>
+          <p:cNvPr id="20" name="TextBox 19"/>
           <p:cNvSpPr txBox="1"/>
           <p:nvPr/>
         </p:nvSpPr>
         <p:spPr>
           <a:xfrm>
-            <a:off x="384048" y="2954426"/>
+            <a:off x="384048" y="2681935"/>
             <a:ext cx="5852160" cy="365760"/>
           </a:xfrm>
           <a:prstGeom prst="rect">
@@ -15261,13 +14580,13 @@
       </p:sp>
       <p:sp>
         <p:nvSpPr>
-          <p:cNvPr id="23" name="TextBox 22"/>
+          <p:cNvPr id="21" name="TextBox 20"/>
           <p:cNvSpPr txBox="1"/>
           <p:nvPr/>
         </p:nvSpPr>
         <p:spPr>
           <a:xfrm>
-            <a:off x="384048" y="3484778"/>
+            <a:off x="384048" y="3193999"/>
             <a:ext cx="5760720" cy="201168"/>
           </a:xfrm>
           <a:prstGeom prst="rect">
@@ -15296,13 +14615,13 @@
       </p:sp>
       <p:sp>
         <p:nvSpPr>
-          <p:cNvPr id="24" name="TextBox 23"/>
+          <p:cNvPr id="22" name="TextBox 21"/>
           <p:cNvSpPr txBox="1"/>
           <p:nvPr/>
         </p:nvSpPr>
         <p:spPr>
           <a:xfrm>
-            <a:off x="384048" y="3722522"/>
+            <a:off x="384048" y="3431743"/>
             <a:ext cx="1847088" cy="256032"/>
           </a:xfrm>
           <a:prstGeom prst="rect">
@@ -15331,14 +14650,14 @@
       </p:sp>
       <p:sp>
         <p:nvSpPr>
-          <p:cNvPr id="25" name="TextBox 24"/>
+          <p:cNvPr id="23" name="TextBox 22"/>
           <p:cNvSpPr txBox="1"/>
           <p:nvPr/>
         </p:nvSpPr>
         <p:spPr>
           <a:xfrm>
-            <a:off x="2304288" y="3722522"/>
-            <a:ext cx="3840479" cy="256032"/>
+            <a:off x="2304288" y="3431743"/>
+            <a:ext cx="4023360" cy="256032"/>
           </a:xfrm>
           <a:prstGeom prst="rect">
             <a:avLst/>
@@ -15366,14 +14685,14 @@
       </p:sp>
       <p:sp>
         <p:nvSpPr>
-          <p:cNvPr id="26" name="Rectangle 25"/>
+          <p:cNvPr id="24" name="Rectangle 23"/>
           <p:cNvSpPr/>
           <p:nvPr/>
         </p:nvSpPr>
         <p:spPr>
           <a:xfrm>
-            <a:off x="384048" y="3996842"/>
-            <a:ext cx="5669280" cy="9144"/>
+            <a:off x="384048" y="3706063"/>
+            <a:ext cx="5852160" cy="9144"/>
           </a:xfrm>
           <a:prstGeom prst="rect">
             <a:avLst/>
@@ -15409,13 +14728,13 @@
       </p:sp>
       <p:sp>
         <p:nvSpPr>
-          <p:cNvPr id="27" name="TextBox 26"/>
+          <p:cNvPr id="25" name="TextBox 24"/>
           <p:cNvSpPr txBox="1"/>
           <p:nvPr/>
         </p:nvSpPr>
         <p:spPr>
           <a:xfrm>
-            <a:off x="384048" y="4088282"/>
+            <a:off x="384048" y="3797503"/>
             <a:ext cx="1847088" cy="256032"/>
           </a:xfrm>
           <a:prstGeom prst="rect">
@@ -15444,14 +14763,14 @@
       </p:sp>
       <p:sp>
         <p:nvSpPr>
-          <p:cNvPr id="28" name="TextBox 27"/>
+          <p:cNvPr id="26" name="TextBox 25"/>
           <p:cNvSpPr txBox="1"/>
           <p:nvPr/>
         </p:nvSpPr>
         <p:spPr>
           <a:xfrm>
-            <a:off x="2304288" y="4088282"/>
-            <a:ext cx="3840479" cy="256032"/>
+            <a:off x="2304288" y="3797503"/>
+            <a:ext cx="4023360" cy="256032"/>
           </a:xfrm>
           <a:prstGeom prst="rect">
             <a:avLst/>
@@ -15479,14 +14798,14 @@
       </p:sp>
       <p:sp>
         <p:nvSpPr>
-          <p:cNvPr id="29" name="Rectangle 28"/>
+          <p:cNvPr id="27" name="Rectangle 26"/>
           <p:cNvSpPr/>
           <p:nvPr/>
         </p:nvSpPr>
         <p:spPr>
           <a:xfrm>
-            <a:off x="384048" y="4362602"/>
-            <a:ext cx="5669280" cy="9144"/>
+            <a:off x="384048" y="4071823"/>
+            <a:ext cx="5852160" cy="9144"/>
           </a:xfrm>
           <a:prstGeom prst="rect">
             <a:avLst/>
@@ -15522,13 +14841,13 @@
       </p:sp>
       <p:sp>
         <p:nvSpPr>
-          <p:cNvPr id="30" name="TextBox 29"/>
+          <p:cNvPr id="28" name="TextBox 27"/>
           <p:cNvSpPr txBox="1"/>
           <p:nvPr/>
         </p:nvSpPr>
         <p:spPr>
           <a:xfrm>
-            <a:off x="384048" y="4454042"/>
+            <a:off x="384048" y="4163263"/>
             <a:ext cx="1847088" cy="256032"/>
           </a:xfrm>
           <a:prstGeom prst="rect">
@@ -15557,14 +14876,14 @@
       </p:sp>
       <p:sp>
         <p:nvSpPr>
-          <p:cNvPr id="31" name="TextBox 30"/>
+          <p:cNvPr id="29" name="TextBox 28"/>
           <p:cNvSpPr txBox="1"/>
           <p:nvPr/>
         </p:nvSpPr>
         <p:spPr>
           <a:xfrm>
-            <a:off x="2304288" y="4454042"/>
-            <a:ext cx="3840479" cy="256032"/>
+            <a:off x="2304288" y="4163263"/>
+            <a:ext cx="4023360" cy="256032"/>
           </a:xfrm>
           <a:prstGeom prst="rect">
             <a:avLst/>
@@ -15592,14 +14911,14 @@
       </p:sp>
       <p:sp>
         <p:nvSpPr>
-          <p:cNvPr id="32" name="Rectangle 31"/>
+          <p:cNvPr id="30" name="Rectangle 29"/>
           <p:cNvSpPr/>
           <p:nvPr/>
         </p:nvSpPr>
         <p:spPr>
           <a:xfrm>
-            <a:off x="384048" y="4728362"/>
-            <a:ext cx="5669280" cy="9144"/>
+            <a:off x="384048" y="4437583"/>
+            <a:ext cx="5852160" cy="9144"/>
           </a:xfrm>
           <a:prstGeom prst="rect">
             <a:avLst/>
@@ -15635,13 +14954,13 @@
       </p:sp>
       <p:sp>
         <p:nvSpPr>
-          <p:cNvPr id="33" name="Rectangle 32"/>
+          <p:cNvPr id="31" name="Rectangle 30"/>
           <p:cNvSpPr/>
           <p:nvPr/>
         </p:nvSpPr>
         <p:spPr>
           <a:xfrm>
-            <a:off x="384048" y="4966106"/>
+            <a:off x="384048" y="4657039"/>
             <a:ext cx="5577840" cy="9144"/>
           </a:xfrm>
           <a:prstGeom prst="rect">
@@ -15678,13 +14997,13 @@
       </p:sp>
       <p:sp>
         <p:nvSpPr>
-          <p:cNvPr id="34" name="TextBox 33"/>
+          <p:cNvPr id="32" name="TextBox 31"/>
           <p:cNvSpPr txBox="1"/>
           <p:nvPr/>
         </p:nvSpPr>
         <p:spPr>
           <a:xfrm>
-            <a:off x="384048" y="5030114"/>
+            <a:off x="384048" y="4721047"/>
             <a:ext cx="5760720" cy="713232"/>
           </a:xfrm>
           <a:prstGeom prst="rect">
@@ -15706,14 +15025,14 @@
                 </a:solidFill>
                 <a:latin typeface="Georgia"/>
               </a:rPr>
-              <a:t>"We aren't asking CFOs to find net-new budget. Enterprises are already burning millions on reactive, post-trigger consulting retainers. We are simply converting that wasteful, panic-driven spend into repeatable software infrastructure that generates immediate, compounding ROI."</a:t>
-            </a:r>
-          </a:p>
-        </p:txBody>
-      </p:sp>
-      <p:sp>
-        <p:nvSpPr>
-          <p:cNvPr id="35" name="Rectangle 34"/>
+              <a:t>"We aren't asking CFOs to find net-new budget. We are simply converting panic-driven, wasteful spend into repeatable software infrastructure that generates immediate, compounding ROI."</a:t>
+            </a:r>
+          </a:p>
+        </p:txBody>
+      </p:sp>
+      <p:sp>
+        <p:nvSpPr>
+          <p:cNvPr id="33" name="Rectangle 32"/>
           <p:cNvSpPr/>
           <p:nvPr/>
         </p:nvSpPr>
@@ -15756,7 +15075,7 @@
       </p:sp>
       <p:sp>
         <p:nvSpPr>
-          <p:cNvPr id="36" name="Rectangle 35"/>
+          <p:cNvPr id="34" name="Rectangle 33"/>
           <p:cNvSpPr/>
           <p:nvPr/>
         </p:nvSpPr>
@@ -15799,7 +15118,7 @@
       </p:sp>
       <p:pic>
         <p:nvPicPr>
-          <p:cNvPr id="37" name="Picture 36" descr="hq_roi_results.jpg"/>
+          <p:cNvPr id="35" name="Picture 34" descr="hq_roi_results.jpg"/>
           <p:cNvPicPr>
             <a:picLocks noChangeAspect="1"/>
           </p:cNvPicPr>
@@ -15835,7 +15154,7 @@
     <p:bg>
       <p:bgPr>
         <a:solidFill>
-          <a:srgbClr val="05081E"/>
+          <a:srgbClr val="04071E"/>
         </a:solidFill>
         <a:effectLst/>
       </p:bgPr>
@@ -15849,7 +15168,7 @@
       <p:grpSpPr/>
       <p:pic>
         <p:nvPicPr>
-          <p:cNvPr id="2" name="Picture 1" descr="bg_cover.jpg"/>
+          <p:cNvPr id="2" name="Picture 1" descr="bg_cover_clean.jpg"/>
           <p:cNvPicPr>
             <a:picLocks noChangeAspect="1"/>
           </p:cNvPicPr>
@@ -15880,13 +15199,13 @@
         <p:spPr>
           <a:xfrm>
             <a:off x="0" y="0"/>
-            <a:ext cx="6565392" cy="6858000"/>
+            <a:ext cx="6547104" cy="6858000"/>
           </a:xfrm>
           <a:prstGeom prst="rect">
             <a:avLst/>
           </a:prstGeom>
           <a:solidFill>
-            <a:srgbClr val="05081E"/>
+            <a:srgbClr val="04071E"/>
           </a:solidFill>
           <a:ln>
             <a:noFill/>
@@ -15922,8 +15241,8 @@
         </p:nvSpPr>
         <p:spPr>
           <a:xfrm>
-            <a:off x="6558076" y="0"/>
-            <a:ext cx="7315" cy="6858000"/>
+            <a:off x="6541617" y="0"/>
+            <a:ext cx="5486" cy="6858000"/>
           </a:xfrm>
           <a:prstGeom prst="rect">
             <a:avLst/>
@@ -15966,13 +15285,13 @@
         <p:spPr>
           <a:xfrm>
             <a:off x="0" y="0"/>
-            <a:ext cx="12188952" cy="329184"/>
+            <a:ext cx="12188952" cy="47548"/>
           </a:xfrm>
           <a:prstGeom prst="rect">
             <a:avLst/>
           </a:prstGeom>
           <a:solidFill>
-            <a:srgbClr val="04071C"/>
+            <a:srgbClr val="C9A84C"/>
           </a:solidFill>
           <a:ln>
             <a:noFill/>
@@ -16008,8 +15327,8 @@
         </p:nvSpPr>
         <p:spPr>
           <a:xfrm>
-            <a:off x="256032" y="64008"/>
-            <a:ext cx="2560320" cy="201168"/>
+            <a:off x="0" y="54864"/>
+            <a:ext cx="11914632" cy="164592"/>
           </a:xfrm>
           <a:prstGeom prst="rect">
             <a:avLst/>
@@ -16022,92 +15341,22 @@
           </a:bodyPr>
           <a:lstStyle/>
           <a:p>
-            <a:pPr algn="l"/>
-            <a:r>
-              <a:rPr sz="800" b="1" i="0">
-                <a:solidFill>
-                  <a:srgbClr val="2B8A6E"/>
+            <a:pPr algn="r"/>
+            <a:r>
+              <a:rPr sz="750" b="1" i="0">
+                <a:solidFill>
+                  <a:srgbClr val="0A0F2E"/>
                 </a:solidFill>
                 <a:latin typeface="Calibri"/>
               </a:rPr>
-              <a:t>●  MONITORING ACTIVE</a:t>
-            </a:r>
-          </a:p>
-        </p:txBody>
-      </p:sp>
-      <p:sp>
-        <p:nvSpPr>
-          <p:cNvPr id="7" name="TextBox 6"/>
-          <p:cNvSpPr txBox="1"/>
-          <p:nvPr/>
-        </p:nvSpPr>
-        <p:spPr>
-          <a:xfrm>
-            <a:off x="2871216" y="64008"/>
-            <a:ext cx="5120640" cy="201168"/>
-          </a:xfrm>
-          <a:prstGeom prst="rect">
-            <a:avLst/>
-          </a:prstGeom>
-          <a:noFill/>
-        </p:spPr>
-        <p:txBody>
-          <a:bodyPr wrap="square">
-            <a:spAutoFit/>
-          </a:bodyPr>
-          <a:lstStyle/>
-          <a:p>
-            <a:pPr algn="l"/>
-            <a:r>
-              <a:rPr sz="750" b="0" i="0">
-                <a:solidFill>
-                  <a:srgbClr val="AAB4CC"/>
-                </a:solidFill>
-                <a:latin typeface="Calibri"/>
-              </a:rPr>
-              <a:t>1 signal detected  ·  System active  ·  Readiness Protocols armed</a:t>
-            </a:r>
-          </a:p>
-        </p:txBody>
-      </p:sp>
-      <p:sp>
-        <p:nvSpPr>
-          <p:cNvPr id="8" name="TextBox 7"/>
-          <p:cNvSpPr txBox="1"/>
-          <p:nvPr/>
-        </p:nvSpPr>
-        <p:spPr>
-          <a:xfrm>
-            <a:off x="8686800" y="64008"/>
-            <a:ext cx="3291840" cy="201168"/>
-          </a:xfrm>
-          <a:prstGeom prst="rect">
-            <a:avLst/>
-          </a:prstGeom>
-          <a:noFill/>
-        </p:spPr>
-        <p:txBody>
-          <a:bodyPr wrap="square">
-            <a:spAutoFit/>
-          </a:bodyPr>
-          <a:lstStyle/>
-          <a:p>
-            <a:pPr algn="r"/>
-            <a:r>
-              <a:rPr sz="750" b="1" i="0">
-                <a:solidFill>
-                  <a:srgbClr val="C9A84C"/>
-                </a:solidFill>
-                <a:latin typeface="Calibri"/>
-              </a:rPr>
-              <a:t>SEE IT EXECUTE IN 12 MINUTES  →</a:t>
-            </a:r>
-          </a:p>
-        </p:txBody>
-      </p:sp>
-      <p:sp>
-        <p:nvSpPr>
-          <p:cNvPr id="9" name="Rectangle 8"/>
+              <a:t>  08  /  08</a:t>
+            </a:r>
+          </a:p>
+        </p:txBody>
+      </p:sp>
+      <p:sp>
+        <p:nvSpPr>
+          <p:cNvPr id="7" name="Rectangle 6"/>
           <p:cNvSpPr/>
           <p:nvPr/>
         </p:nvSpPr>
@@ -16150,7 +15399,7 @@
       </p:sp>
       <p:sp>
         <p:nvSpPr>
-          <p:cNvPr id="10" name="Rectangle 9"/>
+          <p:cNvPr id="8" name="Rectangle 7"/>
           <p:cNvSpPr/>
           <p:nvPr/>
         </p:nvSpPr>
@@ -16193,7 +15442,7 @@
       </p:sp>
       <p:pic>
         <p:nvPicPr>
-          <p:cNvPr id="11" name="Picture 10" descr="vm_logo_footer.png"/>
+          <p:cNvPr id="9" name="Picture 8" descr="vm_logo_footer.png"/>
           <p:cNvPicPr>
             <a:picLocks noChangeAspect="1"/>
           </p:cNvPicPr>
@@ -16217,7 +15466,7 @@
       </p:pic>
       <p:sp>
         <p:nvSpPr>
-          <p:cNvPr id="12" name="TextBox 11"/>
+          <p:cNvPr id="10" name="TextBox 9"/>
           <p:cNvSpPr txBox="1"/>
           <p:nvPr/>
         </p:nvSpPr>
@@ -16245,21 +15494,21 @@
                 </a:solidFill>
                 <a:latin typeface="Calibri"/>
               </a:rPr>
-              <a:t>  08  /  08</a:t>
-            </a:r>
-          </a:p>
-        </p:txBody>
-      </p:sp>
-      <p:sp>
-        <p:nvSpPr>
-          <p:cNvPr id="13" name="TextBox 12"/>
+              <a:t>08  /  08</a:t>
+            </a:r>
+          </a:p>
+        </p:txBody>
+      </p:sp>
+      <p:sp>
+        <p:nvSpPr>
+          <p:cNvPr id="11" name="TextBox 10"/>
           <p:cNvSpPr txBox="1"/>
           <p:nvPr/>
         </p:nvSpPr>
         <p:spPr>
           <a:xfrm>
             <a:off x="2194560" y="6592824"/>
-            <a:ext cx="7955279" cy="182880"/>
+            <a:ext cx="8165592" cy="182880"/>
           </a:xfrm>
           <a:prstGeom prst="rect">
             <a:avLst/>
@@ -16287,14 +15536,14 @@
       </p:sp>
       <p:sp>
         <p:nvSpPr>
-          <p:cNvPr id="14" name="Rectangle 13"/>
+          <p:cNvPr id="12" name="Rectangle 11"/>
           <p:cNvSpPr/>
           <p:nvPr/>
         </p:nvSpPr>
         <p:spPr>
           <a:xfrm>
-            <a:off x="365760" y="448056"/>
-            <a:ext cx="310896" cy="7315"/>
+            <a:off x="365760" y="269748"/>
+            <a:ext cx="256032" cy="7315"/>
           </a:xfrm>
           <a:prstGeom prst="rect">
             <a:avLst/>
@@ -16330,14 +15579,14 @@
       </p:sp>
       <p:sp>
         <p:nvSpPr>
-          <p:cNvPr id="15" name="TextBox 14"/>
+          <p:cNvPr id="13" name="TextBox 12"/>
           <p:cNvSpPr txBox="1"/>
           <p:nvPr/>
         </p:nvSpPr>
         <p:spPr>
           <a:xfrm>
-            <a:off x="713232" y="384048"/>
-            <a:ext cx="5376672" cy="201168"/>
+            <a:off x="658368" y="201168"/>
+            <a:ext cx="5760720" cy="164592"/>
           </a:xfrm>
           <a:prstGeom prst="rect">
             <a:avLst/>
@@ -16358,21 +15607,21 @@
                 </a:solidFill>
                 <a:latin typeface="Calibri"/>
               </a:rPr>
-              <a:t>  THE ASK</a:t>
-            </a:r>
-          </a:p>
-        </p:txBody>
-      </p:sp>
-      <p:sp>
-        <p:nvSpPr>
-          <p:cNvPr id="16" name="TextBox 15"/>
+              <a:t>   THE ASK</a:t>
+            </a:r>
+          </a:p>
+        </p:txBody>
+      </p:sp>
+      <p:sp>
+        <p:nvSpPr>
+          <p:cNvPr id="14" name="TextBox 13"/>
           <p:cNvSpPr txBox="1"/>
           <p:nvPr/>
         </p:nvSpPr>
         <p:spPr>
           <a:xfrm>
-            <a:off x="384048" y="566928"/>
-            <a:ext cx="5943600" cy="297180"/>
+            <a:off x="384048" y="365760"/>
+            <a:ext cx="5943600" cy="268224"/>
           </a:xfrm>
           <a:prstGeom prst="rect">
             <a:avLst/>
@@ -16387,7 +15636,7 @@
           <a:p>
             <a:pPr algn="l"/>
             <a:r>
-              <a:rPr sz="1800" b="1" i="0">
+              <a:rPr sz="1600" b="1" i="0">
                 <a:solidFill>
                   <a:srgbClr val="C9A84C"/>
                 </a:solidFill>
@@ -16400,14 +15649,14 @@
       </p:sp>
       <p:sp>
         <p:nvSpPr>
-          <p:cNvPr id="17" name="TextBox 16"/>
+          <p:cNvPr id="15" name="TextBox 14"/>
           <p:cNvSpPr txBox="1"/>
           <p:nvPr/>
         </p:nvSpPr>
         <p:spPr>
           <a:xfrm>
-            <a:off x="384048" y="864108"/>
-            <a:ext cx="5943600" cy="462280"/>
+            <a:off x="384048" y="633984"/>
+            <a:ext cx="5943600" cy="435864"/>
           </a:xfrm>
           <a:prstGeom prst="rect">
             <a:avLst/>
@@ -16422,7 +15671,7 @@
           <a:p>
             <a:pPr algn="l"/>
             <a:r>
-              <a:rPr sz="2800" b="1" i="0">
+              <a:rPr sz="2600" b="1" i="0">
                 <a:solidFill>
                   <a:srgbClr val="FFFFFF"/>
                 </a:solidFill>
@@ -16435,14 +15684,14 @@
       </p:sp>
       <p:sp>
         <p:nvSpPr>
-          <p:cNvPr id="18" name="Rectangle 17"/>
+          <p:cNvPr id="16" name="Rectangle 15"/>
           <p:cNvSpPr/>
           <p:nvPr/>
         </p:nvSpPr>
         <p:spPr>
           <a:xfrm>
-            <a:off x="384048" y="1436116"/>
-            <a:ext cx="5943600" cy="9144"/>
+            <a:off x="384048" y="1161288"/>
+            <a:ext cx="6126480" cy="9144"/>
           </a:xfrm>
           <a:prstGeom prst="rect">
             <a:avLst/>
@@ -16478,13 +15727,13 @@
       </p:sp>
       <p:sp>
         <p:nvSpPr>
-          <p:cNvPr id="19" name="TextBox 18"/>
+          <p:cNvPr id="17" name="TextBox 16"/>
           <p:cNvSpPr txBox="1"/>
           <p:nvPr/>
         </p:nvSpPr>
         <p:spPr>
           <a:xfrm>
-            <a:off x="384048" y="1582826"/>
+            <a:off x="384048" y="1307592"/>
             <a:ext cx="5852160" cy="365760"/>
           </a:xfrm>
           <a:prstGeom prst="rect">
@@ -16513,13 +15762,13 @@
       </p:sp>
       <p:sp>
         <p:nvSpPr>
-          <p:cNvPr id="20" name="TextBox 19"/>
+          <p:cNvPr id="18" name="TextBox 17"/>
           <p:cNvSpPr txBox="1"/>
           <p:nvPr/>
         </p:nvSpPr>
         <p:spPr>
           <a:xfrm>
-            <a:off x="384048" y="1985162"/>
+            <a:off x="384048" y="1709928"/>
             <a:ext cx="5852160" cy="365760"/>
           </a:xfrm>
           <a:prstGeom prst="rect">
@@ -16548,13 +15797,13 @@
       </p:sp>
       <p:sp>
         <p:nvSpPr>
-          <p:cNvPr id="21" name="TextBox 20"/>
+          <p:cNvPr id="19" name="TextBox 18"/>
           <p:cNvSpPr txBox="1"/>
           <p:nvPr/>
         </p:nvSpPr>
         <p:spPr>
           <a:xfrm>
-            <a:off x="384048" y="2387498"/>
+            <a:off x="384048" y="2112264"/>
             <a:ext cx="5852160" cy="365760"/>
           </a:xfrm>
           <a:prstGeom prst="rect">
@@ -16583,13 +15832,13 @@
       </p:sp>
       <p:sp>
         <p:nvSpPr>
-          <p:cNvPr id="22" name="TextBox 21"/>
+          <p:cNvPr id="20" name="TextBox 19"/>
           <p:cNvSpPr txBox="1"/>
           <p:nvPr/>
         </p:nvSpPr>
         <p:spPr>
           <a:xfrm>
-            <a:off x="384048" y="2789834"/>
+            <a:off x="384048" y="2514600"/>
             <a:ext cx="5852160" cy="365760"/>
           </a:xfrm>
           <a:prstGeom prst="rect">
@@ -16618,14 +15867,14 @@
       </p:sp>
       <p:sp>
         <p:nvSpPr>
-          <p:cNvPr id="23" name="Rectangle 22"/>
+          <p:cNvPr id="21" name="Rectangle 20"/>
           <p:cNvSpPr/>
           <p:nvPr/>
         </p:nvSpPr>
         <p:spPr>
           <a:xfrm>
-            <a:off x="384048" y="3320186"/>
-            <a:ext cx="5943600" cy="402336"/>
+            <a:off x="384048" y="3026664"/>
+            <a:ext cx="6126480" cy="402336"/>
           </a:xfrm>
           <a:prstGeom prst="rect">
             <a:avLst/>
@@ -16661,14 +15910,14 @@
       </p:sp>
       <p:sp>
         <p:nvSpPr>
-          <p:cNvPr id="24" name="Rectangle 23"/>
+          <p:cNvPr id="22" name="Rectangle 21"/>
           <p:cNvSpPr/>
           <p:nvPr/>
         </p:nvSpPr>
         <p:spPr>
           <a:xfrm>
-            <a:off x="384048" y="3320186"/>
-            <a:ext cx="5943600" cy="21945"/>
+            <a:off x="384048" y="3026664"/>
+            <a:ext cx="6126480" cy="21945"/>
           </a:xfrm>
           <a:prstGeom prst="rect">
             <a:avLst/>
@@ -16704,14 +15953,14 @@
       </p:sp>
       <p:sp>
         <p:nvSpPr>
-          <p:cNvPr id="25" name="TextBox 24"/>
+          <p:cNvPr id="23" name="TextBox 22"/>
           <p:cNvSpPr txBox="1"/>
           <p:nvPr/>
         </p:nvSpPr>
         <p:spPr>
           <a:xfrm>
-            <a:off x="512064" y="3411626"/>
-            <a:ext cx="5760720" cy="237744"/>
+            <a:off x="512064" y="3118104"/>
+            <a:ext cx="5943600" cy="237744"/>
           </a:xfrm>
           <a:prstGeom prst="rect">
             <a:avLst/>
@@ -16739,13 +15988,13 @@
       </p:sp>
       <p:sp>
         <p:nvSpPr>
-          <p:cNvPr id="26" name="TextBox 25"/>
+          <p:cNvPr id="24" name="TextBox 23"/>
           <p:cNvSpPr txBox="1"/>
           <p:nvPr/>
         </p:nvSpPr>
         <p:spPr>
           <a:xfrm>
-            <a:off x="384048" y="3832250"/>
+            <a:off x="384048" y="3520440"/>
             <a:ext cx="5760720" cy="201168"/>
           </a:xfrm>
           <a:prstGeom prst="rect">
@@ -16774,13 +16023,13 @@
       </p:sp>
       <p:sp>
         <p:nvSpPr>
-          <p:cNvPr id="27" name="TextBox 26"/>
+          <p:cNvPr id="25" name="TextBox 24"/>
           <p:cNvSpPr txBox="1"/>
           <p:nvPr/>
         </p:nvSpPr>
         <p:spPr>
           <a:xfrm>
-            <a:off x="384048" y="4069994"/>
+            <a:off x="384048" y="3758184"/>
             <a:ext cx="713232" cy="256032"/>
           </a:xfrm>
           <a:prstGeom prst="rect">
@@ -16809,14 +16058,14 @@
       </p:sp>
       <p:sp>
         <p:nvSpPr>
-          <p:cNvPr id="28" name="TextBox 27"/>
+          <p:cNvPr id="26" name="TextBox 25"/>
           <p:cNvSpPr txBox="1"/>
           <p:nvPr/>
         </p:nvSpPr>
         <p:spPr>
           <a:xfrm>
-            <a:off x="1170432" y="4069994"/>
-            <a:ext cx="4974336" cy="256032"/>
+            <a:off x="1170432" y="3758184"/>
+            <a:ext cx="5157216" cy="256032"/>
           </a:xfrm>
           <a:prstGeom prst="rect">
             <a:avLst/>
@@ -16844,14 +16093,14 @@
       </p:sp>
       <p:sp>
         <p:nvSpPr>
-          <p:cNvPr id="29" name="Rectangle 28"/>
+          <p:cNvPr id="27" name="Rectangle 26"/>
           <p:cNvSpPr/>
           <p:nvPr/>
         </p:nvSpPr>
         <p:spPr>
           <a:xfrm>
-            <a:off x="384048" y="4344314"/>
-            <a:ext cx="5669280" cy="9144"/>
+            <a:off x="384048" y="4032504"/>
+            <a:ext cx="5852160" cy="9144"/>
           </a:xfrm>
           <a:prstGeom prst="rect">
             <a:avLst/>
@@ -16887,13 +16136,13 @@
       </p:sp>
       <p:sp>
         <p:nvSpPr>
-          <p:cNvPr id="30" name="TextBox 29"/>
+          <p:cNvPr id="28" name="TextBox 27"/>
           <p:cNvSpPr txBox="1"/>
           <p:nvPr/>
         </p:nvSpPr>
         <p:spPr>
           <a:xfrm>
-            <a:off x="384048" y="4435754"/>
+            <a:off x="384048" y="4123944"/>
             <a:ext cx="713232" cy="256032"/>
           </a:xfrm>
           <a:prstGeom prst="rect">
@@ -16922,14 +16171,14 @@
       </p:sp>
       <p:sp>
         <p:nvSpPr>
-          <p:cNvPr id="31" name="TextBox 30"/>
+          <p:cNvPr id="29" name="TextBox 28"/>
           <p:cNvSpPr txBox="1"/>
           <p:nvPr/>
         </p:nvSpPr>
         <p:spPr>
           <a:xfrm>
-            <a:off x="1170432" y="4435754"/>
-            <a:ext cx="4974336" cy="256032"/>
+            <a:off x="1170432" y="4123944"/>
+            <a:ext cx="5157216" cy="256032"/>
           </a:xfrm>
           <a:prstGeom prst="rect">
             <a:avLst/>
@@ -16957,14 +16206,14 @@
       </p:sp>
       <p:sp>
         <p:nvSpPr>
-          <p:cNvPr id="32" name="Rectangle 31"/>
+          <p:cNvPr id="30" name="Rectangle 29"/>
           <p:cNvSpPr/>
           <p:nvPr/>
         </p:nvSpPr>
         <p:spPr>
           <a:xfrm>
-            <a:off x="384048" y="4710074"/>
-            <a:ext cx="5669280" cy="9144"/>
+            <a:off x="384048" y="4398264"/>
+            <a:ext cx="5852160" cy="9144"/>
           </a:xfrm>
           <a:prstGeom prst="rect">
             <a:avLst/>
@@ -17000,13 +16249,13 @@
       </p:sp>
       <p:sp>
         <p:nvSpPr>
-          <p:cNvPr id="33" name="TextBox 32"/>
+          <p:cNvPr id="31" name="TextBox 30"/>
           <p:cNvSpPr txBox="1"/>
           <p:nvPr/>
         </p:nvSpPr>
         <p:spPr>
           <a:xfrm>
-            <a:off x="384048" y="4801514"/>
+            <a:off x="384048" y="4489704"/>
             <a:ext cx="713232" cy="256032"/>
           </a:xfrm>
           <a:prstGeom prst="rect">
@@ -17035,14 +16284,14 @@
       </p:sp>
       <p:sp>
         <p:nvSpPr>
-          <p:cNvPr id="34" name="TextBox 33"/>
+          <p:cNvPr id="32" name="TextBox 31"/>
           <p:cNvSpPr txBox="1"/>
           <p:nvPr/>
         </p:nvSpPr>
         <p:spPr>
           <a:xfrm>
-            <a:off x="1170432" y="4801514"/>
-            <a:ext cx="4974336" cy="256032"/>
+            <a:off x="1170432" y="4489704"/>
+            <a:ext cx="5157216" cy="256032"/>
           </a:xfrm>
           <a:prstGeom prst="rect">
             <a:avLst/>
@@ -17070,14 +16319,14 @@
       </p:sp>
       <p:sp>
         <p:nvSpPr>
-          <p:cNvPr id="35" name="Rectangle 34"/>
+          <p:cNvPr id="33" name="Rectangle 32"/>
           <p:cNvSpPr/>
           <p:nvPr/>
         </p:nvSpPr>
         <p:spPr>
           <a:xfrm>
-            <a:off x="384048" y="5075834"/>
-            <a:ext cx="5669280" cy="9144"/>
+            <a:off x="384048" y="4764024"/>
+            <a:ext cx="5852160" cy="9144"/>
           </a:xfrm>
           <a:prstGeom prst="rect">
             <a:avLst/>
@@ -17113,13 +16362,13 @@
       </p:sp>
       <p:sp>
         <p:nvSpPr>
-          <p:cNvPr id="36" name="TextBox 35"/>
+          <p:cNvPr id="34" name="TextBox 33"/>
           <p:cNvSpPr txBox="1"/>
           <p:nvPr/>
         </p:nvSpPr>
         <p:spPr>
           <a:xfrm>
-            <a:off x="384048" y="5167274"/>
+            <a:off x="384048" y="4855464"/>
             <a:ext cx="713232" cy="256032"/>
           </a:xfrm>
           <a:prstGeom prst="rect">
@@ -17148,14 +16397,14 @@
       </p:sp>
       <p:sp>
         <p:nvSpPr>
-          <p:cNvPr id="37" name="TextBox 36"/>
+          <p:cNvPr id="35" name="TextBox 34"/>
           <p:cNvSpPr txBox="1"/>
           <p:nvPr/>
         </p:nvSpPr>
         <p:spPr>
           <a:xfrm>
-            <a:off x="1170432" y="5167274"/>
-            <a:ext cx="4974336" cy="256032"/>
+            <a:off x="1170432" y="4855464"/>
+            <a:ext cx="5157216" cy="256032"/>
           </a:xfrm>
           <a:prstGeom prst="rect">
             <a:avLst/>
@@ -17183,14 +16432,14 @@
       </p:sp>
       <p:sp>
         <p:nvSpPr>
-          <p:cNvPr id="38" name="Rectangle 37"/>
+          <p:cNvPr id="36" name="Rectangle 35"/>
           <p:cNvSpPr/>
           <p:nvPr/>
         </p:nvSpPr>
         <p:spPr>
           <a:xfrm>
-            <a:off x="384048" y="5441594"/>
-            <a:ext cx="5669280" cy="9144"/>
+            <a:off x="384048" y="5129784"/>
+            <a:ext cx="5852160" cy="9144"/>
           </a:xfrm>
           <a:prstGeom prst="rect">
             <a:avLst/>
@@ -17226,14 +16475,14 @@
       </p:sp>
       <p:sp>
         <p:nvSpPr>
-          <p:cNvPr id="39" name="Rectangle 38"/>
+          <p:cNvPr id="37" name="Rectangle 36"/>
           <p:cNvSpPr/>
           <p:nvPr/>
         </p:nvSpPr>
         <p:spPr>
           <a:xfrm>
-            <a:off x="384048" y="5642762"/>
-            <a:ext cx="5943600" cy="841248"/>
+            <a:off x="384048" y="5312664"/>
+            <a:ext cx="6126480" cy="822960"/>
           </a:xfrm>
           <a:prstGeom prst="rect">
             <a:avLst/>
@@ -17269,14 +16518,14 @@
       </p:sp>
       <p:sp>
         <p:nvSpPr>
-          <p:cNvPr id="40" name="Rectangle 39"/>
+          <p:cNvPr id="38" name="Rectangle 37"/>
           <p:cNvSpPr/>
           <p:nvPr/>
         </p:nvSpPr>
         <p:spPr>
           <a:xfrm>
-            <a:off x="384048" y="5642762"/>
-            <a:ext cx="5943600" cy="21945"/>
+            <a:off x="384048" y="5312664"/>
+            <a:ext cx="6126480" cy="21945"/>
           </a:xfrm>
           <a:prstGeom prst="rect">
             <a:avLst/>
@@ -17312,14 +16561,14 @@
       </p:sp>
       <p:sp>
         <p:nvSpPr>
-          <p:cNvPr id="41" name="TextBox 40"/>
+          <p:cNvPr id="39" name="TextBox 38"/>
           <p:cNvSpPr txBox="1"/>
           <p:nvPr/>
         </p:nvSpPr>
         <p:spPr>
           <a:xfrm>
-            <a:off x="512064" y="5697626"/>
-            <a:ext cx="5760720" cy="237744"/>
+            <a:off x="512064" y="5367527"/>
+            <a:ext cx="5943600" cy="237744"/>
           </a:xfrm>
           <a:prstGeom prst="rect">
             <a:avLst/>
@@ -17347,14 +16596,14 @@
       </p:sp>
       <p:sp>
         <p:nvSpPr>
-          <p:cNvPr id="42" name="TextBox 41"/>
+          <p:cNvPr id="40" name="TextBox 39"/>
           <p:cNvSpPr txBox="1"/>
           <p:nvPr/>
         </p:nvSpPr>
         <p:spPr>
           <a:xfrm>
-            <a:off x="512064" y="5953658"/>
-            <a:ext cx="5760720" cy="274320"/>
+            <a:off x="512064" y="5623559"/>
+            <a:ext cx="5943600" cy="274320"/>
           </a:xfrm>
           <a:prstGeom prst="rect">
             <a:avLst/>
@@ -17382,14 +16631,14 @@
       </p:sp>
       <p:sp>
         <p:nvSpPr>
-          <p:cNvPr id="43" name="TextBox 42"/>
+          <p:cNvPr id="41" name="TextBox 40"/>
           <p:cNvSpPr txBox="1"/>
           <p:nvPr/>
         </p:nvSpPr>
         <p:spPr>
           <a:xfrm>
-            <a:off x="512064" y="6246266"/>
-            <a:ext cx="5760720" cy="201168"/>
+            <a:off x="512064" y="5916168"/>
+            <a:ext cx="5943600" cy="201168"/>
           </a:xfrm>
           <a:prstGeom prst="rect">
             <a:avLst/>
@@ -17417,7 +16666,7 @@
       </p:sp>
       <p:sp>
         <p:nvSpPr>
-          <p:cNvPr id="44" name="Rectangle 43"/>
+          <p:cNvPr id="42" name="Rectangle 41"/>
           <p:cNvSpPr/>
           <p:nvPr/>
         </p:nvSpPr>
@@ -17460,7 +16709,7 @@
       </p:sp>
       <p:sp>
         <p:nvSpPr>
-          <p:cNvPr id="45" name="Rectangle 44"/>
+          <p:cNvPr id="43" name="Rectangle 42"/>
           <p:cNvSpPr/>
           <p:nvPr/>
         </p:nvSpPr>
@@ -17503,7 +16752,7 @@
       </p:sp>
       <p:pic>
         <p:nvPicPr>
-          <p:cNvPr id="46" name="Picture 45" descr="hq_exec_brief.jpg"/>
+          <p:cNvPr id="44" name="Picture 43" descr="hq_exec_brief.jpg"/>
           <p:cNvPicPr>
             <a:picLocks noChangeAspect="1"/>
           </p:cNvPicPr>
